--- a/blocks/F_integration/M21_launch_yaml_rosbag/M21_Parameter_YAML_Launch_rosbag2.pptx
+++ b/blocks/F_integration/M21_launch_yaml_rosbag/M21_Parameter_YAML_Launch_rosbag2.pptx
@@ -6671,8 +6671,8 @@
         </p:nvSpPr>
         <p:spPr>
           <a:xfrm>
-            <a:off x="658368" y="1682496"/>
-            <a:ext cx="10972800" cy="347472"/>
+            <a:off x="658368" y="1627632"/>
+            <a:ext cx="10972800" cy="256032"/>
           </a:xfrm>
           <a:prstGeom prst="rect">
             <a:avLst/>
@@ -6689,7 +6689,7 @@
               <a:spcAft>
                 <a:spcPts val="0"/>
               </a:spcAft>
-              <a:defRPr sz="1700" b="1">
+              <a:defRPr sz="1500" b="1">
                 <a:solidFill>
                   <a:srgbClr val="122C4E"/>
                 </a:solidFill>
@@ -6710,8 +6710,8 @@
         </p:nvSpPr>
         <p:spPr>
           <a:xfrm>
-            <a:off x="658368" y="2103120"/>
-            <a:ext cx="10972800" cy="493776"/>
+            <a:off x="658368" y="1956816"/>
+            <a:ext cx="10972800" cy="603504"/>
           </a:xfrm>
           <a:prstGeom prst="rect">
             <a:avLst/>
@@ -6755,7 +6755,11 @@
               </a:defRPr>
             </a:pPr>
             <a:r>
-              <a:t>파일 생성/열기: mkdir -p ~/agv_ws/src/agv_bringup/config    &amp;&amp;    nano ~/agv_ws/src/agv_bringup/config/robot.yaml</a:t>
+              <a:t>파일 생성: mkdir -p ~/agv_ws/src/agv_bringup/config</a:t>
+            </a:r>
+            <a:br/>
+            <a:r>
+              <a:t>파일 열기: nano ~/agv_ws/src/agv_bringup/config/robot.yaml</a:t>
             </a:r>
           </a:p>
         </p:txBody>
@@ -6768,8 +6772,8 @@
         </p:nvSpPr>
         <p:spPr>
           <a:xfrm>
-            <a:off x="658368" y="2761488"/>
-            <a:ext cx="10972800" cy="3383280"/>
+            <a:off x="658368" y="2706624"/>
+            <a:ext cx="10972800" cy="3364992"/>
           </a:xfrm>
           <a:prstGeom prst="rect">
             <a:avLst/>
@@ -6834,7 +6838,7 @@
         </p:nvSpPr>
         <p:spPr>
           <a:xfrm>
-            <a:off x="749808" y="6199632"/>
+            <a:off x="749808" y="6181344"/>
             <a:ext cx="10789920" cy="201168"/>
           </a:xfrm>
           <a:prstGeom prst="rect">
@@ -7105,8 +7109,8 @@
         </p:nvSpPr>
         <p:spPr>
           <a:xfrm>
-            <a:off x="658368" y="1682496"/>
-            <a:ext cx="10972800" cy="347472"/>
+            <a:off x="658368" y="1627632"/>
+            <a:ext cx="10972800" cy="256032"/>
           </a:xfrm>
           <a:prstGeom prst="rect">
             <a:avLst/>
@@ -7123,7 +7127,7 @@
               <a:spcAft>
                 <a:spcPts val="0"/>
               </a:spcAft>
-              <a:defRPr sz="1700" b="1">
+              <a:defRPr sz="1500" b="1">
                 <a:solidFill>
                   <a:srgbClr val="122C4E"/>
                 </a:solidFill>
@@ -7144,8 +7148,8 @@
         </p:nvSpPr>
         <p:spPr>
           <a:xfrm>
-            <a:off x="658368" y="2103120"/>
-            <a:ext cx="10972800" cy="493776"/>
+            <a:off x="658368" y="1956816"/>
+            <a:ext cx="10972800" cy="603504"/>
           </a:xfrm>
           <a:prstGeom prst="rect">
             <a:avLst/>
@@ -7189,7 +7193,11 @@
               </a:defRPr>
             </a:pPr>
             <a:r>
-              <a:t>파일 생성/열기: mkdir -p ~/agv_ws/src/agv_bringup/config    &amp;&amp;    nano ~/agv_ws/src/agv_bringup/config/sensors.yaml</a:t>
+              <a:t>파일 생성: mkdir -p ~/agv_ws/src/agv_bringup/config</a:t>
+            </a:r>
+            <a:br/>
+            <a:r>
+              <a:t>파일 열기: nano ~/agv_ws/src/agv_bringup/config/sensors.yaml</a:t>
             </a:r>
           </a:p>
         </p:txBody>
@@ -7202,8 +7210,8 @@
         </p:nvSpPr>
         <p:spPr>
           <a:xfrm>
-            <a:off x="658368" y="2761488"/>
-            <a:ext cx="10972800" cy="3383280"/>
+            <a:off x="658368" y="2706624"/>
+            <a:ext cx="10972800" cy="3364992"/>
           </a:xfrm>
           <a:prstGeom prst="rect">
             <a:avLst/>
@@ -7284,7 +7292,7 @@
         </p:nvSpPr>
         <p:spPr>
           <a:xfrm>
-            <a:off x="749808" y="6199632"/>
+            <a:off x="749808" y="6181344"/>
             <a:ext cx="10789920" cy="201168"/>
           </a:xfrm>
           <a:prstGeom prst="rect">
@@ -7555,8 +7563,8 @@
         </p:nvSpPr>
         <p:spPr>
           <a:xfrm>
-            <a:off x="658368" y="1682496"/>
-            <a:ext cx="10972800" cy="347472"/>
+            <a:off x="658368" y="1627632"/>
+            <a:ext cx="10972800" cy="256032"/>
           </a:xfrm>
           <a:prstGeom prst="rect">
             <a:avLst/>
@@ -7573,7 +7581,7 @@
               <a:spcAft>
                 <a:spcPts val="0"/>
               </a:spcAft>
-              <a:defRPr sz="1700" b="1">
+              <a:defRPr sz="1500" b="1">
                 <a:solidFill>
                   <a:srgbClr val="122C4E"/>
                 </a:solidFill>
@@ -7594,8 +7602,8 @@
         </p:nvSpPr>
         <p:spPr>
           <a:xfrm>
-            <a:off x="658368" y="2103120"/>
-            <a:ext cx="10972800" cy="493776"/>
+            <a:off x="658368" y="1956816"/>
+            <a:ext cx="10972800" cy="603504"/>
           </a:xfrm>
           <a:prstGeom prst="rect">
             <a:avLst/>
@@ -7639,7 +7647,11 @@
               </a:defRPr>
             </a:pPr>
             <a:r>
-              <a:t>파일 생성/열기: mkdir -p ~/agv_ws/src/agv_bringup/config    &amp;&amp;    nano ~/agv_ws/src/agv_bringup/config/vision.yaml</a:t>
+              <a:t>파일 생성: mkdir -p ~/agv_ws/src/agv_bringup/config</a:t>
+            </a:r>
+            <a:br/>
+            <a:r>
+              <a:t>파일 열기: nano ~/agv_ws/src/agv_bringup/config/vision.yaml</a:t>
             </a:r>
           </a:p>
         </p:txBody>
@@ -7652,8 +7664,8 @@
         </p:nvSpPr>
         <p:spPr>
           <a:xfrm>
-            <a:off x="658368" y="2761488"/>
-            <a:ext cx="10972800" cy="3383280"/>
+            <a:off x="658368" y="2706624"/>
+            <a:ext cx="10972800" cy="3364992"/>
           </a:xfrm>
           <a:prstGeom prst="rect">
             <a:avLst/>
@@ -7730,7 +7742,7 @@
         </p:nvSpPr>
         <p:spPr>
           <a:xfrm>
-            <a:off x="749808" y="6199632"/>
+            <a:off x="749808" y="6181344"/>
             <a:ext cx="10789920" cy="201168"/>
           </a:xfrm>
           <a:prstGeom prst="rect">
@@ -8001,8 +8013,8 @@
         </p:nvSpPr>
         <p:spPr>
           <a:xfrm>
-            <a:off x="658368" y="1682496"/>
-            <a:ext cx="10972800" cy="347472"/>
+            <a:off x="658368" y="1627632"/>
+            <a:ext cx="10972800" cy="256032"/>
           </a:xfrm>
           <a:prstGeom prst="rect">
             <a:avLst/>
@@ -8019,7 +8031,7 @@
               <a:spcAft>
                 <a:spcPts val="0"/>
               </a:spcAft>
-              <a:defRPr sz="1700" b="1">
+              <a:defRPr sz="1500" b="1">
                 <a:solidFill>
                   <a:srgbClr val="122C4E"/>
                 </a:solidFill>
@@ -8040,8 +8052,8 @@
         </p:nvSpPr>
         <p:spPr>
           <a:xfrm>
-            <a:off x="658368" y="2103120"/>
-            <a:ext cx="10972800" cy="493776"/>
+            <a:off x="658368" y="1956816"/>
+            <a:ext cx="10972800" cy="603504"/>
           </a:xfrm>
           <a:prstGeom prst="rect">
             <a:avLst/>
@@ -8085,7 +8097,11 @@
               </a:defRPr>
             </a:pPr>
             <a:r>
-              <a:t>파일 생성/열기: mkdir -p ~/agv_ws/src/agv_bringup/config    &amp;&amp;    nano ~/agv_ws/src/agv_bringup/config/mission.yaml</a:t>
+              <a:t>파일 생성: mkdir -p ~/agv_ws/src/agv_bringup/config</a:t>
+            </a:r>
+            <a:br/>
+            <a:r>
+              <a:t>파일 열기: nano ~/agv_ws/src/agv_bringup/config/mission.yaml</a:t>
             </a:r>
           </a:p>
         </p:txBody>
@@ -8098,8 +8114,8 @@
         </p:nvSpPr>
         <p:spPr>
           <a:xfrm>
-            <a:off x="658368" y="2761488"/>
-            <a:ext cx="10972800" cy="3383280"/>
+            <a:off x="658368" y="2706624"/>
+            <a:ext cx="10972800" cy="3364992"/>
           </a:xfrm>
           <a:prstGeom prst="rect">
             <a:avLst/>
@@ -8200,7 +8216,7 @@
         </p:nvSpPr>
         <p:spPr>
           <a:xfrm>
-            <a:off x="749808" y="6199632"/>
+            <a:off x="749808" y="6181344"/>
             <a:ext cx="10789920" cy="201168"/>
           </a:xfrm>
           <a:prstGeom prst="rect">
@@ -8471,8 +8487,8 @@
         </p:nvSpPr>
         <p:spPr>
           <a:xfrm>
-            <a:off x="658368" y="1682496"/>
-            <a:ext cx="10972800" cy="347472"/>
+            <a:off x="658368" y="1627632"/>
+            <a:ext cx="10972800" cy="256032"/>
           </a:xfrm>
           <a:prstGeom prst="rect">
             <a:avLst/>
@@ -8489,7 +8505,7 @@
               <a:spcAft>
                 <a:spcPts val="0"/>
               </a:spcAft>
-              <a:defRPr sz="1700" b="1">
+              <a:defRPr sz="1500" b="1">
                 <a:solidFill>
                   <a:srgbClr val="122C4E"/>
                 </a:solidFill>
@@ -8510,8 +8526,8 @@
         </p:nvSpPr>
         <p:spPr>
           <a:xfrm>
-            <a:off x="658368" y="2103120"/>
-            <a:ext cx="10972800" cy="493776"/>
+            <a:off x="658368" y="1956816"/>
+            <a:ext cx="10972800" cy="603504"/>
           </a:xfrm>
           <a:prstGeom prst="rect">
             <a:avLst/>
@@ -8555,7 +8571,11 @@
               </a:defRPr>
             </a:pPr>
             <a:r>
-              <a:t>파일 생성/열기: mkdir -p ~/agv_ws/src/agv_control/config    &amp;&amp;    nano ~/agv_ws/src/agv_control/config/controllers.yaml</a:t>
+              <a:t>파일 생성: mkdir -p ~/agv_ws/src/agv_control/config</a:t>
+            </a:r>
+            <a:br/>
+            <a:r>
+              <a:t>파일 열기: nano ~/agv_ws/src/agv_control/config/controllers.yaml</a:t>
             </a:r>
           </a:p>
         </p:txBody>
@@ -8568,8 +8588,8 @@
         </p:nvSpPr>
         <p:spPr>
           <a:xfrm>
-            <a:off x="658368" y="2761488"/>
-            <a:ext cx="10972800" cy="3383280"/>
+            <a:off x="658368" y="2706624"/>
+            <a:ext cx="10972800" cy="3364992"/>
           </a:xfrm>
           <a:prstGeom prst="rect">
             <a:avLst/>
@@ -8659,14 +8679,6 @@
             <a:r>
               <a:t>    wheel_separation: 0.38</a:t>
             </a:r>
-            <a:br/>
-            <a:r>
-              <a:t>    wheel_radius: 0.08</a:t>
-            </a:r>
-            <a:br/>
-            <a:r>
-              <a:t>    base_frame_id: base_link</a:t>
-            </a:r>
           </a:p>
         </p:txBody>
       </p:sp>
@@ -8678,7 +8690,7 @@
         </p:nvSpPr>
         <p:spPr>
           <a:xfrm>
-            <a:off x="749808" y="6199632"/>
+            <a:off x="749808" y="6181344"/>
             <a:ext cx="10789920" cy="201168"/>
           </a:xfrm>
           <a:prstGeom prst="rect">
@@ -8949,8 +8961,8 @@
         </p:nvSpPr>
         <p:spPr>
           <a:xfrm>
-            <a:off x="658368" y="1682496"/>
-            <a:ext cx="10972800" cy="347472"/>
+            <a:off x="658368" y="1627632"/>
+            <a:ext cx="10972800" cy="256032"/>
           </a:xfrm>
           <a:prstGeom prst="rect">
             <a:avLst/>
@@ -8967,7 +8979,7 @@
               <a:spcAft>
                 <a:spcPts val="0"/>
               </a:spcAft>
-              <a:defRPr sz="1700" b="1">
+              <a:defRPr sz="1500" b="1">
                 <a:solidFill>
                   <a:srgbClr val="122C4E"/>
                 </a:solidFill>
@@ -8988,8 +9000,8 @@
         </p:nvSpPr>
         <p:spPr>
           <a:xfrm>
-            <a:off x="658368" y="2103120"/>
-            <a:ext cx="10972800" cy="493776"/>
+            <a:off x="658368" y="1956816"/>
+            <a:ext cx="10972800" cy="603504"/>
           </a:xfrm>
           <a:prstGeom prst="rect">
             <a:avLst/>
@@ -9033,7 +9045,11 @@
               </a:defRPr>
             </a:pPr>
             <a:r>
-              <a:t>파일 생성/열기: mkdir -p ~/agv_ws/src/agv_control/config    &amp;&amp;    nano ~/agv_ws/src/agv_control/config/controllers.yaml</a:t>
+              <a:t>파일 생성: mkdir -p ~/agv_ws/src/agv_control/config</a:t>
+            </a:r>
+            <a:br/>
+            <a:r>
+              <a:t>파일 열기: nano ~/agv_ws/src/agv_control/config/controllers.yaml</a:t>
             </a:r>
           </a:p>
         </p:txBody>
@@ -9046,8 +9062,8 @@
         </p:nvSpPr>
         <p:spPr>
           <a:xfrm>
-            <a:off x="658368" y="2761488"/>
-            <a:ext cx="10972800" cy="3383280"/>
+            <a:off x="658368" y="2706624"/>
+            <a:ext cx="10972800" cy="3364992"/>
           </a:xfrm>
           <a:prstGeom prst="rect">
             <a:avLst/>
@@ -9091,6 +9107,14 @@
               </a:defRPr>
             </a:pPr>
             <a:r>
+              <a:t>    wheel_radius: 0.08</a:t>
+            </a:r>
+            <a:br/>
+            <a:r>
+              <a:t>    base_frame_id: base_link</a:t>
+            </a:r>
+            <a:br/>
+            <a:r>
               <a:t>    odom_frame_id: odom</a:t>
             </a:r>
             <a:br/>
@@ -9108,7 +9132,7 @@
         </p:nvSpPr>
         <p:spPr>
           <a:xfrm>
-            <a:off x="749808" y="6199632"/>
+            <a:off x="749808" y="6181344"/>
             <a:ext cx="10789920" cy="201168"/>
           </a:xfrm>
           <a:prstGeom prst="rect">
@@ -9379,8 +9403,8 @@
         </p:nvSpPr>
         <p:spPr>
           <a:xfrm>
-            <a:off x="658368" y="1682496"/>
-            <a:ext cx="10972800" cy="347472"/>
+            <a:off x="658368" y="1627632"/>
+            <a:ext cx="10972800" cy="256032"/>
           </a:xfrm>
           <a:prstGeom prst="rect">
             <a:avLst/>
@@ -9397,7 +9421,7 @@
               <a:spcAft>
                 <a:spcPts val="0"/>
               </a:spcAft>
-              <a:defRPr sz="1700" b="1">
+              <a:defRPr sz="1500" b="1">
                 <a:solidFill>
                   <a:srgbClr val="122C4E"/>
                 </a:solidFill>
@@ -9418,8 +9442,8 @@
         </p:nvSpPr>
         <p:spPr>
           <a:xfrm>
-            <a:off x="658368" y="2103120"/>
-            <a:ext cx="10972800" cy="493776"/>
+            <a:off x="658368" y="1956816"/>
+            <a:ext cx="10972800" cy="603504"/>
           </a:xfrm>
           <a:prstGeom prst="rect">
             <a:avLst/>
@@ -9463,7 +9487,11 @@
               </a:defRPr>
             </a:pPr>
             <a:r>
-              <a:t>파일 생성/열기: mkdir -p ~/agv_ws/src/agv_bringup/launch    &amp;&amp;    nano ~/agv_ws/src/agv_bringup/launch/agv_sim.launch.py</a:t>
+              <a:t>파일 생성: mkdir -p ~/agv_ws/src/agv_bringup/launch</a:t>
+            </a:r>
+            <a:br/>
+            <a:r>
+              <a:t>파일 열기: nano ~/agv_ws/src/agv_bringup/launch/agv_sim.launch.py</a:t>
             </a:r>
           </a:p>
         </p:txBody>
@@ -9476,8 +9504,8 @@
         </p:nvSpPr>
         <p:spPr>
           <a:xfrm>
-            <a:off x="658368" y="2761488"/>
-            <a:ext cx="10972800" cy="3383280"/>
+            <a:off x="658368" y="2706624"/>
+            <a:ext cx="10972800" cy="3364992"/>
           </a:xfrm>
           <a:prstGeom prst="rect">
             <a:avLst/>
@@ -9564,14 +9592,6 @@
             <a:r>
               <a:t>    bringup = get_package_share_directory('agv_bringup')</a:t>
             </a:r>
-            <a:br/>
-            <a:r>
-              <a:t>    description = get_package_share_directory('agv_description')</a:t>
-            </a:r>
-            <a:br/>
-            <a:r>
-              <a:t>    gazebo = get_package_share_directory('agv_gazebo')</a:t>
-            </a:r>
           </a:p>
         </p:txBody>
       </p:sp>
@@ -9583,7 +9603,7 @@
         </p:nvSpPr>
         <p:spPr>
           <a:xfrm>
-            <a:off x="749808" y="6199632"/>
+            <a:off x="749808" y="6181344"/>
             <a:ext cx="10789920" cy="201168"/>
           </a:xfrm>
           <a:prstGeom prst="rect">
@@ -9854,8 +9874,8 @@
         </p:nvSpPr>
         <p:spPr>
           <a:xfrm>
-            <a:off x="658368" y="1682496"/>
-            <a:ext cx="10972800" cy="347472"/>
+            <a:off x="658368" y="1627632"/>
+            <a:ext cx="10972800" cy="256032"/>
           </a:xfrm>
           <a:prstGeom prst="rect">
             <a:avLst/>
@@ -9872,7 +9892,7 @@
               <a:spcAft>
                 <a:spcPts val="0"/>
               </a:spcAft>
-              <a:defRPr sz="1700" b="1">
+              <a:defRPr sz="1500" b="1">
                 <a:solidFill>
                   <a:srgbClr val="122C4E"/>
                 </a:solidFill>
@@ -9893,8 +9913,8 @@
         </p:nvSpPr>
         <p:spPr>
           <a:xfrm>
-            <a:off x="658368" y="2103120"/>
-            <a:ext cx="10972800" cy="493776"/>
+            <a:off x="658368" y="1956816"/>
+            <a:ext cx="10972800" cy="603504"/>
           </a:xfrm>
           <a:prstGeom prst="rect">
             <a:avLst/>
@@ -9938,7 +9958,11 @@
               </a:defRPr>
             </a:pPr>
             <a:r>
-              <a:t>파일 생성/열기: mkdir -p ~/agv_ws/src/agv_bringup/launch    &amp;&amp;    nano ~/agv_ws/src/agv_bringup/launch/agv_sim.launch.py</a:t>
+              <a:t>파일 생성: mkdir -p ~/agv_ws/src/agv_bringup/launch</a:t>
+            </a:r>
+            <a:br/>
+            <a:r>
+              <a:t>파일 열기: nano ~/agv_ws/src/agv_bringup/launch/agv_sim.launch.py</a:t>
             </a:r>
           </a:p>
         </p:txBody>
@@ -9951,8 +9975,8 @@
         </p:nvSpPr>
         <p:spPr>
           <a:xfrm>
-            <a:off x="658368" y="2761488"/>
-            <a:ext cx="10972800" cy="3383280"/>
+            <a:off x="658368" y="2706624"/>
+            <a:ext cx="10972800" cy="3364992"/>
           </a:xfrm>
           <a:prstGeom prst="rect">
             <a:avLst/>
@@ -9996,6 +10020,14 @@
               </a:defRPr>
             </a:pPr>
             <a:r>
+              <a:t>    description = get_package_share_directory('agv_description')</a:t>
+            </a:r>
+            <a:br/>
+            <a:r>
+              <a:t>    gazebo = get_package_share_directory('agv_gazebo')</a:t>
+            </a:r>
+            <a:br/>
+            <a:r>
               <a:t>    xacro_file = os.path.join(description, 'urdf', 'agv.urdf.xacro')</a:t>
             </a:r>
             <a:br/>
@@ -10033,22 +10065,6 @@
             <a:br/>
             <a:r>
               <a:t>        'sensors.yaml')]), Node(package='agv_sensors', executable='imu_monitor',</a:t>
-            </a:r>
-            <a:br/>
-            <a:r>
-              <a:t>        parameters=[os.path.join(bringup, 'config', 'sensors.yaml')]), Node(package='agv_vision',</a:t>
-            </a:r>
-            <a:br/>
-            <a:r>
-              <a:t>         executable='yolo_node', parameters=[os.path.join(bringup, 'config',</a:t>
-            </a:r>
-            <a:br/>
-            <a:r>
-              <a:t>        'vision.yaml')]), Node(package='agv_mission', executable='mission_manager',</a:t>
-            </a:r>
-            <a:br/>
-            <a:r>
-              <a:t>        parameters=[os.path.join(bringup, 'config', 'mission.yaml')]), Node(package='agv_control',</a:t>
             </a:r>
           </a:p>
         </p:txBody>
@@ -10061,7 +10077,7 @@
         </p:nvSpPr>
         <p:spPr>
           <a:xfrm>
-            <a:off x="749808" y="6199632"/>
+            <a:off x="749808" y="6181344"/>
             <a:ext cx="10789920" cy="201168"/>
           </a:xfrm>
           <a:prstGeom prst="rect">
@@ -10332,8 +10348,8 @@
         </p:nvSpPr>
         <p:spPr>
           <a:xfrm>
-            <a:off x="658368" y="1682496"/>
-            <a:ext cx="10972800" cy="347472"/>
+            <a:off x="658368" y="1627632"/>
+            <a:ext cx="10972800" cy="256032"/>
           </a:xfrm>
           <a:prstGeom prst="rect">
             <a:avLst/>
@@ -10350,7 +10366,7 @@
               <a:spcAft>
                 <a:spcPts val="0"/>
               </a:spcAft>
-              <a:defRPr sz="1700" b="1">
+              <a:defRPr sz="1500" b="1">
                 <a:solidFill>
                   <a:srgbClr val="122C4E"/>
                 </a:solidFill>
@@ -10371,8 +10387,8 @@
         </p:nvSpPr>
         <p:spPr>
           <a:xfrm>
-            <a:off x="658368" y="2103120"/>
-            <a:ext cx="10972800" cy="493776"/>
+            <a:off x="658368" y="1956816"/>
+            <a:ext cx="10972800" cy="603504"/>
           </a:xfrm>
           <a:prstGeom prst="rect">
             <a:avLst/>
@@ -10416,7 +10432,11 @@
               </a:defRPr>
             </a:pPr>
             <a:r>
-              <a:t>파일 생성/열기: mkdir -p ~/agv_ws/src/agv_bringup/launch    &amp;&amp;    nano ~/agv_ws/src/agv_bringup/launch/agv_sim.launch.py</a:t>
+              <a:t>파일 생성: mkdir -p ~/agv_ws/src/agv_bringup/launch</a:t>
+            </a:r>
+            <a:br/>
+            <a:r>
+              <a:t>파일 열기: nano ~/agv_ws/src/agv_bringup/launch/agv_sim.launch.py</a:t>
             </a:r>
           </a:p>
         </p:txBody>
@@ -10429,8 +10449,8 @@
         </p:nvSpPr>
         <p:spPr>
           <a:xfrm>
-            <a:off x="658368" y="2761488"/>
-            <a:ext cx="10972800" cy="3383280"/>
+            <a:off x="658368" y="2706624"/>
+            <a:ext cx="10972800" cy="3364992"/>
           </a:xfrm>
           <a:prstGeom prst="rect">
             <a:avLst/>
@@ -10474,6 +10494,22 @@
               </a:defRPr>
             </a:pPr>
             <a:r>
+              <a:t>        parameters=[os.path.join(bringup, 'config', 'sensors.yaml')]), Node(package='agv_vision',</a:t>
+            </a:r>
+            <a:br/>
+            <a:r>
+              <a:t>         executable='yolo_node', parameters=[os.path.join(bringup, 'config',</a:t>
+            </a:r>
+            <a:br/>
+            <a:r>
+              <a:t>        'vision.yaml')]), Node(package='agv_mission', executable='mission_manager',</a:t>
+            </a:r>
+            <a:br/>
+            <a:r>
+              <a:t>        parameters=[os.path.join(bringup, 'config', 'mission.yaml')]), Node(package='agv_control',</a:t>
+            </a:r>
+            <a:br/>
+            <a:r>
               <a:t>         executable='safety_controller', parameters=[os.path.join(bringup, 'config',</a:t>
             </a:r>
             <a:br/>
@@ -10499,7 +10535,7 @@
         </p:nvSpPr>
         <p:spPr>
           <a:xfrm>
-            <a:off x="749808" y="6199632"/>
+            <a:off x="749808" y="6181344"/>
             <a:ext cx="10789920" cy="201168"/>
           </a:xfrm>
           <a:prstGeom prst="rect">
@@ -10770,8 +10806,8 @@
         </p:nvSpPr>
         <p:spPr>
           <a:xfrm>
-            <a:off x="658368" y="1682496"/>
-            <a:ext cx="10972800" cy="347472"/>
+            <a:off x="658368" y="1627632"/>
+            <a:ext cx="10972800" cy="256032"/>
           </a:xfrm>
           <a:prstGeom prst="rect">
             <a:avLst/>
@@ -10788,7 +10824,7 @@
               <a:spcAft>
                 <a:spcPts val="0"/>
               </a:spcAft>
-              <a:defRPr sz="1700" b="1">
+              <a:defRPr sz="1500" b="1">
                 <a:solidFill>
                   <a:srgbClr val="122C4E"/>
                 </a:solidFill>
@@ -10809,8 +10845,8 @@
         </p:nvSpPr>
         <p:spPr>
           <a:xfrm>
-            <a:off x="658368" y="2103120"/>
-            <a:ext cx="10972800" cy="493776"/>
+            <a:off x="658368" y="1956816"/>
+            <a:ext cx="10972800" cy="603504"/>
           </a:xfrm>
           <a:prstGeom prst="rect">
             <a:avLst/>
@@ -10854,7 +10890,11 @@
               </a:defRPr>
             </a:pPr>
             <a:r>
-              <a:t>파일 생성/열기: mkdir -p ~/agv_ws/src/agv_gazebo/launch    &amp;&amp;    nano ~/agv_ws/src/agv_gazebo/launch/gazebo.launch.py</a:t>
+              <a:t>파일 생성: mkdir -p ~/agv_ws/src/agv_gazebo/launch</a:t>
+            </a:r>
+            <a:br/>
+            <a:r>
+              <a:t>파일 열기: nano ~/agv_ws/src/agv_gazebo/launch/gazebo.launch.py</a:t>
             </a:r>
           </a:p>
         </p:txBody>
@@ -10867,8 +10907,8 @@
         </p:nvSpPr>
         <p:spPr>
           <a:xfrm>
-            <a:off x="658368" y="2761488"/>
-            <a:ext cx="10972800" cy="3383280"/>
+            <a:off x="658368" y="2706624"/>
+            <a:ext cx="10972800" cy="3364992"/>
           </a:xfrm>
           <a:prstGeom prst="rect">
             <a:avLst/>
@@ -10955,14 +10995,6 @@
             <a:r>
               <a:t>    previous = os.environ.get('GZ_SIM_RESOURCE_PATH', '')</a:t>
             </a:r>
-            <a:br/>
-            <a:r>
-              <a:t>    gz_launch = os.path.join(get_package_share_directory('ros_gz_sim'), 'launch', 'gz_sim.launch.py')</a:t>
-            </a:r>
-            <a:br/>
-            <a:r>
-              <a:t>    return LaunchDescription([SetEnvironmentVariable('GZ_SIM_RESOURCE_PATH',</a:t>
-            </a:r>
           </a:p>
         </p:txBody>
       </p:sp>
@@ -10974,7 +11006,7 @@
         </p:nvSpPr>
         <p:spPr>
           <a:xfrm>
-            <a:off x="749808" y="6199632"/>
+            <a:off x="749808" y="6181344"/>
             <a:ext cx="10789920" cy="201168"/>
           </a:xfrm>
           <a:prstGeom prst="rect">
@@ -11706,8 +11738,8 @@
         </p:nvSpPr>
         <p:spPr>
           <a:xfrm>
-            <a:off x="658368" y="1682496"/>
-            <a:ext cx="10972800" cy="347472"/>
+            <a:off x="658368" y="1627632"/>
+            <a:ext cx="10972800" cy="256032"/>
           </a:xfrm>
           <a:prstGeom prst="rect">
             <a:avLst/>
@@ -11724,7 +11756,7 @@
               <a:spcAft>
                 <a:spcPts val="0"/>
               </a:spcAft>
-              <a:defRPr sz="1700" b="1">
+              <a:defRPr sz="1500" b="1">
                 <a:solidFill>
                   <a:srgbClr val="122C4E"/>
                 </a:solidFill>
@@ -11745,8 +11777,8 @@
         </p:nvSpPr>
         <p:spPr>
           <a:xfrm>
-            <a:off x="658368" y="2103120"/>
-            <a:ext cx="10972800" cy="493776"/>
+            <a:off x="658368" y="1956816"/>
+            <a:ext cx="10972800" cy="603504"/>
           </a:xfrm>
           <a:prstGeom prst="rect">
             <a:avLst/>
@@ -11790,7 +11822,11 @@
               </a:defRPr>
             </a:pPr>
             <a:r>
-              <a:t>파일 생성/열기: mkdir -p ~/agv_ws/src/agv_gazebo/launch    &amp;&amp;    nano ~/agv_ws/src/agv_gazebo/launch/gazebo.launch.py</a:t>
+              <a:t>파일 생성: mkdir -p ~/agv_ws/src/agv_gazebo/launch</a:t>
+            </a:r>
+            <a:br/>
+            <a:r>
+              <a:t>파일 열기: nano ~/agv_ws/src/agv_gazebo/launch/gazebo.launch.py</a:t>
             </a:r>
           </a:p>
         </p:txBody>
@@ -11803,8 +11839,8 @@
         </p:nvSpPr>
         <p:spPr>
           <a:xfrm>
-            <a:off x="658368" y="2761488"/>
-            <a:ext cx="10972800" cy="3383280"/>
+            <a:off x="658368" y="2706624"/>
+            <a:ext cx="10972800" cy="3364992"/>
           </a:xfrm>
           <a:prstGeom prst="rect">
             <a:avLst/>
@@ -11848,6 +11884,14 @@
               </a:defRPr>
             </a:pPr>
             <a:r>
+              <a:t>    gz_launch = os.path.join(get_package_share_directory('ros_gz_sim'), 'launch', 'gz_sim.launch.py')</a:t>
+            </a:r>
+            <a:br/>
+            <a:r>
+              <a:t>    return LaunchDescription([SetEnvironmentVariable('GZ_SIM_RESOURCE_PATH',</a:t>
+            </a:r>
+            <a:br/>
+            <a:r>
               <a:t>        models + (':' + previous if previous else '')),</a:t>
             </a:r>
             <a:br/>
@@ -11877,7 +11921,7 @@
         </p:nvSpPr>
         <p:spPr>
           <a:xfrm>
-            <a:off x="749808" y="6199632"/>
+            <a:off x="749808" y="6181344"/>
             <a:ext cx="10789920" cy="201168"/>
           </a:xfrm>
           <a:prstGeom prst="rect">
@@ -15172,7 +15216,7 @@
         </p:nvSpPr>
         <p:spPr>
           <a:xfrm>
-            <a:off x="914400" y="1810512"/>
+            <a:off x="914400" y="1773936"/>
             <a:ext cx="3840480" cy="256032"/>
           </a:xfrm>
           <a:prstGeom prst="rect">
@@ -15211,8 +15255,8 @@
         </p:nvSpPr>
         <p:spPr>
           <a:xfrm>
-            <a:off x="914400" y="2121408"/>
-            <a:ext cx="9966960" cy="256032"/>
+            <a:off x="914400" y="2048255"/>
+            <a:ext cx="9966960" cy="475488"/>
           </a:xfrm>
           <a:prstGeom prst="rect">
             <a:avLst/>
@@ -15229,7 +15273,7 @@
               <a:spcAft>
                 <a:spcPts val="0"/>
               </a:spcAft>
-              <a:defRPr sz="1200" b="0">
+              <a:defRPr sz="1000" b="0">
                 <a:solidFill>
                   <a:srgbClr val="225B9B"/>
                 </a:solidFill>
@@ -15250,7 +15294,7 @@
         </p:nvSpPr>
         <p:spPr>
           <a:xfrm>
-            <a:off x="914400" y="2816352"/>
+            <a:off x="914400" y="2852928"/>
             <a:ext cx="3840480" cy="256032"/>
           </a:xfrm>
           <a:prstGeom prst="rect">
@@ -15290,7 +15334,7 @@
         <p:spPr>
           <a:xfrm>
             <a:off x="914400" y="3127248"/>
-            <a:ext cx="9966960" cy="256032"/>
+            <a:ext cx="9966960" cy="475488"/>
           </a:xfrm>
           <a:prstGeom prst="rect">
             <a:avLst/>
@@ -15307,7 +15351,7 @@
               <a:spcAft>
                 <a:spcPts val="0"/>
               </a:spcAft>
-              <a:defRPr sz="1200" b="0">
+              <a:defRPr sz="1000" b="0">
                 <a:solidFill>
                   <a:srgbClr val="225B9B"/>
                 </a:solidFill>
@@ -15328,7 +15372,7 @@
         </p:nvSpPr>
         <p:spPr>
           <a:xfrm>
-            <a:off x="914400" y="3822191"/>
+            <a:off x="914400" y="3931920"/>
             <a:ext cx="3840480" cy="256032"/>
           </a:xfrm>
           <a:prstGeom prst="rect">
@@ -15367,8 +15411,8 @@
         </p:nvSpPr>
         <p:spPr>
           <a:xfrm>
-            <a:off x="914400" y="4133087"/>
-            <a:ext cx="9966960" cy="256032"/>
+            <a:off x="914400" y="4206240"/>
+            <a:ext cx="9966960" cy="475488"/>
           </a:xfrm>
           <a:prstGeom prst="rect">
             <a:avLst/>
@@ -15385,7 +15429,7 @@
               <a:spcAft>
                 <a:spcPts val="0"/>
               </a:spcAft>
-              <a:defRPr sz="1200" b="0">
+              <a:defRPr sz="1000" b="0">
                 <a:solidFill>
                   <a:srgbClr val="225B9B"/>
                 </a:solidFill>
@@ -15406,7 +15450,7 @@
         </p:nvSpPr>
         <p:spPr>
           <a:xfrm>
-            <a:off x="914400" y="4828032"/>
+            <a:off x="914400" y="5010912"/>
             <a:ext cx="3840480" cy="256032"/>
           </a:xfrm>
           <a:prstGeom prst="rect">
@@ -15445,8 +15489,8 @@
         </p:nvSpPr>
         <p:spPr>
           <a:xfrm>
-            <a:off x="914400" y="5138928"/>
-            <a:ext cx="9966960" cy="256032"/>
+            <a:off x="914400" y="5285232"/>
+            <a:ext cx="9966960" cy="475488"/>
           </a:xfrm>
           <a:prstGeom prst="rect">
             <a:avLst/>
@@ -15463,7 +15507,7 @@
               <a:spcAft>
                 <a:spcPts val="0"/>
               </a:spcAft>
-              <a:defRPr sz="1200" b="0">
+              <a:defRPr sz="1000" b="0">
                 <a:solidFill>
                   <a:srgbClr val="225B9B"/>
                 </a:solidFill>

--- a/blocks/F_integration/M21_launch_yaml_rosbag/M21_Parameter_YAML_Launch_rosbag2.pptx
+++ b/blocks/F_integration/M21_launch_yaml_rosbag/M21_Parameter_YAML_Launch_rosbag2.pptx
@@ -34,6 +34,9 @@
     <p:sldId id="282" r:id="rId34"/>
     <p:sldId id="283" r:id="rId35"/>
     <p:sldId id="284" r:id="rId36"/>
+    <p:sldId id="285" r:id="rId37"/>
+    <p:sldId id="286" r:id="rId38"/>
+    <p:sldId id="287" r:id="rId39"/>
   </p:sldIdLst>
   <p:sldSz cx="12191999" cy="6858000" type="screen4x3"/>
   <p:notesSz cx="6858000" cy="9144000"/>
@@ -620,12 +623,12 @@
           <a:lstStyle/>
           <a:p>
             <a:r>
-              <a:t>[설명] ~/agv_ws/src/agv_bringup/config/robot.yaml의 전체 파일을 1/1 구간으로 작성한다.</a:t>
-            </a:r>
-          </a:p>
-          <a:p>
-            <a:r>
-              <a:t>[실행] nano ~/agv_ws/src/agv_bringup/config/robot.yaml</a:t>
+              <a:t>[설명] ~/ros2_curri/agv_ws/src/agv_bringup/config/robot.yaml의 전체 파일을 1/1 구간으로 작성한다.</a:t>
+            </a:r>
+          </a:p>
+          <a:p>
+            <a:r>
+              <a:t>[실행] nano ~/ros2_curri/agv_ws/src/agv_bringup/config/robot.yaml</a:t>
             </a:r>
           </a:p>
           <a:p>
@@ -710,12 +713,12 @@
           <a:lstStyle/>
           <a:p>
             <a:r>
-              <a:t>[설명] ~/agv_ws/src/agv_bringup/config/sensors.yaml의 전체 파일을 1/1 구간으로 작성한다.</a:t>
-            </a:r>
-          </a:p>
-          <a:p>
-            <a:r>
-              <a:t>[실행] nano ~/agv_ws/src/agv_bringup/config/sensors.yaml</a:t>
+              <a:t>[설명] ~/ros2_curri/agv_ws/src/agv_bringup/config/sensors.yaml의 전체 파일을 1/1 구간으로 작성한다.</a:t>
+            </a:r>
+          </a:p>
+          <a:p>
+            <a:r>
+              <a:t>[실행] nano ~/ros2_curri/agv_ws/src/agv_bringup/config/sensors.yaml</a:t>
             </a:r>
           </a:p>
           <a:p>
@@ -800,12 +803,12 @@
           <a:lstStyle/>
           <a:p>
             <a:r>
-              <a:t>[설명] ~/agv_ws/src/agv_bringup/config/vision.yaml의 전체 파일을 1/1 구간으로 작성한다.</a:t>
-            </a:r>
-          </a:p>
-          <a:p>
-            <a:r>
-              <a:t>[실행] nano ~/agv_ws/src/agv_bringup/config/vision.yaml</a:t>
+              <a:t>[설명] ~/ros2_curri/agv_ws/src/agv_bringup/config/vision.yaml의 전체 파일을 1/1 구간으로 작성한다.</a:t>
+            </a:r>
+          </a:p>
+          <a:p>
+            <a:r>
+              <a:t>[실행] nano ~/ros2_curri/agv_ws/src/agv_bringup/config/vision.yaml</a:t>
             </a:r>
           </a:p>
           <a:p>
@@ -890,12 +893,12 @@
           <a:lstStyle/>
           <a:p>
             <a:r>
-              <a:t>[설명] ~/agv_ws/src/agv_bringup/config/mission.yaml의 전체 파일을 1/1 구간으로 작성한다.</a:t>
-            </a:r>
-          </a:p>
-          <a:p>
-            <a:r>
-              <a:t>[실행] nano ~/agv_ws/src/agv_bringup/config/mission.yaml</a:t>
+              <a:t>[설명] ~/ros2_curri/agv_ws/src/agv_bringup/config/mission.yaml의 전체 파일을 1/2 구간으로 작성한다.</a:t>
+            </a:r>
+          </a:p>
+          <a:p>
+            <a:r>
+              <a:t>[실행] nano ~/ros2_curri/agv_ws/src/agv_bringup/config/mission.yaml</a:t>
             </a:r>
           </a:p>
           <a:p>
@@ -980,12 +983,12 @@
           <a:lstStyle/>
           <a:p>
             <a:r>
-              <a:t>[설명] ~/agv_ws/src/agv_control/config/controllers.yaml의 전체 파일을 1/2 구간으로 작성한다.</a:t>
-            </a:r>
-          </a:p>
-          <a:p>
-            <a:r>
-              <a:t>[실행] nano ~/agv_ws/src/agv_control/config/controllers.yaml</a:t>
+              <a:t>[설명] ~/ros2_curri/agv_ws/src/agv_bringup/config/mission.yaml의 전체 파일을 2/2 구간으로 작성한다.</a:t>
+            </a:r>
+          </a:p>
+          <a:p>
+            <a:r>
+              <a:t>[실행] nano ~/ros2_curri/agv_ws/src/agv_bringup/config/mission.yaml</a:t>
             </a:r>
           </a:p>
           <a:p>
@@ -1070,12 +1073,12 @@
           <a:lstStyle/>
           <a:p>
             <a:r>
-              <a:t>[설명] ~/agv_ws/src/agv_control/config/controllers.yaml의 전체 파일을 2/2 구간으로 작성한다.</a:t>
-            </a:r>
-          </a:p>
-          <a:p>
-            <a:r>
-              <a:t>[실행] nano ~/agv_ws/src/agv_control/config/controllers.yaml</a:t>
+              <a:t>[설명] ~/ros2_curri/agv_ws/src/agv_control/config/controllers.yaml의 전체 파일을 1/2 구간으로 작성한다.</a:t>
+            </a:r>
+          </a:p>
+          <a:p>
+            <a:r>
+              <a:t>[실행] nano ~/ros2_curri/agv_ws/src/agv_control/config/controllers.yaml</a:t>
             </a:r>
           </a:p>
           <a:p>
@@ -1160,12 +1163,12 @@
           <a:lstStyle/>
           <a:p>
             <a:r>
-              <a:t>[설명] ~/agv_ws/src/agv_bringup/launch/agv_sim.launch.py의 전체 파일을 1/3 구간으로 작성한다.</a:t>
-            </a:r>
-          </a:p>
-          <a:p>
-            <a:r>
-              <a:t>[실행] nano ~/agv_ws/src/agv_bringup/launch/agv_sim.launch.py</a:t>
+              <a:t>[설명] ~/ros2_curri/agv_ws/src/agv_control/config/controllers.yaml의 전체 파일을 2/2 구간으로 작성한다.</a:t>
+            </a:r>
+          </a:p>
+          <a:p>
+            <a:r>
+              <a:t>[실행] nano ~/ros2_curri/agv_ws/src/agv_control/config/controllers.yaml</a:t>
             </a:r>
           </a:p>
           <a:p>
@@ -1250,12 +1253,12 @@
           <a:lstStyle/>
           <a:p>
             <a:r>
-              <a:t>[설명] ~/agv_ws/src/agv_bringup/launch/agv_sim.launch.py의 전체 파일을 2/3 구간으로 작성한다.</a:t>
-            </a:r>
-          </a:p>
-          <a:p>
-            <a:r>
-              <a:t>[실행] nano ~/agv_ws/src/agv_bringup/launch/agv_sim.launch.py</a:t>
+              <a:t>[설명] ~/ros2_curri/agv_ws/src/agv_bringup/launch/agv_sim.launch.py의 전체 파일을 1/4 구간으로 작성한다.</a:t>
+            </a:r>
+          </a:p>
+          <a:p>
+            <a:r>
+              <a:t>[실행] nano ~/ros2_curri/agv_ws/src/agv_bringup/launch/agv_sim.launch.py</a:t>
             </a:r>
           </a:p>
           <a:p>
@@ -1340,12 +1343,12 @@
           <a:lstStyle/>
           <a:p>
             <a:r>
-              <a:t>[설명] ~/agv_ws/src/agv_bringup/launch/agv_sim.launch.py의 전체 파일을 3/3 구간으로 작성한다.</a:t>
-            </a:r>
-          </a:p>
-          <a:p>
-            <a:r>
-              <a:t>[실행] nano ~/agv_ws/src/agv_bringup/launch/agv_sim.launch.py</a:t>
+              <a:t>[설명] ~/ros2_curri/agv_ws/src/agv_bringup/launch/agv_sim.launch.py의 전체 파일을 2/4 구간으로 작성한다.</a:t>
+            </a:r>
+          </a:p>
+          <a:p>
+            <a:r>
+              <a:t>[실행] nano ~/ros2_curri/agv_ws/src/agv_bringup/launch/agv_sim.launch.py</a:t>
             </a:r>
           </a:p>
           <a:p>
@@ -1430,12 +1433,12 @@
           <a:lstStyle/>
           <a:p>
             <a:r>
-              <a:t>[설명] ~/agv_ws/src/agv_gazebo/launch/gazebo.launch.py의 전체 파일을 1/2 구간으로 작성한다.</a:t>
-            </a:r>
-          </a:p>
-          <a:p>
-            <a:r>
-              <a:t>[실행] nano ~/agv_ws/src/agv_gazebo/launch/gazebo.launch.py</a:t>
+              <a:t>[설명] ~/ros2_curri/agv_ws/src/agv_bringup/launch/agv_sim.launch.py의 전체 파일을 3/4 구간으로 작성한다.</a:t>
+            </a:r>
+          </a:p>
+          <a:p>
+            <a:r>
+              <a:t>[실행] nano ~/ros2_curri/agv_ws/src/agv_bringup/launch/agv_sim.launch.py</a:t>
             </a:r>
           </a:p>
           <a:p>
@@ -1610,12 +1613,12 @@
           <a:lstStyle/>
           <a:p>
             <a:r>
-              <a:t>[설명] ~/agv_ws/src/agv_gazebo/launch/gazebo.launch.py의 전체 파일을 2/2 구간으로 작성한다.</a:t>
-            </a:r>
-          </a:p>
-          <a:p>
-            <a:r>
-              <a:t>[실행] nano ~/agv_ws/src/agv_gazebo/launch/gazebo.launch.py</a:t>
+              <a:t>[설명] ~/ros2_curri/agv_ws/src/agv_bringup/launch/agv_sim.launch.py의 전체 파일을 4/4 구간으로 작성한다.</a:t>
+            </a:r>
+          </a:p>
+          <a:p>
+            <a:r>
+              <a:t>[실행] nano ~/ros2_curri/agv_ws/src/agv_bringup/launch/agv_sim.launch.py</a:t>
             </a:r>
           </a:p>
           <a:p>
@@ -1700,27 +1703,17 @@
           <a:lstStyle/>
           <a:p>
             <a:r>
-              <a:t>[설명] build/source/run을 생략 없이 실행한다.</a:t>
-            </a:r>
-          </a:p>
-          <a:p>
-            <a:r>
-              <a:t>[실행] cd ~/agv_ws &amp;&amp; source install/setup.bash</a:t>
-            </a:r>
-          </a:p>
-          <a:p>
-            <a:r>
-              <a:t>ros2 launch agv_bringup agv_sim.launch.py</a:t>
-            </a:r>
-          </a:p>
-          <a:p>
-            <a:r>
-              <a:t># 별도 터미널: ros2 bag record -o ~/agv_bag_01 /scan /imu/data /odom /camera/image_raw</a:t>
-            </a:r>
-          </a:p>
-          <a:p>
-            <a:r>
-              <a:t>[확인] 한 launch 명령·YAML parameter·rosbag record/replay 명령을 설명하고 확인한다.</a:t>
+              <a:t>[설명] ~/ros2_curri/agv_ws/src/agv_gazebo/launch/gazebo.launch.py의 전체 파일을 1/2 구간으로 작성한다.</a:t>
+            </a:r>
+          </a:p>
+          <a:p>
+            <a:r>
+              <a:t>[실행] nano ~/ros2_curri/agv_ws/src/agv_gazebo/launch/gazebo.launch.py</a:t>
+            </a:r>
+          </a:p>
+          <a:p>
+            <a:r>
+              <a:t>[확인] 코드를 저장하고 다음 코드 슬라이드 또는 build 단계로 이동한다.</a:t>
             </a:r>
           </a:p>
           <a:p>
@@ -1730,7 +1723,7 @@
           </a:p>
           <a:p>
             <a:r>
-              <a:t>[오류] 오류가 나면 현재 폴더, source, 파일 경로를 먼저 확인한다.</a:t>
+              <a:t>[오류] 들여쓰기·XML 태그·따옴표가 슬라이드와 정확히 같은지 확인한다.</a:t>
             </a:r>
           </a:p>
         </p:txBody>
@@ -1800,17 +1793,17 @@
           <a:lstStyle/>
           <a:p>
             <a:r>
-              <a:t>[설명] 실제 Ubuntu/ROS 2 환경에서 생성한 검증 화면이다.</a:t>
-            </a:r>
-          </a:p>
-          <a:p>
-            <a:r>
-              <a:t>[실행] 슬라이드의 명령 또는 파일 작성 단계를 진행한다.</a:t>
-            </a:r>
-          </a:p>
-          <a:p>
-            <a:r>
-              <a:t>[확인] 캡처의 명령과 다음 슬라이드의 검증 명령을 비교한다.</a:t>
+              <a:t>[설명] ~/ros2_curri/agv_ws/src/agv_gazebo/launch/gazebo.launch.py의 전체 파일을 2/2 구간으로 작성한다.</a:t>
+            </a:r>
+          </a:p>
+          <a:p>
+            <a:r>
+              <a:t>[실행] nano ~/ros2_curri/agv_ws/src/agv_gazebo/launch/gazebo.launch.py</a:t>
+            </a:r>
+          </a:p>
+          <a:p>
+            <a:r>
+              <a:t>[확인] 코드를 저장하고 다음 코드 슬라이드 또는 build 단계로 이동한다.</a:t>
             </a:r>
           </a:p>
           <a:p>
@@ -1820,7 +1813,7 @@
           </a:p>
           <a:p>
             <a:r>
-              <a:t>[오류] 오류가 나면 현재 폴더, source, 파일 경로를 먼저 확인한다.</a:t>
+              <a:t>[오류] 들여쓰기·XML 태그·따옴표가 슬라이드와 정확히 같은지 확인한다.</a:t>
             </a:r>
           </a:p>
         </p:txBody>
@@ -1890,22 +1883,22 @@
           <a:lstStyle/>
           <a:p>
             <a:r>
-              <a:t>[설명] 검증 명령은 GUI 결과와 별도로 실행해 재현 가능한 완료 기준을 만든다.</a:t>
-            </a:r>
-          </a:p>
-          <a:p>
-            <a:r>
-              <a:t>[실행] ros2 launch agv_bringup agv_sim.launch.py --show-args</a:t>
-            </a:r>
-          </a:p>
-          <a:p>
-            <a:r>
-              <a:t>ros2 node list</a:t>
-            </a:r>
-          </a:p>
-          <a:p>
-            <a:r>
-              <a:t>ros2 param get /mission_manager stop_distance</a:t>
+              <a:t>[설명] build/source/run을 생략 없이 실행한다.</a:t>
+            </a:r>
+          </a:p>
+          <a:p>
+            <a:r>
+              <a:t>[실행] cd ~/ros2_curri/agv_ws &amp;&amp; source install/setup.bash</a:t>
+            </a:r>
+          </a:p>
+          <a:p>
+            <a:r>
+              <a:t>ros2 launch agv_bringup agv_sim.launch.py</a:t>
+            </a:r>
+          </a:p>
+          <a:p>
+            <a:r>
+              <a:t># 별도 터미널: ros2 bag record -o ~/agv_bag_01 /scan /imu/data /odom /camera/image_raw</a:t>
             </a:r>
           </a:p>
           <a:p>
@@ -1990,7 +1983,7 @@
           <a:lstStyle/>
           <a:p>
             <a:r>
-              <a:t>[설명] 오류를 대신 해결하지 말고 증상부터 우선 확인 순서대로 교육생이 실행하게 한다.</a:t>
+              <a:t>[설명] 실제 Ubuntu/ROS 2 환경에서 생성한 검증 화면이다.</a:t>
             </a:r>
           </a:p>
           <a:p>
@@ -2000,7 +1993,7 @@
           </a:p>
           <a:p>
             <a:r>
-              <a:t>[확인] 수정 뒤 첫 검증 명령을 다시 실행한다.</a:t>
+              <a:t>[확인] 캡처의 명령과 다음 슬라이드의 검증 명령을 비교한다.</a:t>
             </a:r>
           </a:p>
           <a:p>
@@ -2010,7 +2003,7 @@
           </a:p>
           <a:p>
             <a:r>
-              <a:t>[오류] 슬라이드의 두 대표 오류를 먼저 사용한다.</a:t>
+              <a:t>[오류] 오류가 나면 현재 폴더, source, 파일 경로를 먼저 확인한다.</a:t>
             </a:r>
           </a:p>
         </p:txBody>
@@ -2080,7 +2073,7 @@
           <a:lstStyle/>
           <a:p>
             <a:r>
-              <a:t>[설명] 교육생이 직접 한 값만 바꿔 원인과 결과를 연결하게 한다.</a:t>
+              <a:t>[설명] 실제 Ubuntu/ROS 2 환경에서 생성한 검증 화면이다.</a:t>
             </a:r>
           </a:p>
           <a:p>
@@ -2090,7 +2083,7 @@
           </a:p>
           <a:p>
             <a:r>
-              <a:t>[확인] 원래 값과 변경 값을 모두 기록한다.</a:t>
+              <a:t>[확인] 캡처의 명령과 다음 슬라이드의 검증 명령을 비교한다.</a:t>
             </a:r>
           </a:p>
           <a:p>
@@ -2170,17 +2163,27 @@
           <a:lstStyle/>
           <a:p>
             <a:r>
-              <a:t>[설명] rosbag2 재생 절차</a:t>
-            </a:r>
-          </a:p>
-          <a:p>
-            <a:r>
-              <a:t>[실행] 슬라이드의 명령 또는 파일 작성 단계를 진행한다.</a:t>
-            </a:r>
-          </a:p>
-          <a:p>
-            <a:r>
-              <a:t>[확인] 각 항목이 현재 시스템의 어느 package/topic/file과 연결되는지 확인한다.</a:t>
+              <a:t>[설명] 검증 명령은 GUI 결과와 별도로 실행해 재현 가능한 완료 기준을 만든다.</a:t>
+            </a:r>
+          </a:p>
+          <a:p>
+            <a:r>
+              <a:t>[실행] ros2 launch agv_bringup agv_sim.launch.py --show-args</a:t>
+            </a:r>
+          </a:p>
+          <a:p>
+            <a:r>
+              <a:t>ros2 node list</a:t>
+            </a:r>
+          </a:p>
+          <a:p>
+            <a:r>
+              <a:t>ros2 param get /mission_manager stop_distance</a:t>
+            </a:r>
+          </a:p>
+          <a:p>
+            <a:r>
+              <a:t>[확인] 한 launch 명령·YAML parameter·rosbag record/replay 명령을 설명하고 확인한다.</a:t>
             </a:r>
           </a:p>
           <a:p>
@@ -2260,7 +2263,7 @@
           <a:lstStyle/>
           <a:p>
             <a:r>
-              <a:t>[설명] 증상별 디버깅 도구</a:t>
+              <a:t>[설명] 오류를 대신 해결하지 말고 증상부터 우선 확인 순서대로 교육생이 실행하게 한다.</a:t>
             </a:r>
           </a:p>
           <a:p>
@@ -2270,7 +2273,7 @@
           </a:p>
           <a:p>
             <a:r>
-              <a:t>[확인] 각 항목이 현재 시스템의 어느 package/topic/file과 연결되는지 확인한다.</a:t>
+              <a:t>[확인] 수정 뒤 첫 검증 명령을 다시 실행한다.</a:t>
             </a:r>
           </a:p>
           <a:p>
@@ -2280,7 +2283,7 @@
           </a:p>
           <a:p>
             <a:r>
-              <a:t>[오류] 오류가 나면 현재 폴더, source, 파일 경로를 먼저 확인한다.</a:t>
+              <a:t>[오류] 슬라이드의 두 대표 오류를 먼저 사용한다.</a:t>
             </a:r>
           </a:p>
         </p:txBody>
@@ -2350,7 +2353,7 @@
           <a:lstStyle/>
           <a:p>
             <a:r>
-              <a:t>[설명] 교육생이 Complete·캡처·로그를 저장했는지 확인하고 다음 모듈의 시작 상태를 읽는다.</a:t>
+              <a:t>[설명] 교육생이 직접 한 값만 바꿔 원인과 결과를 연결하게 한다.</a:t>
             </a:r>
           </a:p>
           <a:p>
@@ -2360,7 +2363,7 @@
           </a:p>
           <a:p>
             <a:r>
-              <a:t>[확인] M22 final mission 시작 조건을 말할 수 있다.</a:t>
+              <a:t>[확인] 원래 값과 변경 값을 모두 기록한다.</a:t>
             </a:r>
           </a:p>
           <a:p>
@@ -2440,7 +2443,7 @@
           <a:lstStyle/>
           <a:p>
             <a:r>
-              <a:t>[설명] 공식 문서는 버전 차이와 확장 학습을 확인할 때 사용한다.</a:t>
+              <a:t>[설명] rosbag2 재생 절차</a:t>
             </a:r>
           </a:p>
           <a:p>
@@ -2450,7 +2453,7 @@
           </a:p>
           <a:p>
             <a:r>
-              <a:t>[확인] 학습자는 본문만으로 현재 모듈을 완료한 상태여야 한다.</a:t>
+              <a:t>[확인] 각 항목이 현재 시스템의 어느 package/topic/file과 연결되는지 확인한다.</a:t>
             </a:r>
           </a:p>
           <a:p>
@@ -2535,12 +2538,282 @@
           </a:p>
           <a:p>
             <a:r>
-              <a:t>[실행] pwd; source /opt/ros/jazzy/setup.bash; source ~/agv_ws/install/setup.bash</a:t>
+              <a:t>[실행] pwd; source /opt/ros/jazzy/setup.bash; source ~/ros2_curri/agv_ws/install/setup.bash</a:t>
             </a:r>
           </a:p>
           <a:p>
             <a:r>
               <a:t>[확인] 현재 폴더와 source 상태를 모두 확인한다.</a:t>
+            </a:r>
+          </a:p>
+          <a:p>
+            <a:r>
+              <a:t>[멈춤] 교육생이 현재 체크포인트를 통과할 때까지 기다린다.</a:t>
+            </a:r>
+          </a:p>
+          <a:p>
+            <a:r>
+              <a:t>[오류] 오류가 나면 현재 폴더, source, 파일 경로를 먼저 확인한다.</a:t>
+            </a:r>
+          </a:p>
+        </p:txBody>
+      </p:sp>
+      <p:sp>
+        <p:nvSpPr>
+          <p:cNvPr id="4" name="Slide Number Placeholder 3"/>
+          <p:cNvSpPr>
+            <a:spLocks noGrp="1"/>
+          </p:cNvSpPr>
+          <p:nvPr>
+            <p:ph type="sldNum" idx="5" sz="quarter"/>
+          </p:nvPr>
+        </p:nvSpPr>
+        <p:spPr/>
+      </p:sp>
+    </p:spTree>
+  </p:cSld>
+  <p:clrMapOvr>
+    <a:masterClrMapping/>
+  </p:clrMapOvr>
+</p:notes>
+</file>
+
+<file path=ppt/notesSlides/notesSlide30.xml><?xml version="1.0" encoding="utf-8"?>
+<p:notes xmlns:a="http://schemas.openxmlformats.org/drawingml/2006/main" xmlns:p="http://schemas.openxmlformats.org/presentationml/2006/main" xmlns:r="http://schemas.openxmlformats.org/officeDocument/2006/relationships">
+  <p:cSld>
+    <p:spTree>
+      <p:nvGrpSpPr>
+        <p:cNvPr id="1" name=""/>
+        <p:cNvGrpSpPr/>
+        <p:nvPr/>
+      </p:nvGrpSpPr>
+      <p:grpSpPr>
+        <a:xfrm>
+          <a:off x="0" y="0"/>
+          <a:ext cx="0" cy="0"/>
+          <a:chOff x="0" y="0"/>
+          <a:chExt cx="0" cy="0"/>
+        </a:xfrm>
+      </p:grpSpPr>
+      <p:sp>
+        <p:nvSpPr>
+          <p:cNvPr id="2" name="Slide Image Placeholder 1"/>
+          <p:cNvSpPr>
+            <a:spLocks noGrp="1"/>
+          </p:cNvSpPr>
+          <p:nvPr>
+            <p:ph type="sldImg" idx="2"/>
+          </p:nvPr>
+        </p:nvSpPr>
+        <p:spPr/>
+      </p:sp>
+      <p:sp>
+        <p:nvSpPr>
+          <p:cNvPr id="3" name="Notes Placeholder 2"/>
+          <p:cNvSpPr>
+            <a:spLocks noGrp="1"/>
+          </p:cNvSpPr>
+          <p:nvPr>
+            <p:ph type="body" idx="3" sz="quarter"/>
+          </p:nvPr>
+        </p:nvSpPr>
+        <p:spPr/>
+        <p:txBody>
+          <a:bodyPr/>
+          <a:lstStyle/>
+          <a:p>
+            <a:r>
+              <a:t>[설명] 증상별 디버깅 도구</a:t>
+            </a:r>
+          </a:p>
+          <a:p>
+            <a:r>
+              <a:t>[실행] 슬라이드의 명령 또는 파일 작성 단계를 진행한다.</a:t>
+            </a:r>
+          </a:p>
+          <a:p>
+            <a:r>
+              <a:t>[확인] 각 항목이 현재 시스템의 어느 package/topic/file과 연결되는지 확인한다.</a:t>
+            </a:r>
+          </a:p>
+          <a:p>
+            <a:r>
+              <a:t>[멈춤] 교육생이 현재 체크포인트를 통과할 때까지 기다린다.</a:t>
+            </a:r>
+          </a:p>
+          <a:p>
+            <a:r>
+              <a:t>[오류] 오류가 나면 현재 폴더, source, 파일 경로를 먼저 확인한다.</a:t>
+            </a:r>
+          </a:p>
+        </p:txBody>
+      </p:sp>
+      <p:sp>
+        <p:nvSpPr>
+          <p:cNvPr id="4" name="Slide Number Placeholder 3"/>
+          <p:cNvSpPr>
+            <a:spLocks noGrp="1"/>
+          </p:cNvSpPr>
+          <p:nvPr>
+            <p:ph type="sldNum" idx="5" sz="quarter"/>
+          </p:nvPr>
+        </p:nvSpPr>
+        <p:spPr/>
+      </p:sp>
+    </p:spTree>
+  </p:cSld>
+  <p:clrMapOvr>
+    <a:masterClrMapping/>
+  </p:clrMapOvr>
+</p:notes>
+</file>
+
+<file path=ppt/notesSlides/notesSlide31.xml><?xml version="1.0" encoding="utf-8"?>
+<p:notes xmlns:a="http://schemas.openxmlformats.org/drawingml/2006/main" xmlns:p="http://schemas.openxmlformats.org/presentationml/2006/main" xmlns:r="http://schemas.openxmlformats.org/officeDocument/2006/relationships">
+  <p:cSld>
+    <p:spTree>
+      <p:nvGrpSpPr>
+        <p:cNvPr id="1" name=""/>
+        <p:cNvGrpSpPr/>
+        <p:nvPr/>
+      </p:nvGrpSpPr>
+      <p:grpSpPr>
+        <a:xfrm>
+          <a:off x="0" y="0"/>
+          <a:ext cx="0" cy="0"/>
+          <a:chOff x="0" y="0"/>
+          <a:chExt cx="0" cy="0"/>
+        </a:xfrm>
+      </p:grpSpPr>
+      <p:sp>
+        <p:nvSpPr>
+          <p:cNvPr id="2" name="Slide Image Placeholder 1"/>
+          <p:cNvSpPr>
+            <a:spLocks noGrp="1"/>
+          </p:cNvSpPr>
+          <p:nvPr>
+            <p:ph type="sldImg" idx="2"/>
+          </p:nvPr>
+        </p:nvSpPr>
+        <p:spPr/>
+      </p:sp>
+      <p:sp>
+        <p:nvSpPr>
+          <p:cNvPr id="3" name="Notes Placeholder 2"/>
+          <p:cNvSpPr>
+            <a:spLocks noGrp="1"/>
+          </p:cNvSpPr>
+          <p:nvPr>
+            <p:ph type="body" idx="3" sz="quarter"/>
+          </p:nvPr>
+        </p:nvSpPr>
+        <p:spPr/>
+        <p:txBody>
+          <a:bodyPr/>
+          <a:lstStyle/>
+          <a:p>
+            <a:r>
+              <a:t>[설명] 교육생이 Complete·캡처·로그를 저장했는지 확인하고 다음 모듈의 시작 상태를 읽는다.</a:t>
+            </a:r>
+          </a:p>
+          <a:p>
+            <a:r>
+              <a:t>[실행] 슬라이드의 명령 또는 파일 작성 단계를 진행한다.</a:t>
+            </a:r>
+          </a:p>
+          <a:p>
+            <a:r>
+              <a:t>[확인] M22 final mission 시작 조건을 말할 수 있다.</a:t>
+            </a:r>
+          </a:p>
+          <a:p>
+            <a:r>
+              <a:t>[멈춤] 교육생이 현재 체크포인트를 통과할 때까지 기다린다.</a:t>
+            </a:r>
+          </a:p>
+          <a:p>
+            <a:r>
+              <a:t>[오류] 오류가 나면 현재 폴더, source, 파일 경로를 먼저 확인한다.</a:t>
+            </a:r>
+          </a:p>
+        </p:txBody>
+      </p:sp>
+      <p:sp>
+        <p:nvSpPr>
+          <p:cNvPr id="4" name="Slide Number Placeholder 3"/>
+          <p:cNvSpPr>
+            <a:spLocks noGrp="1"/>
+          </p:cNvSpPr>
+          <p:nvPr>
+            <p:ph type="sldNum" idx="5" sz="quarter"/>
+          </p:nvPr>
+        </p:nvSpPr>
+        <p:spPr/>
+      </p:sp>
+    </p:spTree>
+  </p:cSld>
+  <p:clrMapOvr>
+    <a:masterClrMapping/>
+  </p:clrMapOvr>
+</p:notes>
+</file>
+
+<file path=ppt/notesSlides/notesSlide32.xml><?xml version="1.0" encoding="utf-8"?>
+<p:notes xmlns:a="http://schemas.openxmlformats.org/drawingml/2006/main" xmlns:p="http://schemas.openxmlformats.org/presentationml/2006/main" xmlns:r="http://schemas.openxmlformats.org/officeDocument/2006/relationships">
+  <p:cSld>
+    <p:spTree>
+      <p:nvGrpSpPr>
+        <p:cNvPr id="1" name=""/>
+        <p:cNvGrpSpPr/>
+        <p:nvPr/>
+      </p:nvGrpSpPr>
+      <p:grpSpPr>
+        <a:xfrm>
+          <a:off x="0" y="0"/>
+          <a:ext cx="0" cy="0"/>
+          <a:chOff x="0" y="0"/>
+          <a:chExt cx="0" cy="0"/>
+        </a:xfrm>
+      </p:grpSpPr>
+      <p:sp>
+        <p:nvSpPr>
+          <p:cNvPr id="2" name="Slide Image Placeholder 1"/>
+          <p:cNvSpPr>
+            <a:spLocks noGrp="1"/>
+          </p:cNvSpPr>
+          <p:nvPr>
+            <p:ph type="sldImg" idx="2"/>
+          </p:nvPr>
+        </p:nvSpPr>
+        <p:spPr/>
+      </p:sp>
+      <p:sp>
+        <p:nvSpPr>
+          <p:cNvPr id="3" name="Notes Placeholder 2"/>
+          <p:cNvSpPr>
+            <a:spLocks noGrp="1"/>
+          </p:cNvSpPr>
+          <p:nvPr>
+            <p:ph type="body" idx="3" sz="quarter"/>
+          </p:nvPr>
+        </p:nvSpPr>
+        <p:spPr/>
+        <p:txBody>
+          <a:bodyPr/>
+          <a:lstStyle/>
+          <a:p>
+            <a:r>
+              <a:t>[설명] 공식 문서는 버전 차이와 확장 학습을 확인할 때 사용한다.</a:t>
+            </a:r>
+          </a:p>
+          <a:p>
+            <a:r>
+              <a:t>[실행] 슬라이드의 명령 또는 파일 작성 단계를 진행한다.</a:t>
+            </a:r>
+          </a:p>
+          <a:p>
+            <a:r>
+              <a:t>[확인] 학습자는 본문만으로 현재 모듈을 완료한 상태여야 한다.</a:t>
             </a:r>
           </a:p>
           <a:p>
@@ -2895,7 +3168,7 @@
           </a:p>
           <a:p>
             <a:r>
-              <a:t>[실행] find ~/agv_ws/src -path '*/config/*.yaml' -type f | sort</a:t>
+              <a:t>[실행] find ~/ros2_curri/agv_ws/src -path '*/config/*.yaml' -type f | sort</a:t>
             </a:r>
           </a:p>
           <a:p>
@@ -2990,7 +3263,7 @@
           </a:p>
           <a:p>
             <a:r>
-              <a:t>[실행] source ~/agv_ws/install/setup.bash</a:t>
+              <a:t>[실행] source ~/ros2_curri/agv_ws/install/setup.bash</a:t>
             </a:r>
           </a:p>
           <a:p>
@@ -6522,7 +6795,7 @@
               </a:defRPr>
             </a:pPr>
             <a:r>
-              <a:t>~/agv_ws/src/agv_bringup/config/robot.yaml</a:t>
+              <a:t>~/ros2_curri/agv_ws/src/agv_bringup/config/robot.yaml</a:t>
             </a:r>
           </a:p>
         </p:txBody>
@@ -6658,7 +6931,7 @@
               </a:defRPr>
             </a:pPr>
             <a:r>
-              <a:t>현재 단계 4/5    |    현재 폴더 ~/agv_ws    |    현재 터미널</a:t>
+              <a:t>현재 단계 4/5    |    현재 폴더 ~/ros2_curri/agv_ws    |    현재 터미널</a:t>
             </a:r>
           </a:p>
         </p:txBody>
@@ -6755,11 +7028,11 @@
               </a:defRPr>
             </a:pPr>
             <a:r>
-              <a:t>파일 생성: mkdir -p ~/agv_ws/src/agv_bringup/config</a:t>
+              <a:t>파일 생성: mkdir -p ~/ros2_curri/agv_ws/src/agv_bringup/config</a:t>
             </a:r>
             <a:br/>
             <a:r>
-              <a:t>파일 열기: nano ~/agv_ws/src/agv_bringup/config/robot.yaml</a:t>
+              <a:t>파일 열기: nano ~/ros2_curri/agv_ws/src/agv_bringup/config/robot.yaml</a:t>
             </a:r>
           </a:p>
         </p:txBody>
@@ -6960,7 +7233,7 @@
               </a:defRPr>
             </a:pPr>
             <a:r>
-              <a:t>~/agv_ws/src/agv_bringup/config/sensors.yaml</a:t>
+              <a:t>~/ros2_curri/agv_ws/src/agv_bringup/config/sensors.yaml</a:t>
             </a:r>
           </a:p>
         </p:txBody>
@@ -7096,7 +7369,7 @@
               </a:defRPr>
             </a:pPr>
             <a:r>
-              <a:t>현재 단계 5/6    |    현재 폴더 ~/agv_ws    |    현재 터미널</a:t>
+              <a:t>현재 단계 5/6    |    현재 폴더 ~/ros2_curri/agv_ws    |    현재 터미널</a:t>
             </a:r>
           </a:p>
         </p:txBody>
@@ -7193,11 +7466,11 @@
               </a:defRPr>
             </a:pPr>
             <a:r>
-              <a:t>파일 생성: mkdir -p ~/agv_ws/src/agv_bringup/config</a:t>
+              <a:t>파일 생성: mkdir -p ~/ros2_curri/agv_ws/src/agv_bringup/config</a:t>
             </a:r>
             <a:br/>
             <a:r>
-              <a:t>파일 열기: nano ~/agv_ws/src/agv_bringup/config/sensors.yaml</a:t>
+              <a:t>파일 열기: nano ~/ros2_curri/agv_ws/src/agv_bringup/config/sensors.yaml</a:t>
             </a:r>
           </a:p>
         </p:txBody>
@@ -7414,7 +7687,7 @@
               </a:defRPr>
             </a:pPr>
             <a:r>
-              <a:t>~/agv_ws/src/agv_bringup/config/vision.yaml</a:t>
+              <a:t>~/ros2_curri/agv_ws/src/agv_bringup/config/vision.yaml</a:t>
             </a:r>
           </a:p>
         </p:txBody>
@@ -7550,7 +7823,7 @@
               </a:defRPr>
             </a:pPr>
             <a:r>
-              <a:t>현재 단계 6/7    |    현재 폴더 ~/agv_ws    |    현재 터미널</a:t>
+              <a:t>현재 단계 6/7    |    현재 폴더 ~/ros2_curri/agv_ws    |    현재 터미널</a:t>
             </a:r>
           </a:p>
         </p:txBody>
@@ -7647,11 +7920,11 @@
               </a:defRPr>
             </a:pPr>
             <a:r>
-              <a:t>파일 생성: mkdir -p ~/agv_ws/src/agv_bringup/config</a:t>
+              <a:t>파일 생성: mkdir -p ~/ros2_curri/agv_ws/src/agv_bringup/config</a:t>
             </a:r>
             <a:br/>
             <a:r>
-              <a:t>파일 열기: nano ~/agv_ws/src/agv_bringup/config/vision.yaml</a:t>
+              <a:t>파일 열기: nano ~/ros2_curri/agv_ws/src/agv_bringup/config/vision.yaml</a:t>
             </a:r>
           </a:p>
         </p:txBody>
@@ -7722,6 +7995,10 @@
             <a:br/>
             <a:r>
               <a:t>    enable_yolo: false</a:t>
+            </a:r>
+            <a:br/>
+            <a:r>
+              <a:t>    enable_red_target_fallback: true</a:t>
             </a:r>
             <a:br/>
             <a:r>
@@ -7825,7 +8102,7 @@
               </a:defRPr>
             </a:pPr>
             <a:r>
-              <a:t>파일을 새로 만들고 저장한다 (1/1)</a:t>
+              <a:t>파일을 새로 만들고 저장한다 (1/2)</a:t>
             </a:r>
           </a:p>
         </p:txBody>
@@ -7864,7 +8141,7 @@
               </a:defRPr>
             </a:pPr>
             <a:r>
-              <a:t>~/agv_ws/src/agv_bringup/config/mission.yaml</a:t>
+              <a:t>~/ros2_curri/agv_ws/src/agv_bringup/config/mission.yaml</a:t>
             </a:r>
           </a:p>
         </p:txBody>
@@ -8000,7 +8277,7 @@
               </a:defRPr>
             </a:pPr>
             <a:r>
-              <a:t>현재 단계 7/8    |    현재 폴더 ~/agv_ws    |    현재 터미널</a:t>
+              <a:t>현재 단계 7/9    |    현재 폴더 ~/ros2_curri/agv_ws    |    현재 터미널</a:t>
             </a:r>
           </a:p>
         </p:txBody>
@@ -8097,11 +8374,11 @@
               </a:defRPr>
             </a:pPr>
             <a:r>
-              <a:t>파일 생성: mkdir -p ~/agv_ws/src/agv_bringup/config</a:t>
+              <a:t>파일 생성: mkdir -p ~/ros2_curri/agv_ws/src/agv_bringup/config</a:t>
             </a:r>
             <a:br/>
             <a:r>
-              <a:t>파일 열기: nano ~/agv_ws/src/agv_bringup/config/mission.yaml</a:t>
+              <a:t>파일 열기: nano ~/ros2_curri/agv_ws/src/agv_bringup/config/mission.yaml</a:t>
             </a:r>
           </a:p>
         </p:txBody>
@@ -8187,6 +8464,10 @@
             </a:r>
             <a:br/>
             <a:r>
+              <a:t>    target_timeout_sec: 0.70</a:t>
+            </a:r>
+            <a:br/>
+            <a:r>
               <a:t>safety_controller:</a:t>
             </a:r>
             <a:br/>
@@ -8200,10 +8481,6 @@
             <a:br/>
             <a:r>
               <a:t>    stop_distance: 0.50</a:t>
-            </a:r>
-            <a:br/>
-            <a:r>
-              <a:t>    front_half_angle_deg: 15.0</a:t>
             </a:r>
           </a:p>
         </p:txBody>
@@ -8242,7 +8519,7 @@
               </a:defRPr>
             </a:pPr>
             <a:r>
-              <a:t>파일 전체 1/1 · 이 슬라이드 다음에 같은 파일의 나머지 줄이 이어집니다.</a:t>
+              <a:t>파일 전체 1/2 · 이 슬라이드 다음에 같은 파일의 나머지 줄이 이어집니다.</a:t>
             </a:r>
           </a:p>
         </p:txBody>
@@ -8299,7 +8576,7 @@
               </a:defRPr>
             </a:pPr>
             <a:r>
-              <a:t>파일을 새로 만들고 저장한다 (1/2)</a:t>
+              <a:t>파일을 계속 작성하고 저장한다 (2/2)</a:t>
             </a:r>
           </a:p>
         </p:txBody>
@@ -8338,7 +8615,7 @@
               </a:defRPr>
             </a:pPr>
             <a:r>
-              <a:t>~/agv_ws/src/agv_control/config/controllers.yaml</a:t>
+              <a:t>~/ros2_curri/agv_ws/src/agv_bringup/config/mission.yaml</a:t>
             </a:r>
           </a:p>
         </p:txBody>
@@ -8474,7 +8751,7 @@
               </a:defRPr>
             </a:pPr>
             <a:r>
-              <a:t>현재 단계 8/10    |    현재 폴더 ~/agv_ws    |    현재 터미널</a:t>
+              <a:t>현재 단계 8/9    |    현재 폴더 ~/ros2_curri/agv_ws    |    현재 터미널</a:t>
             </a:r>
           </a:p>
         </p:txBody>
@@ -8571,11 +8848,11 @@
               </a:defRPr>
             </a:pPr>
             <a:r>
-              <a:t>파일 생성: mkdir -p ~/agv_ws/src/agv_control/config</a:t>
+              <a:t>파일 생성: mkdir -p ~/ros2_curri/agv_ws/src/agv_bringup/config</a:t>
             </a:r>
             <a:br/>
             <a:r>
-              <a:t>파일 열기: nano ~/agv_ws/src/agv_control/config/controllers.yaml</a:t>
+              <a:t>파일 열기: nano ~/ros2_curri/agv_ws/src/agv_bringup/config/mission.yaml</a:t>
             </a:r>
           </a:p>
         </p:txBody>
@@ -8633,51 +8910,7 @@
               </a:defRPr>
             </a:pPr>
             <a:r>
-              <a:t>controller_manager:</a:t>
-            </a:r>
-            <a:br/>
-            <a:r>
-              <a:t>  ros__parameters:</a:t>
-            </a:r>
-            <a:br/>
-            <a:r>
-              <a:t>    update_rate: 50</a:t>
-            </a:r>
-            <a:br/>
-            <a:r>
-              <a:t>    joint_state_broadcaster:</a:t>
-            </a:r>
-            <a:br/>
-            <a:r>
-              <a:t>      type: joint_state_broadcaster/JointStateBroadcaster</a:t>
-            </a:r>
-            <a:br/>
-            <a:r>
-              <a:t>    diff_drive_controller:</a:t>
-            </a:r>
-            <a:br/>
-            <a:r>
-              <a:t>      type: diff_drive_controller/DiffDriveController</a:t>
-            </a:r>
-            <a:br/>
-            <a:r>
-              <a:t>diff_drive_controller:</a:t>
-            </a:r>
-            <a:br/>
-            <a:r>
-              <a:t>  ros__parameters:</a:t>
-            </a:r>
-            <a:br/>
-            <a:r>
-              <a:t>    left_wheel_names: [left_wheel_joint]</a:t>
-            </a:r>
-            <a:br/>
-            <a:r>
-              <a:t>    right_wheel_names: [right_wheel_joint]</a:t>
-            </a:r>
-            <a:br/>
-            <a:r>
-              <a:t>    wheel_separation: 0.38</a:t>
+              <a:t>    front_half_angle_deg: 15.0</a:t>
             </a:r>
           </a:p>
         </p:txBody>
@@ -8716,7 +8949,7 @@
               </a:defRPr>
             </a:pPr>
             <a:r>
-              <a:t>파일 전체 1/2 · 이 슬라이드 다음에 같은 파일의 나머지 줄이 이어집니다.</a:t>
+              <a:t>파일 전체 2/2 · 이 슬라이드 다음에 같은 파일의 나머지 줄이 이어집니다.</a:t>
             </a:r>
           </a:p>
         </p:txBody>
@@ -8773,7 +9006,7 @@
               </a:defRPr>
             </a:pPr>
             <a:r>
-              <a:t>파일을 계속 작성하고 저장한다 (2/2)</a:t>
+              <a:t>파일을 새로 만들고 저장한다 (1/2)</a:t>
             </a:r>
           </a:p>
         </p:txBody>
@@ -8812,7 +9045,7 @@
               </a:defRPr>
             </a:pPr>
             <a:r>
-              <a:t>~/agv_ws/src/agv_control/config/controllers.yaml</a:t>
+              <a:t>~/ros2_curri/agv_ws/src/agv_control/config/controllers.yaml</a:t>
             </a:r>
           </a:p>
         </p:txBody>
@@ -8948,7 +9181,7 @@
               </a:defRPr>
             </a:pPr>
             <a:r>
-              <a:t>현재 단계 9/10    |    현재 폴더 ~/agv_ws    |    현재 터미널</a:t>
+              <a:t>현재 단계 9/11    |    현재 폴더 ~/ros2_curri/agv_ws    |    현재 터미널</a:t>
             </a:r>
           </a:p>
         </p:txBody>
@@ -9045,11 +9278,11 @@
               </a:defRPr>
             </a:pPr>
             <a:r>
-              <a:t>파일 생성: mkdir -p ~/agv_ws/src/agv_control/config</a:t>
+              <a:t>파일 생성: mkdir -p ~/ros2_curri/agv_ws/src/agv_control/config</a:t>
             </a:r>
             <a:br/>
             <a:r>
-              <a:t>파일 열기: nano ~/agv_ws/src/agv_control/config/controllers.yaml</a:t>
+              <a:t>파일 열기: nano ~/ros2_curri/agv_ws/src/agv_control/config/controllers.yaml</a:t>
             </a:r>
           </a:p>
         </p:txBody>
@@ -9107,19 +9340,51 @@
               </a:defRPr>
             </a:pPr>
             <a:r>
-              <a:t>    wheel_radius: 0.08</a:t>
+              <a:t>controller_manager:</a:t>
             </a:r>
             <a:br/>
             <a:r>
-              <a:t>    base_frame_id: base_link</a:t>
+              <a:t>  ros__parameters:</a:t>
             </a:r>
             <a:br/>
             <a:r>
-              <a:t>    odom_frame_id: odom</a:t>
+              <a:t>    update_rate: 50</a:t>
             </a:r>
             <a:br/>
             <a:r>
-              <a:t>    publish_rate: 50.0</a:t>
+              <a:t>    joint_state_broadcaster:</a:t>
+            </a:r>
+            <a:br/>
+            <a:r>
+              <a:t>      type: joint_state_broadcaster/JointStateBroadcaster</a:t>
+            </a:r>
+            <a:br/>
+            <a:r>
+              <a:t>    diff_drive_controller:</a:t>
+            </a:r>
+            <a:br/>
+            <a:r>
+              <a:t>      type: diff_drive_controller/DiffDriveController</a:t>
+            </a:r>
+            <a:br/>
+            <a:r>
+              <a:t>diff_drive_controller:</a:t>
+            </a:r>
+            <a:br/>
+            <a:r>
+              <a:t>  ros__parameters:</a:t>
+            </a:r>
+            <a:br/>
+            <a:r>
+              <a:t>    left_wheel_names: [left_wheel_joint]</a:t>
+            </a:r>
+            <a:br/>
+            <a:r>
+              <a:t>    right_wheel_names: [right_wheel_joint]</a:t>
+            </a:r>
+            <a:br/>
+            <a:r>
+              <a:t>    wheel_separation: 0.38</a:t>
             </a:r>
           </a:p>
         </p:txBody>
@@ -9158,7 +9423,7 @@
               </a:defRPr>
             </a:pPr>
             <a:r>
-              <a:t>파일 전체 2/2 · 이 슬라이드 다음에 같은 파일의 나머지 줄이 이어집니다.</a:t>
+              <a:t>파일 전체 1/2 · 이 슬라이드 다음에 같은 파일의 나머지 줄이 이어집니다.</a:t>
             </a:r>
           </a:p>
         </p:txBody>
@@ -9215,7 +9480,7 @@
               </a:defRPr>
             </a:pPr>
             <a:r>
-              <a:t>파일을 새로 만들고 저장한다 (1/3)</a:t>
+              <a:t>파일을 계속 작성하고 저장한다 (2/2)</a:t>
             </a:r>
           </a:p>
         </p:txBody>
@@ -9254,7 +9519,7 @@
               </a:defRPr>
             </a:pPr>
             <a:r>
-              <a:t>~/agv_ws/src/agv_bringup/launch/agv_sim.launch.py</a:t>
+              <a:t>~/ros2_curri/agv_ws/src/agv_control/config/controllers.yaml</a:t>
             </a:r>
           </a:p>
         </p:txBody>
@@ -9390,7 +9655,7 @@
               </a:defRPr>
             </a:pPr>
             <a:r>
-              <a:t>현재 단계 10/13    |    현재 폴더 ~/agv_ws    |    현재 터미널</a:t>
+              <a:t>현재 단계 10/11    |    현재 폴더 ~/ros2_curri/agv_ws    |    현재 터미널</a:t>
             </a:r>
           </a:p>
         </p:txBody>
@@ -9487,11 +9752,11 @@
               </a:defRPr>
             </a:pPr>
             <a:r>
-              <a:t>파일 생성: mkdir -p ~/agv_ws/src/agv_bringup/launch</a:t>
+              <a:t>파일 생성: mkdir -p ~/ros2_curri/agv_ws/src/agv_control/config</a:t>
             </a:r>
             <a:br/>
             <a:r>
-              <a:t>파일 열기: nano ~/agv_ws/src/agv_bringup/launch/agv_sim.launch.py</a:t>
+              <a:t>파일 열기: nano ~/ros2_curri/agv_ws/src/agv_control/config/controllers.yaml</a:t>
             </a:r>
           </a:p>
         </p:txBody>
@@ -9549,48 +9814,19 @@
               </a:defRPr>
             </a:pPr>
             <a:r>
-              <a:t>import os</a:t>
+              <a:t>    wheel_radius: 0.08</a:t>
             </a:r>
             <a:br/>
             <a:r>
-              <a:t>from ament_index_python.packages import get_package_share_directory</a:t>
+              <a:t>    base_frame_id: base_link</a:t>
             </a:r>
             <a:br/>
             <a:r>
-              <a:t>from launch import LaunchDescription</a:t>
+              <a:t>    odom_frame_id: odom</a:t>
             </a:r>
             <a:br/>
             <a:r>
-              <a:t>from launch.actions import DeclareLaunchArgument, IncludeLaunchDescription</a:t>
-            </a:r>
-            <a:br/>
-            <a:r>
-              <a:t>from launch.conditions import IfCondition</a:t>
-            </a:r>
-            <a:br/>
-            <a:r>
-              <a:t>from launch.launch_description_sources import PythonLaunchDescriptionSource</a:t>
-            </a:r>
-            <a:br/>
-            <a:r>
-              <a:t>from launch.substitutions import Command, LaunchConfiguration</a:t>
-            </a:r>
-            <a:br/>
-            <a:r>
-              <a:t>from launch_ros.actions import Node</a:t>
-            </a:r>
-            <a:br/>
-            <a:r>
-              <a:t>from launch_ros.parameter_descriptions import ParameterValue</a:t>
-            </a:r>
-            <a:br/>
-            <a:br/>
-            <a:r>
-              <a:t>def generate_launch_description():</a:t>
-            </a:r>
-            <a:br/>
-            <a:r>
-              <a:t>    bringup = get_package_share_directory('agv_bringup')</a:t>
+              <a:t>    publish_rate: 50.0</a:t>
             </a:r>
           </a:p>
         </p:txBody>
@@ -9629,7 +9865,7 @@
               </a:defRPr>
             </a:pPr>
             <a:r>
-              <a:t>파일 전체 1/3 · 이 슬라이드 다음에 같은 파일의 나머지 줄이 이어집니다.</a:t>
+              <a:t>파일 전체 2/2 · 이 슬라이드 다음에 같은 파일의 나머지 줄이 이어집니다.</a:t>
             </a:r>
           </a:p>
         </p:txBody>
@@ -9686,7 +9922,7 @@
               </a:defRPr>
             </a:pPr>
             <a:r>
-              <a:t>파일을 계속 작성하고 저장한다 (2/3)</a:t>
+              <a:t>파일을 새로 만들고 저장한다 (1/4)</a:t>
             </a:r>
           </a:p>
         </p:txBody>
@@ -9725,7 +9961,7 @@
               </a:defRPr>
             </a:pPr>
             <a:r>
-              <a:t>~/agv_ws/src/agv_bringup/launch/agv_sim.launch.py</a:t>
+              <a:t>~/ros2_curri/agv_ws/src/agv_bringup/launch/agv_sim.launch.py</a:t>
             </a:r>
           </a:p>
         </p:txBody>
@@ -9861,7 +10097,7 @@
               </a:defRPr>
             </a:pPr>
             <a:r>
-              <a:t>현재 단계 11/13    |    현재 폴더 ~/agv_ws    |    현재 터미널</a:t>
+              <a:t>현재 단계 11/15    |    현재 폴더 ~/ros2_curri/agv_ws    |    현재 터미널</a:t>
             </a:r>
           </a:p>
         </p:txBody>
@@ -9958,11 +10194,11 @@
               </a:defRPr>
             </a:pPr>
             <a:r>
-              <a:t>파일 생성: mkdir -p ~/agv_ws/src/agv_bringup/launch</a:t>
+              <a:t>파일 생성: mkdir -p ~/ros2_curri/agv_ws/src/agv_bringup/launch</a:t>
             </a:r>
             <a:br/>
             <a:r>
-              <a:t>파일 열기: nano ~/agv_ws/src/agv_bringup/launch/agv_sim.launch.py</a:t>
+              <a:t>파일 열기: nano ~/ros2_curri/agv_ws/src/agv_bringup/launch/agv_sim.launch.py</a:t>
             </a:r>
           </a:p>
         </p:txBody>
@@ -10020,51 +10256,48 @@
               </a:defRPr>
             </a:pPr>
             <a:r>
-              <a:t>    description = get_package_share_directory('agv_description')</a:t>
+              <a:t>import os</a:t>
             </a:r>
             <a:br/>
             <a:r>
-              <a:t>    gazebo = get_package_share_directory('agv_gazebo')</a:t>
+              <a:t>from ament_index_python.packages import get_package_share_directory</a:t>
             </a:r>
             <a:br/>
             <a:r>
-              <a:t>    xacro_file = os.path.join(description, 'urdf', 'agv.urdf.xacro')</a:t>
+              <a:t>from launch import LaunchDescription</a:t>
             </a:r>
             <a:br/>
             <a:r>
-              <a:t>    robot_description = ParameterValue(Command(['xacro ', xacro_file]), value_type=str)</a:t>
+              <a:t>from launch.actions import DeclareLaunchArgument, IncludeLaunchDescription</a:t>
             </a:r>
             <a:br/>
             <a:r>
-              <a:t>    return LaunchDescription([DeclareLaunchArgument('rviz', default_value='true',</a:t>
+              <a:t>from launch.conditions import IfCondition</a:t>
             </a:r>
             <a:br/>
             <a:r>
-              <a:t>        description='Start RViz2'),</a:t>
+              <a:t>from launch.launch_description_sources import PythonLaunchDescriptionSource</a:t>
             </a:r>
             <a:br/>
             <a:r>
-              <a:t>        IncludeLaunchDescription(PythonLaunchDescriptionSource(os.path.join(gazebo, 'launch',</a:t>
+              <a:t>from launch.substitutions import Command, LaunchConfiguration</a:t>
             </a:r>
             <a:br/>
             <a:r>
-              <a:t>         'gazebo.launch.py'))), Node(package='robot_state_publisher', executable='robot_state_publisher',</a:t>
+              <a:t>from launch_ros.actions import Node</a:t>
             </a:r>
             <a:br/>
             <a:r>
-              <a:t>         parameters=[os.path.join(bringup, 'config', 'robot.yaml'),</a:t>
+              <a:t>from launch_ros.parameter_descriptions import ParameterValue</a:t>
             </a:r>
             <a:br/>
-            <a:r>
-              <a:t>        {'robot_description': robot_description}]), Node(package='agv_sensors',</a:t>
-            </a:r>
             <a:br/>
             <a:r>
-              <a:t>        executable='lidar_processor', parameters=[os.path.join(bringup, 'config',</a:t>
+              <a:t>def generate_launch_description():</a:t>
             </a:r>
             <a:br/>
             <a:r>
-              <a:t>        'sensors.yaml')]), Node(package='agv_sensors', executable='imu_monitor',</a:t>
+              <a:t>    bringup = get_package_share_directory('agv_bringup')</a:t>
             </a:r>
           </a:p>
         </p:txBody>
@@ -10103,7 +10336,7 @@
               </a:defRPr>
             </a:pPr>
             <a:r>
-              <a:t>파일 전체 2/3 · 이 슬라이드 다음에 같은 파일의 나머지 줄이 이어집니다.</a:t>
+              <a:t>파일 전체 1/4 · 이 슬라이드 다음에 같은 파일의 나머지 줄이 이어집니다.</a:t>
             </a:r>
           </a:p>
         </p:txBody>
@@ -10160,7 +10393,7 @@
               </a:defRPr>
             </a:pPr>
             <a:r>
-              <a:t>파일을 계속 작성하고 저장한다 (3/3)</a:t>
+              <a:t>파일을 계속 작성하고 저장한다 (2/4)</a:t>
             </a:r>
           </a:p>
         </p:txBody>
@@ -10199,7 +10432,7 @@
               </a:defRPr>
             </a:pPr>
             <a:r>
-              <a:t>~/agv_ws/src/agv_bringup/launch/agv_sim.launch.py</a:t>
+              <a:t>~/ros2_curri/agv_ws/src/agv_bringup/launch/agv_sim.launch.py</a:t>
             </a:r>
           </a:p>
         </p:txBody>
@@ -10335,7 +10568,7 @@
               </a:defRPr>
             </a:pPr>
             <a:r>
-              <a:t>현재 단계 12/13    |    현재 폴더 ~/agv_ws    |    현재 터미널</a:t>
+              <a:t>현재 단계 12/15    |    현재 폴더 ~/ros2_curri/agv_ws    |    현재 터미널</a:t>
             </a:r>
           </a:p>
         </p:txBody>
@@ -10432,11 +10665,11 @@
               </a:defRPr>
             </a:pPr>
             <a:r>
-              <a:t>파일 생성: mkdir -p ~/agv_ws/src/agv_bringup/launch</a:t>
+              <a:t>파일 생성: mkdir -p ~/ros2_curri/agv_ws/src/agv_bringup/launch</a:t>
             </a:r>
             <a:br/>
             <a:r>
-              <a:t>파일 열기: nano ~/agv_ws/src/agv_bringup/launch/agv_sim.launch.py</a:t>
+              <a:t>파일 열기: nano ~/ros2_curri/agv_ws/src/agv_bringup/launch/agv_sim.launch.py</a:t>
             </a:r>
           </a:p>
         </p:txBody>
@@ -10494,35 +10727,51 @@
               </a:defRPr>
             </a:pPr>
             <a:r>
-              <a:t>        parameters=[os.path.join(bringup, 'config', 'sensors.yaml')]), Node(package='agv_vision',</a:t>
+              <a:t>    description = get_package_share_directory('agv_description')</a:t>
             </a:r>
             <a:br/>
             <a:r>
-              <a:t>         executable='yolo_node', parameters=[os.path.join(bringup, 'config',</a:t>
+              <a:t>    gazebo = get_package_share_directory('agv_gazebo')</a:t>
             </a:r>
             <a:br/>
             <a:r>
-              <a:t>        'vision.yaml')]), Node(package='agv_mission', executable='mission_manager',</a:t>
+              <a:t>    xacro_file = os.path.join(description, 'urdf', 'agv.urdf.xacro')</a:t>
             </a:r>
             <a:br/>
             <a:r>
-              <a:t>        parameters=[os.path.join(bringup, 'config', 'mission.yaml')]), Node(package='agv_control',</a:t>
+              <a:t>    robot_description = ParameterValue(Command(['xacro ', xacro_file]), value_type=str)</a:t>
             </a:r>
             <a:br/>
             <a:r>
-              <a:t>         executable='safety_controller', parameters=[os.path.join(bringup, 'config',</a:t>
+              <a:t>    return LaunchDescription([DeclareLaunchArgument('rviz', default_value='true',</a:t>
             </a:r>
             <a:br/>
             <a:r>
-              <a:t>        'mission.yaml')]), Node(package='rviz2', executable='rviz2', arguments=['-d',</a:t>
+              <a:t>        description='Start RViz2'), DeclareLaunchArgument('autonomy', default_value='true',</a:t>
             </a:r>
             <a:br/>
             <a:r>
-              <a:t>        os.path.join(description, 'rviz', 'agv.rviz')],</a:t>
+              <a:t>         description='Start mission and safety nodes'),</a:t>
             </a:r>
             <a:br/>
             <a:r>
-              <a:t>        condition=IfCondition(LaunchConfiguration('rviz')))])</a:t>
+              <a:t>        IncludeLaunchDescription(PythonLaunchDescriptionSource(os.path.join(gazebo, 'launch',</a:t>
+            </a:r>
+            <a:br/>
+            <a:r>
+              <a:t>         'gazebo.launch.py'))), Node(package='robot_state_publisher', executable='robot_state_publisher',</a:t>
+            </a:r>
+            <a:br/>
+            <a:r>
+              <a:t>         parameters=[os.path.join(bringup, 'config', 'robot.yaml'),</a:t>
+            </a:r>
+            <a:br/>
+            <a:r>
+              <a:t>        {'robot_description': robot_description}]), Node(package='agv_sensors',</a:t>
+            </a:r>
+            <a:br/>
+            <a:r>
+              <a:t>        executable='lidar_processor', parameters=[os.path.join(bringup, 'config',</a:t>
             </a:r>
           </a:p>
         </p:txBody>
@@ -10561,7 +10810,7 @@
               </a:defRPr>
             </a:pPr>
             <a:r>
-              <a:t>파일 전체 3/3 · 이 슬라이드 다음에 같은 파일의 나머지 줄이 이어집니다.</a:t>
+              <a:t>파일 전체 2/4 · 이 슬라이드 다음에 같은 파일의 나머지 줄이 이어집니다.</a:t>
             </a:r>
           </a:p>
         </p:txBody>
@@ -10618,7 +10867,7 @@
               </a:defRPr>
             </a:pPr>
             <a:r>
-              <a:t>파일을 새로 만들고 저장한다 (1/2)</a:t>
+              <a:t>파일을 계속 작성하고 저장한다 (3/4)</a:t>
             </a:r>
           </a:p>
         </p:txBody>
@@ -10657,7 +10906,7 @@
               </a:defRPr>
             </a:pPr>
             <a:r>
-              <a:t>~/agv_ws/src/agv_gazebo/launch/gazebo.launch.py</a:t>
+              <a:t>~/ros2_curri/agv_ws/src/agv_bringup/launch/agv_sim.launch.py</a:t>
             </a:r>
           </a:p>
         </p:txBody>
@@ -10793,7 +11042,7 @@
               </a:defRPr>
             </a:pPr>
             <a:r>
-              <a:t>현재 단계 13/15    |    현재 폴더 ~/agv_ws    |    현재 터미널</a:t>
+              <a:t>현재 단계 13/15    |    현재 폴더 ~/ros2_curri/agv_ws    |    현재 터미널</a:t>
             </a:r>
           </a:p>
         </p:txBody>
@@ -10890,11 +11139,11 @@
               </a:defRPr>
             </a:pPr>
             <a:r>
-              <a:t>파일 생성: mkdir -p ~/agv_ws/src/agv_gazebo/launch</a:t>
+              <a:t>파일 생성: mkdir -p ~/ros2_curri/agv_ws/src/agv_bringup/launch</a:t>
             </a:r>
             <a:br/>
             <a:r>
-              <a:t>파일 열기: nano ~/agv_ws/src/agv_gazebo/launch/gazebo.launch.py</a:t>
+              <a:t>파일 열기: nano ~/ros2_curri/agv_ws/src/agv_bringup/launch/agv_sim.launch.py</a:t>
             </a:r>
           </a:p>
         </p:txBody>
@@ -10952,48 +11201,51 @@
               </a:defRPr>
             </a:pPr>
             <a:r>
-              <a:t>import os</a:t>
+              <a:t>        'sensors.yaml')]), Node(package='agv_sensors', executable='imu_monitor',</a:t>
             </a:r>
             <a:br/>
             <a:r>
-              <a:t>from ament_index_python.packages import get_package_share_directory</a:t>
+              <a:t>        parameters=[os.path.join(bringup, 'config', 'sensors.yaml')]), Node(package='agv_sensors',</a:t>
             </a:r>
             <a:br/>
             <a:r>
-              <a:t>from launch import LaunchDescription</a:t>
+              <a:t>         executable='odom_path', parameters=[{'use_sim_time': True}]), Node(package='agv_vision',</a:t>
             </a:r>
             <a:br/>
             <a:r>
-              <a:t>from launch.actions import IncludeLaunchDescription, SetEnvironmentVariable</a:t>
+              <a:t>         executable='yolo_node', parameters=[os.path.join(bringup, 'config',</a:t>
             </a:r>
             <a:br/>
             <a:r>
-              <a:t>from launch.launch_description_sources import PythonLaunchDescriptionSource</a:t>
+              <a:t>        'vision.yaml')]), Node(package='agv_mission', executable='mission_manager',</a:t>
             </a:r>
             <a:br/>
             <a:r>
-              <a:t>from launch_ros.actions import Node</a:t>
+              <a:t>        parameters=[os.path.join(bringup, 'config', 'mission.yaml')],</a:t>
             </a:r>
             <a:br/>
+            <a:r>
+              <a:t>        condition=IfCondition(LaunchConfiguration('autonomy'))), Node(package='agv_mission',</a:t>
+            </a:r>
             <a:br/>
             <a:r>
-              <a:t>def generate_launch_description():</a:t>
+              <a:t>         executable='mission_markers', parameters=[os.path.join(bringup, 'config',</a:t>
             </a:r>
             <a:br/>
             <a:r>
-              <a:t>    share = get_package_share_directory('agv_gazebo')</a:t>
+              <a:t>        'mission.yaml')], condition=IfCondition(LaunchConfiguration('autonomy'))),</a:t>
             </a:r>
             <a:br/>
             <a:r>
-              <a:t>    world = os.path.join(share, 'worlds', 'warehouse.sdf')</a:t>
+              <a:t>        Node(package='agv_control', executable='safety_controller',</a:t>
             </a:r>
             <a:br/>
             <a:r>
-              <a:t>    models = os.path.join(share, 'models')</a:t>
+              <a:t>        parameters=[os.path.join(bringup, 'config', 'mission.yaml')],</a:t>
             </a:r>
             <a:br/>
             <a:r>
-              <a:t>    previous = os.environ.get('GZ_SIM_RESOURCE_PATH', '')</a:t>
+              <a:t>        condition=IfCondition(LaunchConfiguration('autonomy'))), Node(package='rviz2',</a:t>
             </a:r>
           </a:p>
         </p:txBody>
@@ -11032,7 +11284,7 @@
               </a:defRPr>
             </a:pPr>
             <a:r>
-              <a:t>파일 전체 1/2 · 이 슬라이드 다음에 같은 파일의 나머지 줄이 이어집니다.</a:t>
+              <a:t>파일 전체 3/4 · 이 슬라이드 다음에 같은 파일의 나머지 줄이 이어집니다.</a:t>
             </a:r>
           </a:p>
         </p:txBody>
@@ -11550,7 +11802,7 @@
               </a:defRPr>
             </a:pPr>
             <a:r>
-              <a:t>파일을 계속 작성하고 저장한다 (2/2)</a:t>
+              <a:t>파일을 계속 작성하고 저장한다 (4/4)</a:t>
             </a:r>
           </a:p>
         </p:txBody>
@@ -11589,7 +11841,7 @@
               </a:defRPr>
             </a:pPr>
             <a:r>
-              <a:t>~/agv_ws/src/agv_gazebo/launch/gazebo.launch.py</a:t>
+              <a:t>~/ros2_curri/agv_ws/src/agv_bringup/launch/agv_sim.launch.py</a:t>
             </a:r>
           </a:p>
         </p:txBody>
@@ -11725,7 +11977,7 @@
               </a:defRPr>
             </a:pPr>
             <a:r>
-              <a:t>현재 단계 14/15    |    현재 폴더 ~/agv_ws    |    현재 터미널</a:t>
+              <a:t>현재 단계 14/15    |    현재 폴더 ~/ros2_curri/agv_ws    |    현재 터미널</a:t>
             </a:r>
           </a:p>
         </p:txBody>
@@ -11822,11 +12074,11 @@
               </a:defRPr>
             </a:pPr>
             <a:r>
-              <a:t>파일 생성: mkdir -p ~/agv_ws/src/agv_gazebo/launch</a:t>
+              <a:t>파일 생성: mkdir -p ~/ros2_curri/agv_ws/src/agv_bringup/launch</a:t>
             </a:r>
             <a:br/>
             <a:r>
-              <a:t>파일 열기: nano ~/agv_ws/src/agv_gazebo/launch/gazebo.launch.py</a:t>
+              <a:t>파일 열기: nano ~/ros2_curri/agv_ws/src/agv_bringup/launch/agv_sim.launch.py</a:t>
             </a:r>
           </a:p>
         </p:txBody>
@@ -11884,31 +12136,11 @@
               </a:defRPr>
             </a:pPr>
             <a:r>
-              <a:t>    gz_launch = os.path.join(get_package_share_directory('ros_gz_sim'), 'launch', 'gz_sim.launch.py')</a:t>
+              <a:t>        executable='rviz2', arguments=['-d', os.path.join(description, 'rviz',</a:t>
             </a:r>
             <a:br/>
             <a:r>
-              <a:t>    return LaunchDescription([SetEnvironmentVariable('GZ_SIM_RESOURCE_PATH',</a:t>
-            </a:r>
-            <a:br/>
-            <a:r>
-              <a:t>        models + (':' + previous if previous else '')),</a:t>
-            </a:r>
-            <a:br/>
-            <a:r>
-              <a:t>        IncludeLaunchDescription(PythonLaunchDescriptionSource(gz_launch),</a:t>
-            </a:r>
-            <a:br/>
-            <a:r>
-              <a:t>        launch_arguments={'gz_args': '-r ' + world}.items()), Node(package='ros_gz_bridge',</a:t>
-            </a:r>
-            <a:br/>
-            <a:r>
-              <a:t>         executable='parameter_bridge', parameters=[{'config_file': os.path.join(share,</a:t>
-            </a:r>
-            <a:br/>
-            <a:r>
-              <a:t>        'config', 'bridge.yaml')}], output='screen')])</a:t>
+              <a:t>        'agv.rviz')], condition=IfCondition(LaunchConfiguration('rviz')))])</a:t>
             </a:r>
           </a:p>
         </p:txBody>
@@ -11947,7 +12179,7 @@
               </a:defRPr>
             </a:pPr>
             <a:r>
-              <a:t>파일 전체 2/2 · 이 슬라이드 다음에 같은 파일의 나머지 줄이 이어집니다.</a:t>
+              <a:t>파일 전체 4/4 · 이 슬라이드 다음에 같은 파일의 나머지 줄이 이어집니다.</a:t>
             </a:r>
           </a:p>
         </p:txBody>
@@ -12004,7 +12236,7 @@
               </a:defRPr>
             </a:pPr>
             <a:r>
-              <a:t>build → source → run 순서로 실행한다</a:t>
+              <a:t>파일을 새로 만들고 저장한다 (1/2)</a:t>
             </a:r>
           </a:p>
         </p:txBody>
@@ -12043,7 +12275,7 @@
               </a:defRPr>
             </a:pPr>
             <a:r>
-              <a:t>새 파일 또는 수정 파일은 build와 source 뒤에만 실행 이름·설정에 반영됩니다.</a:t>
+              <a:t>~/ros2_curri/agv_ws/src/agv_gazebo/launch/gazebo.launch.py</a:t>
             </a:r>
           </a:p>
         </p:txBody>
@@ -12179,23 +12411,124 @@
               </a:defRPr>
             </a:pPr>
             <a:r>
-              <a:t>현재 단계 실행    |    현재 폴더 ~/agv_ws    |    현재 터미널</a:t>
-            </a:r>
-          </a:p>
-        </p:txBody>
-      </p:sp>
-      <p:sp>
-        <p:nvSpPr>
-          <p:cNvPr id="7" name="Rounded Rectangle 6"/>
+              <a:t>현재 단계 15/17    |    현재 폴더 ~/ros2_curri/agv_ws    |    현재 터미널</a:t>
+            </a:r>
+          </a:p>
+        </p:txBody>
+      </p:sp>
+      <p:sp>
+        <p:nvSpPr>
+          <p:cNvPr id="7" name="TextBox 6"/>
+          <p:cNvSpPr txBox="1"/>
+          <p:nvPr/>
+        </p:nvSpPr>
+        <p:spPr>
+          <a:xfrm>
+            <a:off x="658368" y="1627632"/>
+            <a:ext cx="10972800" cy="256032"/>
+          </a:xfrm>
+          <a:prstGeom prst="rect">
+            <a:avLst/>
+          </a:prstGeom>
+          <a:noFill/>
+        </p:spPr>
+        <p:txBody>
+          <a:bodyPr wrap="square" lIns="73152" rIns="73152" tIns="36576" bIns="36576">
+            <a:spAutoFit/>
+          </a:bodyPr>
+          <a:lstStyle/>
+          <a:p>
+            <a:pPr algn="l">
+              <a:spcAft>
+                <a:spcPts val="0"/>
+              </a:spcAft>
+              <a:defRPr sz="1500" b="1">
+                <a:solidFill>
+                  <a:srgbClr val="122C4E"/>
+                </a:solidFill>
+                <a:latin typeface="Noto Sans CJK KR"/>
+              </a:defRPr>
+            </a:pPr>
+            <a:r>
+              <a:t>이번 단계: 파일의 전체 내용을 중간 생략 없이 작성합니다. 아래 줄 범위를 끝까지 입력하세요.</a:t>
+            </a:r>
+          </a:p>
+        </p:txBody>
+      </p:sp>
+      <p:sp>
+        <p:nvSpPr>
+          <p:cNvPr id="8" name="Rectangle 7"/>
           <p:cNvSpPr/>
           <p:nvPr/>
         </p:nvSpPr>
         <p:spPr>
           <a:xfrm>
-            <a:off x="658368" y="1700784"/>
-            <a:ext cx="10972800" cy="3182112"/>
-          </a:xfrm>
-          <a:prstGeom prst="roundRect">
+            <a:off x="658368" y="1956816"/>
+            <a:ext cx="10972800" cy="603504"/>
+          </a:xfrm>
+          <a:prstGeom prst="rect">
+            <a:avLst/>
+          </a:prstGeom>
+          <a:solidFill>
+            <a:srgbClr val="F4F7FB"/>
+          </a:solidFill>
+          <a:ln>
+            <a:solidFill>
+              <a:srgbClr val="F4F7FB"/>
+            </a:solidFill>
+          </a:ln>
+        </p:spPr>
+        <p:style>
+          <a:lnRef idx="1">
+            <a:schemeClr val="accent1"/>
+          </a:lnRef>
+          <a:fillRef idx="3">
+            <a:schemeClr val="accent1"/>
+          </a:fillRef>
+          <a:effectRef idx="2">
+            <a:schemeClr val="accent1"/>
+          </a:effectRef>
+          <a:fontRef idx="minor">
+            <a:schemeClr val="lt1"/>
+          </a:fontRef>
+        </p:style>
+        <p:txBody>
+          <a:bodyPr rtlCol="0" anchor="ctr" wrap="square" lIns="73152" rIns="73152" tIns="36576" bIns="36576"/>
+          <a:lstStyle/>
+          <a:p>
+            <a:pPr algn="l">
+              <a:spcAft>
+                <a:spcPts val="0"/>
+              </a:spcAft>
+              <a:defRPr sz="1400" b="0">
+                <a:solidFill>
+                  <a:srgbClr val="122C4E"/>
+                </a:solidFill>
+                <a:latin typeface="DejaVu Sans Mono"/>
+              </a:defRPr>
+            </a:pPr>
+            <a:r>
+              <a:t>파일 생성: mkdir -p ~/ros2_curri/agv_ws/src/agv_gazebo/launch</a:t>
+            </a:r>
+            <a:br/>
+            <a:r>
+              <a:t>파일 열기: nano ~/ros2_curri/agv_ws/src/agv_gazebo/launch/gazebo.launch.py</a:t>
+            </a:r>
+          </a:p>
+        </p:txBody>
+      </p:sp>
+      <p:sp>
+        <p:nvSpPr>
+          <p:cNvPr id="9" name="Rectangle 8"/>
+          <p:cNvSpPr/>
+          <p:nvPr/>
+        </p:nvSpPr>
+        <p:spPr>
+          <a:xfrm>
+            <a:off x="658368" y="2706624"/>
+            <a:ext cx="10972800" cy="3364992"/>
+          </a:xfrm>
+          <a:prstGeom prst="rect">
             <a:avLst/>
           </a:prstGeom>
           <a:solidFill>
@@ -12222,14 +12555,14 @@
           </a:fontRef>
         </p:style>
         <p:txBody>
-          <a:bodyPr rtlCol="0" anchor="ctr" wrap="square" lIns="73152" rIns="73152" tIns="36576" bIns="36576"/>
+          <a:bodyPr rtlCol="0" anchor="ctr" wrap="square" lIns="164592" rIns="164592" tIns="109728" bIns="36576"/>
           <a:lstStyle/>
           <a:p>
             <a:pPr algn="l">
               <a:spcAft>
                 <a:spcPts val="0"/>
               </a:spcAft>
-              <a:defRPr sz="1600" b="0">
+              <a:defRPr sz="1400" b="0">
                 <a:solidFill>
                   <a:srgbClr val="FFFFFF"/>
                 </a:solidFill>
@@ -12237,29 +12570,62 @@
               </a:defRPr>
             </a:pPr>
             <a:r>
-              <a:t>cd ~/agv_ws &amp;&amp; source install/setup.bash</a:t>
+              <a:t>import os</a:t>
             </a:r>
             <a:br/>
             <a:r>
-              <a:t>ros2 launch agv_bringup agv_sim.launch.py</a:t>
+              <a:t>from ament_index_python.packages import get_package_share_directory</a:t>
             </a:r>
             <a:br/>
             <a:r>
-              <a:t># 별도 터미널: ros2 bag record -o ~/agv_bag_01 /scan /imu/data /odom /camera/image_raw</a:t>
-            </a:r>
-          </a:p>
-        </p:txBody>
-      </p:sp>
-      <p:sp>
-        <p:nvSpPr>
-          <p:cNvPr id="8" name="TextBox 7"/>
+              <a:t>from launch import LaunchDescription</a:t>
+            </a:r>
+            <a:br/>
+            <a:r>
+              <a:t>from launch.actions import IncludeLaunchDescription, SetEnvironmentVariable</a:t>
+            </a:r>
+            <a:br/>
+            <a:r>
+              <a:t>from launch.launch_description_sources import PythonLaunchDescriptionSource</a:t>
+            </a:r>
+            <a:br/>
+            <a:r>
+              <a:t>from launch_ros.actions import Node</a:t>
+            </a:r>
+            <a:br/>
+            <a:br/>
+            <a:r>
+              <a:t>def generate_launch_description():</a:t>
+            </a:r>
+            <a:br/>
+            <a:r>
+              <a:t>    share = get_package_share_directory('agv_gazebo')</a:t>
+            </a:r>
+            <a:br/>
+            <a:r>
+              <a:t>    world = os.path.join(share, 'worlds', 'warehouse.sdf')</a:t>
+            </a:r>
+            <a:br/>
+            <a:r>
+              <a:t>    models = os.path.join(share, 'models')</a:t>
+            </a:r>
+            <a:br/>
+            <a:r>
+              <a:t>    previous = os.environ.get('GZ_SIM_RESOURCE_PATH', '')</a:t>
+            </a:r>
+          </a:p>
+        </p:txBody>
+      </p:sp>
+      <p:sp>
+        <p:nvSpPr>
+          <p:cNvPr id="10" name="TextBox 9"/>
           <p:cNvSpPr txBox="1"/>
           <p:nvPr/>
         </p:nvSpPr>
         <p:spPr>
           <a:xfrm>
-            <a:off x="786384" y="5239512"/>
-            <a:ext cx="1261872" cy="237744"/>
+            <a:off x="749808" y="6181344"/>
+            <a:ext cx="10789920" cy="201168"/>
           </a:xfrm>
           <a:prstGeom prst="rect">
             <a:avLst/>
@@ -12276,54 +12642,15 @@
               <a:spcAft>
                 <a:spcPts val="0"/>
               </a:spcAft>
-              <a:defRPr sz="1800" b="1">
-                <a:solidFill>
-                  <a:srgbClr val="2A8B5A"/>
-                </a:solidFill>
-                <a:latin typeface="Noto Sans CJK KR"/>
-              </a:defRPr>
-            </a:pPr>
-            <a:r>
-              <a:t>확인 기준</a:t>
-            </a:r>
-          </a:p>
-        </p:txBody>
-      </p:sp>
-      <p:sp>
-        <p:nvSpPr>
-          <p:cNvPr id="9" name="TextBox 8"/>
-          <p:cNvSpPr txBox="1"/>
-          <p:nvPr/>
-        </p:nvSpPr>
-        <p:spPr>
-          <a:xfrm>
-            <a:off x="786384" y="5532120"/>
-            <a:ext cx="10469880" cy="420624"/>
-          </a:xfrm>
-          <a:prstGeom prst="rect">
-            <a:avLst/>
-          </a:prstGeom>
-          <a:noFill/>
-        </p:spPr>
-        <p:txBody>
-          <a:bodyPr wrap="square" lIns="73152" rIns="73152" tIns="36576" bIns="36576">
-            <a:spAutoFit/>
-          </a:bodyPr>
-          <a:lstStyle/>
-          <a:p>
-            <a:pPr algn="l">
-              <a:spcAft>
-                <a:spcPts val="0"/>
-              </a:spcAft>
-              <a:defRPr sz="1800" b="0">
-                <a:solidFill>
-                  <a:srgbClr val="122C4E"/>
-                </a:solidFill>
-                <a:latin typeface="Noto Sans CJK KR"/>
-              </a:defRPr>
-            </a:pPr>
-            <a:r>
-              <a:t>한 launch 명령·YAML parameter·rosbag record/replay 명령을 설명하고 확인한다.</a:t>
+              <a:defRPr sz="1000" b="0">
+                <a:solidFill>
+                  <a:srgbClr val="5C6672"/>
+                </a:solidFill>
+                <a:latin typeface="Noto Sans CJK KR"/>
+              </a:defRPr>
+            </a:pPr>
+            <a:r>
+              <a:t>파일 전체 1/2 · 이 슬라이드 다음에 같은 파일의 나머지 줄이 이어집니다.</a:t>
             </a:r>
           </a:p>
         </p:txBody>
@@ -12380,7 +12707,7 @@
               </a:defRPr>
             </a:pPr>
             <a:r>
-              <a:t>정상 결과: 실제 환경에서 확인한 출력</a:t>
+              <a:t>파일을 계속 작성하고 저장한다 (2/2)</a:t>
             </a:r>
           </a:p>
         </p:txBody>
@@ -12419,7 +12746,7 @@
               </a:defRPr>
             </a:pPr>
             <a:r>
-              <a:t>실제 ROS 2 환경의 파일·패키지·구성 검증 로그</a:t>
+              <a:t>~/ros2_curri/agv_ws/src/agv_gazebo/launch/gazebo.launch.py</a:t>
             </a:r>
           </a:p>
         </p:txBody>
@@ -12502,30 +12829,64 @@
           </a:p>
         </p:txBody>
       </p:sp>
-      <p:pic>
-        <p:nvPicPr>
-          <p:cNvPr id="6" name="Picture 5" descr="validation_terminal.png"/>
-          <p:cNvPicPr>
-            <a:picLocks noChangeAspect="1"/>
-          </p:cNvPicPr>
-          <p:nvPr/>
-        </p:nvPicPr>
-        <p:blipFill>
-          <a:blip r:embed="rId2"/>
-          <a:stretch>
-            <a:fillRect/>
-          </a:stretch>
-        </p:blipFill>
-        <p:spPr>
-          <a:xfrm>
-            <a:off x="2855133" y="1353312"/>
-            <a:ext cx="6478685" cy="4800600"/>
-          </a:xfrm>
-          <a:prstGeom prst="rect">
-            <a:avLst/>
-          </a:prstGeom>
-        </p:spPr>
-      </p:pic>
+      <p:sp>
+        <p:nvSpPr>
+          <p:cNvPr id="6" name="Rectangle 5"/>
+          <p:cNvSpPr/>
+          <p:nvPr/>
+        </p:nvSpPr>
+        <p:spPr>
+          <a:xfrm>
+            <a:off x="566928" y="1188720"/>
+            <a:ext cx="11064240" cy="347472"/>
+          </a:xfrm>
+          <a:prstGeom prst="rect">
+            <a:avLst/>
+          </a:prstGeom>
+          <a:solidFill>
+            <a:srgbClr val="F4F7FB"/>
+          </a:solidFill>
+          <a:ln>
+            <a:solidFill>
+              <a:srgbClr val="F4F7FB"/>
+            </a:solidFill>
+          </a:ln>
+        </p:spPr>
+        <p:style>
+          <a:lnRef idx="1">
+            <a:schemeClr val="accent1"/>
+          </a:lnRef>
+          <a:fillRef idx="3">
+            <a:schemeClr val="accent1"/>
+          </a:fillRef>
+          <a:effectRef idx="2">
+            <a:schemeClr val="accent1"/>
+          </a:effectRef>
+          <a:fontRef idx="minor">
+            <a:schemeClr val="lt1"/>
+          </a:fontRef>
+        </p:style>
+        <p:txBody>
+          <a:bodyPr rtlCol="0" anchor="ctr" wrap="square" lIns="73152" rIns="73152" tIns="36576" bIns="36576"/>
+          <a:lstStyle/>
+          <a:p>
+            <a:pPr algn="l">
+              <a:spcAft>
+                <a:spcPts val="0"/>
+              </a:spcAft>
+              <a:defRPr sz="1300" b="1">
+                <a:solidFill>
+                  <a:srgbClr val="122C4E"/>
+                </a:solidFill>
+                <a:latin typeface="Noto Sans CJK KR"/>
+              </a:defRPr>
+            </a:pPr>
+            <a:r>
+              <a:t>현재 단계 16/17    |    현재 폴더 ~/ros2_curri/agv_ws    |    현재 터미널</a:t>
+            </a:r>
+          </a:p>
+        </p:txBody>
+      </p:sp>
       <p:sp>
         <p:nvSpPr>
           <p:cNvPr id="7" name="TextBox 6"/>
@@ -12534,8 +12895,8 @@
         </p:nvSpPr>
         <p:spPr>
           <a:xfrm>
-            <a:off x="777240" y="6217920"/>
-            <a:ext cx="10607040" cy="182880"/>
+            <a:off x="658368" y="1627632"/>
+            <a:ext cx="10972800" cy="256032"/>
           </a:xfrm>
           <a:prstGeom prst="rect">
             <a:avLst/>
@@ -12548,19 +12909,202 @@
           </a:bodyPr>
           <a:lstStyle/>
           <a:p>
-            <a:pPr algn="ctr">
-              <a:spcAft>
-                <a:spcPts val="0"/>
-              </a:spcAft>
-              <a:defRPr sz="1100" b="1">
-                <a:solidFill>
-                  <a:srgbClr val="2A8B5A"/>
-                </a:solidFill>
-                <a:latin typeface="Noto Sans CJK KR"/>
-              </a:defRPr>
-            </a:pPr>
-            <a:r>
-              <a:t>① 명령/설정  ② 정상 출력 또는 화면  ③ 다음 검증 명령으로 재확인</a:t>
+            <a:pPr algn="l">
+              <a:spcAft>
+                <a:spcPts val="0"/>
+              </a:spcAft>
+              <a:defRPr sz="1500" b="1">
+                <a:solidFill>
+                  <a:srgbClr val="122C4E"/>
+                </a:solidFill>
+                <a:latin typeface="Noto Sans CJK KR"/>
+              </a:defRPr>
+            </a:pPr>
+            <a:r>
+              <a:t>이번 단계: 파일의 전체 내용을 중간 생략 없이 작성합니다. 아래 줄 범위를 끝까지 입력하세요.</a:t>
+            </a:r>
+          </a:p>
+        </p:txBody>
+      </p:sp>
+      <p:sp>
+        <p:nvSpPr>
+          <p:cNvPr id="8" name="Rectangle 7"/>
+          <p:cNvSpPr/>
+          <p:nvPr/>
+        </p:nvSpPr>
+        <p:spPr>
+          <a:xfrm>
+            <a:off x="658368" y="1956816"/>
+            <a:ext cx="10972800" cy="603504"/>
+          </a:xfrm>
+          <a:prstGeom prst="rect">
+            <a:avLst/>
+          </a:prstGeom>
+          <a:solidFill>
+            <a:srgbClr val="F4F7FB"/>
+          </a:solidFill>
+          <a:ln>
+            <a:solidFill>
+              <a:srgbClr val="F4F7FB"/>
+            </a:solidFill>
+          </a:ln>
+        </p:spPr>
+        <p:style>
+          <a:lnRef idx="1">
+            <a:schemeClr val="accent1"/>
+          </a:lnRef>
+          <a:fillRef idx="3">
+            <a:schemeClr val="accent1"/>
+          </a:fillRef>
+          <a:effectRef idx="2">
+            <a:schemeClr val="accent1"/>
+          </a:effectRef>
+          <a:fontRef idx="minor">
+            <a:schemeClr val="lt1"/>
+          </a:fontRef>
+        </p:style>
+        <p:txBody>
+          <a:bodyPr rtlCol="0" anchor="ctr" wrap="square" lIns="73152" rIns="73152" tIns="36576" bIns="36576"/>
+          <a:lstStyle/>
+          <a:p>
+            <a:pPr algn="l">
+              <a:spcAft>
+                <a:spcPts val="0"/>
+              </a:spcAft>
+              <a:defRPr sz="1400" b="0">
+                <a:solidFill>
+                  <a:srgbClr val="122C4E"/>
+                </a:solidFill>
+                <a:latin typeface="DejaVu Sans Mono"/>
+              </a:defRPr>
+            </a:pPr>
+            <a:r>
+              <a:t>파일 생성: mkdir -p ~/ros2_curri/agv_ws/src/agv_gazebo/launch</a:t>
+            </a:r>
+            <a:br/>
+            <a:r>
+              <a:t>파일 열기: nano ~/ros2_curri/agv_ws/src/agv_gazebo/launch/gazebo.launch.py</a:t>
+            </a:r>
+          </a:p>
+        </p:txBody>
+      </p:sp>
+      <p:sp>
+        <p:nvSpPr>
+          <p:cNvPr id="9" name="Rectangle 8"/>
+          <p:cNvSpPr/>
+          <p:nvPr/>
+        </p:nvSpPr>
+        <p:spPr>
+          <a:xfrm>
+            <a:off x="658368" y="2706624"/>
+            <a:ext cx="10972800" cy="3364992"/>
+          </a:xfrm>
+          <a:prstGeom prst="rect">
+            <a:avLst/>
+          </a:prstGeom>
+          <a:solidFill>
+            <a:srgbClr val="1D232D"/>
+          </a:solidFill>
+          <a:ln>
+            <a:solidFill>
+              <a:srgbClr val="1D232D"/>
+            </a:solidFill>
+          </a:ln>
+        </p:spPr>
+        <p:style>
+          <a:lnRef idx="1">
+            <a:schemeClr val="accent1"/>
+          </a:lnRef>
+          <a:fillRef idx="3">
+            <a:schemeClr val="accent1"/>
+          </a:fillRef>
+          <a:effectRef idx="2">
+            <a:schemeClr val="accent1"/>
+          </a:effectRef>
+          <a:fontRef idx="minor">
+            <a:schemeClr val="lt1"/>
+          </a:fontRef>
+        </p:style>
+        <p:txBody>
+          <a:bodyPr rtlCol="0" anchor="ctr" wrap="square" lIns="164592" rIns="164592" tIns="109728" bIns="36576"/>
+          <a:lstStyle/>
+          <a:p>
+            <a:pPr algn="l">
+              <a:spcAft>
+                <a:spcPts val="0"/>
+              </a:spcAft>
+              <a:defRPr sz="1400" b="0">
+                <a:solidFill>
+                  <a:srgbClr val="FFFFFF"/>
+                </a:solidFill>
+                <a:latin typeface="DejaVu Sans Mono"/>
+              </a:defRPr>
+            </a:pPr>
+            <a:r>
+              <a:t>    gz_launch = os.path.join(get_package_share_directory('ros_gz_sim'), 'launch', 'gz_sim.launch.py')</a:t>
+            </a:r>
+            <a:br/>
+            <a:r>
+              <a:t>    return LaunchDescription([SetEnvironmentVariable('GZ_SIM_RESOURCE_PATH',</a:t>
+            </a:r>
+            <a:br/>
+            <a:r>
+              <a:t>        models + (':' + previous if previous else '')),</a:t>
+            </a:r>
+            <a:br/>
+            <a:r>
+              <a:t>        IncludeLaunchDescription(PythonLaunchDescriptionSource(gz_launch),</a:t>
+            </a:r>
+            <a:br/>
+            <a:r>
+              <a:t>        launch_arguments={'gz_args': '-r ' + world}.items()), Node(package='ros_gz_bridge',</a:t>
+            </a:r>
+            <a:br/>
+            <a:r>
+              <a:t>         executable='parameter_bridge', parameters=[{'config_file': os.path.join(share,</a:t>
+            </a:r>
+            <a:br/>
+            <a:r>
+              <a:t>        'config', 'bridge.yaml')}], output='screen')])</a:t>
+            </a:r>
+          </a:p>
+        </p:txBody>
+      </p:sp>
+      <p:sp>
+        <p:nvSpPr>
+          <p:cNvPr id="10" name="TextBox 9"/>
+          <p:cNvSpPr txBox="1"/>
+          <p:nvPr/>
+        </p:nvSpPr>
+        <p:spPr>
+          <a:xfrm>
+            <a:off x="749808" y="6181344"/>
+            <a:ext cx="10789920" cy="201168"/>
+          </a:xfrm>
+          <a:prstGeom prst="rect">
+            <a:avLst/>
+          </a:prstGeom>
+          <a:noFill/>
+        </p:spPr>
+        <p:txBody>
+          <a:bodyPr wrap="square" lIns="73152" rIns="73152" tIns="36576" bIns="36576">
+            <a:spAutoFit/>
+          </a:bodyPr>
+          <a:lstStyle/>
+          <a:p>
+            <a:pPr algn="l">
+              <a:spcAft>
+                <a:spcPts val="0"/>
+              </a:spcAft>
+              <a:defRPr sz="1000" b="0">
+                <a:solidFill>
+                  <a:srgbClr val="5C6672"/>
+                </a:solidFill>
+                <a:latin typeface="Noto Sans CJK KR"/>
+              </a:defRPr>
+            </a:pPr>
+            <a:r>
+              <a:t>파일 전체 2/2 · 이 슬라이드 다음에 같은 파일의 나머지 줄이 이어집니다.</a:t>
             </a:r>
           </a:p>
         </p:txBody>
@@ -12617,7 +13161,7 @@
               </a:defRPr>
             </a:pPr>
             <a:r>
-              <a:t>객관적 검증 명령으로 완료를 확인한다</a:t>
+              <a:t>build → source → run 순서로 실행한다</a:t>
             </a:r>
           </a:p>
         </p:txBody>
@@ -12656,7 +13200,7 @@
               </a:defRPr>
             </a:pPr>
             <a:r>
-              <a:t>화면만 보지 말고 topic·frame·파일·parameter를 다시 확인합니다.</a:t>
+              <a:t>새 파일 또는 수정 파일은 build와 source 뒤에만 실행 이름·설정에 반영됩니다.</a:t>
             </a:r>
           </a:p>
         </p:txBody>
@@ -12792,7 +13336,7 @@
               </a:defRPr>
             </a:pPr>
             <a:r>
-              <a:t>현재 단계 검증    |    현재 폴더 ~/agv_ws    |    현재 터미널</a:t>
+              <a:t>현재 단계 실행    |    현재 폴더 ~/ros2_curri/agv_ws    |    현재 터미널</a:t>
             </a:r>
           </a:p>
         </p:txBody>
@@ -12805,8 +13349,8 @@
         </p:nvSpPr>
         <p:spPr>
           <a:xfrm>
-            <a:off x="658368" y="1755648"/>
-            <a:ext cx="10972800" cy="2148840"/>
+            <a:off x="658368" y="1700784"/>
+            <a:ext cx="10972800" cy="3182112"/>
           </a:xfrm>
           <a:prstGeom prst="roundRect">
             <a:avLst/>
@@ -12850,99 +13394,29 @@
               </a:defRPr>
             </a:pPr>
             <a:r>
-              <a:t>ros2 launch agv_bringup agv_sim.launch.py --show-args</a:t>
+              <a:t>cd ~/ros2_curri/agv_ws &amp;&amp; source install/setup.bash</a:t>
             </a:r>
             <a:br/>
             <a:r>
-              <a:t>ros2 node list</a:t>
+              <a:t>ros2 launch agv_bringup agv_sim.launch.py</a:t>
             </a:r>
             <a:br/>
             <a:r>
-              <a:t>ros2 param get /mission_manager stop_distance</a:t>
-            </a:r>
-          </a:p>
-        </p:txBody>
-      </p:sp>
-      <p:sp>
-        <p:nvSpPr>
-          <p:cNvPr id="8" name="Rounded Rectangle 7"/>
-          <p:cNvSpPr/>
-          <p:nvPr/>
-        </p:nvSpPr>
-        <p:spPr>
-          <a:xfrm>
-            <a:off x="658368" y="4206240"/>
-            <a:ext cx="10972800" cy="1554480"/>
-          </a:xfrm>
-          <a:prstGeom prst="roundRect">
-            <a:avLst/>
-          </a:prstGeom>
-          <a:solidFill>
-            <a:srgbClr val="F4F7FB"/>
-          </a:solidFill>
-          <a:ln>
-            <a:solidFill>
-              <a:srgbClr val="D1DFD5"/>
-            </a:solidFill>
-          </a:ln>
-        </p:spPr>
-        <p:style>
-          <a:lnRef idx="1">
-            <a:schemeClr val="accent1"/>
-          </a:lnRef>
-          <a:fillRef idx="3">
-            <a:schemeClr val="accent1"/>
-          </a:fillRef>
-          <a:effectRef idx="2">
-            <a:schemeClr val="accent1"/>
-          </a:effectRef>
-          <a:fontRef idx="minor">
-            <a:schemeClr val="lt1"/>
-          </a:fontRef>
-        </p:style>
-        <p:txBody>
-          <a:bodyPr rtlCol="0" anchor="ctr" wrap="square" lIns="73152" rIns="73152" tIns="36576" bIns="36576"/>
-          <a:lstStyle/>
-          <a:p>
-            <a:pPr algn="l">
-              <a:spcAft>
-                <a:spcPts val="0"/>
-              </a:spcAft>
-              <a:defRPr sz="1800" b="1">
-                <a:solidFill>
-                  <a:srgbClr val="2A8B5A"/>
-                </a:solidFill>
-                <a:latin typeface="Noto Sans CJK KR"/>
-              </a:defRPr>
-            </a:pPr>
-            <a:r>
-              <a:t>완료 체크</a:t>
-            </a:r>
-            <a:br/>
-            <a:r>
-              <a:t>□ 명령이 오류 없이 실행된다.</a:t>
-            </a:r>
-            <a:br/>
-            <a:r>
-              <a:t>□ 기대한 파일·topic·frame·parameter 이름이 보인다.</a:t>
-            </a:r>
-            <a:br/>
-            <a:r>
-              <a:t>□ 값의 단위와 방향을 한 문장으로 설명할 수 있다.</a:t>
-            </a:r>
-          </a:p>
-        </p:txBody>
-      </p:sp>
-      <p:sp>
-        <p:nvSpPr>
-          <p:cNvPr id="9" name="TextBox 8"/>
+              <a:t># 별도 터미널: ros2 bag record -o ~/agv_bag_01 /scan /imu/data /odom /camera/image_raw</a:t>
+            </a:r>
+          </a:p>
+        </p:txBody>
+      </p:sp>
+      <p:sp>
+        <p:nvSpPr>
+          <p:cNvPr id="8" name="TextBox 7"/>
           <p:cNvSpPr txBox="1"/>
           <p:nvPr/>
         </p:nvSpPr>
         <p:spPr>
           <a:xfrm>
-            <a:off x="731520" y="5989320"/>
-            <a:ext cx="10789920" cy="237744"/>
+            <a:off x="786384" y="5239512"/>
+            <a:ext cx="1261872" cy="237744"/>
           </a:xfrm>
           <a:prstGeom prst="rect">
             <a:avLst/>
@@ -12959,7 +13433,46 @@
               <a:spcAft>
                 <a:spcPts val="0"/>
               </a:spcAft>
-              <a:defRPr sz="1500" b="1">
+              <a:defRPr sz="1800" b="1">
+                <a:solidFill>
+                  <a:srgbClr val="2A8B5A"/>
+                </a:solidFill>
+                <a:latin typeface="Noto Sans CJK KR"/>
+              </a:defRPr>
+            </a:pPr>
+            <a:r>
+              <a:t>확인 기준</a:t>
+            </a:r>
+          </a:p>
+        </p:txBody>
+      </p:sp>
+      <p:sp>
+        <p:nvSpPr>
+          <p:cNvPr id="9" name="TextBox 8"/>
+          <p:cNvSpPr txBox="1"/>
+          <p:nvPr/>
+        </p:nvSpPr>
+        <p:spPr>
+          <a:xfrm>
+            <a:off x="786384" y="5532120"/>
+            <a:ext cx="10469880" cy="420624"/>
+          </a:xfrm>
+          <a:prstGeom prst="rect">
+            <a:avLst/>
+          </a:prstGeom>
+          <a:noFill/>
+        </p:spPr>
+        <p:txBody>
+          <a:bodyPr wrap="square" lIns="73152" rIns="73152" tIns="36576" bIns="36576">
+            <a:spAutoFit/>
+          </a:bodyPr>
+          <a:lstStyle/>
+          <a:p>
+            <a:pPr algn="l">
+              <a:spcAft>
+                <a:spcPts val="0"/>
+              </a:spcAft>
+              <a:defRPr sz="1800" b="0">
                 <a:solidFill>
                   <a:srgbClr val="122C4E"/>
                 </a:solidFill>
@@ -12967,7 +13480,7 @@
               </a:defRPr>
             </a:pPr>
             <a:r>
-              <a:t>완료 조건: 한 launch 명령·YAML parameter·rosbag record/replay 명령을 설명하고 확인한다.</a:t>
+              <a:t>한 launch 명령·YAML parameter·rosbag record/replay 명령을 설명하고 확인한다.</a:t>
             </a:r>
           </a:p>
         </p:txBody>
@@ -13024,7 +13537,7 @@
               </a:defRPr>
             </a:pPr>
             <a:r>
-              <a:t>막히면: 증상 → 우선 확인 → 재검증</a:t>
+              <a:t>정상 결과: 실제 환경에서 확인한 출력</a:t>
             </a:r>
           </a:p>
         </p:txBody>
@@ -13063,7 +13576,7 @@
               </a:defRPr>
             </a:pPr>
             <a:r>
-              <a:t>오류 메시지를 숨기지 않고 같은 순서로 점검합니다.</a:t>
+              <a:t>실제 ROS 2 환경의 파일·패키지·구성 검증 로그</a:t>
             </a:r>
           </a:p>
         </p:txBody>
@@ -13146,119 +13659,40 @@
           </a:p>
         </p:txBody>
       </p:sp>
-      <p:sp>
-        <p:nvSpPr>
-          <p:cNvPr id="6" name="Rectangle 5"/>
-          <p:cNvSpPr/>
-          <p:nvPr/>
-        </p:nvSpPr>
-        <p:spPr>
-          <a:xfrm>
-            <a:off x="566928" y="1188720"/>
-            <a:ext cx="11064240" cy="347472"/>
-          </a:xfrm>
-          <a:prstGeom prst="rect">
-            <a:avLst/>
-          </a:prstGeom>
-          <a:solidFill>
-            <a:srgbClr val="F4F7FB"/>
-          </a:solidFill>
-          <a:ln>
-            <a:solidFill>
-              <a:srgbClr val="F4F7FB"/>
-            </a:solidFill>
-          </a:ln>
-        </p:spPr>
-        <p:style>
-          <a:lnRef idx="1">
-            <a:schemeClr val="accent1"/>
-          </a:lnRef>
-          <a:fillRef idx="3">
-            <a:schemeClr val="accent1"/>
-          </a:fillRef>
-          <a:effectRef idx="2">
-            <a:schemeClr val="accent1"/>
-          </a:effectRef>
-          <a:fontRef idx="minor">
-            <a:schemeClr val="lt1"/>
-          </a:fontRef>
-        </p:style>
-        <p:txBody>
-          <a:bodyPr rtlCol="0" anchor="ctr" wrap="square" lIns="73152" rIns="73152" tIns="36576" bIns="36576"/>
-          <a:lstStyle/>
-          <a:p>
-            <a:pPr algn="l">
-              <a:spcAft>
-                <a:spcPts val="0"/>
-              </a:spcAft>
-              <a:defRPr sz="1300" b="1">
-                <a:solidFill>
-                  <a:srgbClr val="122C4E"/>
-                </a:solidFill>
-                <a:latin typeface="Noto Sans CJK KR"/>
-              </a:defRPr>
-            </a:pPr>
-            <a:r>
-              <a:t>현재 단계 오류 대응    |    현재 폴더 ~/agv_ws    |    현재 터미널</a:t>
-            </a:r>
-          </a:p>
-        </p:txBody>
-      </p:sp>
-      <p:sp>
-        <p:nvSpPr>
-          <p:cNvPr id="7" name="Rounded Rectangle 6"/>
-          <p:cNvSpPr/>
-          <p:nvPr/>
-        </p:nvSpPr>
-        <p:spPr>
-          <a:xfrm>
-            <a:off x="694944" y="1755648"/>
-            <a:ext cx="10972800" cy="1115568"/>
-          </a:xfrm>
-          <a:prstGeom prst="roundRect">
-            <a:avLst/>
-          </a:prstGeom>
-          <a:solidFill>
-            <a:srgbClr val="FFF7F4"/>
-          </a:solidFill>
-          <a:ln>
-            <a:solidFill>
-              <a:srgbClr val="EDBEB4"/>
-            </a:solidFill>
-          </a:ln>
-        </p:spPr>
-        <p:style>
-          <a:lnRef idx="1">
-            <a:schemeClr val="accent1"/>
-          </a:lnRef>
-          <a:fillRef idx="3">
-            <a:schemeClr val="accent1"/>
-          </a:fillRef>
-          <a:effectRef idx="2">
-            <a:schemeClr val="accent1"/>
-          </a:effectRef>
-          <a:fontRef idx="minor">
-            <a:schemeClr val="lt1"/>
-          </a:fontRef>
-        </p:style>
-        <p:txBody>
-          <a:bodyPr rtlCol="0" anchor="ctr"/>
-          <a:lstStyle/>
-          <a:p>
-            <a:pPr algn="ctr"/>
-          </a:p>
-        </p:txBody>
-      </p:sp>
-      <p:sp>
-        <p:nvSpPr>
-          <p:cNvPr id="8" name="TextBox 7"/>
+      <p:pic>
+        <p:nvPicPr>
+          <p:cNvPr id="6" name="Picture 5" descr="validation_terminal.png"/>
+          <p:cNvPicPr>
+            <a:picLocks noChangeAspect="1"/>
+          </p:cNvPicPr>
+          <p:nvPr/>
+        </p:nvPicPr>
+        <p:blipFill>
+          <a:blip r:embed="rId2"/>
+          <a:stretch>
+            <a:fillRect/>
+          </a:stretch>
+        </p:blipFill>
+        <p:spPr>
+          <a:xfrm>
+            <a:off x="2855133" y="1353312"/>
+            <a:ext cx="6478685" cy="4800600"/>
+          </a:xfrm>
+          <a:prstGeom prst="rect">
+            <a:avLst/>
+          </a:prstGeom>
+        </p:spPr>
+      </p:pic>
+      <p:sp>
+        <p:nvSpPr>
+          <p:cNvPr id="7" name="TextBox 6"/>
           <p:cNvSpPr txBox="1"/>
           <p:nvPr/>
         </p:nvSpPr>
         <p:spPr>
           <a:xfrm>
-            <a:off x="896112" y="1901952"/>
-            <a:ext cx="2926080" cy="274320"/>
+            <a:off x="777240" y="6217920"/>
+            <a:ext cx="10607040" cy="182880"/>
           </a:xfrm>
           <a:prstGeom prst="rect">
             <a:avLst/>
@@ -13271,228 +13705,19 @@
           </a:bodyPr>
           <a:lstStyle/>
           <a:p>
-            <a:pPr algn="l">
-              <a:spcAft>
-                <a:spcPts val="0"/>
-              </a:spcAft>
-              <a:defRPr sz="1800" b="1">
-                <a:solidFill>
-                  <a:srgbClr val="BE3B3B"/>
-                </a:solidFill>
-                <a:latin typeface="Noto Sans CJK KR"/>
-              </a:defRPr>
-            </a:pPr>
-            <a:r>
-              <a:t>증상 1: 일부 노드 시작 실패</a:t>
-            </a:r>
-          </a:p>
-        </p:txBody>
-      </p:sp>
-      <p:sp>
-        <p:nvSpPr>
-          <p:cNvPr id="9" name="TextBox 8"/>
-          <p:cNvSpPr txBox="1"/>
-          <p:nvPr/>
-        </p:nvSpPr>
-        <p:spPr>
-          <a:xfrm>
-            <a:off x="3794760" y="1883664"/>
-            <a:ext cx="7543800" cy="621792"/>
-          </a:xfrm>
-          <a:prstGeom prst="rect">
-            <a:avLst/>
-          </a:prstGeom>
-          <a:noFill/>
-        </p:spPr>
-        <p:txBody>
-          <a:bodyPr wrap="square" lIns="73152" rIns="73152" tIns="36576" bIns="36576">
-            <a:spAutoFit/>
-          </a:bodyPr>
-          <a:lstStyle/>
-          <a:p>
-            <a:pPr algn="l">
-              <a:spcAft>
-                <a:spcPts val="0"/>
-              </a:spcAft>
-              <a:defRPr sz="1600" b="0">
-                <a:solidFill>
-                  <a:srgbClr val="122C4E"/>
-                </a:solidFill>
-                <a:latin typeface="Noto Sans CJK KR"/>
-              </a:defRPr>
-            </a:pPr>
-            <a:r>
-              <a:t>우선 확인: launch 순서·spawn 준비·package path를 확인한다.</a:t>
-            </a:r>
-            <a:br/>
-            <a:r>
-              <a:t>수정 후: ros2 launch agv_bringup agv_sim.launch.py --show-args</a:t>
-            </a:r>
-          </a:p>
-        </p:txBody>
-      </p:sp>
-      <p:sp>
-        <p:nvSpPr>
-          <p:cNvPr id="10" name="Rounded Rectangle 9"/>
-          <p:cNvSpPr/>
-          <p:nvPr/>
-        </p:nvSpPr>
-        <p:spPr>
-          <a:xfrm>
-            <a:off x="694944" y="3172968"/>
-            <a:ext cx="10972800" cy="1115568"/>
-          </a:xfrm>
-          <a:prstGeom prst="roundRect">
-            <a:avLst/>
-          </a:prstGeom>
-          <a:solidFill>
-            <a:srgbClr val="FFF7F4"/>
-          </a:solidFill>
-          <a:ln>
-            <a:solidFill>
-              <a:srgbClr val="EDBEB4"/>
-            </a:solidFill>
-          </a:ln>
-        </p:spPr>
-        <p:style>
-          <a:lnRef idx="1">
-            <a:schemeClr val="accent1"/>
-          </a:lnRef>
-          <a:fillRef idx="3">
-            <a:schemeClr val="accent1"/>
-          </a:fillRef>
-          <a:effectRef idx="2">
-            <a:schemeClr val="accent1"/>
-          </a:effectRef>
-          <a:fontRef idx="minor">
-            <a:schemeClr val="lt1"/>
-          </a:fontRef>
-        </p:style>
-        <p:txBody>
-          <a:bodyPr rtlCol="0" anchor="ctr"/>
-          <a:lstStyle/>
-          <a:p>
-            <a:pPr algn="ctr"/>
-          </a:p>
-        </p:txBody>
-      </p:sp>
-      <p:sp>
-        <p:nvSpPr>
-          <p:cNvPr id="11" name="TextBox 10"/>
-          <p:cNvSpPr txBox="1"/>
-          <p:nvPr/>
-        </p:nvSpPr>
-        <p:spPr>
-          <a:xfrm>
-            <a:off x="896112" y="3319272"/>
-            <a:ext cx="2926080" cy="274320"/>
-          </a:xfrm>
-          <a:prstGeom prst="rect">
-            <a:avLst/>
-          </a:prstGeom>
-          <a:noFill/>
-        </p:spPr>
-        <p:txBody>
-          <a:bodyPr wrap="square" lIns="73152" rIns="73152" tIns="36576" bIns="36576">
-            <a:spAutoFit/>
-          </a:bodyPr>
-          <a:lstStyle/>
-          <a:p>
-            <a:pPr algn="l">
-              <a:spcAft>
-                <a:spcPts val="0"/>
-              </a:spcAft>
-              <a:defRPr sz="1800" b="1">
-                <a:solidFill>
-                  <a:srgbClr val="BE3B3B"/>
-                </a:solidFill>
-                <a:latin typeface="Noto Sans CJK KR"/>
-              </a:defRPr>
-            </a:pPr>
-            <a:r>
-              <a:t>증상 2: YAML 값이 적용 안 됨</a:t>
-            </a:r>
-          </a:p>
-        </p:txBody>
-      </p:sp>
-      <p:sp>
-        <p:nvSpPr>
-          <p:cNvPr id="12" name="TextBox 11"/>
-          <p:cNvSpPr txBox="1"/>
-          <p:nvPr/>
-        </p:nvSpPr>
-        <p:spPr>
-          <a:xfrm>
-            <a:off x="3794760" y="3300984"/>
-            <a:ext cx="7543800" cy="621792"/>
-          </a:xfrm>
-          <a:prstGeom prst="rect">
-            <a:avLst/>
-          </a:prstGeom>
-          <a:noFill/>
-        </p:spPr>
-        <p:txBody>
-          <a:bodyPr wrap="square" lIns="73152" rIns="73152" tIns="36576" bIns="36576">
-            <a:spAutoFit/>
-          </a:bodyPr>
-          <a:lstStyle/>
-          <a:p>
-            <a:pPr algn="l">
-              <a:spcAft>
-                <a:spcPts val="0"/>
-              </a:spcAft>
-              <a:defRPr sz="1600" b="0">
-                <a:solidFill>
-                  <a:srgbClr val="122C4E"/>
-                </a:solidFill>
-                <a:latin typeface="Noto Sans CJK KR"/>
-              </a:defRPr>
-            </a:pPr>
-            <a:r>
-              <a:t>우선 확인: node name/namespace와 parameter key를 확인한다.</a:t>
-            </a:r>
-            <a:br/>
-            <a:r>
-              <a:t>수정 후: ros2 launch agv_bringup agv_sim.launch.py --show-args</a:t>
-            </a:r>
-          </a:p>
-        </p:txBody>
-      </p:sp>
-      <p:sp>
-        <p:nvSpPr>
-          <p:cNvPr id="13" name="TextBox 12"/>
-          <p:cNvSpPr txBox="1"/>
-          <p:nvPr/>
-        </p:nvSpPr>
-        <p:spPr>
-          <a:xfrm>
-            <a:off x="822960" y="5102352"/>
-            <a:ext cx="10607040" cy="402336"/>
-          </a:xfrm>
-          <a:prstGeom prst="rect">
-            <a:avLst/>
-          </a:prstGeom>
-          <a:noFill/>
-        </p:spPr>
-        <p:txBody>
-          <a:bodyPr wrap="square" lIns="73152" rIns="73152" tIns="36576" bIns="36576">
-            <a:spAutoFit/>
-          </a:bodyPr>
-          <a:lstStyle/>
-          <a:p>
             <a:pPr algn="ctr">
               <a:spcAft>
                 <a:spcPts val="0"/>
               </a:spcAft>
-              <a:defRPr sz="1800" b="1">
-                <a:solidFill>
-                  <a:srgbClr val="DB7E22"/>
-                </a:solidFill>
-                <a:latin typeface="Noto Sans CJK KR"/>
-              </a:defRPr>
-            </a:pPr>
-            <a:r>
-              <a:t>공통 순서: ① 현재 폴더 ② source ③ 파일 경로 ④ 이름/타입/단위 ⑤ build·source 후 재실행</a:t>
+              <a:defRPr sz="1100" b="1">
+                <a:solidFill>
+                  <a:srgbClr val="2A8B5A"/>
+                </a:solidFill>
+                <a:latin typeface="Noto Sans CJK KR"/>
+              </a:defRPr>
+            </a:pPr>
+            <a:r>
+              <a:t>① 명령/설정  ② 정상 출력 또는 화면  ③ 다음 검증 명령으로 재확인</a:t>
             </a:r>
           </a:p>
         </p:txBody>
@@ -13549,7 +13774,7 @@
               </a:defRPr>
             </a:pPr>
             <a:r>
-              <a:t>미니 실습: 값 하나를 바꾸고 결과를 비교한다</a:t>
+              <a:t>정상 결과: 실제 환경에서 확인한 출력</a:t>
             </a:r>
           </a:p>
         </p:txBody>
@@ -13588,7 +13813,7 @@
               </a:defRPr>
             </a:pPr>
             <a:r>
-              <a:t>정상 결과를 만든 뒤에는 한 번에 하나의 값만 바꿉니다.</a:t>
+              <a:t>실제 Gazebo Sim: launch로 World와 AGV를 함께 실행한 화면</a:t>
             </a:r>
           </a:p>
         </p:txBody>
@@ -13671,132 +13896,40 @@
           </a:p>
         </p:txBody>
       </p:sp>
-      <p:sp>
-        <p:nvSpPr>
-          <p:cNvPr id="6" name="Rectangle 5"/>
-          <p:cNvSpPr/>
-          <p:nvPr/>
-        </p:nvSpPr>
-        <p:spPr>
-          <a:xfrm>
-            <a:off x="566928" y="1188720"/>
-            <a:ext cx="11064240" cy="347472"/>
-          </a:xfrm>
-          <a:prstGeom prst="rect">
-            <a:avLst/>
-          </a:prstGeom>
-          <a:solidFill>
-            <a:srgbClr val="F4F7FB"/>
-          </a:solidFill>
-          <a:ln>
-            <a:solidFill>
-              <a:srgbClr val="F4F7FB"/>
-            </a:solidFill>
-          </a:ln>
-        </p:spPr>
-        <p:style>
-          <a:lnRef idx="1">
-            <a:schemeClr val="accent1"/>
-          </a:lnRef>
-          <a:fillRef idx="3">
-            <a:schemeClr val="accent1"/>
-          </a:fillRef>
-          <a:effectRef idx="2">
-            <a:schemeClr val="accent1"/>
-          </a:effectRef>
-          <a:fontRef idx="minor">
-            <a:schemeClr val="lt1"/>
-          </a:fontRef>
-        </p:style>
-        <p:txBody>
-          <a:bodyPr rtlCol="0" anchor="ctr" wrap="square" lIns="73152" rIns="73152" tIns="36576" bIns="36576"/>
-          <a:lstStyle/>
-          <a:p>
-            <a:pPr algn="l">
-              <a:spcAft>
-                <a:spcPts val="0"/>
-              </a:spcAft>
-              <a:defRPr sz="1300" b="1">
-                <a:solidFill>
-                  <a:srgbClr val="122C4E"/>
-                </a:solidFill>
-                <a:latin typeface="Noto Sans CJK KR"/>
-              </a:defRPr>
-            </a:pPr>
-            <a:r>
-              <a:t>현재 단계 미니 실습    |    현재 폴더 ~/agv_ws    |    현재 터미널</a:t>
-            </a:r>
-          </a:p>
-        </p:txBody>
-      </p:sp>
-      <p:sp>
-        <p:nvSpPr>
-          <p:cNvPr id="7" name="Rounded Rectangle 6"/>
-          <p:cNvSpPr/>
-          <p:nvPr/>
-        </p:nvSpPr>
-        <p:spPr>
-          <a:xfrm>
-            <a:off x="749808" y="1874519"/>
-            <a:ext cx="10652760" cy="1993392"/>
-          </a:xfrm>
-          <a:prstGeom prst="roundRect">
-            <a:avLst/>
-          </a:prstGeom>
-          <a:solidFill>
-            <a:srgbClr val="FFF8EB"/>
-          </a:solidFill>
-          <a:ln>
-            <a:solidFill>
-              <a:srgbClr val="ECC680"/>
-            </a:solidFill>
-          </a:ln>
-        </p:spPr>
-        <p:style>
-          <a:lnRef idx="1">
-            <a:schemeClr val="accent1"/>
-          </a:lnRef>
-          <a:fillRef idx="3">
-            <a:schemeClr val="accent1"/>
-          </a:fillRef>
-          <a:effectRef idx="2">
-            <a:schemeClr val="accent1"/>
-          </a:effectRef>
-          <a:fontRef idx="minor">
-            <a:schemeClr val="lt1"/>
-          </a:fontRef>
-        </p:style>
-        <p:txBody>
-          <a:bodyPr rtlCol="0" anchor="ctr" wrap="square" lIns="73152" rIns="73152" tIns="36576" bIns="36576"/>
-          <a:lstStyle/>
-          <a:p>
-            <a:pPr algn="ctr">
-              <a:spcAft>
-                <a:spcPts val="0"/>
-              </a:spcAft>
-              <a:defRPr sz="2300" b="1">
-                <a:solidFill>
-                  <a:srgbClr val="122C4E"/>
-                </a:solidFill>
-                <a:latin typeface="Noto Sans CJK KR"/>
-              </a:defRPr>
-            </a:pPr>
-            <a:r>
-              <a:t>mission.yaml stop_distance를 0.50→0.70으로 바꾼 뒤 재실행하고 ros2 param get으로 적용값을 확인한다.</a:t>
-            </a:r>
-          </a:p>
-        </p:txBody>
-      </p:sp>
-      <p:sp>
-        <p:nvSpPr>
-          <p:cNvPr id="8" name="TextBox 7"/>
+      <p:pic>
+        <p:nvPicPr>
+          <p:cNvPr id="6" name="Picture 5" descr="01_gazebo_final_actual.png"/>
+          <p:cNvPicPr>
+            <a:picLocks noChangeAspect="1"/>
+          </p:cNvPicPr>
+          <p:nvPr/>
+        </p:nvPicPr>
+        <p:blipFill>
+          <a:blip r:embed="rId2"/>
+          <a:stretch>
+            <a:fillRect/>
+          </a:stretch>
+        </p:blipFill>
+        <p:spPr>
+          <a:xfrm>
+            <a:off x="3253884" y="1353312"/>
+            <a:ext cx="5681183" cy="4800600"/>
+          </a:xfrm>
+          <a:prstGeom prst="rect">
+            <a:avLst/>
+          </a:prstGeom>
+        </p:spPr>
+      </p:pic>
+      <p:sp>
+        <p:nvSpPr>
+          <p:cNvPr id="7" name="TextBox 6"/>
           <p:cNvSpPr txBox="1"/>
           <p:nvPr/>
         </p:nvSpPr>
         <p:spPr>
           <a:xfrm>
-            <a:off x="877824" y="4590288"/>
-            <a:ext cx="10241280" cy="594360"/>
+            <a:off x="777240" y="6217920"/>
+            <a:ext cx="10607040" cy="182880"/>
           </a:xfrm>
           <a:prstGeom prst="rect">
             <a:avLst/>
@@ -13813,15 +13946,15 @@
               <a:spcAft>
                 <a:spcPts val="0"/>
               </a:spcAft>
-              <a:defRPr sz="1900" b="1">
-                <a:solidFill>
-                  <a:srgbClr val="DB7E22"/>
-                </a:solidFill>
-                <a:latin typeface="Noto Sans CJK KR"/>
-              </a:defRPr>
-            </a:pPr>
-            <a:r>
-              <a:t>기록할 것: 바꾼 값(단위) · 기대한 변화 · 실제 출력/화면 · 원래 값으로 되돌린 결과</a:t>
+              <a:defRPr sz="1100" b="1">
+                <a:solidFill>
+                  <a:srgbClr val="2A8B5A"/>
+                </a:solidFill>
+                <a:latin typeface="Noto Sans CJK KR"/>
+              </a:defRPr>
+            </a:pPr>
+            <a:r>
+              <a:t>① 명령/설정  ② 정상 출력 또는 화면  ③ 다음 검증 명령으로 재확인</a:t>
             </a:r>
           </a:p>
         </p:txBody>
@@ -13878,7 +14011,7 @@
               </a:defRPr>
             </a:pPr>
             <a:r>
-              <a:t>rosbag2 재생 절차</a:t>
+              <a:t>객관적 검증 명령으로 완료를 확인한다</a:t>
             </a:r>
           </a:p>
         </p:txBody>
@@ -13917,7 +14050,7 @@
               </a:defRPr>
             </a:pPr>
             <a:r>
-              <a:t>통합 단계에서 놓치기 쉬운 실행·운영 조건을 정리합니다.</a:t>
+              <a:t>화면만 보지 말고 topic·frame·파일·parameter를 다시 확인합니다.</a:t>
             </a:r>
           </a:p>
         </p:txBody>
@@ -14053,7 +14186,7 @@
               </a:defRPr>
             </a:pPr>
             <a:r>
-              <a:t>현재 단계 통합 보강    |    현재 폴더 ~/agv_ws    |    현재 터미널</a:t>
+              <a:t>현재 단계 검증    |    현재 폴더 ~/ros2_curri/agv_ws    |    현재 터미널</a:t>
             </a:r>
           </a:p>
         </p:txBody>
@@ -14066,8 +14199,74 @@
         </p:nvSpPr>
         <p:spPr>
           <a:xfrm>
-            <a:off x="676656" y="1691640"/>
-            <a:ext cx="10972800" cy="4434840"/>
+            <a:off x="658368" y="1755648"/>
+            <a:ext cx="10972800" cy="2148840"/>
+          </a:xfrm>
+          <a:prstGeom prst="roundRect">
+            <a:avLst/>
+          </a:prstGeom>
+          <a:solidFill>
+            <a:srgbClr val="1D232D"/>
+          </a:solidFill>
+          <a:ln>
+            <a:solidFill>
+              <a:srgbClr val="1D232D"/>
+            </a:solidFill>
+          </a:ln>
+        </p:spPr>
+        <p:style>
+          <a:lnRef idx="1">
+            <a:schemeClr val="accent1"/>
+          </a:lnRef>
+          <a:fillRef idx="3">
+            <a:schemeClr val="accent1"/>
+          </a:fillRef>
+          <a:effectRef idx="2">
+            <a:schemeClr val="accent1"/>
+          </a:effectRef>
+          <a:fontRef idx="minor">
+            <a:schemeClr val="lt1"/>
+          </a:fontRef>
+        </p:style>
+        <p:txBody>
+          <a:bodyPr rtlCol="0" anchor="ctr" wrap="square" lIns="73152" rIns="73152" tIns="36576" bIns="36576"/>
+          <a:lstStyle/>
+          <a:p>
+            <a:pPr algn="l">
+              <a:spcAft>
+                <a:spcPts val="0"/>
+              </a:spcAft>
+              <a:defRPr sz="1600" b="0">
+                <a:solidFill>
+                  <a:srgbClr val="FFFFFF"/>
+                </a:solidFill>
+                <a:latin typeface="DejaVu Sans Mono"/>
+              </a:defRPr>
+            </a:pPr>
+            <a:r>
+              <a:t>ros2 launch agv_bringup agv_sim.launch.py --show-args</a:t>
+            </a:r>
+            <a:br/>
+            <a:r>
+              <a:t>ros2 node list</a:t>
+            </a:r>
+            <a:br/>
+            <a:r>
+              <a:t>ros2 param get /mission_manager stop_distance</a:t>
+            </a:r>
+          </a:p>
+        </p:txBody>
+      </p:sp>
+      <p:sp>
+        <p:nvSpPr>
+          <p:cNvPr id="8" name="Rounded Rectangle 7"/>
+          <p:cNvSpPr/>
+          <p:nvPr/>
+        </p:nvSpPr>
+        <p:spPr>
+          <a:xfrm>
+            <a:off x="658368" y="4206240"/>
+            <a:ext cx="10972800" cy="1554480"/>
           </a:xfrm>
           <a:prstGeom prst="roundRect">
             <a:avLst/>
@@ -14077,7 +14276,7 @@
           </a:solidFill>
           <a:ln>
             <a:solidFill>
-              <a:srgbClr val="D2DEEC"/>
+              <a:srgbClr val="D1DFD5"/>
             </a:solidFill>
           </a:ln>
         </p:spPr>
@@ -14096,23 +14295,48 @@
           </a:fontRef>
         </p:style>
         <p:txBody>
-          <a:bodyPr rtlCol="0" anchor="ctr"/>
-          <a:lstStyle/>
-          <a:p>
-            <a:pPr algn="ctr"/>
-          </a:p>
-        </p:txBody>
-      </p:sp>
-      <p:sp>
-        <p:nvSpPr>
-          <p:cNvPr id="8" name="TextBox 7"/>
+          <a:bodyPr rtlCol="0" anchor="ctr" wrap="square" lIns="73152" rIns="73152" tIns="36576" bIns="36576"/>
+          <a:lstStyle/>
+          <a:p>
+            <a:pPr algn="l">
+              <a:spcAft>
+                <a:spcPts val="0"/>
+              </a:spcAft>
+              <a:defRPr sz="1800" b="1">
+                <a:solidFill>
+                  <a:srgbClr val="2A8B5A"/>
+                </a:solidFill>
+                <a:latin typeface="Noto Sans CJK KR"/>
+              </a:defRPr>
+            </a:pPr>
+            <a:r>
+              <a:t>완료 체크</a:t>
+            </a:r>
+            <a:br/>
+            <a:r>
+              <a:t>□ 명령이 오류 없이 실행된다.</a:t>
+            </a:r>
+            <a:br/>
+            <a:r>
+              <a:t>□ 기대한 파일·topic·frame·parameter 이름이 보인다.</a:t>
+            </a:r>
+            <a:br/>
+            <a:r>
+              <a:t>□ 값의 단위와 방향을 한 문장으로 설명할 수 있다.</a:t>
+            </a:r>
+          </a:p>
+        </p:txBody>
+      </p:sp>
+      <p:sp>
+        <p:nvSpPr>
+          <p:cNvPr id="9" name="TextBox 8"/>
           <p:cNvSpPr txBox="1"/>
           <p:nvPr/>
         </p:nvSpPr>
         <p:spPr>
           <a:xfrm>
-            <a:off x="914400" y="1993392"/>
-            <a:ext cx="10332720" cy="3749039"/>
+            <a:off x="731520" y="5989320"/>
+            <a:ext cx="10789920" cy="237744"/>
           </a:xfrm>
           <a:prstGeom prst="rect">
             <a:avLst/>
@@ -14120,16 +14344,16 @@
           <a:noFill/>
         </p:spPr>
         <p:txBody>
-          <a:bodyPr wrap="square" lIns="109728" rIns="109728">
+          <a:bodyPr wrap="square" lIns="73152" rIns="73152" tIns="36576" bIns="36576">
             <a:spAutoFit/>
           </a:bodyPr>
           <a:lstStyle/>
           <a:p>
-            <a:pPr>
-              <a:spcAft>
-                <a:spcPts val="800"/>
-              </a:spcAft>
-              <a:defRPr sz="1900">
+            <a:pPr algn="l">
+              <a:spcAft>
+                <a:spcPts val="0"/>
+              </a:spcAft>
+              <a:defRPr sz="1500" b="1">
                 <a:solidFill>
                   <a:srgbClr val="122C4E"/>
                 </a:solidFill>
@@ -14137,55 +14361,7 @@
               </a:defRPr>
             </a:pPr>
             <a:r>
-              <a:t>• 기록 종료 뒤 `ros2 bag info ~/agv_bag_01`로 topic과 duration을 먼저 확인한다.</a:t>
-            </a:r>
-          </a:p>
-          <a:p>
-            <a:pPr>
-              <a:spcAft>
-                <a:spcPts val="800"/>
-              </a:spcAft>
-              <a:defRPr sz="1900">
-                <a:solidFill>
-                  <a:srgbClr val="122C4E"/>
-                </a:solidFill>
-                <a:latin typeface="Noto Sans CJK KR"/>
-              </a:defRPr>
-            </a:pPr>
-            <a:r>
-              <a:t>• Gazebo가 없는 terminal에서 processing node를 source·실행한다.</a:t>
-            </a:r>
-          </a:p>
-          <a:p>
-            <a:pPr>
-              <a:spcAft>
-                <a:spcPts val="800"/>
-              </a:spcAft>
-              <a:defRPr sz="1900">
-                <a:solidFill>
-                  <a:srgbClr val="122C4E"/>
-                </a:solidFill>
-                <a:latin typeface="Noto Sans CJK KR"/>
-              </a:defRPr>
-            </a:pPr>
-            <a:r>
-              <a:t>• `ros2 bag play ~/agv_bag_01 --clock`으로 sensor 입력을 다시 공급한다.</a:t>
-            </a:r>
-          </a:p>
-          <a:p>
-            <a:pPr>
-              <a:spcAft>
-                <a:spcPts val="800"/>
-              </a:spcAft>
-              <a:defRPr sz="1900">
-                <a:solidFill>
-                  <a:srgbClr val="122C4E"/>
-                </a:solidFill>
-                <a:latin typeface="Noto Sans CJK KR"/>
-              </a:defRPr>
-            </a:pPr>
-            <a:r>
-              <a:t>• use_sim_time=true 노드는 /clock을 받아 같은 시간축을 사용한다.</a:t>
+              <a:t>완료 조건: 한 launch 명령·YAML parameter·rosbag record/replay 명령을 설명하고 확인한다.</a:t>
             </a:r>
           </a:p>
         </p:txBody>
@@ -14242,7 +14418,7 @@
               </a:defRPr>
             </a:pPr>
             <a:r>
-              <a:t>증상별 디버깅 도구</a:t>
+              <a:t>막히면: 증상 → 우선 확인 → 재검증</a:t>
             </a:r>
           </a:p>
         </p:txBody>
@@ -14281,7 +14457,7 @@
               </a:defRPr>
             </a:pPr>
             <a:r>
-              <a:t>통합 단계에서 놓치기 쉬운 실행·운영 조건을 정리합니다.</a:t>
+              <a:t>오류 메시지를 숨기지 않고 같은 순서로 점검합니다.</a:t>
             </a:r>
           </a:p>
         </p:txBody>
@@ -14417,7 +14593,7 @@
               </a:defRPr>
             </a:pPr>
             <a:r>
-              <a:t>현재 단계 통합 보강    |    현재 폴더 ~/agv_ws    |    현재 터미널</a:t>
+              <a:t>현재 단계 오류 대응    |    현재 폴더 ~/ros2_curri/agv_ws    |    현재 터미널</a:t>
             </a:r>
           </a:p>
         </p:txBody>
@@ -14430,18 +14606,18 @@
         </p:nvSpPr>
         <p:spPr>
           <a:xfrm>
-            <a:off x="676656" y="1691640"/>
-            <a:ext cx="10972800" cy="4434840"/>
+            <a:off x="694944" y="1755648"/>
+            <a:ext cx="10972800" cy="1115568"/>
           </a:xfrm>
           <a:prstGeom prst="roundRect">
             <a:avLst/>
           </a:prstGeom>
           <a:solidFill>
-            <a:srgbClr val="F4F7FB"/>
+            <a:srgbClr val="FFF7F4"/>
           </a:solidFill>
           <a:ln>
             <a:solidFill>
-              <a:srgbClr val="D2DEEC"/>
+              <a:srgbClr val="EDBEB4"/>
             </a:solidFill>
           </a:ln>
         </p:spPr>
@@ -14475,8 +14651,8 @@
         </p:nvSpPr>
         <p:spPr>
           <a:xfrm>
-            <a:off x="914400" y="1993392"/>
-            <a:ext cx="10332720" cy="3749039"/>
+            <a:off x="896112" y="1901952"/>
+            <a:ext cx="2926080" cy="274320"/>
           </a:xfrm>
           <a:prstGeom prst="rect">
             <a:avLst/>
@@ -14484,16 +14660,55 @@
           <a:noFill/>
         </p:spPr>
         <p:txBody>
-          <a:bodyPr wrap="square" lIns="109728" rIns="109728">
+          <a:bodyPr wrap="square" lIns="73152" rIns="73152" tIns="36576" bIns="36576">
             <a:spAutoFit/>
           </a:bodyPr>
           <a:lstStyle/>
           <a:p>
-            <a:pPr>
-              <a:spcAft>
-                <a:spcPts val="800"/>
-              </a:spcAft>
-              <a:defRPr sz="1900">
+            <a:pPr algn="l">
+              <a:spcAft>
+                <a:spcPts val="0"/>
+              </a:spcAft>
+              <a:defRPr sz="1800" b="1">
+                <a:solidFill>
+                  <a:srgbClr val="BE3B3B"/>
+                </a:solidFill>
+                <a:latin typeface="Noto Sans CJK KR"/>
+              </a:defRPr>
+            </a:pPr>
+            <a:r>
+              <a:t>증상 1: 일부 노드 시작 실패</a:t>
+            </a:r>
+          </a:p>
+        </p:txBody>
+      </p:sp>
+      <p:sp>
+        <p:nvSpPr>
+          <p:cNvPr id="9" name="TextBox 8"/>
+          <p:cNvSpPr txBox="1"/>
+          <p:nvPr/>
+        </p:nvSpPr>
+        <p:spPr>
+          <a:xfrm>
+            <a:off x="3794760" y="1883664"/>
+            <a:ext cx="7543800" cy="621792"/>
+          </a:xfrm>
+          <a:prstGeom prst="rect">
+            <a:avLst/>
+          </a:prstGeom>
+          <a:noFill/>
+        </p:spPr>
+        <p:txBody>
+          <a:bodyPr wrap="square" lIns="73152" rIns="73152" tIns="36576" bIns="36576">
+            <a:spAutoFit/>
+          </a:bodyPr>
+          <a:lstStyle/>
+          <a:p>
+            <a:pPr algn="l">
+              <a:spcAft>
+                <a:spcPts val="0"/>
+              </a:spcAft>
+              <a:defRPr sz="1600" b="0">
                 <a:solidFill>
                   <a:srgbClr val="122C4E"/>
                 </a:solidFill>
@@ -14501,15 +14716,126 @@
               </a:defRPr>
             </a:pPr>
             <a:r>
-              <a:t>• node 미실행: ros2 node list</a:t>
-            </a:r>
-          </a:p>
-          <a:p>
-            <a:pPr>
-              <a:spcAft>
-                <a:spcPts val="800"/>
-              </a:spcAft>
-              <a:defRPr sz="1900">
+              <a:t>우선 확인: launch 순서·spawn 준비·package path를 확인한다.</a:t>
+            </a:r>
+            <a:br/>
+            <a:r>
+              <a:t>수정 후: ros2 launch agv_bringup agv_sim.launch.py --show-args</a:t>
+            </a:r>
+          </a:p>
+        </p:txBody>
+      </p:sp>
+      <p:sp>
+        <p:nvSpPr>
+          <p:cNvPr id="10" name="Rounded Rectangle 9"/>
+          <p:cNvSpPr/>
+          <p:nvPr/>
+        </p:nvSpPr>
+        <p:spPr>
+          <a:xfrm>
+            <a:off x="694944" y="3172968"/>
+            <a:ext cx="10972800" cy="1115568"/>
+          </a:xfrm>
+          <a:prstGeom prst="roundRect">
+            <a:avLst/>
+          </a:prstGeom>
+          <a:solidFill>
+            <a:srgbClr val="FFF7F4"/>
+          </a:solidFill>
+          <a:ln>
+            <a:solidFill>
+              <a:srgbClr val="EDBEB4"/>
+            </a:solidFill>
+          </a:ln>
+        </p:spPr>
+        <p:style>
+          <a:lnRef idx="1">
+            <a:schemeClr val="accent1"/>
+          </a:lnRef>
+          <a:fillRef idx="3">
+            <a:schemeClr val="accent1"/>
+          </a:fillRef>
+          <a:effectRef idx="2">
+            <a:schemeClr val="accent1"/>
+          </a:effectRef>
+          <a:fontRef idx="minor">
+            <a:schemeClr val="lt1"/>
+          </a:fontRef>
+        </p:style>
+        <p:txBody>
+          <a:bodyPr rtlCol="0" anchor="ctr"/>
+          <a:lstStyle/>
+          <a:p>
+            <a:pPr algn="ctr"/>
+          </a:p>
+        </p:txBody>
+      </p:sp>
+      <p:sp>
+        <p:nvSpPr>
+          <p:cNvPr id="11" name="TextBox 10"/>
+          <p:cNvSpPr txBox="1"/>
+          <p:nvPr/>
+        </p:nvSpPr>
+        <p:spPr>
+          <a:xfrm>
+            <a:off x="896112" y="3319272"/>
+            <a:ext cx="2926080" cy="274320"/>
+          </a:xfrm>
+          <a:prstGeom prst="rect">
+            <a:avLst/>
+          </a:prstGeom>
+          <a:noFill/>
+        </p:spPr>
+        <p:txBody>
+          <a:bodyPr wrap="square" lIns="73152" rIns="73152" tIns="36576" bIns="36576">
+            <a:spAutoFit/>
+          </a:bodyPr>
+          <a:lstStyle/>
+          <a:p>
+            <a:pPr algn="l">
+              <a:spcAft>
+                <a:spcPts val="0"/>
+              </a:spcAft>
+              <a:defRPr sz="1800" b="1">
+                <a:solidFill>
+                  <a:srgbClr val="BE3B3B"/>
+                </a:solidFill>
+                <a:latin typeface="Noto Sans CJK KR"/>
+              </a:defRPr>
+            </a:pPr>
+            <a:r>
+              <a:t>증상 2: YAML 값이 적용 안 됨</a:t>
+            </a:r>
+          </a:p>
+        </p:txBody>
+      </p:sp>
+      <p:sp>
+        <p:nvSpPr>
+          <p:cNvPr id="12" name="TextBox 11"/>
+          <p:cNvSpPr txBox="1"/>
+          <p:nvPr/>
+        </p:nvSpPr>
+        <p:spPr>
+          <a:xfrm>
+            <a:off x="3794760" y="3300984"/>
+            <a:ext cx="7543800" cy="621792"/>
+          </a:xfrm>
+          <a:prstGeom prst="rect">
+            <a:avLst/>
+          </a:prstGeom>
+          <a:noFill/>
+        </p:spPr>
+        <p:txBody>
+          <a:bodyPr wrap="square" lIns="73152" rIns="73152" tIns="36576" bIns="36576">
+            <a:spAutoFit/>
+          </a:bodyPr>
+          <a:lstStyle/>
+          <a:p>
+            <a:pPr algn="l">
+              <a:spcAft>
+                <a:spcPts val="0"/>
+              </a:spcAft>
+              <a:defRPr sz="1600" b="0">
                 <a:solidFill>
                   <a:srgbClr val="122C4E"/>
                 </a:solidFill>
@@ -14517,55 +14843,50 @@
               </a:defRPr>
             </a:pPr>
             <a:r>
-              <a:t>• topic/타입/QoS: ros2 topic info --verbose</a:t>
-            </a:r>
-          </a:p>
-          <a:p>
-            <a:pPr>
-              <a:spcAft>
-                <a:spcPts val="800"/>
-              </a:spcAft>
-              <a:defRPr sz="1900">
-                <a:solidFill>
-                  <a:srgbClr val="122C4E"/>
-                </a:solidFill>
-                <a:latin typeface="Noto Sans CJK KR"/>
-              </a:defRPr>
-            </a:pPr>
-            <a:r>
-              <a:t>• parameter: ros2 param get/list</a:t>
-            </a:r>
-          </a:p>
-          <a:p>
-            <a:pPr>
-              <a:spcAft>
-                <a:spcPts val="800"/>
-              </a:spcAft>
-              <a:defRPr sz="1900">
-                <a:solidFill>
-                  <a:srgbClr val="122C4E"/>
-                </a:solidFill>
-                <a:latin typeface="Noto Sans CJK KR"/>
-              </a:defRPr>
-            </a:pPr>
-            <a:r>
-              <a:t>• frame: tf2_tools view_frames와 RViz2</a:t>
-            </a:r>
-          </a:p>
-          <a:p>
-            <a:pPr>
-              <a:spcAft>
-                <a:spcPts val="800"/>
-              </a:spcAft>
-              <a:defRPr sz="1900">
-                <a:solidFill>
-                  <a:srgbClr val="122C4E"/>
-                </a:solidFill>
-                <a:latin typeface="Noto Sans CJK KR"/>
-              </a:defRPr>
-            </a:pPr>
-            <a:r>
-              <a:t>• 시뮬레이터: Gazebo GUI와 bridge log</a:t>
+              <a:t>우선 확인: node name/namespace와 parameter key를 확인한다.</a:t>
+            </a:r>
+            <a:br/>
+            <a:r>
+              <a:t>수정 후: ros2 launch agv_bringup agv_sim.launch.py --show-args</a:t>
+            </a:r>
+          </a:p>
+        </p:txBody>
+      </p:sp>
+      <p:sp>
+        <p:nvSpPr>
+          <p:cNvPr id="13" name="TextBox 12"/>
+          <p:cNvSpPr txBox="1"/>
+          <p:nvPr/>
+        </p:nvSpPr>
+        <p:spPr>
+          <a:xfrm>
+            <a:off x="822960" y="5102352"/>
+            <a:ext cx="10607040" cy="402336"/>
+          </a:xfrm>
+          <a:prstGeom prst="rect">
+            <a:avLst/>
+          </a:prstGeom>
+          <a:noFill/>
+        </p:spPr>
+        <p:txBody>
+          <a:bodyPr wrap="square" lIns="73152" rIns="73152" tIns="36576" bIns="36576">
+            <a:spAutoFit/>
+          </a:bodyPr>
+          <a:lstStyle/>
+          <a:p>
+            <a:pPr algn="ctr">
+              <a:spcAft>
+                <a:spcPts val="0"/>
+              </a:spcAft>
+              <a:defRPr sz="1800" b="1">
+                <a:solidFill>
+                  <a:srgbClr val="DB7E22"/>
+                </a:solidFill>
+                <a:latin typeface="Noto Sans CJK KR"/>
+              </a:defRPr>
+            </a:pPr>
+            <a:r>
+              <a:t>공통 순서: ① 현재 폴더 ② source ③ 파일 경로 ④ 이름/타입/단위 ⑤ build·source 후 재실행</a:t>
             </a:r>
           </a:p>
         </p:txBody>
@@ -14622,7 +14943,7 @@
               </a:defRPr>
             </a:pPr>
             <a:r>
-              <a:t>체크포인트를 저장하고 다음 모듈로 넘긴다</a:t>
+              <a:t>미니 실습: 값 하나를 바꾸고 결과를 비교한다</a:t>
             </a:r>
           </a:p>
         </p:txBody>
@@ -14661,7 +14982,7 @@
               </a:defRPr>
             </a:pPr>
             <a:r>
-              <a:t>현재 Complete는 다음 Starter의 기준선입니다.</a:t>
+              <a:t>정상 결과를 만든 뒤에는 한 번에 하나의 값만 바꿉니다.</a:t>
             </a:r>
           </a:p>
         </p:txBody>
@@ -14797,7 +15118,7 @@
               </a:defRPr>
             </a:pPr>
             <a:r>
-              <a:t>현재 단계 체크포인트    |    현재 폴더 ~/agv_ws    |    현재 터미널</a:t>
+              <a:t>현재 단계 미니 실습    |    현재 폴더 ~/ros2_curri/agv_ws    |    현재 터미널</a:t>
             </a:r>
           </a:p>
         </p:txBody>
@@ -14810,18 +15131,18 @@
         </p:nvSpPr>
         <p:spPr>
           <a:xfrm>
-            <a:off x="685800" y="1737360"/>
-            <a:ext cx="10972800" cy="3611880"/>
+            <a:off x="749808" y="1874519"/>
+            <a:ext cx="10652760" cy="1993392"/>
           </a:xfrm>
           <a:prstGeom prst="roundRect">
             <a:avLst/>
           </a:prstGeom>
           <a:solidFill>
-            <a:srgbClr val="F4F7FB"/>
+            <a:srgbClr val="FFF8EB"/>
           </a:solidFill>
           <a:ln>
             <a:solidFill>
-              <a:srgbClr val="D2DCE8"/>
+              <a:srgbClr val="ECC680"/>
             </a:solidFill>
           </a:ln>
         </p:spPr>
@@ -14840,10 +15161,23 @@
           </a:fontRef>
         </p:style>
         <p:txBody>
-          <a:bodyPr rtlCol="0" anchor="ctr"/>
-          <a:lstStyle/>
-          <a:p>
-            <a:pPr algn="ctr"/>
+          <a:bodyPr rtlCol="0" anchor="ctr" wrap="square" lIns="73152" rIns="73152" tIns="36576" bIns="36576"/>
+          <a:lstStyle/>
+          <a:p>
+            <a:pPr algn="ctr">
+              <a:spcAft>
+                <a:spcPts val="0"/>
+              </a:spcAft>
+              <a:defRPr sz="2300" b="1">
+                <a:solidFill>
+                  <a:srgbClr val="122C4E"/>
+                </a:solidFill>
+                <a:latin typeface="Noto Sans CJK KR"/>
+              </a:defRPr>
+            </a:pPr>
+            <a:r>
+              <a:t>mission.yaml stop_distance를 0.50→0.70으로 바꾼 뒤 재실행하고 ros2 param get으로 적용값을 확인한다.</a:t>
+            </a:r>
           </a:p>
         </p:txBody>
       </p:sp>
@@ -14855,111 +15189,8 @@
         </p:nvSpPr>
         <p:spPr>
           <a:xfrm>
-            <a:off x="896112" y="1993392"/>
-            <a:ext cx="10332720" cy="2971800"/>
-          </a:xfrm>
-          <a:prstGeom prst="rect">
-            <a:avLst/>
-          </a:prstGeom>
-          <a:noFill/>
-        </p:spPr>
-        <p:txBody>
-          <a:bodyPr wrap="square" lIns="109728" rIns="109728">
-            <a:spAutoFit/>
-          </a:bodyPr>
-          <a:lstStyle/>
-          <a:p>
-            <a:pPr>
-              <a:spcAft>
-                <a:spcPts val="800"/>
-              </a:spcAft>
-              <a:defRPr sz="1800">
-                <a:solidFill>
-                  <a:srgbClr val="122C4E"/>
-                </a:solidFill>
-                <a:latin typeface="Noto Sans CJK KR"/>
-              </a:defRPr>
-            </a:pPr>
-            <a:r>
-              <a:t>• □ 완료 화면: 한 launch 명령·YAML parameter·rosbag record/replay 명령을 설명하고 확인한다.</a:t>
-            </a:r>
-          </a:p>
-          <a:p>
-            <a:pPr>
-              <a:spcAft>
-                <a:spcPts val="800"/>
-              </a:spcAft>
-              <a:defRPr sz="1800">
-                <a:solidFill>
-                  <a:srgbClr val="122C4E"/>
-                </a:solidFill>
-                <a:latin typeface="Noto Sans CJK KR"/>
-              </a:defRPr>
-            </a:pPr>
-            <a:r>
-              <a:t>• □ Complete 파일: blocks/F_integration/M21_launch_yaml_rosbag/complete/</a:t>
-            </a:r>
-          </a:p>
-          <a:p>
-            <a:pPr>
-              <a:spcAft>
-                <a:spcPts val="800"/>
-              </a:spcAft>
-              <a:defRPr sz="1800">
-                <a:solidFill>
-                  <a:srgbClr val="122C4E"/>
-                </a:solidFill>
-                <a:latin typeface="Noto Sans CJK KR"/>
-              </a:defRPr>
-            </a:pPr>
-            <a:r>
-              <a:t>• □ 정상 로그·캡처: logs/validation.log, screenshots/validation_terminal.png</a:t>
-            </a:r>
-          </a:p>
-          <a:p>
-            <a:pPr>
-              <a:spcAft>
-                <a:spcPts val="800"/>
-              </a:spcAft>
-              <a:defRPr sz="1800">
-                <a:solidFill>
-                  <a:srgbClr val="122C4E"/>
-                </a:solidFill>
-                <a:latin typeface="Noto Sans CJK KR"/>
-              </a:defRPr>
-            </a:pPr>
-            <a:r>
-              <a:t>• □ 버전 식별: CHECKSUM_or_TAG.txt의 SHA-256 manifest</a:t>
-            </a:r>
-          </a:p>
-          <a:p>
-            <a:pPr>
-              <a:spcAft>
-                <a:spcPts val="800"/>
-              </a:spcAft>
-              <a:defRPr sz="1800">
-                <a:solidFill>
-                  <a:srgbClr val="122C4E"/>
-                </a:solidFill>
-                <a:latin typeface="Noto Sans CJK KR"/>
-              </a:defRPr>
-            </a:pPr>
-            <a:r>
-              <a:t>• □ 다음 시작 조건: M22 final mission</a:t>
-            </a:r>
-          </a:p>
-        </p:txBody>
-      </p:sp>
-      <p:sp>
-        <p:nvSpPr>
-          <p:cNvPr id="9" name="TextBox 8"/>
-          <p:cNvSpPr txBox="1"/>
-          <p:nvPr/>
-        </p:nvSpPr>
-        <p:spPr>
-          <a:xfrm>
-            <a:off x="868680" y="5596128"/>
-            <a:ext cx="10515600" cy="338328"/>
+            <a:off x="877824" y="4590288"/>
+            <a:ext cx="10241280" cy="594360"/>
           </a:xfrm>
           <a:prstGeom prst="rect">
             <a:avLst/>
@@ -14976,15 +15207,15 @@
               <a:spcAft>
                 <a:spcPts val="0"/>
               </a:spcAft>
-              <a:defRPr sz="1700" b="1">
-                <a:solidFill>
-                  <a:srgbClr val="2A8B5A"/>
-                </a:solidFill>
-                <a:latin typeface="Noto Sans CJK KR"/>
-              </a:defRPr>
-            </a:pPr>
-            <a:r>
-              <a:t>다음 모듈을 시작하기 전, 이 슬라이드의 Complete와 다음 모듈의 Starter를 비교합니다.</a:t>
+              <a:defRPr sz="1900" b="1">
+                <a:solidFill>
+                  <a:srgbClr val="DB7E22"/>
+                </a:solidFill>
+                <a:latin typeface="Noto Sans CJK KR"/>
+              </a:defRPr>
+            </a:pPr>
+            <a:r>
+              <a:t>기록할 것: 바꾼 값(단위) · 기대한 변화 · 실제 출력/화면 · 원래 값으로 되돌린 결과</a:t>
             </a:r>
           </a:p>
         </p:txBody>
@@ -15041,7 +15272,7 @@
               </a:defRPr>
             </a:pPr>
             <a:r>
-              <a:t>공식 참고 자료</a:t>
+              <a:t>rosbag2 재생 절차</a:t>
             </a:r>
           </a:p>
         </p:txBody>
@@ -15080,7 +15311,7 @@
               </a:defRPr>
             </a:pPr>
             <a:r>
-              <a:t>본문 단계는 링크를 열지 않아도 완료할 수 있으며, 링크는 개념을 더 확인할 때만 사용합니다.</a:t>
+              <a:t>통합 단계에서 놓치기 쉬운 실행·운영 조건을 정리합니다.</a:t>
             </a:r>
           </a:p>
         </p:txBody>
@@ -15165,16 +15396,16 @@
       </p:sp>
       <p:sp>
         <p:nvSpPr>
-          <p:cNvPr id="6" name="Rounded Rectangle 5"/>
+          <p:cNvPr id="6" name="Rectangle 5"/>
           <p:cNvSpPr/>
           <p:nvPr/>
         </p:nvSpPr>
         <p:spPr>
           <a:xfrm>
-            <a:off x="658368" y="1554480"/>
-            <a:ext cx="10972800" cy="4526280"/>
-          </a:xfrm>
-          <a:prstGeom prst="roundRect">
+            <a:off x="566928" y="1188720"/>
+            <a:ext cx="11064240" cy="347472"/>
+          </a:xfrm>
+          <a:prstGeom prst="rect">
             <a:avLst/>
           </a:prstGeom>
           <a:solidFill>
@@ -15182,7 +15413,7 @@
           </a:solidFill>
           <a:ln>
             <a:solidFill>
-              <a:srgbClr val="D7DFE9"/>
+              <a:srgbClr val="F4F7FB"/>
             </a:solidFill>
           </a:ln>
         </p:spPr>
@@ -15201,6 +15432,64 @@
           </a:fontRef>
         </p:style>
         <p:txBody>
+          <a:bodyPr rtlCol="0" anchor="ctr" wrap="square" lIns="73152" rIns="73152" tIns="36576" bIns="36576"/>
+          <a:lstStyle/>
+          <a:p>
+            <a:pPr algn="l">
+              <a:spcAft>
+                <a:spcPts val="0"/>
+              </a:spcAft>
+              <a:defRPr sz="1300" b="1">
+                <a:solidFill>
+                  <a:srgbClr val="122C4E"/>
+                </a:solidFill>
+                <a:latin typeface="Noto Sans CJK KR"/>
+              </a:defRPr>
+            </a:pPr>
+            <a:r>
+              <a:t>현재 단계 통합 보강    |    현재 폴더 ~/ros2_curri/agv_ws    |    현재 터미널</a:t>
+            </a:r>
+          </a:p>
+        </p:txBody>
+      </p:sp>
+      <p:sp>
+        <p:nvSpPr>
+          <p:cNvPr id="7" name="Rounded Rectangle 6"/>
+          <p:cNvSpPr/>
+          <p:nvPr/>
+        </p:nvSpPr>
+        <p:spPr>
+          <a:xfrm>
+            <a:off x="676656" y="1691640"/>
+            <a:ext cx="10972800" cy="4434840"/>
+          </a:xfrm>
+          <a:prstGeom prst="roundRect">
+            <a:avLst/>
+          </a:prstGeom>
+          <a:solidFill>
+            <a:srgbClr val="F4F7FB"/>
+          </a:solidFill>
+          <a:ln>
+            <a:solidFill>
+              <a:srgbClr val="D2DEEC"/>
+            </a:solidFill>
+          </a:ln>
+        </p:spPr>
+        <p:style>
+          <a:lnRef idx="1">
+            <a:schemeClr val="accent1"/>
+          </a:lnRef>
+          <a:fillRef idx="3">
+            <a:schemeClr val="accent1"/>
+          </a:fillRef>
+          <a:effectRef idx="2">
+            <a:schemeClr val="accent1"/>
+          </a:effectRef>
+          <a:fontRef idx="minor">
+            <a:schemeClr val="lt1"/>
+          </a:fontRef>
+        </p:style>
+        <p:txBody>
           <a:bodyPr rtlCol="0" anchor="ctr"/>
           <a:lstStyle/>
           <a:p>
@@ -15210,14 +15499,14 @@
       </p:sp>
       <p:sp>
         <p:nvSpPr>
-          <p:cNvPr id="7" name="TextBox 6"/>
+          <p:cNvPr id="8" name="TextBox 7"/>
           <p:cNvSpPr txBox="1"/>
           <p:nvPr/>
         </p:nvSpPr>
         <p:spPr>
           <a:xfrm>
-            <a:off x="914400" y="1773936"/>
-            <a:ext cx="3840480" cy="256032"/>
+            <a:off x="914400" y="1993392"/>
+            <a:ext cx="10332720" cy="3749039"/>
           </a:xfrm>
           <a:prstGeom prst="rect">
             <a:avLst/>
@@ -15225,16 +15514,16 @@
           <a:noFill/>
         </p:spPr>
         <p:txBody>
-          <a:bodyPr wrap="square" lIns="73152" rIns="73152" tIns="36576" bIns="36576">
+          <a:bodyPr wrap="square" lIns="109728" rIns="109728">
             <a:spAutoFit/>
           </a:bodyPr>
           <a:lstStyle/>
           <a:p>
-            <a:pPr algn="l">
-              <a:spcAft>
-                <a:spcPts val="0"/>
-              </a:spcAft>
-              <a:defRPr sz="1700" b="1">
+            <a:pPr>
+              <a:spcAft>
+                <a:spcPts val="800"/>
+              </a:spcAft>
+              <a:defRPr sz="1900">
                 <a:solidFill>
                   <a:srgbClr val="122C4E"/>
                 </a:solidFill>
@@ -15242,77 +15531,15 @@
               </a:defRPr>
             </a:pPr>
             <a:r>
-              <a:t>ROS 2 Jazzy — Gazebo Simulation</a:t>
-            </a:r>
-          </a:p>
-        </p:txBody>
-      </p:sp>
-      <p:sp>
-        <p:nvSpPr>
-          <p:cNvPr id="8" name="TextBox 7"/>
-          <p:cNvSpPr txBox="1"/>
-          <p:nvPr/>
-        </p:nvSpPr>
-        <p:spPr>
-          <a:xfrm>
-            <a:off x="914400" y="2048255"/>
-            <a:ext cx="9966960" cy="475488"/>
-          </a:xfrm>
-          <a:prstGeom prst="rect">
-            <a:avLst/>
-          </a:prstGeom>
-          <a:noFill/>
-        </p:spPr>
-        <p:txBody>
-          <a:bodyPr wrap="square" lIns="73152" rIns="73152" tIns="36576" bIns="36576">
-            <a:spAutoFit/>
-          </a:bodyPr>
-          <a:lstStyle/>
-          <a:p>
-            <a:pPr algn="l">
-              <a:spcAft>
-                <a:spcPts val="0"/>
-              </a:spcAft>
-              <a:defRPr sz="1000" b="0">
-                <a:solidFill>
-                  <a:srgbClr val="225B9B"/>
-                </a:solidFill>
-                <a:latin typeface="DejaVu Sans Mono"/>
-              </a:defRPr>
-            </a:pPr>
-            <a:r>
-              <a:t>https://docs.ros.org/en/jazzy/Tutorials/Advanced/Simulators/Gazebo/Simulation-Gazebo.html</a:t>
-            </a:r>
-          </a:p>
-        </p:txBody>
-      </p:sp>
-      <p:sp>
-        <p:nvSpPr>
-          <p:cNvPr id="9" name="TextBox 8"/>
-          <p:cNvSpPr txBox="1"/>
-          <p:nvPr/>
-        </p:nvSpPr>
-        <p:spPr>
-          <a:xfrm>
-            <a:off x="914400" y="2852928"/>
-            <a:ext cx="3840480" cy="256032"/>
-          </a:xfrm>
-          <a:prstGeom prst="rect">
-            <a:avLst/>
-          </a:prstGeom>
-          <a:noFill/>
-        </p:spPr>
-        <p:txBody>
-          <a:bodyPr wrap="square" lIns="73152" rIns="73152" tIns="36576" bIns="36576">
-            <a:spAutoFit/>
-          </a:bodyPr>
-          <a:lstStyle/>
-          <a:p>
-            <a:pPr algn="l">
-              <a:spcAft>
-                <a:spcPts val="0"/>
-              </a:spcAft>
-              <a:defRPr sz="1700" b="1">
+              <a:t>• 기록 종료 뒤 `ros2 bag info ~/agv_bag_01`로 topic과 duration을 먼저 확인한다.</a:t>
+            </a:r>
+          </a:p>
+          <a:p>
+            <a:pPr>
+              <a:spcAft>
+                <a:spcPts val="800"/>
+              </a:spcAft>
+              <a:defRPr sz="1900">
                 <a:solidFill>
                   <a:srgbClr val="122C4E"/>
                 </a:solidFill>
@@ -15320,77 +15547,15 @@
               </a:defRPr>
             </a:pPr>
             <a:r>
-              <a:t>ROS 2 Jazzy — URDF / robot_state_publisher</a:t>
-            </a:r>
-          </a:p>
-        </p:txBody>
-      </p:sp>
-      <p:sp>
-        <p:nvSpPr>
-          <p:cNvPr id="10" name="TextBox 9"/>
-          <p:cNvSpPr txBox="1"/>
-          <p:nvPr/>
-        </p:nvSpPr>
-        <p:spPr>
-          <a:xfrm>
-            <a:off x="914400" y="3127248"/>
-            <a:ext cx="9966960" cy="475488"/>
-          </a:xfrm>
-          <a:prstGeom prst="rect">
-            <a:avLst/>
-          </a:prstGeom>
-          <a:noFill/>
-        </p:spPr>
-        <p:txBody>
-          <a:bodyPr wrap="square" lIns="73152" rIns="73152" tIns="36576" bIns="36576">
-            <a:spAutoFit/>
-          </a:bodyPr>
-          <a:lstStyle/>
-          <a:p>
-            <a:pPr algn="l">
-              <a:spcAft>
-                <a:spcPts val="0"/>
-              </a:spcAft>
-              <a:defRPr sz="1000" b="0">
-                <a:solidFill>
-                  <a:srgbClr val="225B9B"/>
-                </a:solidFill>
-                <a:latin typeface="DejaVu Sans Mono"/>
-              </a:defRPr>
-            </a:pPr>
-            <a:r>
-              <a:t>https://docs.ros.org/en/jazzy/Tutorials/Intermediate/URDF/Using-URDF-with-Robot-State-Publisher-py.html</a:t>
-            </a:r>
-          </a:p>
-        </p:txBody>
-      </p:sp>
-      <p:sp>
-        <p:nvSpPr>
-          <p:cNvPr id="11" name="TextBox 10"/>
-          <p:cNvSpPr txBox="1"/>
-          <p:nvPr/>
-        </p:nvSpPr>
-        <p:spPr>
-          <a:xfrm>
-            <a:off x="914400" y="3931920"/>
-            <a:ext cx="3840480" cy="256032"/>
-          </a:xfrm>
-          <a:prstGeom prst="rect">
-            <a:avLst/>
-          </a:prstGeom>
-          <a:noFill/>
-        </p:spPr>
-        <p:txBody>
-          <a:bodyPr wrap="square" lIns="73152" rIns="73152" tIns="36576" bIns="36576">
-            <a:spAutoFit/>
-          </a:bodyPr>
-          <a:lstStyle/>
-          <a:p>
-            <a:pPr algn="l">
-              <a:spcAft>
-                <a:spcPts val="0"/>
-              </a:spcAft>
-              <a:defRPr sz="1700" b="1">
+              <a:t>• Gazebo가 없는 terminal에서 processing node를 source·실행한다.</a:t>
+            </a:r>
+          </a:p>
+          <a:p>
+            <a:pPr>
+              <a:spcAft>
+                <a:spcPts val="800"/>
+              </a:spcAft>
+              <a:defRPr sz="1900">
                 <a:solidFill>
                   <a:srgbClr val="122C4E"/>
                 </a:solidFill>
@@ -15398,77 +15563,15 @@
               </a:defRPr>
             </a:pPr>
             <a:r>
-              <a:t>Gazebo — ROS 2 Integration / ros_gz_bridge</a:t>
-            </a:r>
-          </a:p>
-        </p:txBody>
-      </p:sp>
-      <p:sp>
-        <p:nvSpPr>
-          <p:cNvPr id="12" name="TextBox 11"/>
-          <p:cNvSpPr txBox="1"/>
-          <p:nvPr/>
-        </p:nvSpPr>
-        <p:spPr>
-          <a:xfrm>
-            <a:off x="914400" y="4206240"/>
-            <a:ext cx="9966960" cy="475488"/>
-          </a:xfrm>
-          <a:prstGeom prst="rect">
-            <a:avLst/>
-          </a:prstGeom>
-          <a:noFill/>
-        </p:spPr>
-        <p:txBody>
-          <a:bodyPr wrap="square" lIns="73152" rIns="73152" tIns="36576" bIns="36576">
-            <a:spAutoFit/>
-          </a:bodyPr>
-          <a:lstStyle/>
-          <a:p>
-            <a:pPr algn="l">
-              <a:spcAft>
-                <a:spcPts val="0"/>
-              </a:spcAft>
-              <a:defRPr sz="1000" b="0">
-                <a:solidFill>
-                  <a:srgbClr val="225B9B"/>
-                </a:solidFill>
-                <a:latin typeface="DejaVu Sans Mono"/>
-              </a:defRPr>
-            </a:pPr>
-            <a:r>
-              <a:t>https://gazebosim.org/docs/latest/ros2_integration/</a:t>
-            </a:r>
-          </a:p>
-        </p:txBody>
-      </p:sp>
-      <p:sp>
-        <p:nvSpPr>
-          <p:cNvPr id="13" name="TextBox 12"/>
-          <p:cNvSpPr txBox="1"/>
-          <p:nvPr/>
-        </p:nvSpPr>
-        <p:spPr>
-          <a:xfrm>
-            <a:off x="914400" y="5010912"/>
-            <a:ext cx="3840480" cy="256032"/>
-          </a:xfrm>
-          <a:prstGeom prst="rect">
-            <a:avLst/>
-          </a:prstGeom>
-          <a:noFill/>
-        </p:spPr>
-        <p:txBody>
-          <a:bodyPr wrap="square" lIns="73152" rIns="73152" tIns="36576" bIns="36576">
-            <a:spAutoFit/>
-          </a:bodyPr>
-          <a:lstStyle/>
-          <a:p>
-            <a:pPr algn="l">
-              <a:spcAft>
-                <a:spcPts val="0"/>
-              </a:spcAft>
-              <a:defRPr sz="1700" b="1">
+              <a:t>• `ros2 bag play ~/agv_bag_01 --clock`으로 sensor 입력을 다시 공급한다.</a:t>
+            </a:r>
+          </a:p>
+          <a:p>
+            <a:pPr>
+              <a:spcAft>
+                <a:spcPts val="800"/>
+              </a:spcAft>
+              <a:defRPr sz="1900">
                 <a:solidFill>
                   <a:srgbClr val="122C4E"/>
                 </a:solidFill>
@@ -15476,46 +15579,7 @@
               </a:defRPr>
             </a:pPr>
             <a:r>
-              <a:t>ROS 2 Jazzy — rosbag2 Recording and Playback</a:t>
-            </a:r>
-          </a:p>
-        </p:txBody>
-      </p:sp>
-      <p:sp>
-        <p:nvSpPr>
-          <p:cNvPr id="14" name="TextBox 13"/>
-          <p:cNvSpPr txBox="1"/>
-          <p:nvPr/>
-        </p:nvSpPr>
-        <p:spPr>
-          <a:xfrm>
-            <a:off x="914400" y="5285232"/>
-            <a:ext cx="9966960" cy="475488"/>
-          </a:xfrm>
-          <a:prstGeom prst="rect">
-            <a:avLst/>
-          </a:prstGeom>
-          <a:noFill/>
-        </p:spPr>
-        <p:txBody>
-          <a:bodyPr wrap="square" lIns="73152" rIns="73152" tIns="36576" bIns="36576">
-            <a:spAutoFit/>
-          </a:bodyPr>
-          <a:lstStyle/>
-          <a:p>
-            <a:pPr algn="l">
-              <a:spcAft>
-                <a:spcPts val="0"/>
-              </a:spcAft>
-              <a:defRPr sz="1000" b="0">
-                <a:solidFill>
-                  <a:srgbClr val="225B9B"/>
-                </a:solidFill>
-                <a:latin typeface="DejaVu Sans Mono"/>
-              </a:defRPr>
-            </a:pPr>
-            <a:r>
-              <a:t>https://docs.ros.org/en/jazzy/Tutorials/Beginner-CLI-Tools/Recording-And-Playing-Back-Data/Recording-And-Playing-Back-Data.html</a:t>
+              <a:t>• use_sim_time=true 노드는 /clock을 받아 같은 시간축을 사용한다.</a:t>
             </a:r>
           </a:p>
         </p:txBody>
@@ -15747,7 +15811,7 @@
               </a:defRPr>
             </a:pPr>
             <a:r>
-              <a:t>현재 단계 시작    |    현재 폴더 ~/agv_ws    |    현재 터미널</a:t>
+              <a:t>현재 단계 시작    |    현재 폴더 ~/ros2_curri/agv_ws    |    현재 터미널</a:t>
             </a:r>
           </a:p>
         </p:txBody>
@@ -15863,7 +15927,7 @@
               </a:defRPr>
             </a:pPr>
             <a:r>
-              <a:t>• 현재 폴더: ~/agv_ws</a:t>
+              <a:t>• 현재 폴더: ~/ros2_curri/agv_ws</a:t>
             </a:r>
           </a:p>
           <a:p>
@@ -15934,7 +15998,1337 @@
               </a:defRPr>
             </a:pPr>
             <a:r>
-              <a:t>확인: pwd가 ~/agv_ws이고, 이전 모듈의 완료 조건을 한 문장으로 설명할 수 있으면 시작합니다.</a:t>
+              <a:t>확인: pwd가 ~/ros2_curri/agv_ws이고, 이전 모듈의 완료 조건을 한 문장으로 설명할 수 있으면 시작합니다.</a:t>
+            </a:r>
+          </a:p>
+        </p:txBody>
+      </p:sp>
+    </p:spTree>
+  </p:cSld>
+  <p:clrMapOvr>
+    <a:masterClrMapping/>
+  </p:clrMapOvr>
+</p:sld>
+</file>
+
+<file path=ppt/slides/slide30.xml><?xml version="1.0" encoding="utf-8"?>
+<p:sld xmlns:a="http://schemas.openxmlformats.org/drawingml/2006/main" xmlns:p="http://schemas.openxmlformats.org/presentationml/2006/main" xmlns:r="http://schemas.openxmlformats.org/officeDocument/2006/relationships">
+  <p:cSld>
+    <p:spTree>
+      <p:nvGrpSpPr>
+        <p:cNvPr id="1" name=""/>
+        <p:cNvGrpSpPr/>
+        <p:nvPr/>
+      </p:nvGrpSpPr>
+      <p:grpSpPr/>
+      <p:sp>
+        <p:nvSpPr>
+          <p:cNvPr id="2" name="TextBox 1"/>
+          <p:cNvSpPr txBox="1"/>
+          <p:nvPr/>
+        </p:nvSpPr>
+        <p:spPr>
+          <a:xfrm>
+            <a:off x="566928" y="347472"/>
+            <a:ext cx="10881360" cy="438912"/>
+          </a:xfrm>
+          <a:prstGeom prst="rect">
+            <a:avLst/>
+          </a:prstGeom>
+          <a:noFill/>
+        </p:spPr>
+        <p:txBody>
+          <a:bodyPr wrap="square" lIns="73152" rIns="73152" tIns="36576" bIns="36576">
+            <a:spAutoFit/>
+          </a:bodyPr>
+          <a:lstStyle/>
+          <a:p>
+            <a:pPr algn="l">
+              <a:spcAft>
+                <a:spcPts val="0"/>
+              </a:spcAft>
+              <a:defRPr sz="3200" b="1">
+                <a:solidFill>
+                  <a:srgbClr val="122C4E"/>
+                </a:solidFill>
+                <a:latin typeface="Noto Sans CJK KR"/>
+              </a:defRPr>
+            </a:pPr>
+            <a:r>
+              <a:t>증상별 디버깅 도구</a:t>
+            </a:r>
+          </a:p>
+        </p:txBody>
+      </p:sp>
+      <p:sp>
+        <p:nvSpPr>
+          <p:cNvPr id="3" name="TextBox 2"/>
+          <p:cNvSpPr txBox="1"/>
+          <p:nvPr/>
+        </p:nvSpPr>
+        <p:spPr>
+          <a:xfrm>
+            <a:off x="603504" y="859536"/>
+            <a:ext cx="10698480" cy="292608"/>
+          </a:xfrm>
+          <a:prstGeom prst="rect">
+            <a:avLst/>
+          </a:prstGeom>
+          <a:noFill/>
+        </p:spPr>
+        <p:txBody>
+          <a:bodyPr wrap="square" lIns="73152" rIns="73152" tIns="36576" bIns="36576">
+            <a:spAutoFit/>
+          </a:bodyPr>
+          <a:lstStyle/>
+          <a:p>
+            <a:pPr algn="l">
+              <a:spcAft>
+                <a:spcPts val="0"/>
+              </a:spcAft>
+              <a:defRPr sz="1700" b="0">
+                <a:solidFill>
+                  <a:srgbClr val="5C6672"/>
+                </a:solidFill>
+                <a:latin typeface="Noto Sans CJK KR"/>
+              </a:defRPr>
+            </a:pPr>
+            <a:r>
+              <a:t>통합 단계에서 놓치기 쉬운 실행·운영 조건을 정리합니다.</a:t>
+            </a:r>
+          </a:p>
+        </p:txBody>
+      </p:sp>
+      <p:sp>
+        <p:nvSpPr>
+          <p:cNvPr id="4" name="TextBox 3"/>
+          <p:cNvSpPr txBox="1"/>
+          <p:nvPr/>
+        </p:nvSpPr>
+        <p:spPr>
+          <a:xfrm>
+            <a:off x="530352" y="6510528"/>
+            <a:ext cx="7772400" cy="201168"/>
+          </a:xfrm>
+          <a:prstGeom prst="rect">
+            <a:avLst/>
+          </a:prstGeom>
+          <a:noFill/>
+        </p:spPr>
+        <p:txBody>
+          <a:bodyPr wrap="square" lIns="73152" rIns="73152" tIns="36576" bIns="36576">
+            <a:spAutoFit/>
+          </a:bodyPr>
+          <a:lstStyle/>
+          <a:p>
+            <a:pPr algn="l">
+              <a:spcAft>
+                <a:spcPts val="0"/>
+              </a:spcAft>
+              <a:defRPr sz="1000" b="0">
+                <a:solidFill>
+                  <a:srgbClr val="5C6672"/>
+                </a:solidFill>
+                <a:latin typeface="Noto Sans CJK KR"/>
+              </a:defRPr>
+            </a:pPr>
+            <a:r>
+              <a:t>ROS 2 Jazzy · Gazebo Harmonic · M21 · 따라 하기형 AGV 실습</a:t>
+            </a:r>
+          </a:p>
+        </p:txBody>
+      </p:sp>
+      <p:sp>
+        <p:nvSpPr>
+          <p:cNvPr id="5" name="TextBox 4"/>
+          <p:cNvSpPr txBox="1"/>
+          <p:nvPr/>
+        </p:nvSpPr>
+        <p:spPr>
+          <a:xfrm>
+            <a:off x="9144000" y="6510528"/>
+            <a:ext cx="2468880" cy="201168"/>
+          </a:xfrm>
+          <a:prstGeom prst="rect">
+            <a:avLst/>
+          </a:prstGeom>
+          <a:noFill/>
+        </p:spPr>
+        <p:txBody>
+          <a:bodyPr wrap="square" lIns="73152" rIns="73152" tIns="36576" bIns="36576">
+            <a:spAutoFit/>
+          </a:bodyPr>
+          <a:lstStyle/>
+          <a:p>
+            <a:pPr algn="r">
+              <a:spcAft>
+                <a:spcPts val="0"/>
+              </a:spcAft>
+              <a:defRPr sz="1000" b="0">
+                <a:solidFill>
+                  <a:srgbClr val="5C6672"/>
+                </a:solidFill>
+                <a:latin typeface="Noto Sans CJK KR"/>
+              </a:defRPr>
+            </a:pPr>
+            <a:r>
+              <a:t>명령·파일 경로는 슬라이드에서 복사 가능</a:t>
+            </a:r>
+          </a:p>
+        </p:txBody>
+      </p:sp>
+      <p:sp>
+        <p:nvSpPr>
+          <p:cNvPr id="6" name="Rectangle 5"/>
+          <p:cNvSpPr/>
+          <p:nvPr/>
+        </p:nvSpPr>
+        <p:spPr>
+          <a:xfrm>
+            <a:off x="566928" y="1188720"/>
+            <a:ext cx="11064240" cy="347472"/>
+          </a:xfrm>
+          <a:prstGeom prst="rect">
+            <a:avLst/>
+          </a:prstGeom>
+          <a:solidFill>
+            <a:srgbClr val="F4F7FB"/>
+          </a:solidFill>
+          <a:ln>
+            <a:solidFill>
+              <a:srgbClr val="F4F7FB"/>
+            </a:solidFill>
+          </a:ln>
+        </p:spPr>
+        <p:style>
+          <a:lnRef idx="1">
+            <a:schemeClr val="accent1"/>
+          </a:lnRef>
+          <a:fillRef idx="3">
+            <a:schemeClr val="accent1"/>
+          </a:fillRef>
+          <a:effectRef idx="2">
+            <a:schemeClr val="accent1"/>
+          </a:effectRef>
+          <a:fontRef idx="minor">
+            <a:schemeClr val="lt1"/>
+          </a:fontRef>
+        </p:style>
+        <p:txBody>
+          <a:bodyPr rtlCol="0" anchor="ctr" wrap="square" lIns="73152" rIns="73152" tIns="36576" bIns="36576"/>
+          <a:lstStyle/>
+          <a:p>
+            <a:pPr algn="l">
+              <a:spcAft>
+                <a:spcPts val="0"/>
+              </a:spcAft>
+              <a:defRPr sz="1300" b="1">
+                <a:solidFill>
+                  <a:srgbClr val="122C4E"/>
+                </a:solidFill>
+                <a:latin typeface="Noto Sans CJK KR"/>
+              </a:defRPr>
+            </a:pPr>
+            <a:r>
+              <a:t>현재 단계 통합 보강    |    현재 폴더 ~/ros2_curri/agv_ws    |    현재 터미널</a:t>
+            </a:r>
+          </a:p>
+        </p:txBody>
+      </p:sp>
+      <p:sp>
+        <p:nvSpPr>
+          <p:cNvPr id="7" name="Rounded Rectangle 6"/>
+          <p:cNvSpPr/>
+          <p:nvPr/>
+        </p:nvSpPr>
+        <p:spPr>
+          <a:xfrm>
+            <a:off x="676656" y="1691640"/>
+            <a:ext cx="10972800" cy="4434840"/>
+          </a:xfrm>
+          <a:prstGeom prst="roundRect">
+            <a:avLst/>
+          </a:prstGeom>
+          <a:solidFill>
+            <a:srgbClr val="F4F7FB"/>
+          </a:solidFill>
+          <a:ln>
+            <a:solidFill>
+              <a:srgbClr val="D2DEEC"/>
+            </a:solidFill>
+          </a:ln>
+        </p:spPr>
+        <p:style>
+          <a:lnRef idx="1">
+            <a:schemeClr val="accent1"/>
+          </a:lnRef>
+          <a:fillRef idx="3">
+            <a:schemeClr val="accent1"/>
+          </a:fillRef>
+          <a:effectRef idx="2">
+            <a:schemeClr val="accent1"/>
+          </a:effectRef>
+          <a:fontRef idx="minor">
+            <a:schemeClr val="lt1"/>
+          </a:fontRef>
+        </p:style>
+        <p:txBody>
+          <a:bodyPr rtlCol="0" anchor="ctr"/>
+          <a:lstStyle/>
+          <a:p>
+            <a:pPr algn="ctr"/>
+          </a:p>
+        </p:txBody>
+      </p:sp>
+      <p:sp>
+        <p:nvSpPr>
+          <p:cNvPr id="8" name="TextBox 7"/>
+          <p:cNvSpPr txBox="1"/>
+          <p:nvPr/>
+        </p:nvSpPr>
+        <p:spPr>
+          <a:xfrm>
+            <a:off x="914400" y="1993392"/>
+            <a:ext cx="10332720" cy="3749039"/>
+          </a:xfrm>
+          <a:prstGeom prst="rect">
+            <a:avLst/>
+          </a:prstGeom>
+          <a:noFill/>
+        </p:spPr>
+        <p:txBody>
+          <a:bodyPr wrap="square" lIns="109728" rIns="109728">
+            <a:spAutoFit/>
+          </a:bodyPr>
+          <a:lstStyle/>
+          <a:p>
+            <a:pPr>
+              <a:spcAft>
+                <a:spcPts val="800"/>
+              </a:spcAft>
+              <a:defRPr sz="1900">
+                <a:solidFill>
+                  <a:srgbClr val="122C4E"/>
+                </a:solidFill>
+                <a:latin typeface="Noto Sans CJK KR"/>
+              </a:defRPr>
+            </a:pPr>
+            <a:r>
+              <a:t>• node 미실행: ros2 node list</a:t>
+            </a:r>
+          </a:p>
+          <a:p>
+            <a:pPr>
+              <a:spcAft>
+                <a:spcPts val="800"/>
+              </a:spcAft>
+              <a:defRPr sz="1900">
+                <a:solidFill>
+                  <a:srgbClr val="122C4E"/>
+                </a:solidFill>
+                <a:latin typeface="Noto Sans CJK KR"/>
+              </a:defRPr>
+            </a:pPr>
+            <a:r>
+              <a:t>• topic/타입/QoS: ros2 topic info --verbose</a:t>
+            </a:r>
+          </a:p>
+          <a:p>
+            <a:pPr>
+              <a:spcAft>
+                <a:spcPts val="800"/>
+              </a:spcAft>
+              <a:defRPr sz="1900">
+                <a:solidFill>
+                  <a:srgbClr val="122C4E"/>
+                </a:solidFill>
+                <a:latin typeface="Noto Sans CJK KR"/>
+              </a:defRPr>
+            </a:pPr>
+            <a:r>
+              <a:t>• parameter: ros2 param get/list</a:t>
+            </a:r>
+          </a:p>
+          <a:p>
+            <a:pPr>
+              <a:spcAft>
+                <a:spcPts val="800"/>
+              </a:spcAft>
+              <a:defRPr sz="1900">
+                <a:solidFill>
+                  <a:srgbClr val="122C4E"/>
+                </a:solidFill>
+                <a:latin typeface="Noto Sans CJK KR"/>
+              </a:defRPr>
+            </a:pPr>
+            <a:r>
+              <a:t>• frame: tf2_tools view_frames와 RViz2</a:t>
+            </a:r>
+          </a:p>
+          <a:p>
+            <a:pPr>
+              <a:spcAft>
+                <a:spcPts val="800"/>
+              </a:spcAft>
+              <a:defRPr sz="1900">
+                <a:solidFill>
+                  <a:srgbClr val="122C4E"/>
+                </a:solidFill>
+                <a:latin typeface="Noto Sans CJK KR"/>
+              </a:defRPr>
+            </a:pPr>
+            <a:r>
+              <a:t>• 시뮬레이터: Gazebo GUI와 bridge log</a:t>
+            </a:r>
+          </a:p>
+        </p:txBody>
+      </p:sp>
+    </p:spTree>
+  </p:cSld>
+  <p:clrMapOvr>
+    <a:masterClrMapping/>
+  </p:clrMapOvr>
+</p:sld>
+</file>
+
+<file path=ppt/slides/slide31.xml><?xml version="1.0" encoding="utf-8"?>
+<p:sld xmlns:a="http://schemas.openxmlformats.org/drawingml/2006/main" xmlns:p="http://schemas.openxmlformats.org/presentationml/2006/main" xmlns:r="http://schemas.openxmlformats.org/officeDocument/2006/relationships">
+  <p:cSld>
+    <p:spTree>
+      <p:nvGrpSpPr>
+        <p:cNvPr id="1" name=""/>
+        <p:cNvGrpSpPr/>
+        <p:nvPr/>
+      </p:nvGrpSpPr>
+      <p:grpSpPr/>
+      <p:sp>
+        <p:nvSpPr>
+          <p:cNvPr id="2" name="TextBox 1"/>
+          <p:cNvSpPr txBox="1"/>
+          <p:nvPr/>
+        </p:nvSpPr>
+        <p:spPr>
+          <a:xfrm>
+            <a:off x="566928" y="347472"/>
+            <a:ext cx="10881360" cy="438912"/>
+          </a:xfrm>
+          <a:prstGeom prst="rect">
+            <a:avLst/>
+          </a:prstGeom>
+          <a:noFill/>
+        </p:spPr>
+        <p:txBody>
+          <a:bodyPr wrap="square" lIns="73152" rIns="73152" tIns="36576" bIns="36576">
+            <a:spAutoFit/>
+          </a:bodyPr>
+          <a:lstStyle/>
+          <a:p>
+            <a:pPr algn="l">
+              <a:spcAft>
+                <a:spcPts val="0"/>
+              </a:spcAft>
+              <a:defRPr sz="3200" b="1">
+                <a:solidFill>
+                  <a:srgbClr val="122C4E"/>
+                </a:solidFill>
+                <a:latin typeface="Noto Sans CJK KR"/>
+              </a:defRPr>
+            </a:pPr>
+            <a:r>
+              <a:t>체크포인트를 저장하고 다음 모듈로 넘긴다</a:t>
+            </a:r>
+          </a:p>
+        </p:txBody>
+      </p:sp>
+      <p:sp>
+        <p:nvSpPr>
+          <p:cNvPr id="3" name="TextBox 2"/>
+          <p:cNvSpPr txBox="1"/>
+          <p:nvPr/>
+        </p:nvSpPr>
+        <p:spPr>
+          <a:xfrm>
+            <a:off x="603504" y="859536"/>
+            <a:ext cx="10698480" cy="292608"/>
+          </a:xfrm>
+          <a:prstGeom prst="rect">
+            <a:avLst/>
+          </a:prstGeom>
+          <a:noFill/>
+        </p:spPr>
+        <p:txBody>
+          <a:bodyPr wrap="square" lIns="73152" rIns="73152" tIns="36576" bIns="36576">
+            <a:spAutoFit/>
+          </a:bodyPr>
+          <a:lstStyle/>
+          <a:p>
+            <a:pPr algn="l">
+              <a:spcAft>
+                <a:spcPts val="0"/>
+              </a:spcAft>
+              <a:defRPr sz="1700" b="0">
+                <a:solidFill>
+                  <a:srgbClr val="5C6672"/>
+                </a:solidFill>
+                <a:latin typeface="Noto Sans CJK KR"/>
+              </a:defRPr>
+            </a:pPr>
+            <a:r>
+              <a:t>현재 Complete는 다음 Starter의 기준선입니다.</a:t>
+            </a:r>
+          </a:p>
+        </p:txBody>
+      </p:sp>
+      <p:sp>
+        <p:nvSpPr>
+          <p:cNvPr id="4" name="TextBox 3"/>
+          <p:cNvSpPr txBox="1"/>
+          <p:nvPr/>
+        </p:nvSpPr>
+        <p:spPr>
+          <a:xfrm>
+            <a:off x="530352" y="6510528"/>
+            <a:ext cx="7772400" cy="201168"/>
+          </a:xfrm>
+          <a:prstGeom prst="rect">
+            <a:avLst/>
+          </a:prstGeom>
+          <a:noFill/>
+        </p:spPr>
+        <p:txBody>
+          <a:bodyPr wrap="square" lIns="73152" rIns="73152" tIns="36576" bIns="36576">
+            <a:spAutoFit/>
+          </a:bodyPr>
+          <a:lstStyle/>
+          <a:p>
+            <a:pPr algn="l">
+              <a:spcAft>
+                <a:spcPts val="0"/>
+              </a:spcAft>
+              <a:defRPr sz="1000" b="0">
+                <a:solidFill>
+                  <a:srgbClr val="5C6672"/>
+                </a:solidFill>
+                <a:latin typeface="Noto Sans CJK KR"/>
+              </a:defRPr>
+            </a:pPr>
+            <a:r>
+              <a:t>ROS 2 Jazzy · Gazebo Harmonic · M21 · 따라 하기형 AGV 실습</a:t>
+            </a:r>
+          </a:p>
+        </p:txBody>
+      </p:sp>
+      <p:sp>
+        <p:nvSpPr>
+          <p:cNvPr id="5" name="TextBox 4"/>
+          <p:cNvSpPr txBox="1"/>
+          <p:nvPr/>
+        </p:nvSpPr>
+        <p:spPr>
+          <a:xfrm>
+            <a:off x="9144000" y="6510528"/>
+            <a:ext cx="2468880" cy="201168"/>
+          </a:xfrm>
+          <a:prstGeom prst="rect">
+            <a:avLst/>
+          </a:prstGeom>
+          <a:noFill/>
+        </p:spPr>
+        <p:txBody>
+          <a:bodyPr wrap="square" lIns="73152" rIns="73152" tIns="36576" bIns="36576">
+            <a:spAutoFit/>
+          </a:bodyPr>
+          <a:lstStyle/>
+          <a:p>
+            <a:pPr algn="r">
+              <a:spcAft>
+                <a:spcPts val="0"/>
+              </a:spcAft>
+              <a:defRPr sz="1000" b="0">
+                <a:solidFill>
+                  <a:srgbClr val="5C6672"/>
+                </a:solidFill>
+                <a:latin typeface="Noto Sans CJK KR"/>
+              </a:defRPr>
+            </a:pPr>
+            <a:r>
+              <a:t>명령·파일 경로는 슬라이드에서 복사 가능</a:t>
+            </a:r>
+          </a:p>
+        </p:txBody>
+      </p:sp>
+      <p:sp>
+        <p:nvSpPr>
+          <p:cNvPr id="6" name="Rectangle 5"/>
+          <p:cNvSpPr/>
+          <p:nvPr/>
+        </p:nvSpPr>
+        <p:spPr>
+          <a:xfrm>
+            <a:off x="566928" y="1188720"/>
+            <a:ext cx="11064240" cy="347472"/>
+          </a:xfrm>
+          <a:prstGeom prst="rect">
+            <a:avLst/>
+          </a:prstGeom>
+          <a:solidFill>
+            <a:srgbClr val="F4F7FB"/>
+          </a:solidFill>
+          <a:ln>
+            <a:solidFill>
+              <a:srgbClr val="F4F7FB"/>
+            </a:solidFill>
+          </a:ln>
+        </p:spPr>
+        <p:style>
+          <a:lnRef idx="1">
+            <a:schemeClr val="accent1"/>
+          </a:lnRef>
+          <a:fillRef idx="3">
+            <a:schemeClr val="accent1"/>
+          </a:fillRef>
+          <a:effectRef idx="2">
+            <a:schemeClr val="accent1"/>
+          </a:effectRef>
+          <a:fontRef idx="minor">
+            <a:schemeClr val="lt1"/>
+          </a:fontRef>
+        </p:style>
+        <p:txBody>
+          <a:bodyPr rtlCol="0" anchor="ctr" wrap="square" lIns="73152" rIns="73152" tIns="36576" bIns="36576"/>
+          <a:lstStyle/>
+          <a:p>
+            <a:pPr algn="l">
+              <a:spcAft>
+                <a:spcPts val="0"/>
+              </a:spcAft>
+              <a:defRPr sz="1300" b="1">
+                <a:solidFill>
+                  <a:srgbClr val="122C4E"/>
+                </a:solidFill>
+                <a:latin typeface="Noto Sans CJK KR"/>
+              </a:defRPr>
+            </a:pPr>
+            <a:r>
+              <a:t>현재 단계 체크포인트    |    현재 폴더 ~/ros2_curri/agv_ws    |    현재 터미널</a:t>
+            </a:r>
+          </a:p>
+        </p:txBody>
+      </p:sp>
+      <p:sp>
+        <p:nvSpPr>
+          <p:cNvPr id="7" name="Rounded Rectangle 6"/>
+          <p:cNvSpPr/>
+          <p:nvPr/>
+        </p:nvSpPr>
+        <p:spPr>
+          <a:xfrm>
+            <a:off x="685800" y="1737360"/>
+            <a:ext cx="10972800" cy="3611880"/>
+          </a:xfrm>
+          <a:prstGeom prst="roundRect">
+            <a:avLst/>
+          </a:prstGeom>
+          <a:solidFill>
+            <a:srgbClr val="F4F7FB"/>
+          </a:solidFill>
+          <a:ln>
+            <a:solidFill>
+              <a:srgbClr val="D2DCE8"/>
+            </a:solidFill>
+          </a:ln>
+        </p:spPr>
+        <p:style>
+          <a:lnRef idx="1">
+            <a:schemeClr val="accent1"/>
+          </a:lnRef>
+          <a:fillRef idx="3">
+            <a:schemeClr val="accent1"/>
+          </a:fillRef>
+          <a:effectRef idx="2">
+            <a:schemeClr val="accent1"/>
+          </a:effectRef>
+          <a:fontRef idx="minor">
+            <a:schemeClr val="lt1"/>
+          </a:fontRef>
+        </p:style>
+        <p:txBody>
+          <a:bodyPr rtlCol="0" anchor="ctr"/>
+          <a:lstStyle/>
+          <a:p>
+            <a:pPr algn="ctr"/>
+          </a:p>
+        </p:txBody>
+      </p:sp>
+      <p:sp>
+        <p:nvSpPr>
+          <p:cNvPr id="8" name="TextBox 7"/>
+          <p:cNvSpPr txBox="1"/>
+          <p:nvPr/>
+        </p:nvSpPr>
+        <p:spPr>
+          <a:xfrm>
+            <a:off x="896112" y="1993392"/>
+            <a:ext cx="10332720" cy="2971800"/>
+          </a:xfrm>
+          <a:prstGeom prst="rect">
+            <a:avLst/>
+          </a:prstGeom>
+          <a:noFill/>
+        </p:spPr>
+        <p:txBody>
+          <a:bodyPr wrap="square" lIns="109728" rIns="109728">
+            <a:spAutoFit/>
+          </a:bodyPr>
+          <a:lstStyle/>
+          <a:p>
+            <a:pPr>
+              <a:spcAft>
+                <a:spcPts val="800"/>
+              </a:spcAft>
+              <a:defRPr sz="1800">
+                <a:solidFill>
+                  <a:srgbClr val="122C4E"/>
+                </a:solidFill>
+                <a:latin typeface="Noto Sans CJK KR"/>
+              </a:defRPr>
+            </a:pPr>
+            <a:r>
+              <a:t>• □ 완료 화면: 한 launch 명령·YAML parameter·rosbag record/replay 명령을 설명하고 확인한다.</a:t>
+            </a:r>
+          </a:p>
+          <a:p>
+            <a:pPr>
+              <a:spcAft>
+                <a:spcPts val="800"/>
+              </a:spcAft>
+              <a:defRPr sz="1800">
+                <a:solidFill>
+                  <a:srgbClr val="122C4E"/>
+                </a:solidFill>
+                <a:latin typeface="Noto Sans CJK KR"/>
+              </a:defRPr>
+            </a:pPr>
+            <a:r>
+              <a:t>• □ Complete 파일: blocks/F_integration/M21_launch_yaml_rosbag/complete/</a:t>
+            </a:r>
+          </a:p>
+          <a:p>
+            <a:pPr>
+              <a:spcAft>
+                <a:spcPts val="800"/>
+              </a:spcAft>
+              <a:defRPr sz="1800">
+                <a:solidFill>
+                  <a:srgbClr val="122C4E"/>
+                </a:solidFill>
+                <a:latin typeface="Noto Sans CJK KR"/>
+              </a:defRPr>
+            </a:pPr>
+            <a:r>
+              <a:t>• □ 정상 로그·캡처: logs/validation.log, screenshots/validation_terminal.png</a:t>
+            </a:r>
+          </a:p>
+          <a:p>
+            <a:pPr>
+              <a:spcAft>
+                <a:spcPts val="800"/>
+              </a:spcAft>
+              <a:defRPr sz="1800">
+                <a:solidFill>
+                  <a:srgbClr val="122C4E"/>
+                </a:solidFill>
+                <a:latin typeface="Noto Sans CJK KR"/>
+              </a:defRPr>
+            </a:pPr>
+            <a:r>
+              <a:t>• □ 버전 식별: CHECKSUM_or_TAG.txt의 SHA-256 manifest</a:t>
+            </a:r>
+          </a:p>
+          <a:p>
+            <a:pPr>
+              <a:spcAft>
+                <a:spcPts val="800"/>
+              </a:spcAft>
+              <a:defRPr sz="1800">
+                <a:solidFill>
+                  <a:srgbClr val="122C4E"/>
+                </a:solidFill>
+                <a:latin typeface="Noto Sans CJK KR"/>
+              </a:defRPr>
+            </a:pPr>
+            <a:r>
+              <a:t>• □ 다음 시작 조건: M22 final mission</a:t>
+            </a:r>
+          </a:p>
+        </p:txBody>
+      </p:sp>
+      <p:sp>
+        <p:nvSpPr>
+          <p:cNvPr id="9" name="TextBox 8"/>
+          <p:cNvSpPr txBox="1"/>
+          <p:nvPr/>
+        </p:nvSpPr>
+        <p:spPr>
+          <a:xfrm>
+            <a:off x="868680" y="5596128"/>
+            <a:ext cx="10515600" cy="338328"/>
+          </a:xfrm>
+          <a:prstGeom prst="rect">
+            <a:avLst/>
+          </a:prstGeom>
+          <a:noFill/>
+        </p:spPr>
+        <p:txBody>
+          <a:bodyPr wrap="square" lIns="73152" rIns="73152" tIns="36576" bIns="36576">
+            <a:spAutoFit/>
+          </a:bodyPr>
+          <a:lstStyle/>
+          <a:p>
+            <a:pPr algn="ctr">
+              <a:spcAft>
+                <a:spcPts val="0"/>
+              </a:spcAft>
+              <a:defRPr sz="1700" b="1">
+                <a:solidFill>
+                  <a:srgbClr val="2A8B5A"/>
+                </a:solidFill>
+                <a:latin typeface="Noto Sans CJK KR"/>
+              </a:defRPr>
+            </a:pPr>
+            <a:r>
+              <a:t>다음 모듈을 시작하기 전, 이 슬라이드의 Complete와 다음 모듈의 Starter를 비교합니다.</a:t>
+            </a:r>
+          </a:p>
+        </p:txBody>
+      </p:sp>
+    </p:spTree>
+  </p:cSld>
+  <p:clrMapOvr>
+    <a:masterClrMapping/>
+  </p:clrMapOvr>
+</p:sld>
+</file>
+
+<file path=ppt/slides/slide32.xml><?xml version="1.0" encoding="utf-8"?>
+<p:sld xmlns:a="http://schemas.openxmlformats.org/drawingml/2006/main" xmlns:p="http://schemas.openxmlformats.org/presentationml/2006/main" xmlns:r="http://schemas.openxmlformats.org/officeDocument/2006/relationships">
+  <p:cSld>
+    <p:spTree>
+      <p:nvGrpSpPr>
+        <p:cNvPr id="1" name=""/>
+        <p:cNvGrpSpPr/>
+        <p:nvPr/>
+      </p:nvGrpSpPr>
+      <p:grpSpPr/>
+      <p:sp>
+        <p:nvSpPr>
+          <p:cNvPr id="2" name="TextBox 1"/>
+          <p:cNvSpPr txBox="1"/>
+          <p:nvPr/>
+        </p:nvSpPr>
+        <p:spPr>
+          <a:xfrm>
+            <a:off x="566928" y="347472"/>
+            <a:ext cx="10881360" cy="438912"/>
+          </a:xfrm>
+          <a:prstGeom prst="rect">
+            <a:avLst/>
+          </a:prstGeom>
+          <a:noFill/>
+        </p:spPr>
+        <p:txBody>
+          <a:bodyPr wrap="square" lIns="73152" rIns="73152" tIns="36576" bIns="36576">
+            <a:spAutoFit/>
+          </a:bodyPr>
+          <a:lstStyle/>
+          <a:p>
+            <a:pPr algn="l">
+              <a:spcAft>
+                <a:spcPts val="0"/>
+              </a:spcAft>
+              <a:defRPr sz="3200" b="1">
+                <a:solidFill>
+                  <a:srgbClr val="122C4E"/>
+                </a:solidFill>
+                <a:latin typeface="Noto Sans CJK KR"/>
+              </a:defRPr>
+            </a:pPr>
+            <a:r>
+              <a:t>공식 참고 자료</a:t>
+            </a:r>
+          </a:p>
+        </p:txBody>
+      </p:sp>
+      <p:sp>
+        <p:nvSpPr>
+          <p:cNvPr id="3" name="TextBox 2"/>
+          <p:cNvSpPr txBox="1"/>
+          <p:nvPr/>
+        </p:nvSpPr>
+        <p:spPr>
+          <a:xfrm>
+            <a:off x="603504" y="859536"/>
+            <a:ext cx="10698480" cy="292608"/>
+          </a:xfrm>
+          <a:prstGeom prst="rect">
+            <a:avLst/>
+          </a:prstGeom>
+          <a:noFill/>
+        </p:spPr>
+        <p:txBody>
+          <a:bodyPr wrap="square" lIns="73152" rIns="73152" tIns="36576" bIns="36576">
+            <a:spAutoFit/>
+          </a:bodyPr>
+          <a:lstStyle/>
+          <a:p>
+            <a:pPr algn="l">
+              <a:spcAft>
+                <a:spcPts val="0"/>
+              </a:spcAft>
+              <a:defRPr sz="1700" b="0">
+                <a:solidFill>
+                  <a:srgbClr val="5C6672"/>
+                </a:solidFill>
+                <a:latin typeface="Noto Sans CJK KR"/>
+              </a:defRPr>
+            </a:pPr>
+            <a:r>
+              <a:t>본문 단계는 링크를 열지 않아도 완료할 수 있으며, 링크는 개념을 더 확인할 때만 사용합니다.</a:t>
+            </a:r>
+          </a:p>
+        </p:txBody>
+      </p:sp>
+      <p:sp>
+        <p:nvSpPr>
+          <p:cNvPr id="4" name="TextBox 3"/>
+          <p:cNvSpPr txBox="1"/>
+          <p:nvPr/>
+        </p:nvSpPr>
+        <p:spPr>
+          <a:xfrm>
+            <a:off x="530352" y="6510528"/>
+            <a:ext cx="7772400" cy="201168"/>
+          </a:xfrm>
+          <a:prstGeom prst="rect">
+            <a:avLst/>
+          </a:prstGeom>
+          <a:noFill/>
+        </p:spPr>
+        <p:txBody>
+          <a:bodyPr wrap="square" lIns="73152" rIns="73152" tIns="36576" bIns="36576">
+            <a:spAutoFit/>
+          </a:bodyPr>
+          <a:lstStyle/>
+          <a:p>
+            <a:pPr algn="l">
+              <a:spcAft>
+                <a:spcPts val="0"/>
+              </a:spcAft>
+              <a:defRPr sz="1000" b="0">
+                <a:solidFill>
+                  <a:srgbClr val="5C6672"/>
+                </a:solidFill>
+                <a:latin typeface="Noto Sans CJK KR"/>
+              </a:defRPr>
+            </a:pPr>
+            <a:r>
+              <a:t>ROS 2 Jazzy · Gazebo Harmonic · M21 · 따라 하기형 AGV 실습</a:t>
+            </a:r>
+          </a:p>
+        </p:txBody>
+      </p:sp>
+      <p:sp>
+        <p:nvSpPr>
+          <p:cNvPr id="5" name="TextBox 4"/>
+          <p:cNvSpPr txBox="1"/>
+          <p:nvPr/>
+        </p:nvSpPr>
+        <p:spPr>
+          <a:xfrm>
+            <a:off x="9144000" y="6510528"/>
+            <a:ext cx="2468880" cy="201168"/>
+          </a:xfrm>
+          <a:prstGeom prst="rect">
+            <a:avLst/>
+          </a:prstGeom>
+          <a:noFill/>
+        </p:spPr>
+        <p:txBody>
+          <a:bodyPr wrap="square" lIns="73152" rIns="73152" tIns="36576" bIns="36576">
+            <a:spAutoFit/>
+          </a:bodyPr>
+          <a:lstStyle/>
+          <a:p>
+            <a:pPr algn="r">
+              <a:spcAft>
+                <a:spcPts val="0"/>
+              </a:spcAft>
+              <a:defRPr sz="1000" b="0">
+                <a:solidFill>
+                  <a:srgbClr val="5C6672"/>
+                </a:solidFill>
+                <a:latin typeface="Noto Sans CJK KR"/>
+              </a:defRPr>
+            </a:pPr>
+            <a:r>
+              <a:t>명령·파일 경로는 슬라이드에서 복사 가능</a:t>
+            </a:r>
+          </a:p>
+        </p:txBody>
+      </p:sp>
+      <p:sp>
+        <p:nvSpPr>
+          <p:cNvPr id="6" name="Rounded Rectangle 5"/>
+          <p:cNvSpPr/>
+          <p:nvPr/>
+        </p:nvSpPr>
+        <p:spPr>
+          <a:xfrm>
+            <a:off x="658368" y="1554480"/>
+            <a:ext cx="10972800" cy="4526280"/>
+          </a:xfrm>
+          <a:prstGeom prst="roundRect">
+            <a:avLst/>
+          </a:prstGeom>
+          <a:solidFill>
+            <a:srgbClr val="F4F7FB"/>
+          </a:solidFill>
+          <a:ln>
+            <a:solidFill>
+              <a:srgbClr val="D7DFE9"/>
+            </a:solidFill>
+          </a:ln>
+        </p:spPr>
+        <p:style>
+          <a:lnRef idx="1">
+            <a:schemeClr val="accent1"/>
+          </a:lnRef>
+          <a:fillRef idx="3">
+            <a:schemeClr val="accent1"/>
+          </a:fillRef>
+          <a:effectRef idx="2">
+            <a:schemeClr val="accent1"/>
+          </a:effectRef>
+          <a:fontRef idx="minor">
+            <a:schemeClr val="lt1"/>
+          </a:fontRef>
+        </p:style>
+        <p:txBody>
+          <a:bodyPr rtlCol="0" anchor="ctr"/>
+          <a:lstStyle/>
+          <a:p>
+            <a:pPr algn="ctr"/>
+          </a:p>
+        </p:txBody>
+      </p:sp>
+      <p:sp>
+        <p:nvSpPr>
+          <p:cNvPr id="7" name="TextBox 6"/>
+          <p:cNvSpPr txBox="1"/>
+          <p:nvPr/>
+        </p:nvSpPr>
+        <p:spPr>
+          <a:xfrm>
+            <a:off x="914400" y="1773936"/>
+            <a:ext cx="3840480" cy="256032"/>
+          </a:xfrm>
+          <a:prstGeom prst="rect">
+            <a:avLst/>
+          </a:prstGeom>
+          <a:noFill/>
+        </p:spPr>
+        <p:txBody>
+          <a:bodyPr wrap="square" lIns="73152" rIns="73152" tIns="36576" bIns="36576">
+            <a:spAutoFit/>
+          </a:bodyPr>
+          <a:lstStyle/>
+          <a:p>
+            <a:pPr algn="l">
+              <a:spcAft>
+                <a:spcPts val="0"/>
+              </a:spcAft>
+              <a:defRPr sz="1700" b="1">
+                <a:solidFill>
+                  <a:srgbClr val="122C4E"/>
+                </a:solidFill>
+                <a:latin typeface="Noto Sans CJK KR"/>
+              </a:defRPr>
+            </a:pPr>
+            <a:r>
+              <a:t>ROS 2 Jazzy — Gazebo Simulation</a:t>
+            </a:r>
+          </a:p>
+        </p:txBody>
+      </p:sp>
+      <p:sp>
+        <p:nvSpPr>
+          <p:cNvPr id="8" name="TextBox 7"/>
+          <p:cNvSpPr txBox="1"/>
+          <p:nvPr/>
+        </p:nvSpPr>
+        <p:spPr>
+          <a:xfrm>
+            <a:off x="914400" y="2048255"/>
+            <a:ext cx="9966960" cy="475488"/>
+          </a:xfrm>
+          <a:prstGeom prst="rect">
+            <a:avLst/>
+          </a:prstGeom>
+          <a:noFill/>
+        </p:spPr>
+        <p:txBody>
+          <a:bodyPr wrap="square" lIns="73152" rIns="73152" tIns="36576" bIns="36576">
+            <a:spAutoFit/>
+          </a:bodyPr>
+          <a:lstStyle/>
+          <a:p>
+            <a:pPr algn="l">
+              <a:spcAft>
+                <a:spcPts val="0"/>
+              </a:spcAft>
+              <a:defRPr sz="1000" b="0">
+                <a:solidFill>
+                  <a:srgbClr val="225B9B"/>
+                </a:solidFill>
+                <a:latin typeface="DejaVu Sans Mono"/>
+              </a:defRPr>
+            </a:pPr>
+            <a:r>
+              <a:t>https://docs.ros.org/en/jazzy/Tutorials/Advanced/Simulators/Gazebo/Simulation-Gazebo.html</a:t>
+            </a:r>
+          </a:p>
+        </p:txBody>
+      </p:sp>
+      <p:sp>
+        <p:nvSpPr>
+          <p:cNvPr id="9" name="TextBox 8"/>
+          <p:cNvSpPr txBox="1"/>
+          <p:nvPr/>
+        </p:nvSpPr>
+        <p:spPr>
+          <a:xfrm>
+            <a:off x="914400" y="2852928"/>
+            <a:ext cx="3840480" cy="256032"/>
+          </a:xfrm>
+          <a:prstGeom prst="rect">
+            <a:avLst/>
+          </a:prstGeom>
+          <a:noFill/>
+        </p:spPr>
+        <p:txBody>
+          <a:bodyPr wrap="square" lIns="73152" rIns="73152" tIns="36576" bIns="36576">
+            <a:spAutoFit/>
+          </a:bodyPr>
+          <a:lstStyle/>
+          <a:p>
+            <a:pPr algn="l">
+              <a:spcAft>
+                <a:spcPts val="0"/>
+              </a:spcAft>
+              <a:defRPr sz="1700" b="1">
+                <a:solidFill>
+                  <a:srgbClr val="122C4E"/>
+                </a:solidFill>
+                <a:latin typeface="Noto Sans CJK KR"/>
+              </a:defRPr>
+            </a:pPr>
+            <a:r>
+              <a:t>ROS 2 Jazzy — URDF / robot_state_publisher</a:t>
+            </a:r>
+          </a:p>
+        </p:txBody>
+      </p:sp>
+      <p:sp>
+        <p:nvSpPr>
+          <p:cNvPr id="10" name="TextBox 9"/>
+          <p:cNvSpPr txBox="1"/>
+          <p:nvPr/>
+        </p:nvSpPr>
+        <p:spPr>
+          <a:xfrm>
+            <a:off x="914400" y="3127248"/>
+            <a:ext cx="9966960" cy="475488"/>
+          </a:xfrm>
+          <a:prstGeom prst="rect">
+            <a:avLst/>
+          </a:prstGeom>
+          <a:noFill/>
+        </p:spPr>
+        <p:txBody>
+          <a:bodyPr wrap="square" lIns="73152" rIns="73152" tIns="36576" bIns="36576">
+            <a:spAutoFit/>
+          </a:bodyPr>
+          <a:lstStyle/>
+          <a:p>
+            <a:pPr algn="l">
+              <a:spcAft>
+                <a:spcPts val="0"/>
+              </a:spcAft>
+              <a:defRPr sz="1000" b="0">
+                <a:solidFill>
+                  <a:srgbClr val="225B9B"/>
+                </a:solidFill>
+                <a:latin typeface="DejaVu Sans Mono"/>
+              </a:defRPr>
+            </a:pPr>
+            <a:r>
+              <a:t>https://docs.ros.org/en/jazzy/Tutorials/Intermediate/URDF/Using-URDF-with-Robot-State-Publisher-py.html</a:t>
+            </a:r>
+          </a:p>
+        </p:txBody>
+      </p:sp>
+      <p:sp>
+        <p:nvSpPr>
+          <p:cNvPr id="11" name="TextBox 10"/>
+          <p:cNvSpPr txBox="1"/>
+          <p:nvPr/>
+        </p:nvSpPr>
+        <p:spPr>
+          <a:xfrm>
+            <a:off x="914400" y="3931920"/>
+            <a:ext cx="3840480" cy="256032"/>
+          </a:xfrm>
+          <a:prstGeom prst="rect">
+            <a:avLst/>
+          </a:prstGeom>
+          <a:noFill/>
+        </p:spPr>
+        <p:txBody>
+          <a:bodyPr wrap="square" lIns="73152" rIns="73152" tIns="36576" bIns="36576">
+            <a:spAutoFit/>
+          </a:bodyPr>
+          <a:lstStyle/>
+          <a:p>
+            <a:pPr algn="l">
+              <a:spcAft>
+                <a:spcPts val="0"/>
+              </a:spcAft>
+              <a:defRPr sz="1700" b="1">
+                <a:solidFill>
+                  <a:srgbClr val="122C4E"/>
+                </a:solidFill>
+                <a:latin typeface="Noto Sans CJK KR"/>
+              </a:defRPr>
+            </a:pPr>
+            <a:r>
+              <a:t>Gazebo — ROS 2 Integration / ros_gz_bridge</a:t>
+            </a:r>
+          </a:p>
+        </p:txBody>
+      </p:sp>
+      <p:sp>
+        <p:nvSpPr>
+          <p:cNvPr id="12" name="TextBox 11"/>
+          <p:cNvSpPr txBox="1"/>
+          <p:nvPr/>
+        </p:nvSpPr>
+        <p:spPr>
+          <a:xfrm>
+            <a:off x="914400" y="4206240"/>
+            <a:ext cx="9966960" cy="475488"/>
+          </a:xfrm>
+          <a:prstGeom prst="rect">
+            <a:avLst/>
+          </a:prstGeom>
+          <a:noFill/>
+        </p:spPr>
+        <p:txBody>
+          <a:bodyPr wrap="square" lIns="73152" rIns="73152" tIns="36576" bIns="36576">
+            <a:spAutoFit/>
+          </a:bodyPr>
+          <a:lstStyle/>
+          <a:p>
+            <a:pPr algn="l">
+              <a:spcAft>
+                <a:spcPts val="0"/>
+              </a:spcAft>
+              <a:defRPr sz="1000" b="0">
+                <a:solidFill>
+                  <a:srgbClr val="225B9B"/>
+                </a:solidFill>
+                <a:latin typeface="DejaVu Sans Mono"/>
+              </a:defRPr>
+            </a:pPr>
+            <a:r>
+              <a:t>https://gazebosim.org/docs/latest/ros2_integration/</a:t>
+            </a:r>
+          </a:p>
+        </p:txBody>
+      </p:sp>
+      <p:sp>
+        <p:nvSpPr>
+          <p:cNvPr id="13" name="TextBox 12"/>
+          <p:cNvSpPr txBox="1"/>
+          <p:nvPr/>
+        </p:nvSpPr>
+        <p:spPr>
+          <a:xfrm>
+            <a:off x="914400" y="5010912"/>
+            <a:ext cx="3840480" cy="256032"/>
+          </a:xfrm>
+          <a:prstGeom prst="rect">
+            <a:avLst/>
+          </a:prstGeom>
+          <a:noFill/>
+        </p:spPr>
+        <p:txBody>
+          <a:bodyPr wrap="square" lIns="73152" rIns="73152" tIns="36576" bIns="36576">
+            <a:spAutoFit/>
+          </a:bodyPr>
+          <a:lstStyle/>
+          <a:p>
+            <a:pPr algn="l">
+              <a:spcAft>
+                <a:spcPts val="0"/>
+              </a:spcAft>
+              <a:defRPr sz="1700" b="1">
+                <a:solidFill>
+                  <a:srgbClr val="122C4E"/>
+                </a:solidFill>
+                <a:latin typeface="Noto Sans CJK KR"/>
+              </a:defRPr>
+            </a:pPr>
+            <a:r>
+              <a:t>ROS 2 Jazzy — rosbag2 Recording and Playback</a:t>
+            </a:r>
+          </a:p>
+        </p:txBody>
+      </p:sp>
+      <p:sp>
+        <p:nvSpPr>
+          <p:cNvPr id="14" name="TextBox 13"/>
+          <p:cNvSpPr txBox="1"/>
+          <p:nvPr/>
+        </p:nvSpPr>
+        <p:spPr>
+          <a:xfrm>
+            <a:off x="914400" y="5285232"/>
+            <a:ext cx="9966960" cy="475488"/>
+          </a:xfrm>
+          <a:prstGeom prst="rect">
+            <a:avLst/>
+          </a:prstGeom>
+          <a:noFill/>
+        </p:spPr>
+        <p:txBody>
+          <a:bodyPr wrap="square" lIns="73152" rIns="73152" tIns="36576" bIns="36576">
+            <a:spAutoFit/>
+          </a:bodyPr>
+          <a:lstStyle/>
+          <a:p>
+            <a:pPr algn="l">
+              <a:spcAft>
+                <a:spcPts val="0"/>
+              </a:spcAft>
+              <a:defRPr sz="1000" b="0">
+                <a:solidFill>
+                  <a:srgbClr val="225B9B"/>
+                </a:solidFill>
+                <a:latin typeface="DejaVu Sans Mono"/>
+              </a:defRPr>
+            </a:pPr>
+            <a:r>
+              <a:t>https://docs.ros.org/en/jazzy/Tutorials/Beginner-CLI-Tools/Recording-And-Playing-Back-Data/Recording-And-Playing-Back-Data.html</a:t>
             </a:r>
           </a:p>
         </p:txBody>
@@ -17049,7 +18443,7 @@
               </a:defRPr>
             </a:pPr>
             <a:r>
-              <a:t>~/agv_ws/src/</a:t>
+              <a:t>~/ros2_curri/agv_ws/src/</a:t>
             </a:r>
             <a:br/>
             <a:r>
@@ -17348,7 +18742,7 @@
               </a:defRPr>
             </a:pPr>
             <a:r>
-              <a:t>현재 단계 1/3    |    현재 폴더 ~/agv_ws    |    현재 터미널</a:t>
+              <a:t>현재 단계 1/3    |    현재 폴더 ~/ros2_curri/agv_ws    |    현재 터미널</a:t>
             </a:r>
           </a:p>
         </p:txBody>
@@ -17484,7 +18878,7 @@
               </a:defRPr>
             </a:pPr>
             <a:r>
-              <a:t>find ~/agv_ws/src -path '*/config/*.yaml' -type f | sort</a:t>
+              <a:t>find ~/ros2_curri/agv_ws/src -path '*/config/*.yaml' -type f | sort</a:t>
             </a:r>
             <a:br/>
             <a:r>
@@ -17798,7 +19192,7 @@
               </a:defRPr>
             </a:pPr>
             <a:r>
-              <a:t>현재 단계 2/3    |    현재 폴더 ~/agv_ws    |    현재 터미널</a:t>
+              <a:t>현재 단계 2/3    |    현재 폴더 ~/ros2_curri/agv_ws    |    현재 터미널</a:t>
             </a:r>
           </a:p>
         </p:txBody>
@@ -17934,7 +19328,7 @@
               </a:defRPr>
             </a:pPr>
             <a:r>
-              <a:t>source ~/agv_ws/install/setup.bash</a:t>
+              <a:t>source ~/ros2_curri/agv_ws/install/setup.bash</a:t>
             </a:r>
             <a:br/>
             <a:r>
@@ -18248,7 +19642,7 @@
               </a:defRPr>
             </a:pPr>
             <a:r>
-              <a:t>현재 단계 3/3    |    현재 폴더 ~/agv_ws    |    현재 터미널</a:t>
+              <a:t>현재 단계 3/3    |    현재 폴더 ~/ros2_curri/agv_ws    |    현재 터미널</a:t>
             </a:r>
           </a:p>
         </p:txBody>

--- a/blocks/F_integration/M21_launch_yaml_rosbag/M21_Parameter_YAML_Launch_rosbag2.pptx
+++ b/blocks/F_integration/M21_launch_yaml_rosbag/M21_Parameter_YAML_Launch_rosbag2.pptx
@@ -10139,7 +10139,7 @@
               <a:spcAft>
                 <a:spcPts val="0"/>
               </a:spcAft>
-              <a:defRPr sz="1800" b="1">
+              <a:defRPr sz="1400" b="1">
                 <a:solidFill>
                   <a:srgbClr val="FFFFFF"/>
                 </a:solidFill>
@@ -10147,7 +10147,7 @@
               </a:defRPr>
             </a:pPr>
             <a:r>
-              <a:t>M21 · Block F · ROS 2 + Gazebo Sim AGV</a:t>
+              <a:t>ROS 2 기반 AGV End-to-End 개발 커리큘럼 · M21 · Block F</a:t>
             </a:r>
           </a:p>
         </p:txBody>
@@ -10357,7 +10357,7 @@
               <a:spcAft>
                 <a:spcPts val="0"/>
               </a:spcAft>
-              <a:defRPr sz="1000" b="0">
+              <a:defRPr sz="900" b="0">
                 <a:solidFill>
                   <a:srgbClr val="5C6672"/>
                 </a:solidFill>
@@ -10365,7 +10365,7 @@
               </a:defRPr>
             </a:pPr>
             <a:r>
-              <a:t>ROS 2 Jazzy · Gazebo Harmonic · M21 · 따라 하기형 AGV 실습</a:t>
+              <a:t>ROS 2 기반 AGV End-to-End 개발 커리큘럼 · M21 · Block F</a:t>
             </a:r>
           </a:p>
         </p:txBody>
@@ -10531,7 +10531,7 @@
               <a:spcAft>
                 <a:spcPts val="0"/>
               </a:spcAft>
-              <a:defRPr sz="1000" b="0">
+              <a:defRPr sz="900" b="0">
                 <a:solidFill>
                   <a:srgbClr val="5C6672"/>
                 </a:solidFill>
@@ -10539,7 +10539,7 @@
               </a:defRPr>
             </a:pPr>
             <a:r>
-              <a:t>ROS 2 Jazzy · Gazebo Harmonic · M21 · 따라 하기형 AGV 실습</a:t>
+              <a:t>ROS 2 기반 AGV End-to-End 개발 커리큘럼 · M21 · Block F</a:t>
             </a:r>
           </a:p>
         </p:txBody>
@@ -11407,7 +11407,7 @@
               <a:spcAft>
                 <a:spcPts val="0"/>
               </a:spcAft>
-              <a:defRPr sz="1000" b="0">
+              <a:defRPr sz="900" b="0">
                 <a:solidFill>
                   <a:srgbClr val="5C6672"/>
                 </a:solidFill>
@@ -11415,7 +11415,7 @@
               </a:defRPr>
             </a:pPr>
             <a:r>
-              <a:t>ROS 2 Jazzy · Gazebo Harmonic · M21 · 따라 하기형 AGV 실습</a:t>
+              <a:t>ROS 2 기반 AGV End-to-End 개발 커리큘럼 · M21 · Block F</a:t>
             </a:r>
           </a:p>
         </p:txBody>
@@ -12283,7 +12283,7 @@
               <a:spcAft>
                 <a:spcPts val="0"/>
               </a:spcAft>
-              <a:defRPr sz="1000" b="0">
+              <a:defRPr sz="900" b="0">
                 <a:solidFill>
                   <a:srgbClr val="5C6672"/>
                 </a:solidFill>
@@ -12291,7 +12291,7 @@
               </a:defRPr>
             </a:pPr>
             <a:r>
-              <a:t>ROS 2 Jazzy · Gazebo Harmonic · M21 · 따라 하기형 AGV 실습</a:t>
+              <a:t>ROS 2 기반 AGV End-to-End 개발 커리큘럼 · M21 · Block F</a:t>
             </a:r>
           </a:p>
         </p:txBody>
@@ -13159,7 +13159,7 @@
               <a:spcAft>
                 <a:spcPts val="0"/>
               </a:spcAft>
-              <a:defRPr sz="1000" b="0">
+              <a:defRPr sz="900" b="0">
                 <a:solidFill>
                   <a:srgbClr val="5C6672"/>
                 </a:solidFill>
@@ -13167,7 +13167,7 @@
               </a:defRPr>
             </a:pPr>
             <a:r>
-              <a:t>ROS 2 Jazzy · Gazebo Harmonic · M21 · 따라 하기형 AGV 실습</a:t>
+              <a:t>ROS 2 기반 AGV End-to-End 개발 커리큘럼 · M21 · Block F</a:t>
             </a:r>
           </a:p>
         </p:txBody>
@@ -13713,7 +13713,7 @@
               <a:spcAft>
                 <a:spcPts val="0"/>
               </a:spcAft>
-              <a:defRPr sz="1000" b="0">
+              <a:defRPr sz="900" b="0">
                 <a:solidFill>
                   <a:srgbClr val="5C6672"/>
                 </a:solidFill>
@@ -13721,7 +13721,7 @@
               </a:defRPr>
             </a:pPr>
             <a:r>
-              <a:t>ROS 2 Jazzy · Gazebo Harmonic · M21 · 따라 하기형 AGV 실습</a:t>
+              <a:t>ROS 2 기반 AGV End-to-End 개발 커리큘럼 · M21 · Block F</a:t>
             </a:r>
           </a:p>
         </p:txBody>
@@ -14241,7 +14241,7 @@
               <a:spcAft>
                 <a:spcPts val="0"/>
               </a:spcAft>
-              <a:defRPr sz="1000" b="0">
+              <a:defRPr sz="900" b="0">
                 <a:solidFill>
                   <a:srgbClr val="5C6672"/>
                 </a:solidFill>
@@ -14249,7 +14249,7 @@
               </a:defRPr>
             </a:pPr>
             <a:r>
-              <a:t>ROS 2 Jazzy · Gazebo Harmonic · M21 · 따라 하기형 AGV 실습</a:t>
+              <a:t>ROS 2 기반 AGV End-to-End 개발 커리큘럼 · M21 · Block F</a:t>
             </a:r>
           </a:p>
         </p:txBody>
@@ -15030,7 +15030,7 @@
               <a:spcAft>
                 <a:spcPts val="0"/>
               </a:spcAft>
-              <a:defRPr sz="1000" b="0">
+              <a:defRPr sz="900" b="0">
                 <a:solidFill>
                   <a:srgbClr val="5C6672"/>
                 </a:solidFill>
@@ -15038,7 +15038,7 @@
               </a:defRPr>
             </a:pPr>
             <a:r>
-              <a:t>ROS 2 Jazzy · Gazebo Harmonic · M21 · 따라 하기형 AGV 실습</a:t>
+              <a:t>ROS 2 기반 AGV End-to-End 개발 커리큘럼 · M21 · Block F</a:t>
             </a:r>
           </a:p>
         </p:txBody>
@@ -15599,7 +15599,7 @@
               <a:spcAft>
                 <a:spcPts val="0"/>
               </a:spcAft>
-              <a:defRPr sz="1000" b="0">
+              <a:defRPr sz="900" b="0">
                 <a:solidFill>
                   <a:srgbClr val="5C6672"/>
                 </a:solidFill>
@@ -15607,7 +15607,7 @@
               </a:defRPr>
             </a:pPr>
             <a:r>
-              <a:t>ROS 2 Jazzy · Gazebo Harmonic · M21 · 따라 하기형 AGV 실습</a:t>
+              <a:t>ROS 2 기반 AGV End-to-End 개발 커리큘럼 · M21 · Block F</a:t>
             </a:r>
           </a:p>
         </p:txBody>
@@ -16073,7 +16073,7 @@
               <a:spcAft>
                 <a:spcPts val="0"/>
               </a:spcAft>
-              <a:defRPr sz="1000" b="0">
+              <a:defRPr sz="900" b="0">
                 <a:solidFill>
                   <a:srgbClr val="5C6672"/>
                 </a:solidFill>
@@ -16081,7 +16081,7 @@
               </a:defRPr>
             </a:pPr>
             <a:r>
-              <a:t>ROS 2 Jazzy · Gazebo Harmonic · M21 · 따라 하기형 AGV 실습</a:t>
+              <a:t>ROS 2 기반 AGV End-to-End 개발 커리큘럼 · M21 · Block F</a:t>
             </a:r>
           </a:p>
         </p:txBody>
@@ -16547,7 +16547,7 @@
               <a:spcAft>
                 <a:spcPts val="0"/>
               </a:spcAft>
-              <a:defRPr sz="1000" b="0">
+              <a:defRPr sz="900" b="0">
                 <a:solidFill>
                   <a:srgbClr val="5C6672"/>
                 </a:solidFill>
@@ -16555,7 +16555,7 @@
               </a:defRPr>
             </a:pPr>
             <a:r>
-              <a:t>ROS 2 Jazzy · Gazebo Harmonic · M21 · 따라 하기형 AGV 실습</a:t>
+              <a:t>ROS 2 기반 AGV End-to-End 개발 커리큘럼 · M21 · Block F</a:t>
             </a:r>
           </a:p>
         </p:txBody>
@@ -16998,7 +16998,7 @@
               <a:spcAft>
                 <a:spcPts val="0"/>
               </a:spcAft>
-              <a:defRPr sz="1000" b="0">
+              <a:defRPr sz="900" b="0">
                 <a:solidFill>
                   <a:srgbClr val="5C6672"/>
                 </a:solidFill>
@@ -17006,7 +17006,7 @@
               </a:defRPr>
             </a:pPr>
             <a:r>
-              <a:t>ROS 2 Jazzy · Gazebo Harmonic · M21 · 따라 하기형 AGV 실습</a:t>
+              <a:t>ROS 2 기반 AGV End-to-End 개발 커리큘럼 · M21 · Block F</a:t>
             </a:r>
           </a:p>
         </p:txBody>
@@ -17459,7 +17459,7 @@
               <a:spcAft>
                 <a:spcPts val="0"/>
               </a:spcAft>
-              <a:defRPr sz="1000" b="0">
+              <a:defRPr sz="900" b="0">
                 <a:solidFill>
                   <a:srgbClr val="5C6672"/>
                 </a:solidFill>
@@ -17467,7 +17467,7 @@
               </a:defRPr>
             </a:pPr>
             <a:r>
-              <a:t>ROS 2 Jazzy · Gazebo Harmonic · M21 · 따라 하기형 AGV 실습</a:t>
+              <a:t>ROS 2 기반 AGV End-to-End 개발 커리큘럼 · M21 · Block F</a:t>
             </a:r>
           </a:p>
         </p:txBody>
@@ -17987,7 +17987,7 @@
               <a:spcAft>
                 <a:spcPts val="0"/>
               </a:spcAft>
-              <a:defRPr sz="1000" b="0">
+              <a:defRPr sz="900" b="0">
                 <a:solidFill>
                   <a:srgbClr val="5C6672"/>
                 </a:solidFill>
@@ -17995,7 +17995,7 @@
               </a:defRPr>
             </a:pPr>
             <a:r>
-              <a:t>ROS 2 Jazzy · Gazebo Harmonic · M21 · 따라 하기형 AGV 실습</a:t>
+              <a:t>ROS 2 기반 AGV End-to-End 개발 커리큘럼 · M21 · Block F</a:t>
             </a:r>
           </a:p>
         </p:txBody>
@@ -18780,7 +18780,7 @@
               <a:spcAft>
                 <a:spcPts val="0"/>
               </a:spcAft>
-              <a:defRPr sz="1000" b="0">
+              <a:defRPr sz="900" b="0">
                 <a:solidFill>
                   <a:srgbClr val="5C6672"/>
                 </a:solidFill>
@@ -18788,7 +18788,7 @@
               </a:defRPr>
             </a:pPr>
             <a:r>
-              <a:t>ROS 2 Jazzy · Gazebo Harmonic · M21 · 따라 하기형 AGV 실습</a:t>
+              <a:t>ROS 2 기반 AGV End-to-End 개발 커리큘럼 · M21 · Block F</a:t>
             </a:r>
           </a:p>
         </p:txBody>
@@ -19349,7 +19349,7 @@
               <a:spcAft>
                 <a:spcPts val="0"/>
               </a:spcAft>
-              <a:defRPr sz="1000" b="0">
+              <a:defRPr sz="900" b="0">
                 <a:solidFill>
                   <a:srgbClr val="5C6672"/>
                 </a:solidFill>
@@ -19357,7 +19357,7 @@
               </a:defRPr>
             </a:pPr>
             <a:r>
-              <a:t>ROS 2 Jazzy · Gazebo Harmonic · M21 · 따라 하기형 AGV 실습</a:t>
+              <a:t>ROS 2 기반 AGV End-to-End 개발 커리큘럼 · M21 · Block F</a:t>
             </a:r>
           </a:p>
         </p:txBody>
@@ -19815,7 +19815,7 @@
               <a:spcAft>
                 <a:spcPts val="0"/>
               </a:spcAft>
-              <a:defRPr sz="1000" b="0">
+              <a:defRPr sz="900" b="0">
                 <a:solidFill>
                   <a:srgbClr val="5C6672"/>
                 </a:solidFill>
@@ -19823,7 +19823,7 @@
               </a:defRPr>
             </a:pPr>
             <a:r>
-              <a:t>ROS 2 Jazzy · Gazebo Harmonic · M21 · 따라 하기형 AGV 실습</a:t>
+              <a:t>ROS 2 기반 AGV End-to-End 개발 커리큘럼 · M21 · Block F</a:t>
             </a:r>
           </a:p>
         </p:txBody>
@@ -20343,7 +20343,7 @@
               <a:spcAft>
                 <a:spcPts val="0"/>
               </a:spcAft>
-              <a:defRPr sz="1000" b="0">
+              <a:defRPr sz="900" b="0">
                 <a:solidFill>
                   <a:srgbClr val="5C6672"/>
                 </a:solidFill>
@@ -20351,7 +20351,7 @@
               </a:defRPr>
             </a:pPr>
             <a:r>
-              <a:t>ROS 2 Jazzy · Gazebo Harmonic · M21 · 따라 하기형 AGV 실습</a:t>
+              <a:t>ROS 2 기반 AGV End-to-End 개발 커리큘럼 · M21 · Block F</a:t>
             </a:r>
           </a:p>
         </p:txBody>
@@ -21132,7 +21132,7 @@
               <a:spcAft>
                 <a:spcPts val="0"/>
               </a:spcAft>
-              <a:defRPr sz="1000" b="0">
+              <a:defRPr sz="900" b="0">
                 <a:solidFill>
                   <a:srgbClr val="5C6672"/>
                 </a:solidFill>
@@ -21140,7 +21140,7 @@
               </a:defRPr>
             </a:pPr>
             <a:r>
-              <a:t>ROS 2 Jazzy · Gazebo Harmonic · M21 · 따라 하기형 AGV 실습</a:t>
+              <a:t>ROS 2 기반 AGV End-to-End 개발 커리큘럼 · M21 · Block F</a:t>
             </a:r>
           </a:p>
         </p:txBody>
@@ -21701,7 +21701,7 @@
               <a:spcAft>
                 <a:spcPts val="0"/>
               </a:spcAft>
-              <a:defRPr sz="1000" b="0">
+              <a:defRPr sz="900" b="0">
                 <a:solidFill>
                   <a:srgbClr val="5C6672"/>
                 </a:solidFill>
@@ -21709,7 +21709,7 @@
               </a:defRPr>
             </a:pPr>
             <a:r>
-              <a:t>ROS 2 Jazzy · Gazebo Harmonic · M21 · 따라 하기형 AGV 실습</a:t>
+              <a:t>ROS 2 기반 AGV End-to-End 개발 커리큘럼 · M21 · Block F</a:t>
             </a:r>
           </a:p>
         </p:txBody>
@@ -22139,7 +22139,7 @@
               <a:spcAft>
                 <a:spcPts val="0"/>
               </a:spcAft>
-              <a:defRPr sz="1000" b="0">
+              <a:defRPr sz="900" b="0">
                 <a:solidFill>
                   <a:srgbClr val="5C6672"/>
                 </a:solidFill>
@@ -22147,7 +22147,7 @@
               </a:defRPr>
             </a:pPr>
             <a:r>
-              <a:t>ROS 2 Jazzy · Gazebo Harmonic · M21 · 따라 하기형 AGV 실습</a:t>
+              <a:t>ROS 2 기반 AGV End-to-End 개발 커리큘럼 · M21 · Block F</a:t>
             </a:r>
           </a:p>
         </p:txBody>
@@ -22667,7 +22667,7 @@
               <a:spcAft>
                 <a:spcPts val="0"/>
               </a:spcAft>
-              <a:defRPr sz="1000" b="0">
+              <a:defRPr sz="900" b="0">
                 <a:solidFill>
                   <a:srgbClr val="5C6672"/>
                 </a:solidFill>
@@ -22675,7 +22675,7 @@
               </a:defRPr>
             </a:pPr>
             <a:r>
-              <a:t>ROS 2 Jazzy · Gazebo Harmonic · M21 · 따라 하기형 AGV 실습</a:t>
+              <a:t>ROS 2 기반 AGV End-to-End 개발 커리큘럼 · M21 · Block F</a:t>
             </a:r>
           </a:p>
         </p:txBody>
@@ -23456,7 +23456,7 @@
               <a:spcAft>
                 <a:spcPts val="0"/>
               </a:spcAft>
-              <a:defRPr sz="1000" b="0">
+              <a:defRPr sz="900" b="0">
                 <a:solidFill>
                   <a:srgbClr val="5C6672"/>
                 </a:solidFill>
@@ -23464,7 +23464,7 @@
               </a:defRPr>
             </a:pPr>
             <a:r>
-              <a:t>ROS 2 Jazzy · Gazebo Harmonic · M21 · 따라 하기형 AGV 실습</a:t>
+              <a:t>ROS 2 기반 AGV End-to-End 개발 커리큘럼 · M21 · Block F</a:t>
             </a:r>
           </a:p>
         </p:txBody>
@@ -23875,7 +23875,7 @@
               <a:spcAft>
                 <a:spcPts val="0"/>
               </a:spcAft>
-              <a:defRPr sz="1000" b="0">
+              <a:defRPr sz="900" b="0">
                 <a:solidFill>
                   <a:srgbClr val="5C6672"/>
                 </a:solidFill>
@@ -23883,7 +23883,7 @@
               </a:defRPr>
             </a:pPr>
             <a:r>
-              <a:t>ROS 2 Jazzy · Gazebo Harmonic · M21 · 따라 하기형 AGV 실습</a:t>
+              <a:t>ROS 2 기반 AGV End-to-End 개발 커리큘럼 · M21 · Block F</a:t>
             </a:r>
           </a:p>
         </p:txBody>
@@ -24444,7 +24444,7 @@
               <a:spcAft>
                 <a:spcPts val="0"/>
               </a:spcAft>
-              <a:defRPr sz="1000" b="0">
+              <a:defRPr sz="900" b="0">
                 <a:solidFill>
                   <a:srgbClr val="5C6672"/>
                 </a:solidFill>
@@ -24452,7 +24452,7 @@
               </a:defRPr>
             </a:pPr>
             <a:r>
-              <a:t>ROS 2 Jazzy · Gazebo Harmonic · M21 · 따라 하기형 AGV 실습</a:t>
+              <a:t>ROS 2 기반 AGV End-to-End 개발 커리큘럼 · M21 · Block F</a:t>
             </a:r>
           </a:p>
         </p:txBody>
@@ -24898,7 +24898,7 @@
               <a:spcAft>
                 <a:spcPts val="0"/>
               </a:spcAft>
-              <a:defRPr sz="1000" b="0">
+              <a:defRPr sz="900" b="0">
                 <a:solidFill>
                   <a:srgbClr val="5C6672"/>
                 </a:solidFill>
@@ -24906,7 +24906,7 @@
               </a:defRPr>
             </a:pPr>
             <a:r>
-              <a:t>ROS 2 Jazzy · Gazebo Harmonic · M21 · 따라 하기형 AGV 실습</a:t>
+              <a:t>ROS 2 기반 AGV End-to-End 개발 커리큘럼 · M21 · Block F</a:t>
             </a:r>
           </a:p>
         </p:txBody>
@@ -25426,7 +25426,7 @@
               <a:spcAft>
                 <a:spcPts val="0"/>
               </a:spcAft>
-              <a:defRPr sz="1000" b="0">
+              <a:defRPr sz="900" b="0">
                 <a:solidFill>
                   <a:srgbClr val="5C6672"/>
                 </a:solidFill>
@@ -25434,7 +25434,7 @@
               </a:defRPr>
             </a:pPr>
             <a:r>
-              <a:t>ROS 2 Jazzy · Gazebo Harmonic · M21 · 따라 하기형 AGV 실습</a:t>
+              <a:t>ROS 2 기반 AGV End-to-End 개발 커리큘럼 · M21 · Block F</a:t>
             </a:r>
           </a:p>
         </p:txBody>
@@ -26215,7 +26215,7 @@
               <a:spcAft>
                 <a:spcPts val="0"/>
               </a:spcAft>
-              <a:defRPr sz="1000" b="0">
+              <a:defRPr sz="900" b="0">
                 <a:solidFill>
                   <a:srgbClr val="5C6672"/>
                 </a:solidFill>
@@ -26223,7 +26223,7 @@
               </a:defRPr>
             </a:pPr>
             <a:r>
-              <a:t>ROS 2 Jazzy · Gazebo Harmonic · M21 · 따라 하기형 AGV 실습</a:t>
+              <a:t>ROS 2 기반 AGV End-to-End 개발 커리큘럼 · M21 · Block F</a:t>
             </a:r>
           </a:p>
         </p:txBody>
@@ -26784,7 +26784,7 @@
               <a:spcAft>
                 <a:spcPts val="0"/>
               </a:spcAft>
-              <a:defRPr sz="1000" b="0">
+              <a:defRPr sz="900" b="0">
                 <a:solidFill>
                   <a:srgbClr val="5C6672"/>
                 </a:solidFill>
@@ -26792,7 +26792,7 @@
               </a:defRPr>
             </a:pPr>
             <a:r>
-              <a:t>ROS 2 Jazzy · Gazebo Harmonic · M21 · 따라 하기형 AGV 실습</a:t>
+              <a:t>ROS 2 기반 AGV End-to-End 개발 커리큘럼 · M21 · Block F</a:t>
             </a:r>
           </a:p>
         </p:txBody>
@@ -27238,7 +27238,7 @@
               <a:spcAft>
                 <a:spcPts val="0"/>
               </a:spcAft>
-              <a:defRPr sz="1000" b="0">
+              <a:defRPr sz="900" b="0">
                 <a:solidFill>
                   <a:srgbClr val="5C6672"/>
                 </a:solidFill>
@@ -27246,7 +27246,7 @@
               </a:defRPr>
             </a:pPr>
             <a:r>
-              <a:t>ROS 2 Jazzy · Gazebo Harmonic · M21 · 따라 하기형 AGV 실습</a:t>
+              <a:t>ROS 2 기반 AGV End-to-End 개발 커리큘럼 · M21 · Block F</a:t>
             </a:r>
           </a:p>
         </p:txBody>
@@ -27766,7 +27766,7 @@
               <a:spcAft>
                 <a:spcPts val="0"/>
               </a:spcAft>
-              <a:defRPr sz="1000" b="0">
+              <a:defRPr sz="900" b="0">
                 <a:solidFill>
                   <a:srgbClr val="5C6672"/>
                 </a:solidFill>
@@ -27774,7 +27774,7 @@
               </a:defRPr>
             </a:pPr>
             <a:r>
-              <a:t>ROS 2 Jazzy · Gazebo Harmonic · M21 · 따라 하기형 AGV 실습</a:t>
+              <a:t>ROS 2 기반 AGV End-to-End 개발 커리큘럼 · M21 · Block F</a:t>
             </a:r>
           </a:p>
         </p:txBody>
@@ -28555,7 +28555,7 @@
               <a:spcAft>
                 <a:spcPts val="0"/>
               </a:spcAft>
-              <a:defRPr sz="1000" b="0">
+              <a:defRPr sz="900" b="0">
                 <a:solidFill>
                   <a:srgbClr val="5C6672"/>
                 </a:solidFill>
@@ -28563,7 +28563,7 @@
               </a:defRPr>
             </a:pPr>
             <a:r>
-              <a:t>ROS 2 Jazzy · Gazebo Harmonic · M21 · 따라 하기형 AGV 실습</a:t>
+              <a:t>ROS 2 기반 AGV End-to-End 개발 커리큘럼 · M21 · Block F</a:t>
             </a:r>
           </a:p>
         </p:txBody>
@@ -29124,7 +29124,7 @@
               <a:spcAft>
                 <a:spcPts val="0"/>
               </a:spcAft>
-              <a:defRPr sz="1000" b="0">
+              <a:defRPr sz="900" b="0">
                 <a:solidFill>
                   <a:srgbClr val="5C6672"/>
                 </a:solidFill>
@@ -29132,7 +29132,7 @@
               </a:defRPr>
             </a:pPr>
             <a:r>
-              <a:t>ROS 2 Jazzy · Gazebo Harmonic · M21 · 따라 하기형 AGV 실습</a:t>
+              <a:t>ROS 2 기반 AGV End-to-End 개발 커리큘럼 · M21 · Block F</a:t>
             </a:r>
           </a:p>
         </p:txBody>
@@ -29598,7 +29598,7 @@
               <a:spcAft>
                 <a:spcPts val="0"/>
               </a:spcAft>
-              <a:defRPr sz="1000" b="0">
+              <a:defRPr sz="900" b="0">
                 <a:solidFill>
                   <a:srgbClr val="5C6672"/>
                 </a:solidFill>
@@ -29606,7 +29606,7 @@
               </a:defRPr>
             </a:pPr>
             <a:r>
-              <a:t>ROS 2 Jazzy · Gazebo Harmonic · M21 · 따라 하기형 AGV 실습</a:t>
+              <a:t>ROS 2 기반 AGV End-to-End 개발 커리큘럼 · M21 · Block F</a:t>
             </a:r>
           </a:p>
         </p:txBody>
@@ -29931,7 +29931,7 @@
               <a:spcAft>
                 <a:spcPts val="0"/>
               </a:spcAft>
-              <a:defRPr sz="1000" b="0">
+              <a:defRPr sz="900" b="0">
                 <a:solidFill>
                   <a:srgbClr val="5C6672"/>
                 </a:solidFill>
@@ -29939,7 +29939,7 @@
               </a:defRPr>
             </a:pPr>
             <a:r>
-              <a:t>ROS 2 Jazzy · Gazebo Harmonic · M21 · 따라 하기형 AGV 실습</a:t>
+              <a:t>ROS 2 기반 AGV End-to-End 개발 커리큘럼 · M21 · Block F</a:t>
             </a:r>
           </a:p>
         </p:txBody>
@@ -30361,7 +30361,7 @@
               <a:spcAft>
                 <a:spcPts val="0"/>
               </a:spcAft>
-              <a:defRPr sz="1000" b="0">
+              <a:defRPr sz="900" b="0">
                 <a:solidFill>
                   <a:srgbClr val="5C6672"/>
                 </a:solidFill>
@@ -30369,7 +30369,7 @@
               </a:defRPr>
             </a:pPr>
             <a:r>
-              <a:t>ROS 2 Jazzy · Gazebo Harmonic · M21 · 따라 하기형 AGV 실습</a:t>
+              <a:t>ROS 2 기반 AGV End-to-End 개발 커리큘럼 · M21 · Block F</a:t>
             </a:r>
           </a:p>
         </p:txBody>
@@ -30889,7 +30889,7 @@
               <a:spcAft>
                 <a:spcPts val="0"/>
               </a:spcAft>
-              <a:defRPr sz="1000" b="0">
+              <a:defRPr sz="900" b="0">
                 <a:solidFill>
                   <a:srgbClr val="5C6672"/>
                 </a:solidFill>
@@ -30897,7 +30897,7 @@
               </a:defRPr>
             </a:pPr>
             <a:r>
-              <a:t>ROS 2 Jazzy · Gazebo Harmonic · M21 · 따라 하기형 AGV 실습</a:t>
+              <a:t>ROS 2 기반 AGV End-to-End 개발 커리큘럼 · M21 · Block F</a:t>
             </a:r>
           </a:p>
         </p:txBody>
@@ -31678,7 +31678,7 @@
               <a:spcAft>
                 <a:spcPts val="0"/>
               </a:spcAft>
-              <a:defRPr sz="1000" b="0">
+              <a:defRPr sz="900" b="0">
                 <a:solidFill>
                   <a:srgbClr val="5C6672"/>
                 </a:solidFill>
@@ -31686,7 +31686,7 @@
               </a:defRPr>
             </a:pPr>
             <a:r>
-              <a:t>ROS 2 Jazzy · Gazebo Harmonic · M21 · 따라 하기형 AGV 실습</a:t>
+              <a:t>ROS 2 기반 AGV End-to-End 개발 커리큘럼 · M21 · Block F</a:t>
             </a:r>
           </a:p>
         </p:txBody>
@@ -32247,7 +32247,7 @@
               <a:spcAft>
                 <a:spcPts val="0"/>
               </a:spcAft>
-              <a:defRPr sz="1000" b="0">
+              <a:defRPr sz="900" b="0">
                 <a:solidFill>
                   <a:srgbClr val="5C6672"/>
                 </a:solidFill>
@@ -32255,7 +32255,7 @@
               </a:defRPr>
             </a:pPr>
             <a:r>
-              <a:t>ROS 2 Jazzy · Gazebo Harmonic · M21 · 따라 하기형 AGV 실습</a:t>
+              <a:t>ROS 2 기반 AGV End-to-End 개발 커리큘럼 · M21 · Block F</a:t>
             </a:r>
           </a:p>
         </p:txBody>
@@ -32721,7 +32721,7 @@
               <a:spcAft>
                 <a:spcPts val="0"/>
               </a:spcAft>
-              <a:defRPr sz="1000" b="0">
+              <a:defRPr sz="900" b="0">
                 <a:solidFill>
                   <a:srgbClr val="5C6672"/>
                 </a:solidFill>
@@ -32729,7 +32729,7 @@
               </a:defRPr>
             </a:pPr>
             <a:r>
-              <a:t>ROS 2 Jazzy · Gazebo Harmonic · M21 · 따라 하기형 AGV 실습</a:t>
+              <a:t>ROS 2 기반 AGV End-to-End 개발 커리큘럼 · M21 · Block F</a:t>
             </a:r>
           </a:p>
         </p:txBody>
@@ -33163,7 +33163,7 @@
               <a:spcAft>
                 <a:spcPts val="0"/>
               </a:spcAft>
-              <a:defRPr sz="1000" b="0">
+              <a:defRPr sz="900" b="0">
                 <a:solidFill>
                   <a:srgbClr val="5C6672"/>
                 </a:solidFill>
@@ -33171,7 +33171,7 @@
               </a:defRPr>
             </a:pPr>
             <a:r>
-              <a:t>ROS 2 Jazzy · Gazebo Harmonic · M21 · 따라 하기형 AGV 실습</a:t>
+              <a:t>ROS 2 기반 AGV End-to-End 개발 커리큘럼 · M21 · Block F</a:t>
             </a:r>
           </a:p>
         </p:txBody>
@@ -33691,7 +33691,7 @@
               <a:spcAft>
                 <a:spcPts val="0"/>
               </a:spcAft>
-              <a:defRPr sz="1000" b="0">
+              <a:defRPr sz="900" b="0">
                 <a:solidFill>
                   <a:srgbClr val="5C6672"/>
                 </a:solidFill>
@@ -33699,7 +33699,7 @@
               </a:defRPr>
             </a:pPr>
             <a:r>
-              <a:t>ROS 2 Jazzy · Gazebo Harmonic · M21 · 따라 하기형 AGV 실습</a:t>
+              <a:t>ROS 2 기반 AGV End-to-End 개발 커리큘럼 · M21 · Block F</a:t>
             </a:r>
           </a:p>
         </p:txBody>
@@ -34480,7 +34480,7 @@
               <a:spcAft>
                 <a:spcPts val="0"/>
               </a:spcAft>
-              <a:defRPr sz="1000" b="0">
+              <a:defRPr sz="900" b="0">
                 <a:solidFill>
                   <a:srgbClr val="5C6672"/>
                 </a:solidFill>
@@ -34488,7 +34488,7 @@
               </a:defRPr>
             </a:pPr>
             <a:r>
-              <a:t>ROS 2 Jazzy · Gazebo Harmonic · M21 · 따라 하기형 AGV 실습</a:t>
+              <a:t>ROS 2 기반 AGV End-to-End 개발 커리큘럼 · M21 · Block F</a:t>
             </a:r>
           </a:p>
         </p:txBody>
@@ -35277,7 +35277,7 @@
               <a:spcAft>
                 <a:spcPts val="0"/>
               </a:spcAft>
-              <a:defRPr sz="1000" b="0">
+              <a:defRPr sz="900" b="0">
                 <a:solidFill>
                   <a:srgbClr val="5C6672"/>
                 </a:solidFill>
@@ -35285,7 +35285,7 @@
               </a:defRPr>
             </a:pPr>
             <a:r>
-              <a:t>ROS 2 Jazzy · Gazebo Harmonic · M21 · 따라 하기형 AGV 실습</a:t>
+              <a:t>ROS 2 기반 AGV End-to-End 개발 커리큘럼 · M21 · Block F</a:t>
             </a:r>
           </a:p>
         </p:txBody>
@@ -36074,7 +36074,7 @@
               <a:spcAft>
                 <a:spcPts val="0"/>
               </a:spcAft>
-              <a:defRPr sz="1000" b="0">
+              <a:defRPr sz="900" b="0">
                 <a:solidFill>
                   <a:srgbClr val="5C6672"/>
                 </a:solidFill>
@@ -36082,7 +36082,7 @@
               </a:defRPr>
             </a:pPr>
             <a:r>
-              <a:t>ROS 2 Jazzy · Gazebo Harmonic · M21 · 따라 하기형 AGV 실습</a:t>
+              <a:t>ROS 2 기반 AGV End-to-End 개발 커리큘럼 · M21 · Block F</a:t>
             </a:r>
           </a:p>
         </p:txBody>
@@ -36714,7 +36714,7 @@
               <a:spcAft>
                 <a:spcPts val="0"/>
               </a:spcAft>
-              <a:defRPr sz="1000" b="0">
+              <a:defRPr sz="900" b="0">
                 <a:solidFill>
                   <a:srgbClr val="5C6672"/>
                 </a:solidFill>
@@ -36722,7 +36722,7 @@
               </a:defRPr>
             </a:pPr>
             <a:r>
-              <a:t>ROS 2 Jazzy · Gazebo Harmonic · M21 · 따라 하기형 AGV 실습</a:t>
+              <a:t>ROS 2 기반 AGV End-to-End 개발 커리큘럼 · M21 · Block F</a:t>
             </a:r>
           </a:p>
         </p:txBody>
@@ -37185,7 +37185,7 @@
               <a:spcAft>
                 <a:spcPts val="0"/>
               </a:spcAft>
-              <a:defRPr sz="1000" b="0">
+              <a:defRPr sz="900" b="0">
                 <a:solidFill>
                   <a:srgbClr val="5C6672"/>
                 </a:solidFill>
@@ -37193,7 +37193,7 @@
               </a:defRPr>
             </a:pPr>
             <a:r>
-              <a:t>ROS 2 Jazzy · Gazebo Harmonic · M21 · 따라 하기형 AGV 실습</a:t>
+              <a:t>ROS 2 기반 AGV End-to-End 개발 커리큘럼 · M21 · Block F</a:t>
             </a:r>
           </a:p>
         </p:txBody>
@@ -37659,7 +37659,7 @@
               <a:spcAft>
                 <a:spcPts val="0"/>
               </a:spcAft>
-              <a:defRPr sz="1000" b="0">
+              <a:defRPr sz="900" b="0">
                 <a:solidFill>
                   <a:srgbClr val="5C6672"/>
                 </a:solidFill>
@@ -37667,7 +37667,7 @@
               </a:defRPr>
             </a:pPr>
             <a:r>
-              <a:t>ROS 2 Jazzy · Gazebo Harmonic · M21 · 따라 하기형 AGV 실습</a:t>
+              <a:t>ROS 2 기반 AGV End-to-End 개발 커리큘럼 · M21 · Block F</a:t>
             </a:r>
           </a:p>
         </p:txBody>
@@ -38133,7 +38133,7 @@
               <a:spcAft>
                 <a:spcPts val="0"/>
               </a:spcAft>
-              <a:defRPr sz="1000" b="0">
+              <a:defRPr sz="900" b="0">
                 <a:solidFill>
                   <a:srgbClr val="5C6672"/>
                 </a:solidFill>
@@ -38141,7 +38141,7 @@
               </a:defRPr>
             </a:pPr>
             <a:r>
-              <a:t>ROS 2 Jazzy · Gazebo Harmonic · M21 · 따라 하기형 AGV 실습</a:t>
+              <a:t>ROS 2 기반 AGV End-to-End 개발 커리큘럼 · M21 · Block F</a:t>
             </a:r>
           </a:p>
         </p:txBody>
@@ -38567,7 +38567,7 @@
               <a:spcAft>
                 <a:spcPts val="0"/>
               </a:spcAft>
-              <a:defRPr sz="1000" b="0">
+              <a:defRPr sz="900" b="0">
                 <a:solidFill>
                   <a:srgbClr val="5C6672"/>
                 </a:solidFill>
@@ -38575,7 +38575,7 @@
               </a:defRPr>
             </a:pPr>
             <a:r>
-              <a:t>ROS 2 Jazzy · Gazebo Harmonic · M21 · 따라 하기형 AGV 실습</a:t>
+              <a:t>ROS 2 기반 AGV End-to-End 개발 커리큘럼 · M21 · Block F</a:t>
             </a:r>
           </a:p>
         </p:txBody>
@@ -39095,7 +39095,7 @@
               <a:spcAft>
                 <a:spcPts val="0"/>
               </a:spcAft>
-              <a:defRPr sz="1000" b="0">
+              <a:defRPr sz="900" b="0">
                 <a:solidFill>
                   <a:srgbClr val="5C6672"/>
                 </a:solidFill>
@@ -39103,7 +39103,7 @@
               </a:defRPr>
             </a:pPr>
             <a:r>
-              <a:t>ROS 2 Jazzy · Gazebo Harmonic · M21 · 따라 하기형 AGV 실습</a:t>
+              <a:t>ROS 2 기반 AGV End-to-End 개발 커리큘럼 · M21 · Block F</a:t>
             </a:r>
           </a:p>
         </p:txBody>
@@ -39884,7 +39884,7 @@
               <a:spcAft>
                 <a:spcPts val="0"/>
               </a:spcAft>
-              <a:defRPr sz="1000" b="0">
+              <a:defRPr sz="900" b="0">
                 <a:solidFill>
                   <a:srgbClr val="5C6672"/>
                 </a:solidFill>
@@ -39892,7 +39892,7 @@
               </a:defRPr>
             </a:pPr>
             <a:r>
-              <a:t>ROS 2 Jazzy · Gazebo Harmonic · M21 · 따라 하기형 AGV 실습</a:t>
+              <a:t>ROS 2 기반 AGV End-to-End 개발 커리큘럼 · M21 · Block F</a:t>
             </a:r>
           </a:p>
         </p:txBody>
@@ -40681,7 +40681,7 @@
               <a:spcAft>
                 <a:spcPts val="0"/>
               </a:spcAft>
-              <a:defRPr sz="1000" b="0">
+              <a:defRPr sz="900" b="0">
                 <a:solidFill>
                   <a:srgbClr val="5C6672"/>
                 </a:solidFill>
@@ -40689,7 +40689,7 @@
               </a:defRPr>
             </a:pPr>
             <a:r>
-              <a:t>ROS 2 Jazzy · Gazebo Harmonic · M21 · 따라 하기형 AGV 실습</a:t>
+              <a:t>ROS 2 기반 AGV End-to-End 개발 커리큘럼 · M21 · Block F</a:t>
             </a:r>
           </a:p>
         </p:txBody>
@@ -41254,7 +41254,7 @@
               <a:spcAft>
                 <a:spcPts val="0"/>
               </a:spcAft>
-              <a:defRPr sz="1000" b="0">
+              <a:defRPr sz="900" b="0">
                 <a:solidFill>
                   <a:srgbClr val="5C6672"/>
                 </a:solidFill>
@@ -41262,7 +41262,7 @@
               </a:defRPr>
             </a:pPr>
             <a:r>
-              <a:t>ROS 2 Jazzy · Gazebo Harmonic · M21 · 따라 하기형 AGV 실습</a:t>
+              <a:t>ROS 2 기반 AGV End-to-End 개발 커리큘럼 · M21 · Block F</a:t>
             </a:r>
           </a:p>
         </p:txBody>
@@ -41725,7 +41725,7 @@
               <a:spcAft>
                 <a:spcPts val="0"/>
               </a:spcAft>
-              <a:defRPr sz="1000" b="0">
+              <a:defRPr sz="900" b="0">
                 <a:solidFill>
                   <a:srgbClr val="5C6672"/>
                 </a:solidFill>
@@ -41733,7 +41733,7 @@
               </a:defRPr>
             </a:pPr>
             <a:r>
-              <a:t>ROS 2 Jazzy · Gazebo Harmonic · M21 · 따라 하기형 AGV 실습</a:t>
+              <a:t>ROS 2 기반 AGV End-to-End 개발 커리큘럼 · M21 · Block F</a:t>
             </a:r>
           </a:p>
         </p:txBody>
@@ -42179,7 +42179,7 @@
               <a:spcAft>
                 <a:spcPts val="0"/>
               </a:spcAft>
-              <a:defRPr sz="1000" b="0">
+              <a:defRPr sz="900" b="0">
                 <a:solidFill>
                   <a:srgbClr val="5C6672"/>
                 </a:solidFill>
@@ -42187,7 +42187,7 @@
               </a:defRPr>
             </a:pPr>
             <a:r>
-              <a:t>ROS 2 Jazzy · Gazebo Harmonic · M21 · 따라 하기형 AGV 실습</a:t>
+              <a:t>ROS 2 기반 AGV End-to-End 개발 커리큘럼 · M21 · Block F</a:t>
             </a:r>
           </a:p>
         </p:txBody>
@@ -42416,7 +42416,7 @@
               <a:spcAft>
                 <a:spcPts val="0"/>
               </a:spcAft>
-              <a:defRPr sz="1000" b="0">
+              <a:defRPr sz="900" b="0">
                 <a:solidFill>
                   <a:srgbClr val="5C6672"/>
                 </a:solidFill>
@@ -42424,7 +42424,7 @@
               </a:defRPr>
             </a:pPr>
             <a:r>
-              <a:t>ROS 2 Jazzy · Gazebo Harmonic · M21 · 따라 하기형 AGV 실습</a:t>
+              <a:t>ROS 2 기반 AGV End-to-End 개발 커리큘럼 · M21 · Block F</a:t>
             </a:r>
           </a:p>
         </p:txBody>
@@ -42866,7 +42866,7 @@
               <a:spcAft>
                 <a:spcPts val="0"/>
               </a:spcAft>
-              <a:defRPr sz="1000" b="0">
+              <a:defRPr sz="900" b="0">
                 <a:solidFill>
                   <a:srgbClr val="5C6672"/>
                 </a:solidFill>
@@ -42874,7 +42874,7 @@
               </a:defRPr>
             </a:pPr>
             <a:r>
-              <a:t>ROS 2 Jazzy · Gazebo Harmonic · M21 · 따라 하기형 AGV 실습</a:t>
+              <a:t>ROS 2 기반 AGV End-to-End 개발 커리큘럼 · M21 · Block F</a:t>
             </a:r>
           </a:p>
         </p:txBody>
@@ -43316,7 +43316,7 @@
               <a:spcAft>
                 <a:spcPts val="0"/>
               </a:spcAft>
-              <a:defRPr sz="1000" b="0">
+              <a:defRPr sz="900" b="0">
                 <a:solidFill>
                   <a:srgbClr val="5C6672"/>
                 </a:solidFill>
@@ -43324,7 +43324,7 @@
               </a:defRPr>
             </a:pPr>
             <a:r>
-              <a:t>ROS 2 Jazzy · Gazebo Harmonic · M21 · 따라 하기형 AGV 실습</a:t>
+              <a:t>ROS 2 기반 AGV End-to-End 개발 커리큘럼 · M21 · Block F</a:t>
             </a:r>
           </a:p>
         </p:txBody>
@@ -43770,7 +43770,7 @@
               <a:spcAft>
                 <a:spcPts val="0"/>
               </a:spcAft>
-              <a:defRPr sz="1000" b="0">
+              <a:defRPr sz="900" b="0">
                 <a:solidFill>
                   <a:srgbClr val="5C6672"/>
                 </a:solidFill>
@@ -43778,7 +43778,7 @@
               </a:defRPr>
             </a:pPr>
             <a:r>
-              <a:t>ROS 2 Jazzy · Gazebo Harmonic · M21 · 따라 하기형 AGV 실습</a:t>
+              <a:t>ROS 2 기반 AGV End-to-End 개발 커리큘럼 · M21 · Block F</a:t>
             </a:r>
           </a:p>
         </p:txBody>
@@ -44146,7 +44146,7 @@
               <a:spcAft>
                 <a:spcPts val="0"/>
               </a:spcAft>
-              <a:defRPr sz="1000" b="0">
+              <a:defRPr sz="900" b="0">
                 <a:solidFill>
                   <a:srgbClr val="5C6672"/>
                 </a:solidFill>
@@ -44154,7 +44154,7 @@
               </a:defRPr>
             </a:pPr>
             <a:r>
-              <a:t>ROS 2 Jazzy · Gazebo Harmonic · M21 · 따라 하기형 AGV 실습</a:t>
+              <a:t>ROS 2 기반 AGV End-to-End 개발 커리큘럼 · M21 · Block F</a:t>
             </a:r>
           </a:p>
         </p:txBody>
@@ -44383,7 +44383,7 @@
               <a:spcAft>
                 <a:spcPts val="0"/>
               </a:spcAft>
-              <a:defRPr sz="1000" b="0">
+              <a:defRPr sz="900" b="0">
                 <a:solidFill>
                   <a:srgbClr val="5C6672"/>
                 </a:solidFill>
@@ -44391,7 +44391,7 @@
               </a:defRPr>
             </a:pPr>
             <a:r>
-              <a:t>ROS 2 Jazzy · Gazebo Harmonic · M21 · 따라 하기형 AGV 실습</a:t>
+              <a:t>ROS 2 기반 AGV End-to-End 개발 커리큘럼 · M21 · Block F</a:t>
             </a:r>
           </a:p>
         </p:txBody>
@@ -44790,7 +44790,7 @@
               <a:spcAft>
                 <a:spcPts val="0"/>
               </a:spcAft>
-              <a:defRPr sz="1000" b="0">
+              <a:defRPr sz="900" b="0">
                 <a:solidFill>
                   <a:srgbClr val="5C6672"/>
                 </a:solidFill>
@@ -44798,7 +44798,7 @@
               </a:defRPr>
             </a:pPr>
             <a:r>
-              <a:t>ROS 2 Jazzy · Gazebo Harmonic · M21 · 따라 하기형 AGV 실습</a:t>
+              <a:t>ROS 2 기반 AGV End-to-End 개발 커리큘럼 · M21 · Block F</a:t>
             </a:r>
           </a:p>
         </p:txBody>
@@ -45315,7 +45315,7 @@
               <a:spcAft>
                 <a:spcPts val="0"/>
               </a:spcAft>
-              <a:defRPr sz="1000" b="0">
+              <a:defRPr sz="900" b="0">
                 <a:solidFill>
                   <a:srgbClr val="5C6672"/>
                 </a:solidFill>
@@ -45323,7 +45323,7 @@
               </a:defRPr>
             </a:pPr>
             <a:r>
-              <a:t>ROS 2 Jazzy · Gazebo Harmonic · M21 · 따라 하기형 AGV 실습</a:t>
+              <a:t>ROS 2 기반 AGV End-to-End 개발 커리큘럼 · M21 · Block F</a:t>
             </a:r>
           </a:p>
         </p:txBody>
@@ -45699,7 +45699,7 @@
               <a:spcAft>
                 <a:spcPts val="0"/>
               </a:spcAft>
-              <a:defRPr sz="1000" b="0">
+              <a:defRPr sz="900" b="0">
                 <a:solidFill>
                   <a:srgbClr val="5C6672"/>
                 </a:solidFill>
@@ -45707,7 +45707,7 @@
               </a:defRPr>
             </a:pPr>
             <a:r>
-              <a:t>ROS 2 Jazzy · Gazebo Harmonic · M21 · 따라 하기형 AGV 실습</a:t>
+              <a:t>ROS 2 기반 AGV End-to-End 개발 커리큘럼 · M21 · Block F</a:t>
             </a:r>
           </a:p>
         </p:txBody>
@@ -46028,7 +46028,7 @@
               <a:spcAft>
                 <a:spcPts val="0"/>
               </a:spcAft>
-              <a:defRPr sz="1000" b="0">
+              <a:defRPr sz="900" b="0">
                 <a:solidFill>
                   <a:srgbClr val="5C6672"/>
                 </a:solidFill>
@@ -46036,7 +46036,7 @@
               </a:defRPr>
             </a:pPr>
             <a:r>
-              <a:t>ROS 2 Jazzy · Gazebo Harmonic · M21 · 따라 하기형 AGV 실습</a:t>
+              <a:t>ROS 2 기반 AGV End-to-End 개발 커리큘럼 · M21 · Block F</a:t>
             </a:r>
           </a:p>
         </p:txBody>
@@ -46392,7 +46392,7 @@
               <a:spcAft>
                 <a:spcPts val="0"/>
               </a:spcAft>
-              <a:defRPr sz="1000" b="0">
+              <a:defRPr sz="900" b="0">
                 <a:solidFill>
                   <a:srgbClr val="5C6672"/>
                 </a:solidFill>
@@ -46400,7 +46400,7 @@
               </a:defRPr>
             </a:pPr>
             <a:r>
-              <a:t>ROS 2 Jazzy · Gazebo Harmonic · M21 · 따라 하기형 AGV 실습</a:t>
+              <a:t>ROS 2 기반 AGV End-to-End 개발 커리큘럼 · M21 · Block F</a:t>
             </a:r>
           </a:p>
         </p:txBody>
@@ -46942,7 +46942,7 @@
               <a:spcAft>
                 <a:spcPts val="0"/>
               </a:spcAft>
-              <a:defRPr sz="1000" b="0">
+              <a:defRPr sz="900" b="0">
                 <a:solidFill>
                   <a:srgbClr val="5C6672"/>
                 </a:solidFill>
@@ -46950,7 +46950,7 @@
               </a:defRPr>
             </a:pPr>
             <a:r>
-              <a:t>ROS 2 Jazzy · Gazebo Harmonic · M21 · 따라 하기형 AGV 실습</a:t>
+              <a:t>ROS 2 기반 AGV End-to-End 개발 커리큘럼 · M21 · Block F</a:t>
             </a:r>
           </a:p>
         </p:txBody>
@@ -47322,7 +47322,7 @@
               <a:spcAft>
                 <a:spcPts val="0"/>
               </a:spcAft>
-              <a:defRPr sz="1000" b="0">
+              <a:defRPr sz="900" b="0">
                 <a:solidFill>
                   <a:srgbClr val="5C6672"/>
                 </a:solidFill>
@@ -47330,7 +47330,7 @@
               </a:defRPr>
             </a:pPr>
             <a:r>
-              <a:t>ROS 2 Jazzy · Gazebo Harmonic · M21 · 따라 하기형 AGV 실습</a:t>
+              <a:t>ROS 2 기반 AGV End-to-End 개발 커리큘럼 · M21 · Block F</a:t>
             </a:r>
           </a:p>
         </p:txBody>
@@ -47741,7 +47741,7 @@
               <a:spcAft>
                 <a:spcPts val="0"/>
               </a:spcAft>
-              <a:defRPr sz="1000" b="0">
+              <a:defRPr sz="900" b="0">
                 <a:solidFill>
                   <a:srgbClr val="5C6672"/>
                 </a:solidFill>
@@ -47749,7 +47749,7 @@
               </a:defRPr>
             </a:pPr>
             <a:r>
-              <a:t>ROS 2 Jazzy · Gazebo Harmonic · M21 · 따라 하기형 AGV 실습</a:t>
+              <a:t>ROS 2 기반 AGV End-to-End 개발 커리큘럼 · M21 · Block F</a:t>
             </a:r>
           </a:p>
         </p:txBody>
@@ -48272,7 +48272,7 @@
               <a:spcAft>
                 <a:spcPts val="0"/>
               </a:spcAft>
-              <a:defRPr sz="1000" b="0">
+              <a:defRPr sz="900" b="0">
                 <a:solidFill>
                   <a:srgbClr val="5C6672"/>
                 </a:solidFill>
@@ -48280,7 +48280,7 @@
               </a:defRPr>
             </a:pPr>
             <a:r>
-              <a:t>ROS 2 Jazzy · Gazebo Harmonic · M21 · 따라 하기형 AGV 실습</a:t>
+              <a:t>ROS 2 기반 AGV End-to-End 개발 커리큘럼 · M21 · Block F</a:t>
             </a:r>
           </a:p>
         </p:txBody>
@@ -48579,7 +48579,7 @@
               <a:spcAft>
                 <a:spcPts val="0"/>
               </a:spcAft>
-              <a:defRPr sz="1000" b="0">
+              <a:defRPr sz="900" b="0">
                 <a:solidFill>
                   <a:srgbClr val="5C6672"/>
                 </a:solidFill>
@@ -48587,7 +48587,7 @@
               </a:defRPr>
             </a:pPr>
             <a:r>
-              <a:t>ROS 2 Jazzy · Gazebo Harmonic · M21 · 따라 하기형 AGV 실습</a:t>
+              <a:t>ROS 2 기반 AGV End-to-End 개발 커리큘럼 · M21 · Block F</a:t>
             </a:r>
           </a:p>
         </p:txBody>

--- a/blocks/F_integration/M21_launch_yaml_rosbag/M21_Parameter_YAML_Launch_rosbag2.pptx
+++ b/blocks/F_integration/M21_launch_yaml_rosbag/M21_Parameter_YAML_Launch_rosbag2.pptx
@@ -77,6 +77,7 @@
     <p:sldId id="325" r:id="rId77"/>
     <p:sldId id="326" r:id="rId78"/>
     <p:sldId id="327" r:id="rId79"/>
+    <p:sldId id="328" r:id="rId80"/>
   </p:sldIdLst>
   <p:sldSz cx="12191999" cy="6858000" type="screen4x3"/>
   <p:notesSz cx="6858000" cy="9144000"/>
@@ -6058,7 +6059,7 @@
           </a:p>
           <a:p>
             <a:r>
-              <a:t>[확인] ① 명령/설정  ② 정상 출력 또는 화면  ③ 다음 검증 명령으로 재확인</a:t>
+              <a:t>[확인] 명령·설정과 화면의 topic·frame·결과 이름을 대조합니다.</a:t>
             </a:r>
           </a:p>
           <a:p>
@@ -6138,27 +6139,17 @@
           <a:lstStyle/>
           <a:p>
             <a:r>
-              <a:t>[설명] 검증 명령은 GUI 결과와 별도로 실행해 재현 가능한 완료 기준을 만든다.</a:t>
-            </a:r>
-          </a:p>
-          <a:p>
-            <a:r>
-              <a:t>[실행] ros2 launch agv_bringup agv_sim.launch.py --show-args</a:t>
-            </a:r>
-          </a:p>
-          <a:p>
-            <a:r>
-              <a:t>ros2 node list</a:t>
-            </a:r>
-          </a:p>
-          <a:p>
-            <a:r>
-              <a:t>ros2 param get /mission_manager stop_distance</a:t>
-            </a:r>
-          </a:p>
-          <a:p>
-            <a:r>
-              <a:t>[확인] 한 launch 명령·YAML parameter·rosbag record/replay 명령을 설명하고 확인한다.</a:t>
+              <a:t>[설명] 실제 Ubuntu/ROS 2 환경에서 생성한 검증 화면이다.</a:t>
+            </a:r>
+          </a:p>
+          <a:p>
+            <a:r>
+              <a:t>[실행] 슬라이드의 명령 또는 파일 작성 단계를 진행한다.</a:t>
+            </a:r>
+          </a:p>
+          <a:p>
+            <a:r>
+              <a:t>[확인] ① 명령/설정  ② 정상 출력 또는 화면  ③ 다음 검증 명령으로 재확인</a:t>
             </a:r>
           </a:p>
           <a:p>
@@ -6238,17 +6229,27 @@
           <a:lstStyle/>
           <a:p>
             <a:r>
-              <a:t>[설명] 오류를 대신 해결하지 말고 증상부터 우선 확인 순서대로 교육생이 실행하게 한다.</a:t>
-            </a:r>
-          </a:p>
-          <a:p>
-            <a:r>
-              <a:t>[실행] 슬라이드의 명령 또는 파일 작성 단계를 진행한다.</a:t>
-            </a:r>
-          </a:p>
-          <a:p>
-            <a:r>
-              <a:t>[확인] 수정 뒤 첫 검증 명령을 다시 실행한다.</a:t>
+              <a:t>[설명] 검증 명령은 GUI 결과와 별도로 실행해 재현 가능한 완료 기준을 만든다.</a:t>
+            </a:r>
+          </a:p>
+          <a:p>
+            <a:r>
+              <a:t>[실행] ros2 launch agv_bringup agv_sim.launch.py --show-args</a:t>
+            </a:r>
+          </a:p>
+          <a:p>
+            <a:r>
+              <a:t>ros2 node list</a:t>
+            </a:r>
+          </a:p>
+          <a:p>
+            <a:r>
+              <a:t>ros2 param get /mission_manager stop_distance</a:t>
+            </a:r>
+          </a:p>
+          <a:p>
+            <a:r>
+              <a:t>[확인] 한 launch 명령·YAML parameter·rosbag record/replay 명령을 설명하고 확인한다.</a:t>
             </a:r>
           </a:p>
           <a:p>
@@ -6258,7 +6259,7 @@
           </a:p>
           <a:p>
             <a:r>
-              <a:t>[오류] 슬라이드의 두 대표 오류를 먼저 사용한다.</a:t>
+              <a:t>[오류] 오류가 나면 현재 폴더, source, 파일 경로를 먼저 확인한다.</a:t>
             </a:r>
           </a:p>
         </p:txBody>
@@ -6328,37 +6329,17 @@
           <a:lstStyle/>
           <a:p>
             <a:r>
-              <a:t>[설명] Complete는 정답 복사본이 아니라 막혔을 때 비교·복구하는 안전망이다.</a:t>
-            </a:r>
-          </a:p>
-          <a:p>
-            <a:r>
-              <a:t>[실행] cd ~/ros2_curri</a:t>
-            </a:r>
-          </a:p>
-          <a:p>
-            <a:r>
-              <a:t>diff -ru my_agv_ws/src blocks/F_integration/M21_launch_yaml_rosbag/complete/agv_ws/src || true</a:t>
-            </a:r>
-          </a:p>
-          <a:p>
-            <a:r>
-              <a:t>cp -a my_agv_ws/src my_agv_ws/src_before_M21</a:t>
-            </a:r>
-          </a:p>
-          <a:p>
-            <a:r>
-              <a:t>cp -a blocks/F_integration/M21_launch_yaml_rosbag/complete/agv_ws/src/. my_agv_ws/src/</a:t>
-            </a:r>
-          </a:p>
-          <a:p>
-            <a:r>
-              <a:t>cd my_agv_ws &amp;&amp; colcon build --symlink-install &amp;&amp; source install/setup.bash</a:t>
-            </a:r>
-          </a:p>
-          <a:p>
-            <a:r>
-              <a:t>[확인] diff에서 내 파일과 Complete의 차이를 설명할 수 있다.</a:t>
+              <a:t>[설명] 오류를 대신 해결하지 말고 증상부터 우선 확인 순서대로 교육생이 실행하게 한다.</a:t>
+            </a:r>
+          </a:p>
+          <a:p>
+            <a:r>
+              <a:t>[실행] 슬라이드의 명령 또는 파일 작성 단계를 진행한다.</a:t>
+            </a:r>
+          </a:p>
+          <a:p>
+            <a:r>
+              <a:t>[확인] 수정 뒤 첫 검증 명령을 다시 실행한다.</a:t>
             </a:r>
           </a:p>
           <a:p>
@@ -6368,7 +6349,7 @@
           </a:p>
           <a:p>
             <a:r>
-              <a:t>[오류] 오류가 나면 현재 폴더, source, 파일 경로를 먼저 확인한다.</a:t>
+              <a:t>[오류] 슬라이드의 두 대표 오류를 먼저 사용한다.</a:t>
             </a:r>
           </a:p>
         </p:txBody>
@@ -6438,17 +6419,37 @@
           <a:lstStyle/>
           <a:p>
             <a:r>
-              <a:t>[설명] 교육생이 직접 한 값만 바꿔 원인과 결과를 연결하게 한다.</a:t>
-            </a:r>
-          </a:p>
-          <a:p>
-            <a:r>
-              <a:t>[실행] 슬라이드의 명령 또는 파일 작성 단계를 진행한다.</a:t>
-            </a:r>
-          </a:p>
-          <a:p>
-            <a:r>
-              <a:t>[확인] 원래 값과 변경 값을 모두 기록한다.</a:t>
+              <a:t>[설명] Complete는 정답 복사본이 아니라 막혔을 때 비교·복구하는 안전망이다.</a:t>
+            </a:r>
+          </a:p>
+          <a:p>
+            <a:r>
+              <a:t>[실행] cd ~/ros2_curri</a:t>
+            </a:r>
+          </a:p>
+          <a:p>
+            <a:r>
+              <a:t>diff -ru my_agv_ws/src blocks/F_integration/M21_launch_yaml_rosbag/complete/agv_ws/src || true</a:t>
+            </a:r>
+          </a:p>
+          <a:p>
+            <a:r>
+              <a:t>cp -a my_agv_ws/src my_agv_ws/src_before_M21</a:t>
+            </a:r>
+          </a:p>
+          <a:p>
+            <a:r>
+              <a:t>cp -a blocks/F_integration/M21_launch_yaml_rosbag/complete/agv_ws/src/. my_agv_ws/src/</a:t>
+            </a:r>
+          </a:p>
+          <a:p>
+            <a:r>
+              <a:t>cd my_agv_ws &amp;&amp; colcon build --symlink-install &amp;&amp; source install/setup.bash</a:t>
+            </a:r>
+          </a:p>
+          <a:p>
+            <a:r>
+              <a:t>[확인] diff에서 내 파일과 Complete의 차이를 설명할 수 있다.</a:t>
             </a:r>
           </a:p>
           <a:p>
@@ -6528,7 +6529,7 @@
           <a:lstStyle/>
           <a:p>
             <a:r>
-              <a:t>[설명] rosbag2 재생 절차</a:t>
+              <a:t>[설명] 교육생이 직접 한 값만 바꿔 원인과 결과를 연결하게 한다.</a:t>
             </a:r>
           </a:p>
           <a:p>
@@ -6538,7 +6539,7 @@
           </a:p>
           <a:p>
             <a:r>
-              <a:t>[확인] 각 항목이 현재 시스템의 어느 package/topic/file과 연결되는지 확인한다.</a:t>
+              <a:t>[확인] 원래 값과 변경 값을 모두 기록한다.</a:t>
             </a:r>
           </a:p>
           <a:p>
@@ -6708,7 +6709,7 @@
           <a:lstStyle/>
           <a:p>
             <a:r>
-              <a:t>[설명] 증상별 디버깅 도구</a:t>
+              <a:t>[설명] rosbag2 재생 절차</a:t>
             </a:r>
           </a:p>
           <a:p>
@@ -6798,7 +6799,7 @@
           <a:lstStyle/>
           <a:p>
             <a:r>
-              <a:t>[설명] 교육생이 자신의 workspace·캡처·로그를 저장했는지 확인하고 다음 모듈의 시작 상태를 읽는다.</a:t>
+              <a:t>[설명] 증상별 디버깅 도구</a:t>
             </a:r>
           </a:p>
           <a:p>
@@ -6808,7 +6809,7 @@
           </a:p>
           <a:p>
             <a:r>
-              <a:t>[확인] M22 final mission 시작 조건을 말할 수 있다.</a:t>
+              <a:t>[확인] 각 항목이 현재 시스템의 어느 package/topic/file과 연결되는지 확인한다.</a:t>
             </a:r>
           </a:p>
           <a:p>
@@ -6844,6 +6845,96 @@
 </file>
 
 <file path=ppt/notesSlides/notesSlide72.xml><?xml version="1.0" encoding="utf-8"?>
+<p:notes xmlns:a="http://schemas.openxmlformats.org/drawingml/2006/main" xmlns:p="http://schemas.openxmlformats.org/presentationml/2006/main" xmlns:r="http://schemas.openxmlformats.org/officeDocument/2006/relationships">
+  <p:cSld>
+    <p:spTree>
+      <p:nvGrpSpPr>
+        <p:cNvPr id="1" name=""/>
+        <p:cNvGrpSpPr/>
+        <p:nvPr/>
+      </p:nvGrpSpPr>
+      <p:grpSpPr>
+        <a:xfrm>
+          <a:off x="0" y="0"/>
+          <a:ext cx="0" cy="0"/>
+          <a:chOff x="0" y="0"/>
+          <a:chExt cx="0" cy="0"/>
+        </a:xfrm>
+      </p:grpSpPr>
+      <p:sp>
+        <p:nvSpPr>
+          <p:cNvPr id="2" name="Slide Image Placeholder 1"/>
+          <p:cNvSpPr>
+            <a:spLocks noGrp="1"/>
+          </p:cNvSpPr>
+          <p:nvPr>
+            <p:ph type="sldImg" idx="2"/>
+          </p:nvPr>
+        </p:nvSpPr>
+        <p:spPr/>
+      </p:sp>
+      <p:sp>
+        <p:nvSpPr>
+          <p:cNvPr id="3" name="Notes Placeholder 2"/>
+          <p:cNvSpPr>
+            <a:spLocks noGrp="1"/>
+          </p:cNvSpPr>
+          <p:nvPr>
+            <p:ph type="body" idx="3" sz="quarter"/>
+          </p:nvPr>
+        </p:nvSpPr>
+        <p:spPr/>
+        <p:txBody>
+          <a:bodyPr/>
+          <a:lstStyle/>
+          <a:p>
+            <a:r>
+              <a:t>[설명] 교육생이 자신의 workspace·캡처·로그를 저장했는지 확인하고 다음 모듈의 시작 상태를 읽는다.</a:t>
+            </a:r>
+          </a:p>
+          <a:p>
+            <a:r>
+              <a:t>[실행] 슬라이드의 명령 또는 파일 작성 단계를 진행한다.</a:t>
+            </a:r>
+          </a:p>
+          <a:p>
+            <a:r>
+              <a:t>[확인] M22 final mission 시작 조건을 말할 수 있다.</a:t>
+            </a:r>
+          </a:p>
+          <a:p>
+            <a:r>
+              <a:t>[멈춤] 교육생이 현재 체크포인트를 통과할 때까지 기다린다.</a:t>
+            </a:r>
+          </a:p>
+          <a:p>
+            <a:r>
+              <a:t>[오류] 오류가 나면 현재 폴더, source, 파일 경로를 먼저 확인한다.</a:t>
+            </a:r>
+          </a:p>
+        </p:txBody>
+      </p:sp>
+      <p:sp>
+        <p:nvSpPr>
+          <p:cNvPr id="4" name="Slide Number Placeholder 3"/>
+          <p:cNvSpPr>
+            <a:spLocks noGrp="1"/>
+          </p:cNvSpPr>
+          <p:nvPr>
+            <p:ph type="sldNum" idx="5" sz="quarter"/>
+          </p:nvPr>
+        </p:nvSpPr>
+        <p:spPr/>
+      </p:sp>
+    </p:spTree>
+  </p:cSld>
+  <p:clrMapOvr>
+    <a:masterClrMapping/>
+  </p:clrMapOvr>
+</p:notes>
+</file>
+
+<file path=ppt/notesSlides/notesSlide73.xml><?xml version="1.0" encoding="utf-8"?>
 <p:notes xmlns:a="http://schemas.openxmlformats.org/drawingml/2006/main" xmlns:p="http://schemas.openxmlformats.org/presentationml/2006/main" xmlns:r="http://schemas.openxmlformats.org/officeDocument/2006/relationships">
   <p:cSld>
     <p:spTree>
@@ -14017,7 +14108,7 @@
           </a:fontRef>
         </p:style>
         <p:txBody>
-          <a:bodyPr rtlCol="0" anchor="ctr" wrap="square" lIns="73152" rIns="73152" tIns="36576" bIns="36576"/>
+          <a:bodyPr rtlCol="0" anchor="ctr" wrap="square" lIns="109728" rIns="109728" tIns="73152" bIns="73152"/>
           <a:lstStyle/>
           <a:p>
             <a:pPr algn="l">
@@ -14034,7 +14125,19 @@
             <a:r>
               <a:t>mkdir -p ~/ros2_curri/my_agv_ws/src/agv_bringup</a:t>
             </a:r>
-            <a:br/>
+          </a:p>
+          <a:p>
+            <a:pPr algn="l">
+              <a:spcAft>
+                <a:spcPts val="0"/>
+              </a:spcAft>
+              <a:defRPr sz="1600" b="0">
+                <a:solidFill>
+                  <a:srgbClr val="FFFFFF"/>
+                </a:solidFill>
+                <a:latin typeface="DejaVu Sans Mono"/>
+              </a:defRPr>
+            </a:pPr>
             <a:r>
               <a:t>nano ~/ros2_curri/my_agv_ws/src/agv_bringup/package.xml</a:t>
             </a:r>
@@ -15848,7 +15951,7 @@
           </a:fontRef>
         </p:style>
         <p:txBody>
-          <a:bodyPr rtlCol="0" anchor="ctr" wrap="square" lIns="164592" rIns="164592" tIns="109728" bIns="36576"/>
+          <a:bodyPr rtlCol="0" anchor="ctr" wrap="square" lIns="164592" rIns="164592" tIns="109728" bIns="73152"/>
           <a:lstStyle/>
           <a:p>
             <a:pPr algn="l">
@@ -15865,47 +15968,179 @@
             <a:r>
               <a:t>&lt;?xml version="1.0" ?&gt;</a:t>
             </a:r>
-            <a:br/>
+          </a:p>
+          <a:p>
+            <a:pPr algn="l">
+              <a:spcAft>
+                <a:spcPts val="0"/>
+              </a:spcAft>
+              <a:defRPr sz="1400" b="0">
+                <a:solidFill>
+                  <a:srgbClr val="FFFFFF"/>
+                </a:solidFill>
+                <a:latin typeface="DejaVu Sans Mono"/>
+              </a:defRPr>
+            </a:pPr>
             <a:r>
               <a:t>&lt;package format="3"&gt;</a:t>
             </a:r>
-            <a:br/>
+          </a:p>
+          <a:p>
+            <a:pPr algn="l">
+              <a:spcAft>
+                <a:spcPts val="0"/>
+              </a:spcAft>
+              <a:defRPr sz="1400" b="0">
+                <a:solidFill>
+                  <a:srgbClr val="FFFFFF"/>
+                </a:solidFill>
+                <a:latin typeface="DejaVu Sans Mono"/>
+              </a:defRPr>
+            </a:pPr>
             <a:r>
               <a:t>  &lt;name&gt;agv_bringup&lt;/name&gt;</a:t>
             </a:r>
-            <a:br/>
+          </a:p>
+          <a:p>
+            <a:pPr algn="l">
+              <a:spcAft>
+                <a:spcPts val="0"/>
+              </a:spcAft>
+              <a:defRPr sz="1400" b="0">
+                <a:solidFill>
+                  <a:srgbClr val="FFFFFF"/>
+                </a:solidFill>
+                <a:latin typeface="DejaVu Sans Mono"/>
+              </a:defRPr>
+            </a:pPr>
             <a:r>
               <a:t>  &lt;version&gt;0.1.0&lt;/version&gt;</a:t>
             </a:r>
-            <a:br/>
+          </a:p>
+          <a:p>
+            <a:pPr algn="l">
+              <a:spcAft>
+                <a:spcPts val="0"/>
+              </a:spcAft>
+              <a:defRPr sz="1400" b="0">
+                <a:solidFill>
+                  <a:srgbClr val="FFFFFF"/>
+                </a:solidFill>
+                <a:latin typeface="DejaVu Sans Mono"/>
+              </a:defRPr>
+            </a:pPr>
             <a:r>
               <a:t>  </a:t>
             </a:r>
-            <a:br/>
+          </a:p>
+          <a:p>
+            <a:pPr algn="l">
+              <a:spcAft>
+                <a:spcPts val="0"/>
+              </a:spcAft>
+              <a:defRPr sz="1400" b="0">
+                <a:solidFill>
+                  <a:srgbClr val="FFFFFF"/>
+                </a:solidFill>
+                <a:latin typeface="DejaVu Sans Mono"/>
+              </a:defRPr>
+            </a:pPr>
             <a:r>
               <a:t>  </a:t>
             </a:r>
-            <a:br/>
+          </a:p>
+          <a:p>
+            <a:pPr algn="l">
+              <a:spcAft>
+                <a:spcPts val="0"/>
+              </a:spcAft>
+              <a:defRPr sz="1400" b="0">
+                <a:solidFill>
+                  <a:srgbClr val="FFFFFF"/>
+                </a:solidFill>
+                <a:latin typeface="DejaVu Sans Mono"/>
+              </a:defRPr>
+            </a:pPr>
             <a:r>
               <a:t>  &lt;description&gt;One-command launch and parameter files for the educational</a:t>
             </a:r>
-            <a:br/>
+          </a:p>
+          <a:p>
+            <a:pPr algn="l">
+              <a:spcAft>
+                <a:spcPts val="0"/>
+              </a:spcAft>
+              <a:defRPr sz="1400" b="0">
+                <a:solidFill>
+                  <a:srgbClr val="FFFFFF"/>
+                </a:solidFill>
+                <a:latin typeface="DejaVu Sans Mono"/>
+              </a:defRPr>
+            </a:pPr>
             <a:r>
               <a:t>    AGV.&lt;/description&gt;</a:t>
             </a:r>
-            <a:br/>
+          </a:p>
+          <a:p>
+            <a:pPr algn="l">
+              <a:spcAft>
+                <a:spcPts val="0"/>
+              </a:spcAft>
+              <a:defRPr sz="1400" b="0">
+                <a:solidFill>
+                  <a:srgbClr val="FFFFFF"/>
+                </a:solidFill>
+                <a:latin typeface="DejaVu Sans Mono"/>
+              </a:defRPr>
+            </a:pPr>
             <a:r>
               <a:t>  &lt;maintainer email="student@example.com"&gt;AGV student&lt;/maintainer&gt;</a:t>
             </a:r>
-            <a:br/>
+          </a:p>
+          <a:p>
+            <a:pPr algn="l">
+              <a:spcAft>
+                <a:spcPts val="0"/>
+              </a:spcAft>
+              <a:defRPr sz="1400" b="0">
+                <a:solidFill>
+                  <a:srgbClr val="FFFFFF"/>
+                </a:solidFill>
+                <a:latin typeface="DejaVu Sans Mono"/>
+              </a:defRPr>
+            </a:pPr>
             <a:r>
               <a:t>  &lt;license&gt;Apache-2.0&lt;/license&gt;</a:t>
             </a:r>
-            <a:br/>
+          </a:p>
+          <a:p>
+            <a:pPr algn="l">
+              <a:spcAft>
+                <a:spcPts val="0"/>
+              </a:spcAft>
+              <a:defRPr sz="1400" b="0">
+                <a:solidFill>
+                  <a:srgbClr val="FFFFFF"/>
+                </a:solidFill>
+                <a:latin typeface="DejaVu Sans Mono"/>
+              </a:defRPr>
+            </a:pPr>
             <a:r>
               <a:t>  </a:t>
             </a:r>
-            <a:br/>
+          </a:p>
+          <a:p>
+            <a:pPr algn="l">
+              <a:spcAft>
+                <a:spcPts val="0"/>
+              </a:spcAft>
+              <a:defRPr sz="1400" b="0">
+                <a:solidFill>
+                  <a:srgbClr val="FFFFFF"/>
+                </a:solidFill>
+                <a:latin typeface="DejaVu Sans Mono"/>
+              </a:defRPr>
+            </a:pPr>
             <a:r>
               <a:t>  </a:t>
             </a:r>
@@ -16322,7 +16557,7 @@
           </a:fontRef>
         </p:style>
         <p:txBody>
-          <a:bodyPr rtlCol="0" anchor="ctr" wrap="square" lIns="164592" rIns="164592" tIns="109728" bIns="36576"/>
+          <a:bodyPr rtlCol="0" anchor="ctr" wrap="square" lIns="164592" rIns="164592" tIns="109728" bIns="73152"/>
           <a:lstStyle/>
           <a:p>
             <a:pPr algn="l">
@@ -16339,47 +16574,179 @@
             <a:r>
               <a:t>  &lt;buildtool_depend&gt;ament_python&lt;/buildtool_depend&gt;</a:t>
             </a:r>
-            <a:br/>
+          </a:p>
+          <a:p>
+            <a:pPr algn="l">
+              <a:spcAft>
+                <a:spcPts val="0"/>
+              </a:spcAft>
+              <a:defRPr sz="1400" b="0">
+                <a:solidFill>
+                  <a:srgbClr val="FFFFFF"/>
+                </a:solidFill>
+                <a:latin typeface="DejaVu Sans Mono"/>
+              </a:defRPr>
+            </a:pPr>
             <a:r>
               <a:t>  &lt;exec_depend&gt;launch&lt;/exec_depend&gt;</a:t>
             </a:r>
-            <a:br/>
+          </a:p>
+          <a:p>
+            <a:pPr algn="l">
+              <a:spcAft>
+                <a:spcPts val="0"/>
+              </a:spcAft>
+              <a:defRPr sz="1400" b="0">
+                <a:solidFill>
+                  <a:srgbClr val="FFFFFF"/>
+                </a:solidFill>
+                <a:latin typeface="DejaVu Sans Mono"/>
+              </a:defRPr>
+            </a:pPr>
             <a:r>
               <a:t>  &lt;exec_depend&gt;launch_ros&lt;/exec_depend&gt;</a:t>
             </a:r>
-            <a:br/>
+          </a:p>
+          <a:p>
+            <a:pPr algn="l">
+              <a:spcAft>
+                <a:spcPts val="0"/>
+              </a:spcAft>
+              <a:defRPr sz="1400" b="0">
+                <a:solidFill>
+                  <a:srgbClr val="FFFFFF"/>
+                </a:solidFill>
+                <a:latin typeface="DejaVu Sans Mono"/>
+              </a:defRPr>
+            </a:pPr>
             <a:r>
               <a:t>  &lt;exec_depend&gt;agv_description&lt;/exec_depend&gt;</a:t>
             </a:r>
-            <a:br/>
+          </a:p>
+          <a:p>
+            <a:pPr algn="l">
+              <a:spcAft>
+                <a:spcPts val="0"/>
+              </a:spcAft>
+              <a:defRPr sz="1400" b="0">
+                <a:solidFill>
+                  <a:srgbClr val="FFFFFF"/>
+                </a:solidFill>
+                <a:latin typeface="DejaVu Sans Mono"/>
+              </a:defRPr>
+            </a:pPr>
             <a:r>
               <a:t>  &lt;exec_depend&gt;agv_gazebo&lt;/exec_depend&gt;</a:t>
             </a:r>
-            <a:br/>
+          </a:p>
+          <a:p>
+            <a:pPr algn="l">
+              <a:spcAft>
+                <a:spcPts val="0"/>
+              </a:spcAft>
+              <a:defRPr sz="1400" b="0">
+                <a:solidFill>
+                  <a:srgbClr val="FFFFFF"/>
+                </a:solidFill>
+                <a:latin typeface="DejaVu Sans Mono"/>
+              </a:defRPr>
+            </a:pPr>
             <a:r>
               <a:t>  &lt;exec_depend&gt;agv_control&lt;/exec_depend&gt;</a:t>
             </a:r>
-            <a:br/>
+          </a:p>
+          <a:p>
+            <a:pPr algn="l">
+              <a:spcAft>
+                <a:spcPts val="0"/>
+              </a:spcAft>
+              <a:defRPr sz="1400" b="0">
+                <a:solidFill>
+                  <a:srgbClr val="FFFFFF"/>
+                </a:solidFill>
+                <a:latin typeface="DejaVu Sans Mono"/>
+              </a:defRPr>
+            </a:pPr>
             <a:r>
               <a:t>  &lt;exec_depend&gt;agv_sensors&lt;/exec_depend&gt;</a:t>
             </a:r>
-            <a:br/>
+          </a:p>
+          <a:p>
+            <a:pPr algn="l">
+              <a:spcAft>
+                <a:spcPts val="0"/>
+              </a:spcAft>
+              <a:defRPr sz="1400" b="0">
+                <a:solidFill>
+                  <a:srgbClr val="FFFFFF"/>
+                </a:solidFill>
+                <a:latin typeface="DejaVu Sans Mono"/>
+              </a:defRPr>
+            </a:pPr>
             <a:r>
               <a:t>  &lt;exec_depend&gt;agv_vision&lt;/exec_depend&gt;</a:t>
             </a:r>
-            <a:br/>
+          </a:p>
+          <a:p>
+            <a:pPr algn="l">
+              <a:spcAft>
+                <a:spcPts val="0"/>
+              </a:spcAft>
+              <a:defRPr sz="1400" b="0">
+                <a:solidFill>
+                  <a:srgbClr val="FFFFFF"/>
+                </a:solidFill>
+                <a:latin typeface="DejaVu Sans Mono"/>
+              </a:defRPr>
+            </a:pPr>
             <a:r>
               <a:t>  &lt;exec_depend&gt;agv_mission&lt;/exec_depend&gt;</a:t>
             </a:r>
-            <a:br/>
+          </a:p>
+          <a:p>
+            <a:pPr algn="l">
+              <a:spcAft>
+                <a:spcPts val="0"/>
+              </a:spcAft>
+              <a:defRPr sz="1400" b="0">
+                <a:solidFill>
+                  <a:srgbClr val="FFFFFF"/>
+                </a:solidFill>
+                <a:latin typeface="DejaVu Sans Mono"/>
+              </a:defRPr>
+            </a:pPr>
             <a:r>
               <a:t>  &lt;exec_depend&gt;robot_state_publisher&lt;/exec_depend&gt;</a:t>
             </a:r>
-            <a:br/>
+          </a:p>
+          <a:p>
+            <a:pPr algn="l">
+              <a:spcAft>
+                <a:spcPts val="0"/>
+              </a:spcAft>
+              <a:defRPr sz="1400" b="0">
+                <a:solidFill>
+                  <a:srgbClr val="FFFFFF"/>
+                </a:solidFill>
+                <a:latin typeface="DejaVu Sans Mono"/>
+              </a:defRPr>
+            </a:pPr>
             <a:r>
               <a:t>  &lt;exec_depend&gt;rviz2&lt;/exec_depend&gt;</a:t>
             </a:r>
-            <a:br/>
+          </a:p>
+          <a:p>
+            <a:pPr algn="l">
+              <a:spcAft>
+                <a:spcPts val="0"/>
+              </a:spcAft>
+              <a:defRPr sz="1400" b="0">
+                <a:solidFill>
+                  <a:srgbClr val="FFFFFF"/>
+                </a:solidFill>
+                <a:latin typeface="DejaVu Sans Mono"/>
+              </a:defRPr>
+            </a:pPr>
             <a:r>
               <a:t>  </a:t>
             </a:r>
@@ -16796,7 +17163,7 @@
           </a:fontRef>
         </p:style>
         <p:txBody>
-          <a:bodyPr rtlCol="0" anchor="ctr" wrap="square" lIns="164592" rIns="164592" tIns="109728" bIns="36576"/>
+          <a:bodyPr rtlCol="0" anchor="ctr" wrap="square" lIns="164592" rIns="164592" tIns="109728" bIns="73152"/>
           <a:lstStyle/>
           <a:p>
             <a:pPr algn="l">
@@ -16813,24 +17180,96 @@
             <a:r>
               <a:t>  </a:t>
             </a:r>
-            <a:br/>
+          </a:p>
+          <a:p>
+            <a:pPr algn="l">
+              <a:spcAft>
+                <a:spcPts val="0"/>
+              </a:spcAft>
+              <a:defRPr sz="1400" b="0">
+                <a:solidFill>
+                  <a:srgbClr val="FFFFFF"/>
+                </a:solidFill>
+                <a:latin typeface="DejaVu Sans Mono"/>
+              </a:defRPr>
+            </a:pPr>
             <a:r>
               <a:t>  &lt;export&gt;</a:t>
             </a:r>
-            <a:br/>
+          </a:p>
+          <a:p>
+            <a:pPr algn="l">
+              <a:spcAft>
+                <a:spcPts val="0"/>
+              </a:spcAft>
+              <a:defRPr sz="1400" b="0">
+                <a:solidFill>
+                  <a:srgbClr val="FFFFFF"/>
+                </a:solidFill>
+                <a:latin typeface="DejaVu Sans Mono"/>
+              </a:defRPr>
+            </a:pPr>
             <a:r>
               <a:t>    &lt;build_type&gt;ament_python&lt;/build_type&gt;</a:t>
             </a:r>
-            <a:br/>
+          </a:p>
+          <a:p>
+            <a:pPr algn="l">
+              <a:spcAft>
+                <a:spcPts val="0"/>
+              </a:spcAft>
+              <a:defRPr sz="1400" b="0">
+                <a:solidFill>
+                  <a:srgbClr val="FFFFFF"/>
+                </a:solidFill>
+                <a:latin typeface="DejaVu Sans Mono"/>
+              </a:defRPr>
+            </a:pPr>
             <a:r>
               <a:t>  &lt;/export&gt;</a:t>
             </a:r>
-            <a:br/>
+          </a:p>
+          <a:p>
+            <a:pPr algn="l">
+              <a:spcAft>
+                <a:spcPts val="0"/>
+              </a:spcAft>
+              <a:defRPr sz="1400" b="0">
+                <a:solidFill>
+                  <a:srgbClr val="FFFFFF"/>
+                </a:solidFill>
+                <a:latin typeface="DejaVu Sans Mono"/>
+              </a:defRPr>
+            </a:pPr>
             <a:r>
               <a:t>  </a:t>
             </a:r>
-            <a:br/>
-            <a:br/>
+          </a:p>
+          <a:p>
+            <a:pPr algn="l">
+              <a:spcAft>
+                <a:spcPts val="0"/>
+              </a:spcAft>
+              <a:defRPr sz="1400" b="0">
+                <a:solidFill>
+                  <a:srgbClr val="FFFFFF"/>
+                </a:solidFill>
+                <a:latin typeface="DejaVu Sans Mono"/>
+              </a:defRPr>
+            </a:pPr>
+          </a:p>
+          <a:p>
+            <a:pPr algn="l">
+              <a:spcAft>
+                <a:spcPts val="0"/>
+              </a:spcAft>
+              <a:defRPr sz="1400" b="0">
+                <a:solidFill>
+                  <a:srgbClr val="FFFFFF"/>
+                </a:solidFill>
+                <a:latin typeface="DejaVu Sans Mono"/>
+              </a:defRPr>
+            </a:pPr>
             <a:r>
               <a:t>&lt;/package&gt;</a:t>
             </a:r>
@@ -17763,7 +18202,7 @@
           </a:fontRef>
         </p:style>
         <p:txBody>
-          <a:bodyPr rtlCol="0" anchor="ctr" wrap="square" lIns="73152" rIns="73152" tIns="36576" bIns="36576"/>
+          <a:bodyPr rtlCol="0" anchor="ctr" wrap="square" lIns="109728" rIns="109728" tIns="73152" bIns="73152"/>
           <a:lstStyle/>
           <a:p>
             <a:pPr algn="l">
@@ -17780,7 +18219,19 @@
             <a:r>
               <a:t>mkdir -p ~/ros2_curri/my_agv_ws/src/agv_bringup</a:t>
             </a:r>
-            <a:br/>
+          </a:p>
+          <a:p>
+            <a:pPr algn="l">
+              <a:spcAft>
+                <a:spcPts val="0"/>
+              </a:spcAft>
+              <a:defRPr sz="1600" b="0">
+                <a:solidFill>
+                  <a:srgbClr val="FFFFFF"/>
+                </a:solidFill>
+                <a:latin typeface="DejaVu Sans Mono"/>
+              </a:defRPr>
+            </a:pPr>
             <a:r>
               <a:t>nano ~/ros2_curri/my_agv_ws/src/agv_bringup/setup.py</a:t>
             </a:r>
@@ -19598,7 +20049,7 @@
           </a:fontRef>
         </p:style>
         <p:txBody>
-          <a:bodyPr rtlCol="0" anchor="ctr" wrap="square" lIns="164592" rIns="164592" tIns="109728" bIns="36576"/>
+          <a:bodyPr rtlCol="0" anchor="ctr" wrap="square" lIns="164592" rIns="164592" tIns="109728" bIns="73152"/>
           <a:lstStyle/>
           <a:p>
             <a:pPr algn="l">
@@ -19615,39 +20066,147 @@
             <a:r>
               <a:t>from glob import glob</a:t>
             </a:r>
-            <a:br/>
+          </a:p>
+          <a:p>
+            <a:pPr algn="l">
+              <a:spcAft>
+                <a:spcPts val="0"/>
+              </a:spcAft>
+              <a:defRPr sz="1400" b="0">
+                <a:solidFill>
+                  <a:srgbClr val="FFFFFF"/>
+                </a:solidFill>
+                <a:latin typeface="DejaVu Sans Mono"/>
+              </a:defRPr>
+            </a:pPr>
             <a:r>
               <a:t>from setuptools import find_packages, setup</a:t>
             </a:r>
-            <a:br/>
+          </a:p>
+          <a:p>
+            <a:pPr algn="l">
+              <a:spcAft>
+                <a:spcPts val="0"/>
+              </a:spcAft>
+              <a:defRPr sz="1400" b="0">
+                <a:solidFill>
+                  <a:srgbClr val="FFFFFF"/>
+                </a:solidFill>
+                <a:latin typeface="DejaVu Sans Mono"/>
+              </a:defRPr>
+            </a:pPr>
             <a:r>
               <a:t>package_name = 'agv_bringup'</a:t>
             </a:r>
-            <a:br/>
+          </a:p>
+          <a:p>
+            <a:pPr algn="l">
+              <a:spcAft>
+                <a:spcPts val="0"/>
+              </a:spcAft>
+              <a:defRPr sz="1400" b="0">
+                <a:solidFill>
+                  <a:srgbClr val="FFFFFF"/>
+                </a:solidFill>
+                <a:latin typeface="DejaVu Sans Mono"/>
+              </a:defRPr>
+            </a:pPr>
             <a:r>
               <a:t>setup(name=package_name, version='0.1.0', packages=find_packages(exclude=['test']),</a:t>
             </a:r>
-            <a:br/>
+          </a:p>
+          <a:p>
+            <a:pPr algn="l">
+              <a:spcAft>
+                <a:spcPts val="0"/>
+              </a:spcAft>
+              <a:defRPr sz="1400" b="0">
+                <a:solidFill>
+                  <a:srgbClr val="FFFFFF"/>
+                </a:solidFill>
+                <a:latin typeface="DejaVu Sans Mono"/>
+              </a:defRPr>
+            </a:pPr>
             <a:r>
               <a:t>    data_files=[('share/ament_index/resource_index/packages',</a:t>
             </a:r>
-            <a:br/>
+          </a:p>
+          <a:p>
+            <a:pPr algn="l">
+              <a:spcAft>
+                <a:spcPts val="0"/>
+              </a:spcAft>
+              <a:defRPr sz="1400" b="0">
+                <a:solidFill>
+                  <a:srgbClr val="FFFFFF"/>
+                </a:solidFill>
+                <a:latin typeface="DejaVu Sans Mono"/>
+              </a:defRPr>
+            </a:pPr>
             <a:r>
               <a:t>    ['resource/' + package_name]), ('share/' + package_name, ['package.xml']),</a:t>
             </a:r>
-            <a:br/>
+          </a:p>
+          <a:p>
+            <a:pPr algn="l">
+              <a:spcAft>
+                <a:spcPts val="0"/>
+              </a:spcAft>
+              <a:defRPr sz="1400" b="0">
+                <a:solidFill>
+                  <a:srgbClr val="FFFFFF"/>
+                </a:solidFill>
+                <a:latin typeface="DejaVu Sans Mono"/>
+              </a:defRPr>
+            </a:pPr>
             <a:r>
               <a:t>    ('share/' + package_name + '/launch', glob('launch/*.launch.py')),</a:t>
             </a:r>
-            <a:br/>
+          </a:p>
+          <a:p>
+            <a:pPr algn="l">
+              <a:spcAft>
+                <a:spcPts val="0"/>
+              </a:spcAft>
+              <a:defRPr sz="1400" b="0">
+                <a:solidFill>
+                  <a:srgbClr val="FFFFFF"/>
+                </a:solidFill>
+                <a:latin typeface="DejaVu Sans Mono"/>
+              </a:defRPr>
+            </a:pPr>
             <a:r>
               <a:t>    ('share/' + package_name + '/config', glob('config/*.yaml'))],</a:t>
             </a:r>
-            <a:br/>
+          </a:p>
+          <a:p>
+            <a:pPr algn="l">
+              <a:spcAft>
+                <a:spcPts val="0"/>
+              </a:spcAft>
+              <a:defRPr sz="1400" b="0">
+                <a:solidFill>
+                  <a:srgbClr val="FFFFFF"/>
+                </a:solidFill>
+                <a:latin typeface="DejaVu Sans Mono"/>
+              </a:defRPr>
+            </a:pPr>
             <a:r>
               <a:t>    install_requires=['setuptools'], zip_safe=True, maintainer='AGV student',</a:t>
             </a:r>
-            <a:br/>
+          </a:p>
+          <a:p>
+            <a:pPr algn="l">
+              <a:spcAft>
+                <a:spcPts val="0"/>
+              </a:spcAft>
+              <a:defRPr sz="1400" b="0">
+                <a:solidFill>
+                  <a:srgbClr val="FFFFFF"/>
+                </a:solidFill>
+                <a:latin typeface="DejaVu Sans Mono"/>
+              </a:defRPr>
+            </a:pPr>
             <a:r>
               <a:t>    maintainer_email='student@example.com', license='Apache-2.0')</a:t>
             </a:r>
@@ -20119,7 +20678,7 @@
           </a:fontRef>
         </p:style>
         <p:txBody>
-          <a:bodyPr rtlCol="0" anchor="ctr" wrap="square" lIns="73152" rIns="73152" tIns="36576" bIns="36576"/>
+          <a:bodyPr rtlCol="0" anchor="ctr" wrap="square" lIns="109728" rIns="109728" tIns="73152" bIns="73152"/>
           <a:lstStyle/>
           <a:p>
             <a:pPr algn="l">
@@ -20136,7 +20695,19 @@
             <a:r>
               <a:t>mkdir -p ~/ros2_curri/my_agv_ws/src/agv_bringup/config</a:t>
             </a:r>
-            <a:br/>
+          </a:p>
+          <a:p>
+            <a:pPr algn="l">
+              <a:spcAft>
+                <a:spcPts val="0"/>
+              </a:spcAft>
+              <a:defRPr sz="1600" b="0">
+                <a:solidFill>
+                  <a:srgbClr val="FFFFFF"/>
+                </a:solidFill>
+                <a:latin typeface="DejaVu Sans Mono"/>
+              </a:defRPr>
+            </a:pPr>
             <a:r>
               <a:t>nano ~/ros2_curri/my_agv_ws/src/agv_bringup/config/robot.yaml</a:t>
             </a:r>
@@ -21950,7 +22521,7 @@
           </a:fontRef>
         </p:style>
         <p:txBody>
-          <a:bodyPr rtlCol="0" anchor="ctr" wrap="square" lIns="164592" rIns="164592" tIns="109728" bIns="36576"/>
+          <a:bodyPr rtlCol="0" anchor="ctr" wrap="square" lIns="164592" rIns="164592" tIns="109728" bIns="73152"/>
           <a:lstStyle/>
           <a:p>
             <a:pPr algn="l">
@@ -21967,11 +22538,35 @@
             <a:r>
               <a:t>robot_state_publisher:</a:t>
             </a:r>
-            <a:br/>
+          </a:p>
+          <a:p>
+            <a:pPr algn="l">
+              <a:spcAft>
+                <a:spcPts val="0"/>
+              </a:spcAft>
+              <a:defRPr sz="1400" b="0">
+                <a:solidFill>
+                  <a:srgbClr val="FFFFFF"/>
+                </a:solidFill>
+                <a:latin typeface="DejaVu Sans Mono"/>
+              </a:defRPr>
+            </a:pPr>
             <a:r>
               <a:t>  ros__parameters:</a:t>
             </a:r>
-            <a:br/>
+          </a:p>
+          <a:p>
+            <a:pPr algn="l">
+              <a:spcAft>
+                <a:spcPts val="0"/>
+              </a:spcAft>
+              <a:defRPr sz="1400" b="0">
+                <a:solidFill>
+                  <a:srgbClr val="FFFFFF"/>
+                </a:solidFill>
+                <a:latin typeface="DejaVu Sans Mono"/>
+              </a:defRPr>
+            </a:pPr>
             <a:r>
               <a:t>    use_sim_time: true</a:t>
             </a:r>
@@ -22443,7 +23038,7 @@
           </a:fontRef>
         </p:style>
         <p:txBody>
-          <a:bodyPr rtlCol="0" anchor="ctr" wrap="square" lIns="73152" rIns="73152" tIns="36576" bIns="36576"/>
+          <a:bodyPr rtlCol="0" anchor="ctr" wrap="square" lIns="109728" rIns="109728" tIns="73152" bIns="73152"/>
           <a:lstStyle/>
           <a:p>
             <a:pPr algn="l">
@@ -22460,7 +23055,19 @@
             <a:r>
               <a:t>mkdir -p ~/ros2_curri/my_agv_ws/src/agv_bringup/config</a:t>
             </a:r>
-            <a:br/>
+          </a:p>
+          <a:p>
+            <a:pPr algn="l">
+              <a:spcAft>
+                <a:spcPts val="0"/>
+              </a:spcAft>
+              <a:defRPr sz="1600" b="0">
+                <a:solidFill>
+                  <a:srgbClr val="FFFFFF"/>
+                </a:solidFill>
+                <a:latin typeface="DejaVu Sans Mono"/>
+              </a:defRPr>
+            </a:pPr>
             <a:r>
               <a:t>nano ~/ros2_curri/my_agv_ws/src/agv_bringup/config/sensors.yaml</a:t>
             </a:r>
@@ -24693,7 +25300,7 @@
           </a:fontRef>
         </p:style>
         <p:txBody>
-          <a:bodyPr rtlCol="0" anchor="ctr" wrap="square" lIns="164592" rIns="164592" tIns="109728" bIns="36576"/>
+          <a:bodyPr rtlCol="0" anchor="ctr" wrap="square" lIns="164592" rIns="164592" tIns="109728" bIns="73152"/>
           <a:lstStyle/>
           <a:p>
             <a:pPr algn="l">
@@ -24710,27 +25317,99 @@
             <a:r>
               <a:t>lidar_processor:</a:t>
             </a:r>
-            <a:br/>
+          </a:p>
+          <a:p>
+            <a:pPr algn="l">
+              <a:spcAft>
+                <a:spcPts val="0"/>
+              </a:spcAft>
+              <a:defRPr sz="1400" b="0">
+                <a:solidFill>
+                  <a:srgbClr val="FFFFFF"/>
+                </a:solidFill>
+                <a:latin typeface="DejaVu Sans Mono"/>
+              </a:defRPr>
+            </a:pPr>
             <a:r>
               <a:t>  ros__parameters:</a:t>
             </a:r>
-            <a:br/>
+          </a:p>
+          <a:p>
+            <a:pPr algn="l">
+              <a:spcAft>
+                <a:spcPts val="0"/>
+              </a:spcAft>
+              <a:defRPr sz="1400" b="0">
+                <a:solidFill>
+                  <a:srgbClr val="FFFFFF"/>
+                </a:solidFill>
+                <a:latin typeface="DejaVu Sans Mono"/>
+              </a:defRPr>
+            </a:pPr>
             <a:r>
               <a:t>    use_sim_time: true</a:t>
             </a:r>
-            <a:br/>
+          </a:p>
+          <a:p>
+            <a:pPr algn="l">
+              <a:spcAft>
+                <a:spcPts val="0"/>
+              </a:spcAft>
+              <a:defRPr sz="1400" b="0">
+                <a:solidFill>
+                  <a:srgbClr val="FFFFFF"/>
+                </a:solidFill>
+                <a:latin typeface="DejaVu Sans Mono"/>
+              </a:defRPr>
+            </a:pPr>
             <a:r>
               <a:t>    front_half_angle_deg: 15.0</a:t>
             </a:r>
-            <a:br/>
+          </a:p>
+          <a:p>
+            <a:pPr algn="l">
+              <a:spcAft>
+                <a:spcPts val="0"/>
+              </a:spcAft>
+              <a:defRPr sz="1400" b="0">
+                <a:solidFill>
+                  <a:srgbClr val="FFFFFF"/>
+                </a:solidFill>
+                <a:latin typeface="DejaVu Sans Mono"/>
+              </a:defRPr>
+            </a:pPr>
             <a:r>
               <a:t>imu_monitor:</a:t>
             </a:r>
-            <a:br/>
+          </a:p>
+          <a:p>
+            <a:pPr algn="l">
+              <a:spcAft>
+                <a:spcPts val="0"/>
+              </a:spcAft>
+              <a:defRPr sz="1400" b="0">
+                <a:solidFill>
+                  <a:srgbClr val="FFFFFF"/>
+                </a:solidFill>
+                <a:latin typeface="DejaVu Sans Mono"/>
+              </a:defRPr>
+            </a:pPr>
             <a:r>
               <a:t>  ros__parameters:</a:t>
             </a:r>
-            <a:br/>
+          </a:p>
+          <a:p>
+            <a:pPr algn="l">
+              <a:spcAft>
+                <a:spcPts val="0"/>
+              </a:spcAft>
+              <a:defRPr sz="1400" b="0">
+                <a:solidFill>
+                  <a:srgbClr val="FFFFFF"/>
+                </a:solidFill>
+                <a:latin typeface="DejaVu Sans Mono"/>
+              </a:defRPr>
+            </a:pPr>
             <a:r>
               <a:t>    use_sim_time: true</a:t>
             </a:r>
@@ -25202,7 +25881,7 @@
           </a:fontRef>
         </p:style>
         <p:txBody>
-          <a:bodyPr rtlCol="0" anchor="ctr" wrap="square" lIns="73152" rIns="73152" tIns="36576" bIns="36576"/>
+          <a:bodyPr rtlCol="0" anchor="ctr" wrap="square" lIns="109728" rIns="109728" tIns="73152" bIns="73152"/>
           <a:lstStyle/>
           <a:p>
             <a:pPr algn="l">
@@ -25219,7 +25898,19 @@
             <a:r>
               <a:t>mkdir -p ~/ros2_curri/my_agv_ws/src/agv_bringup/config</a:t>
             </a:r>
-            <a:br/>
+          </a:p>
+          <a:p>
+            <a:pPr algn="l">
+              <a:spcAft>
+                <a:spcPts val="0"/>
+              </a:spcAft>
+              <a:defRPr sz="1600" b="0">
+                <a:solidFill>
+                  <a:srgbClr val="FFFFFF"/>
+                </a:solidFill>
+                <a:latin typeface="DejaVu Sans Mono"/>
+              </a:defRPr>
+            </a:pPr>
             <a:r>
               <a:t>nano ~/ros2_curri/my_agv_ws/src/agv_bringup/config/vision.yaml</a:t>
             </a:r>
@@ -27033,7 +27724,7 @@
           </a:fontRef>
         </p:style>
         <p:txBody>
-          <a:bodyPr rtlCol="0" anchor="ctr" wrap="square" lIns="164592" rIns="164592" tIns="109728" bIns="36576"/>
+          <a:bodyPr rtlCol="0" anchor="ctr" wrap="square" lIns="164592" rIns="164592" tIns="109728" bIns="73152"/>
           <a:lstStyle/>
           <a:p>
             <a:pPr algn="l">
@@ -27050,27 +27741,99 @@
             <a:r>
               <a:t>yolo_node:</a:t>
             </a:r>
-            <a:br/>
+          </a:p>
+          <a:p>
+            <a:pPr algn="l">
+              <a:spcAft>
+                <a:spcPts val="0"/>
+              </a:spcAft>
+              <a:defRPr sz="1400" b="0">
+                <a:solidFill>
+                  <a:srgbClr val="FFFFFF"/>
+                </a:solidFill>
+                <a:latin typeface="DejaVu Sans Mono"/>
+              </a:defRPr>
+            </a:pPr>
             <a:r>
               <a:t>  ros__parameters:</a:t>
             </a:r>
-            <a:br/>
+          </a:p>
+          <a:p>
+            <a:pPr algn="l">
+              <a:spcAft>
+                <a:spcPts val="0"/>
+              </a:spcAft>
+              <a:defRPr sz="1400" b="0">
+                <a:solidFill>
+                  <a:srgbClr val="FFFFFF"/>
+                </a:solidFill>
+                <a:latin typeface="DejaVu Sans Mono"/>
+              </a:defRPr>
+            </a:pPr>
             <a:r>
               <a:t>    use_sim_time: true</a:t>
             </a:r>
-            <a:br/>
+          </a:p>
+          <a:p>
+            <a:pPr algn="l">
+              <a:spcAft>
+                <a:spcPts val="0"/>
+              </a:spcAft>
+              <a:defRPr sz="1400" b="0">
+                <a:solidFill>
+                  <a:srgbClr val="FFFFFF"/>
+                </a:solidFill>
+                <a:latin typeface="DejaVu Sans Mono"/>
+              </a:defRPr>
+            </a:pPr>
             <a:r>
               <a:t>    enable_yolo: false</a:t>
             </a:r>
-            <a:br/>
+          </a:p>
+          <a:p>
+            <a:pPr algn="l">
+              <a:spcAft>
+                <a:spcPts val="0"/>
+              </a:spcAft>
+              <a:defRPr sz="1400" b="0">
+                <a:solidFill>
+                  <a:srgbClr val="FFFFFF"/>
+                </a:solidFill>
+                <a:latin typeface="DejaVu Sans Mono"/>
+              </a:defRPr>
+            </a:pPr>
             <a:r>
               <a:t>    enable_red_target_fallback: true</a:t>
             </a:r>
-            <a:br/>
+          </a:p>
+          <a:p>
+            <a:pPr algn="l">
+              <a:spcAft>
+                <a:spcPts val="0"/>
+              </a:spcAft>
+              <a:defRPr sz="1400" b="0">
+                <a:solidFill>
+                  <a:srgbClr val="FFFFFF"/>
+                </a:solidFill>
+                <a:latin typeface="DejaVu Sans Mono"/>
+              </a:defRPr>
+            </a:pPr>
             <a:r>
               <a:t>    model_path: yolo11n.pt</a:t>
             </a:r>
-            <a:br/>
+          </a:p>
+          <a:p>
+            <a:pPr algn="l">
+              <a:spcAft>
+                <a:spcPts val="0"/>
+              </a:spcAft>
+              <a:defRPr sz="1400" b="0">
+                <a:solidFill>
+                  <a:srgbClr val="FFFFFF"/>
+                </a:solidFill>
+                <a:latin typeface="DejaVu Sans Mono"/>
+              </a:defRPr>
+            </a:pPr>
             <a:r>
               <a:t>    confidence_threshold: 0.50</a:t>
             </a:r>
@@ -27542,7 +28305,7 @@
           </a:fontRef>
         </p:style>
         <p:txBody>
-          <a:bodyPr rtlCol="0" anchor="ctr" wrap="square" lIns="73152" rIns="73152" tIns="36576" bIns="36576"/>
+          <a:bodyPr rtlCol="0" anchor="ctr" wrap="square" lIns="109728" rIns="109728" tIns="73152" bIns="73152"/>
           <a:lstStyle/>
           <a:p>
             <a:pPr algn="l">
@@ -27559,7 +28322,19 @@
             <a:r>
               <a:t>mkdir -p ~/ros2_curri/my_agv_ws/src/agv_bringup/config</a:t>
             </a:r>
-            <a:br/>
+          </a:p>
+          <a:p>
+            <a:pPr algn="l">
+              <a:spcAft>
+                <a:spcPts val="0"/>
+              </a:spcAft>
+              <a:defRPr sz="1600" b="0">
+                <a:solidFill>
+                  <a:srgbClr val="FFFFFF"/>
+                </a:solidFill>
+                <a:latin typeface="DejaVu Sans Mono"/>
+              </a:defRPr>
+            </a:pPr>
             <a:r>
               <a:t>nano ~/ros2_curri/my_agv_ws/src/agv_bringup/config/mission.yaml</a:t>
             </a:r>
@@ -29373,7 +30148,7 @@
           </a:fontRef>
         </p:style>
         <p:txBody>
-          <a:bodyPr rtlCol="0" anchor="ctr" wrap="square" lIns="164592" rIns="164592" tIns="109728" bIns="36576"/>
+          <a:bodyPr rtlCol="0" anchor="ctr" wrap="square" lIns="164592" rIns="164592" tIns="109728" bIns="73152"/>
           <a:lstStyle/>
           <a:p>
             <a:pPr algn="l">
@@ -29390,47 +30165,179 @@
             <a:r>
               <a:t>mission_manager:</a:t>
             </a:r>
-            <a:br/>
+          </a:p>
+          <a:p>
+            <a:pPr algn="l">
+              <a:spcAft>
+                <a:spcPts val="0"/>
+              </a:spcAft>
+              <a:defRPr sz="1400" b="0">
+                <a:solidFill>
+                  <a:srgbClr val="FFFFFF"/>
+                </a:solidFill>
+                <a:latin typeface="DejaVu Sans Mono"/>
+              </a:defRPr>
+            </a:pPr>
             <a:r>
               <a:t>  ros__parameters:</a:t>
             </a:r>
-            <a:br/>
+          </a:p>
+          <a:p>
+            <a:pPr algn="l">
+              <a:spcAft>
+                <a:spcPts val="0"/>
+              </a:spcAft>
+              <a:defRPr sz="1400" b="0">
+                <a:solidFill>
+                  <a:srgbClr val="FFFFFF"/>
+                </a:solidFill>
+                <a:latin typeface="DejaVu Sans Mono"/>
+              </a:defRPr>
+            </a:pPr>
             <a:r>
               <a:t>    use_sim_time: true</a:t>
             </a:r>
-            <a:br/>
+          </a:p>
+          <a:p>
+            <a:pPr algn="l">
+              <a:spcAft>
+                <a:spcPts val="0"/>
+              </a:spcAft>
+              <a:defRPr sz="1400" b="0">
+                <a:solidFill>
+                  <a:srgbClr val="FFFFFF"/>
+                </a:solidFill>
+                <a:latin typeface="DejaVu Sans Mono"/>
+              </a:defRPr>
+            </a:pPr>
             <a:r>
               <a:t>    stop_distance: 0.50</a:t>
             </a:r>
-            <a:br/>
+          </a:p>
+          <a:p>
+            <a:pPr algn="l">
+              <a:spcAft>
+                <a:spcPts val="0"/>
+              </a:spcAft>
+              <a:defRPr sz="1400" b="0">
+                <a:solidFill>
+                  <a:srgbClr val="FFFFFF"/>
+                </a:solidFill>
+                <a:latin typeface="DejaVu Sans Mono"/>
+              </a:defRPr>
+            </a:pPr>
             <a:r>
               <a:t>    search_speed: 0.25</a:t>
             </a:r>
-            <a:br/>
+          </a:p>
+          <a:p>
+            <a:pPr algn="l">
+              <a:spcAft>
+                <a:spcPts val="0"/>
+              </a:spcAft>
+              <a:defRPr sz="1400" b="0">
+                <a:solidFill>
+                  <a:srgbClr val="FFFFFF"/>
+                </a:solidFill>
+                <a:latin typeface="DejaVu Sans Mono"/>
+              </a:defRPr>
+            </a:pPr>
             <a:r>
               <a:t>    approach_speed: 0.15</a:t>
             </a:r>
-            <a:br/>
+          </a:p>
+          <a:p>
+            <a:pPr algn="l">
+              <a:spcAft>
+                <a:spcPts val="0"/>
+              </a:spcAft>
+              <a:defRPr sz="1400" b="0">
+                <a:solidFill>
+                  <a:srgbClr val="FFFFFF"/>
+                </a:solidFill>
+                <a:latin typeface="DejaVu Sans Mono"/>
+              </a:defRPr>
+            </a:pPr>
             <a:r>
               <a:t>    image_center_x: 320</a:t>
             </a:r>
-            <a:br/>
+          </a:p>
+          <a:p>
+            <a:pPr algn="l">
+              <a:spcAft>
+                <a:spcPts val="0"/>
+              </a:spcAft>
+              <a:defRPr sz="1400" b="0">
+                <a:solidFill>
+                  <a:srgbClr val="FFFFFF"/>
+                </a:solidFill>
+                <a:latin typeface="DejaVu Sans Mono"/>
+              </a:defRPr>
+            </a:pPr>
             <a:r>
               <a:t>    target_timeout_sec: 0.70</a:t>
             </a:r>
-            <a:br/>
+          </a:p>
+          <a:p>
+            <a:pPr algn="l">
+              <a:spcAft>
+                <a:spcPts val="0"/>
+              </a:spcAft>
+              <a:defRPr sz="1400" b="0">
+                <a:solidFill>
+                  <a:srgbClr val="FFFFFF"/>
+                </a:solidFill>
+                <a:latin typeface="DejaVu Sans Mono"/>
+              </a:defRPr>
+            </a:pPr>
             <a:r>
               <a:t>safety_controller:</a:t>
             </a:r>
-            <a:br/>
+          </a:p>
+          <a:p>
+            <a:pPr algn="l">
+              <a:spcAft>
+                <a:spcPts val="0"/>
+              </a:spcAft>
+              <a:defRPr sz="1400" b="0">
+                <a:solidFill>
+                  <a:srgbClr val="FFFFFF"/>
+                </a:solidFill>
+                <a:latin typeface="DejaVu Sans Mono"/>
+              </a:defRPr>
+            </a:pPr>
             <a:r>
               <a:t>  ros__parameters:</a:t>
             </a:r>
-            <a:br/>
+          </a:p>
+          <a:p>
+            <a:pPr algn="l">
+              <a:spcAft>
+                <a:spcPts val="0"/>
+              </a:spcAft>
+              <a:defRPr sz="1400" b="0">
+                <a:solidFill>
+                  <a:srgbClr val="FFFFFF"/>
+                </a:solidFill>
+                <a:latin typeface="DejaVu Sans Mono"/>
+              </a:defRPr>
+            </a:pPr>
             <a:r>
               <a:t>    use_sim_time: true</a:t>
             </a:r>
-            <a:br/>
+          </a:p>
+          <a:p>
+            <a:pPr algn="l">
+              <a:spcAft>
+                <a:spcPts val="0"/>
+              </a:spcAft>
+              <a:defRPr sz="1400" b="0">
+                <a:solidFill>
+                  <a:srgbClr val="FFFFFF"/>
+                </a:solidFill>
+                <a:latin typeface="DejaVu Sans Mono"/>
+              </a:defRPr>
+            </a:pPr>
             <a:r>
               <a:t>    stop_distance: 0.50</a:t>
             </a:r>
@@ -30180,7 +31087,7 @@
           </a:fontRef>
         </p:style>
         <p:txBody>
-          <a:bodyPr rtlCol="0" anchor="ctr" wrap="square" lIns="164592" rIns="164592" tIns="109728" bIns="36576"/>
+          <a:bodyPr rtlCol="0" anchor="ctr" wrap="square" lIns="164592" rIns="164592" tIns="109728" bIns="73152"/>
           <a:lstStyle/>
           <a:p>
             <a:pPr algn="l">
@@ -30665,7 +31572,7 @@
           </a:fontRef>
         </p:style>
         <p:txBody>
-          <a:bodyPr rtlCol="0" anchor="ctr" wrap="square" lIns="73152" rIns="73152" tIns="36576" bIns="36576"/>
+          <a:bodyPr rtlCol="0" anchor="ctr" wrap="square" lIns="109728" rIns="109728" tIns="73152" bIns="73152"/>
           <a:lstStyle/>
           <a:p>
             <a:pPr algn="l">
@@ -30682,7 +31589,19 @@
             <a:r>
               <a:t>mkdir -p ~/ros2_curri/my_agv_ws/src/agv_control/config</a:t>
             </a:r>
-            <a:br/>
+          </a:p>
+          <a:p>
+            <a:pPr algn="l">
+              <a:spcAft>
+                <a:spcPts val="0"/>
+              </a:spcAft>
+              <a:defRPr sz="1600" b="0">
+                <a:solidFill>
+                  <a:srgbClr val="FFFFFF"/>
+                </a:solidFill>
+                <a:latin typeface="DejaVu Sans Mono"/>
+              </a:defRPr>
+            </a:pPr>
             <a:r>
               <a:t>nano ~/ros2_curri/my_agv_ws/src/agv_control/config/controllers.yaml</a:t>
             </a:r>
@@ -32496,7 +33415,7 @@
           </a:fontRef>
         </p:style>
         <p:txBody>
-          <a:bodyPr rtlCol="0" anchor="ctr" wrap="square" lIns="164592" rIns="164592" tIns="109728" bIns="36576"/>
+          <a:bodyPr rtlCol="0" anchor="ctr" wrap="square" lIns="164592" rIns="164592" tIns="109728" bIns="73152"/>
           <a:lstStyle/>
           <a:p>
             <a:pPr algn="l">
@@ -32513,47 +33432,179 @@
             <a:r>
               <a:t>controller_manager:</a:t>
             </a:r>
-            <a:br/>
+          </a:p>
+          <a:p>
+            <a:pPr algn="l">
+              <a:spcAft>
+                <a:spcPts val="0"/>
+              </a:spcAft>
+              <a:defRPr sz="1400" b="0">
+                <a:solidFill>
+                  <a:srgbClr val="FFFFFF"/>
+                </a:solidFill>
+                <a:latin typeface="DejaVu Sans Mono"/>
+              </a:defRPr>
+            </a:pPr>
             <a:r>
               <a:t>  ros__parameters:</a:t>
             </a:r>
-            <a:br/>
+          </a:p>
+          <a:p>
+            <a:pPr algn="l">
+              <a:spcAft>
+                <a:spcPts val="0"/>
+              </a:spcAft>
+              <a:defRPr sz="1400" b="0">
+                <a:solidFill>
+                  <a:srgbClr val="FFFFFF"/>
+                </a:solidFill>
+                <a:latin typeface="DejaVu Sans Mono"/>
+              </a:defRPr>
+            </a:pPr>
             <a:r>
               <a:t>    update_rate: 50</a:t>
             </a:r>
-            <a:br/>
+          </a:p>
+          <a:p>
+            <a:pPr algn="l">
+              <a:spcAft>
+                <a:spcPts val="0"/>
+              </a:spcAft>
+              <a:defRPr sz="1400" b="0">
+                <a:solidFill>
+                  <a:srgbClr val="FFFFFF"/>
+                </a:solidFill>
+                <a:latin typeface="DejaVu Sans Mono"/>
+              </a:defRPr>
+            </a:pPr>
             <a:r>
               <a:t>    joint_state_broadcaster:</a:t>
             </a:r>
-            <a:br/>
+          </a:p>
+          <a:p>
+            <a:pPr algn="l">
+              <a:spcAft>
+                <a:spcPts val="0"/>
+              </a:spcAft>
+              <a:defRPr sz="1400" b="0">
+                <a:solidFill>
+                  <a:srgbClr val="FFFFFF"/>
+                </a:solidFill>
+                <a:latin typeface="DejaVu Sans Mono"/>
+              </a:defRPr>
+            </a:pPr>
             <a:r>
               <a:t>      type: joint_state_broadcaster/JointStateBroadcaster</a:t>
             </a:r>
-            <a:br/>
+          </a:p>
+          <a:p>
+            <a:pPr algn="l">
+              <a:spcAft>
+                <a:spcPts val="0"/>
+              </a:spcAft>
+              <a:defRPr sz="1400" b="0">
+                <a:solidFill>
+                  <a:srgbClr val="FFFFFF"/>
+                </a:solidFill>
+                <a:latin typeface="DejaVu Sans Mono"/>
+              </a:defRPr>
+            </a:pPr>
             <a:r>
               <a:t>    diff_drive_controller:</a:t>
             </a:r>
-            <a:br/>
+          </a:p>
+          <a:p>
+            <a:pPr algn="l">
+              <a:spcAft>
+                <a:spcPts val="0"/>
+              </a:spcAft>
+              <a:defRPr sz="1400" b="0">
+                <a:solidFill>
+                  <a:srgbClr val="FFFFFF"/>
+                </a:solidFill>
+                <a:latin typeface="DejaVu Sans Mono"/>
+              </a:defRPr>
+            </a:pPr>
             <a:r>
               <a:t>      type: diff_drive_controller/DiffDriveController</a:t>
             </a:r>
-            <a:br/>
+          </a:p>
+          <a:p>
+            <a:pPr algn="l">
+              <a:spcAft>
+                <a:spcPts val="0"/>
+              </a:spcAft>
+              <a:defRPr sz="1400" b="0">
+                <a:solidFill>
+                  <a:srgbClr val="FFFFFF"/>
+                </a:solidFill>
+                <a:latin typeface="DejaVu Sans Mono"/>
+              </a:defRPr>
+            </a:pPr>
             <a:r>
               <a:t>diff_drive_controller:</a:t>
             </a:r>
-            <a:br/>
+          </a:p>
+          <a:p>
+            <a:pPr algn="l">
+              <a:spcAft>
+                <a:spcPts val="0"/>
+              </a:spcAft>
+              <a:defRPr sz="1400" b="0">
+                <a:solidFill>
+                  <a:srgbClr val="FFFFFF"/>
+                </a:solidFill>
+                <a:latin typeface="DejaVu Sans Mono"/>
+              </a:defRPr>
+            </a:pPr>
             <a:r>
               <a:t>  ros__parameters:</a:t>
             </a:r>
-            <a:br/>
+          </a:p>
+          <a:p>
+            <a:pPr algn="l">
+              <a:spcAft>
+                <a:spcPts val="0"/>
+              </a:spcAft>
+              <a:defRPr sz="1400" b="0">
+                <a:solidFill>
+                  <a:srgbClr val="FFFFFF"/>
+                </a:solidFill>
+                <a:latin typeface="DejaVu Sans Mono"/>
+              </a:defRPr>
+            </a:pPr>
             <a:r>
               <a:t>    left_wheel_names: [left_wheel_joint]</a:t>
             </a:r>
-            <a:br/>
+          </a:p>
+          <a:p>
+            <a:pPr algn="l">
+              <a:spcAft>
+                <a:spcPts val="0"/>
+              </a:spcAft>
+              <a:defRPr sz="1400" b="0">
+                <a:solidFill>
+                  <a:srgbClr val="FFFFFF"/>
+                </a:solidFill>
+                <a:latin typeface="DejaVu Sans Mono"/>
+              </a:defRPr>
+            </a:pPr>
             <a:r>
               <a:t>    right_wheel_names: [right_wheel_joint]</a:t>
             </a:r>
-            <a:br/>
+          </a:p>
+          <a:p>
+            <a:pPr algn="l">
+              <a:spcAft>
+                <a:spcPts val="0"/>
+              </a:spcAft>
+              <a:defRPr sz="1400" b="0">
+                <a:solidFill>
+                  <a:srgbClr val="FFFFFF"/>
+                </a:solidFill>
+                <a:latin typeface="DejaVu Sans Mono"/>
+              </a:defRPr>
+            </a:pPr>
             <a:r>
               <a:t>    wheel_separation: 0.38</a:t>
             </a:r>
@@ -32970,7 +34021,7 @@
           </a:fontRef>
         </p:style>
         <p:txBody>
-          <a:bodyPr rtlCol="0" anchor="ctr" wrap="square" lIns="164592" rIns="164592" tIns="109728" bIns="36576"/>
+          <a:bodyPr rtlCol="0" anchor="ctr" wrap="square" lIns="164592" rIns="164592" tIns="109728" bIns="73152"/>
           <a:lstStyle/>
           <a:p>
             <a:pPr algn="l">
@@ -32987,15 +34038,51 @@
             <a:r>
               <a:t>    wheel_radius: 0.08</a:t>
             </a:r>
-            <a:br/>
+          </a:p>
+          <a:p>
+            <a:pPr algn="l">
+              <a:spcAft>
+                <a:spcPts val="0"/>
+              </a:spcAft>
+              <a:defRPr sz="1400" b="0">
+                <a:solidFill>
+                  <a:srgbClr val="FFFFFF"/>
+                </a:solidFill>
+                <a:latin typeface="DejaVu Sans Mono"/>
+              </a:defRPr>
+            </a:pPr>
             <a:r>
               <a:t>    base_frame_id: base_link</a:t>
             </a:r>
-            <a:br/>
+          </a:p>
+          <a:p>
+            <a:pPr algn="l">
+              <a:spcAft>
+                <a:spcPts val="0"/>
+              </a:spcAft>
+              <a:defRPr sz="1400" b="0">
+                <a:solidFill>
+                  <a:srgbClr val="FFFFFF"/>
+                </a:solidFill>
+                <a:latin typeface="DejaVu Sans Mono"/>
+              </a:defRPr>
+            </a:pPr>
             <a:r>
               <a:t>    odom_frame_id: odom</a:t>
             </a:r>
-            <a:br/>
+          </a:p>
+          <a:p>
+            <a:pPr algn="l">
+              <a:spcAft>
+                <a:spcPts val="0"/>
+              </a:spcAft>
+              <a:defRPr sz="1400" b="0">
+                <a:solidFill>
+                  <a:srgbClr val="FFFFFF"/>
+                </a:solidFill>
+                <a:latin typeface="DejaVu Sans Mono"/>
+              </a:defRPr>
+            </a:pPr>
             <a:r>
               <a:t>    publish_rate: 50.0</a:t>
             </a:r>
@@ -33467,7 +34554,7 @@
           </a:fontRef>
         </p:style>
         <p:txBody>
-          <a:bodyPr rtlCol="0" anchor="ctr" wrap="square" lIns="73152" rIns="73152" tIns="36576" bIns="36576"/>
+          <a:bodyPr rtlCol="0" anchor="ctr" wrap="square" lIns="109728" rIns="109728" tIns="73152" bIns="73152"/>
           <a:lstStyle/>
           <a:p>
             <a:pPr algn="l">
@@ -33484,7 +34571,19 @@
             <a:r>
               <a:t>mkdir -p ~/ros2_curri/my_agv_ws/src/agv_bringup/launch</a:t>
             </a:r>
-            <a:br/>
+          </a:p>
+          <a:p>
+            <a:pPr algn="l">
+              <a:spcAft>
+                <a:spcPts val="0"/>
+              </a:spcAft>
+              <a:defRPr sz="1600" b="0">
+                <a:solidFill>
+                  <a:srgbClr val="FFFFFF"/>
+                </a:solidFill>
+                <a:latin typeface="DejaVu Sans Mono"/>
+              </a:defRPr>
+            </a:pPr>
             <a:r>
               <a:t>nano ~/ros2_curri/my_agv_ws/src/agv_bringup/launch/agv_sim.launch.py</a:t>
             </a:r>
@@ -36963,7 +38062,7 @@
           </a:fontRef>
         </p:style>
         <p:txBody>
-          <a:bodyPr rtlCol="0" anchor="ctr" wrap="square" lIns="164592" rIns="164592" tIns="109728" bIns="36576"/>
+          <a:bodyPr rtlCol="0" anchor="ctr" wrap="square" lIns="164592" rIns="164592" tIns="109728" bIns="73152"/>
           <a:lstStyle/>
           <a:p>
             <a:pPr algn="l">
@@ -36980,44 +38079,176 @@
             <a:r>
               <a:t>import os</a:t>
             </a:r>
-            <a:br/>
+          </a:p>
+          <a:p>
+            <a:pPr algn="l">
+              <a:spcAft>
+                <a:spcPts val="0"/>
+              </a:spcAft>
+              <a:defRPr sz="1400" b="0">
+                <a:solidFill>
+                  <a:srgbClr val="FFFFFF"/>
+                </a:solidFill>
+                <a:latin typeface="DejaVu Sans Mono"/>
+              </a:defRPr>
+            </a:pPr>
             <a:r>
               <a:t>from ament_index_python.packages import get_package_share_directory</a:t>
             </a:r>
-            <a:br/>
+          </a:p>
+          <a:p>
+            <a:pPr algn="l">
+              <a:spcAft>
+                <a:spcPts val="0"/>
+              </a:spcAft>
+              <a:defRPr sz="1400" b="0">
+                <a:solidFill>
+                  <a:srgbClr val="FFFFFF"/>
+                </a:solidFill>
+                <a:latin typeface="DejaVu Sans Mono"/>
+              </a:defRPr>
+            </a:pPr>
             <a:r>
               <a:t>from launch import LaunchDescription</a:t>
             </a:r>
-            <a:br/>
+          </a:p>
+          <a:p>
+            <a:pPr algn="l">
+              <a:spcAft>
+                <a:spcPts val="0"/>
+              </a:spcAft>
+              <a:defRPr sz="1400" b="0">
+                <a:solidFill>
+                  <a:srgbClr val="FFFFFF"/>
+                </a:solidFill>
+                <a:latin typeface="DejaVu Sans Mono"/>
+              </a:defRPr>
+            </a:pPr>
             <a:r>
               <a:t>from launch.actions import DeclareLaunchArgument, IncludeLaunchDescription</a:t>
             </a:r>
-            <a:br/>
+          </a:p>
+          <a:p>
+            <a:pPr algn="l">
+              <a:spcAft>
+                <a:spcPts val="0"/>
+              </a:spcAft>
+              <a:defRPr sz="1400" b="0">
+                <a:solidFill>
+                  <a:srgbClr val="FFFFFF"/>
+                </a:solidFill>
+                <a:latin typeface="DejaVu Sans Mono"/>
+              </a:defRPr>
+            </a:pPr>
             <a:r>
               <a:t>from launch.conditions import IfCondition</a:t>
             </a:r>
-            <a:br/>
+          </a:p>
+          <a:p>
+            <a:pPr algn="l">
+              <a:spcAft>
+                <a:spcPts val="0"/>
+              </a:spcAft>
+              <a:defRPr sz="1400" b="0">
+                <a:solidFill>
+                  <a:srgbClr val="FFFFFF"/>
+                </a:solidFill>
+                <a:latin typeface="DejaVu Sans Mono"/>
+              </a:defRPr>
+            </a:pPr>
             <a:r>
               <a:t>from launch.launch_description_sources import PythonLaunchDescriptionSource</a:t>
             </a:r>
-            <a:br/>
+          </a:p>
+          <a:p>
+            <a:pPr algn="l">
+              <a:spcAft>
+                <a:spcPts val="0"/>
+              </a:spcAft>
+              <a:defRPr sz="1400" b="0">
+                <a:solidFill>
+                  <a:srgbClr val="FFFFFF"/>
+                </a:solidFill>
+                <a:latin typeface="DejaVu Sans Mono"/>
+              </a:defRPr>
+            </a:pPr>
             <a:r>
               <a:t>from launch.substitutions import Command, LaunchConfiguration</a:t>
             </a:r>
-            <a:br/>
+          </a:p>
+          <a:p>
+            <a:pPr algn="l">
+              <a:spcAft>
+                <a:spcPts val="0"/>
+              </a:spcAft>
+              <a:defRPr sz="1400" b="0">
+                <a:solidFill>
+                  <a:srgbClr val="FFFFFF"/>
+                </a:solidFill>
+                <a:latin typeface="DejaVu Sans Mono"/>
+              </a:defRPr>
+            </a:pPr>
             <a:r>
               <a:t>from launch_ros.actions import Node</a:t>
             </a:r>
-            <a:br/>
+          </a:p>
+          <a:p>
+            <a:pPr algn="l">
+              <a:spcAft>
+                <a:spcPts val="0"/>
+              </a:spcAft>
+              <a:defRPr sz="1400" b="0">
+                <a:solidFill>
+                  <a:srgbClr val="FFFFFF"/>
+                </a:solidFill>
+                <a:latin typeface="DejaVu Sans Mono"/>
+              </a:defRPr>
+            </a:pPr>
             <a:r>
               <a:t>from launch_ros.parameter_descriptions import ParameterValue</a:t>
             </a:r>
-            <a:br/>
-            <a:br/>
+          </a:p>
+          <a:p>
+            <a:pPr algn="l">
+              <a:spcAft>
+                <a:spcPts val="0"/>
+              </a:spcAft>
+              <a:defRPr sz="1400" b="0">
+                <a:solidFill>
+                  <a:srgbClr val="FFFFFF"/>
+                </a:solidFill>
+                <a:latin typeface="DejaVu Sans Mono"/>
+              </a:defRPr>
+            </a:pPr>
+          </a:p>
+          <a:p>
+            <a:pPr algn="l">
+              <a:spcAft>
+                <a:spcPts val="0"/>
+              </a:spcAft>
+              <a:defRPr sz="1400" b="0">
+                <a:solidFill>
+                  <a:srgbClr val="FFFFFF"/>
+                </a:solidFill>
+                <a:latin typeface="DejaVu Sans Mono"/>
+              </a:defRPr>
+            </a:pPr>
             <a:r>
               <a:t>def generate_launch_description():</a:t>
             </a:r>
-            <a:br/>
+          </a:p>
+          <a:p>
+            <a:pPr algn="l">
+              <a:spcAft>
+                <a:spcPts val="0"/>
+              </a:spcAft>
+              <a:defRPr sz="1400" b="0">
+                <a:solidFill>
+                  <a:srgbClr val="FFFFFF"/>
+                </a:solidFill>
+                <a:latin typeface="DejaVu Sans Mono"/>
+              </a:defRPr>
+            </a:pPr>
             <a:r>
               <a:t>    bringup = get_package_share_directory('agv_bringup')</a:t>
             </a:r>
@@ -37434,7 +38665,7 @@
           </a:fontRef>
         </p:style>
         <p:txBody>
-          <a:bodyPr rtlCol="0" anchor="ctr" wrap="square" lIns="164592" rIns="164592" tIns="109728" bIns="36576"/>
+          <a:bodyPr rtlCol="0" anchor="ctr" wrap="square" lIns="164592" rIns="164592" tIns="109728" bIns="73152"/>
           <a:lstStyle/>
           <a:p>
             <a:pPr algn="l">
@@ -37451,47 +38682,179 @@
             <a:r>
               <a:t>    description = get_package_share_directory('agv_description')</a:t>
             </a:r>
-            <a:br/>
+          </a:p>
+          <a:p>
+            <a:pPr algn="l">
+              <a:spcAft>
+                <a:spcPts val="0"/>
+              </a:spcAft>
+              <a:defRPr sz="1400" b="0">
+                <a:solidFill>
+                  <a:srgbClr val="FFFFFF"/>
+                </a:solidFill>
+                <a:latin typeface="DejaVu Sans Mono"/>
+              </a:defRPr>
+            </a:pPr>
             <a:r>
               <a:t>    gazebo = get_package_share_directory('agv_gazebo')</a:t>
             </a:r>
-            <a:br/>
+          </a:p>
+          <a:p>
+            <a:pPr algn="l">
+              <a:spcAft>
+                <a:spcPts val="0"/>
+              </a:spcAft>
+              <a:defRPr sz="1400" b="0">
+                <a:solidFill>
+                  <a:srgbClr val="FFFFFF"/>
+                </a:solidFill>
+                <a:latin typeface="DejaVu Sans Mono"/>
+              </a:defRPr>
+            </a:pPr>
             <a:r>
               <a:t>    xacro_file = os.path.join(description, 'urdf', 'agv.urdf.xacro')</a:t>
             </a:r>
-            <a:br/>
+          </a:p>
+          <a:p>
+            <a:pPr algn="l">
+              <a:spcAft>
+                <a:spcPts val="0"/>
+              </a:spcAft>
+              <a:defRPr sz="1400" b="0">
+                <a:solidFill>
+                  <a:srgbClr val="FFFFFF"/>
+                </a:solidFill>
+                <a:latin typeface="DejaVu Sans Mono"/>
+              </a:defRPr>
+            </a:pPr>
             <a:r>
               <a:t>    robot_description = ParameterValue(Command(['xacro ', xacro_file]), value_type=str)</a:t>
             </a:r>
-            <a:br/>
+          </a:p>
+          <a:p>
+            <a:pPr algn="l">
+              <a:spcAft>
+                <a:spcPts val="0"/>
+              </a:spcAft>
+              <a:defRPr sz="1400" b="0">
+                <a:solidFill>
+                  <a:srgbClr val="FFFFFF"/>
+                </a:solidFill>
+                <a:latin typeface="DejaVu Sans Mono"/>
+              </a:defRPr>
+            </a:pPr>
             <a:r>
               <a:t>    return LaunchDescription([DeclareLaunchArgument('rviz', default_value='true',</a:t>
             </a:r>
-            <a:br/>
+          </a:p>
+          <a:p>
+            <a:pPr algn="l">
+              <a:spcAft>
+                <a:spcPts val="0"/>
+              </a:spcAft>
+              <a:defRPr sz="1400" b="0">
+                <a:solidFill>
+                  <a:srgbClr val="FFFFFF"/>
+                </a:solidFill>
+                <a:latin typeface="DejaVu Sans Mono"/>
+              </a:defRPr>
+            </a:pPr>
             <a:r>
               <a:t>        description='Start RViz2'), DeclareLaunchArgument('autonomy', default_value='true',</a:t>
             </a:r>
-            <a:br/>
+          </a:p>
+          <a:p>
+            <a:pPr algn="l">
+              <a:spcAft>
+                <a:spcPts val="0"/>
+              </a:spcAft>
+              <a:defRPr sz="1400" b="0">
+                <a:solidFill>
+                  <a:srgbClr val="FFFFFF"/>
+                </a:solidFill>
+                <a:latin typeface="DejaVu Sans Mono"/>
+              </a:defRPr>
+            </a:pPr>
             <a:r>
               <a:t>         description='Start mission and safety nodes'),</a:t>
             </a:r>
-            <a:br/>
+          </a:p>
+          <a:p>
+            <a:pPr algn="l">
+              <a:spcAft>
+                <a:spcPts val="0"/>
+              </a:spcAft>
+              <a:defRPr sz="1400" b="0">
+                <a:solidFill>
+                  <a:srgbClr val="FFFFFF"/>
+                </a:solidFill>
+                <a:latin typeface="DejaVu Sans Mono"/>
+              </a:defRPr>
+            </a:pPr>
             <a:r>
               <a:t>        IncludeLaunchDescription(PythonLaunchDescriptionSource(os.path.join(gazebo, 'launch',</a:t>
             </a:r>
-            <a:br/>
+          </a:p>
+          <a:p>
+            <a:pPr algn="l">
+              <a:spcAft>
+                <a:spcPts val="0"/>
+              </a:spcAft>
+              <a:defRPr sz="1400" b="0">
+                <a:solidFill>
+                  <a:srgbClr val="FFFFFF"/>
+                </a:solidFill>
+                <a:latin typeface="DejaVu Sans Mono"/>
+              </a:defRPr>
+            </a:pPr>
             <a:r>
               <a:t>         'gazebo.launch.py'))), Node(package='robot_state_publisher', executable='robot_state_publisher',</a:t>
             </a:r>
-            <a:br/>
+          </a:p>
+          <a:p>
+            <a:pPr algn="l">
+              <a:spcAft>
+                <a:spcPts val="0"/>
+              </a:spcAft>
+              <a:defRPr sz="1400" b="0">
+                <a:solidFill>
+                  <a:srgbClr val="FFFFFF"/>
+                </a:solidFill>
+                <a:latin typeface="DejaVu Sans Mono"/>
+              </a:defRPr>
+            </a:pPr>
             <a:r>
               <a:t>         parameters=[os.path.join(bringup, 'config', 'robot.yaml'),</a:t>
             </a:r>
-            <a:br/>
+          </a:p>
+          <a:p>
+            <a:pPr algn="l">
+              <a:spcAft>
+                <a:spcPts val="0"/>
+              </a:spcAft>
+              <a:defRPr sz="1400" b="0">
+                <a:solidFill>
+                  <a:srgbClr val="FFFFFF"/>
+                </a:solidFill>
+                <a:latin typeface="DejaVu Sans Mono"/>
+              </a:defRPr>
+            </a:pPr>
             <a:r>
               <a:t>        {'robot_description': robot_description}]), Node(package='agv_sensors',</a:t>
             </a:r>
-            <a:br/>
+          </a:p>
+          <a:p>
+            <a:pPr algn="l">
+              <a:spcAft>
+                <a:spcPts val="0"/>
+              </a:spcAft>
+              <a:defRPr sz="1400" b="0">
+                <a:solidFill>
+                  <a:srgbClr val="FFFFFF"/>
+                </a:solidFill>
+                <a:latin typeface="DejaVu Sans Mono"/>
+              </a:defRPr>
+            </a:pPr>
             <a:r>
               <a:t>        executable='lidar_processor', parameters=[os.path.join(bringup, 'config',</a:t>
             </a:r>
@@ -37908,7 +39271,7 @@
           </a:fontRef>
         </p:style>
         <p:txBody>
-          <a:bodyPr rtlCol="0" anchor="ctr" wrap="square" lIns="164592" rIns="164592" tIns="109728" bIns="36576"/>
+          <a:bodyPr rtlCol="0" anchor="ctr" wrap="square" lIns="164592" rIns="164592" tIns="109728" bIns="73152"/>
           <a:lstStyle/>
           <a:p>
             <a:pPr algn="l">
@@ -37925,47 +39288,179 @@
             <a:r>
               <a:t>        'sensors.yaml')]), Node(package='agv_sensors', executable='imu_monitor',</a:t>
             </a:r>
-            <a:br/>
+          </a:p>
+          <a:p>
+            <a:pPr algn="l">
+              <a:spcAft>
+                <a:spcPts val="0"/>
+              </a:spcAft>
+              <a:defRPr sz="1400" b="0">
+                <a:solidFill>
+                  <a:srgbClr val="FFFFFF"/>
+                </a:solidFill>
+                <a:latin typeface="DejaVu Sans Mono"/>
+              </a:defRPr>
+            </a:pPr>
             <a:r>
               <a:t>        parameters=[os.path.join(bringup, 'config', 'sensors.yaml')]), Node(package='agv_sensors',</a:t>
             </a:r>
-            <a:br/>
+          </a:p>
+          <a:p>
+            <a:pPr algn="l">
+              <a:spcAft>
+                <a:spcPts val="0"/>
+              </a:spcAft>
+              <a:defRPr sz="1400" b="0">
+                <a:solidFill>
+                  <a:srgbClr val="FFFFFF"/>
+                </a:solidFill>
+                <a:latin typeface="DejaVu Sans Mono"/>
+              </a:defRPr>
+            </a:pPr>
             <a:r>
               <a:t>         executable='odom_path', parameters=[{'use_sim_time': True}]), Node(package='agv_vision',</a:t>
             </a:r>
-            <a:br/>
+          </a:p>
+          <a:p>
+            <a:pPr algn="l">
+              <a:spcAft>
+                <a:spcPts val="0"/>
+              </a:spcAft>
+              <a:defRPr sz="1400" b="0">
+                <a:solidFill>
+                  <a:srgbClr val="FFFFFF"/>
+                </a:solidFill>
+                <a:latin typeface="DejaVu Sans Mono"/>
+              </a:defRPr>
+            </a:pPr>
             <a:r>
               <a:t>         executable='yolo_node', parameters=[os.path.join(bringup, 'config',</a:t>
             </a:r>
-            <a:br/>
+          </a:p>
+          <a:p>
+            <a:pPr algn="l">
+              <a:spcAft>
+                <a:spcPts val="0"/>
+              </a:spcAft>
+              <a:defRPr sz="1400" b="0">
+                <a:solidFill>
+                  <a:srgbClr val="FFFFFF"/>
+                </a:solidFill>
+                <a:latin typeface="DejaVu Sans Mono"/>
+              </a:defRPr>
+            </a:pPr>
             <a:r>
               <a:t>        'vision.yaml')]), Node(package='agv_mission', executable='mission_manager',</a:t>
             </a:r>
-            <a:br/>
+          </a:p>
+          <a:p>
+            <a:pPr algn="l">
+              <a:spcAft>
+                <a:spcPts val="0"/>
+              </a:spcAft>
+              <a:defRPr sz="1400" b="0">
+                <a:solidFill>
+                  <a:srgbClr val="FFFFFF"/>
+                </a:solidFill>
+                <a:latin typeface="DejaVu Sans Mono"/>
+              </a:defRPr>
+            </a:pPr>
             <a:r>
               <a:t>        parameters=[os.path.join(bringup, 'config', 'mission.yaml')],</a:t>
             </a:r>
-            <a:br/>
+          </a:p>
+          <a:p>
+            <a:pPr algn="l">
+              <a:spcAft>
+                <a:spcPts val="0"/>
+              </a:spcAft>
+              <a:defRPr sz="1400" b="0">
+                <a:solidFill>
+                  <a:srgbClr val="FFFFFF"/>
+                </a:solidFill>
+                <a:latin typeface="DejaVu Sans Mono"/>
+              </a:defRPr>
+            </a:pPr>
             <a:r>
               <a:t>        condition=IfCondition(LaunchConfiguration('autonomy'))), Node(package='agv_mission',</a:t>
             </a:r>
-            <a:br/>
+          </a:p>
+          <a:p>
+            <a:pPr algn="l">
+              <a:spcAft>
+                <a:spcPts val="0"/>
+              </a:spcAft>
+              <a:defRPr sz="1400" b="0">
+                <a:solidFill>
+                  <a:srgbClr val="FFFFFF"/>
+                </a:solidFill>
+                <a:latin typeface="DejaVu Sans Mono"/>
+              </a:defRPr>
+            </a:pPr>
             <a:r>
               <a:t>         executable='mission_markers', parameters=[os.path.join(bringup, 'config',</a:t>
             </a:r>
-            <a:br/>
+          </a:p>
+          <a:p>
+            <a:pPr algn="l">
+              <a:spcAft>
+                <a:spcPts val="0"/>
+              </a:spcAft>
+              <a:defRPr sz="1400" b="0">
+                <a:solidFill>
+                  <a:srgbClr val="FFFFFF"/>
+                </a:solidFill>
+                <a:latin typeface="DejaVu Sans Mono"/>
+              </a:defRPr>
+            </a:pPr>
             <a:r>
               <a:t>        'mission.yaml')], condition=IfCondition(LaunchConfiguration('autonomy'))),</a:t>
             </a:r>
-            <a:br/>
+          </a:p>
+          <a:p>
+            <a:pPr algn="l">
+              <a:spcAft>
+                <a:spcPts val="0"/>
+              </a:spcAft>
+              <a:defRPr sz="1400" b="0">
+                <a:solidFill>
+                  <a:srgbClr val="FFFFFF"/>
+                </a:solidFill>
+                <a:latin typeface="DejaVu Sans Mono"/>
+              </a:defRPr>
+            </a:pPr>
             <a:r>
               <a:t>        Node(package='agv_control', executable='safety_controller',</a:t>
             </a:r>
-            <a:br/>
+          </a:p>
+          <a:p>
+            <a:pPr algn="l">
+              <a:spcAft>
+                <a:spcPts val="0"/>
+              </a:spcAft>
+              <a:defRPr sz="1400" b="0">
+                <a:solidFill>
+                  <a:srgbClr val="FFFFFF"/>
+                </a:solidFill>
+                <a:latin typeface="DejaVu Sans Mono"/>
+              </a:defRPr>
+            </a:pPr>
             <a:r>
               <a:t>        parameters=[os.path.join(bringup, 'config', 'mission.yaml')],</a:t>
             </a:r>
-            <a:br/>
+          </a:p>
+          <a:p>
+            <a:pPr algn="l">
+              <a:spcAft>
+                <a:spcPts val="0"/>
+              </a:spcAft>
+              <a:defRPr sz="1400" b="0">
+                <a:solidFill>
+                  <a:srgbClr val="FFFFFF"/>
+                </a:solidFill>
+                <a:latin typeface="DejaVu Sans Mono"/>
+              </a:defRPr>
+            </a:pPr>
             <a:r>
               <a:t>        condition=IfCondition(LaunchConfiguration('autonomy'))), Node(package='rviz2',</a:t>
             </a:r>
@@ -38382,7 +39877,7 @@
           </a:fontRef>
         </p:style>
         <p:txBody>
-          <a:bodyPr rtlCol="0" anchor="ctr" wrap="square" lIns="164592" rIns="164592" tIns="109728" bIns="36576"/>
+          <a:bodyPr rtlCol="0" anchor="ctr" wrap="square" lIns="164592" rIns="164592" tIns="109728" bIns="73152"/>
           <a:lstStyle/>
           <a:p>
             <a:pPr algn="l">
@@ -38399,7 +39894,19 @@
             <a:r>
               <a:t>        executable='rviz2', arguments=['-d', os.path.join(description, 'rviz',</a:t>
             </a:r>
-            <a:br/>
+          </a:p>
+          <a:p>
+            <a:pPr algn="l">
+              <a:spcAft>
+                <a:spcPts val="0"/>
+              </a:spcAft>
+              <a:defRPr sz="1400" b="0">
+                <a:solidFill>
+                  <a:srgbClr val="FFFFFF"/>
+                </a:solidFill>
+                <a:latin typeface="DejaVu Sans Mono"/>
+              </a:defRPr>
+            </a:pPr>
             <a:r>
               <a:t>        'agv.rviz')], condition=IfCondition(LaunchConfiguration('rviz')))])</a:t>
             </a:r>
@@ -38871,7 +40378,7 @@
           </a:fontRef>
         </p:style>
         <p:txBody>
-          <a:bodyPr rtlCol="0" anchor="ctr" wrap="square" lIns="73152" rIns="73152" tIns="36576" bIns="36576"/>
+          <a:bodyPr rtlCol="0" anchor="ctr" wrap="square" lIns="109728" rIns="109728" tIns="73152" bIns="73152"/>
           <a:lstStyle/>
           <a:p>
             <a:pPr algn="l">
@@ -38888,7 +40395,19 @@
             <a:r>
               <a:t>mkdir -p ~/ros2_curri/my_agv_ws/src/agv_gazebo/launch</a:t>
             </a:r>
-            <a:br/>
+          </a:p>
+          <a:p>
+            <a:pPr algn="l">
+              <a:spcAft>
+                <a:spcPts val="0"/>
+              </a:spcAft>
+              <a:defRPr sz="1600" b="0">
+                <a:solidFill>
+                  <a:srgbClr val="FFFFFF"/>
+                </a:solidFill>
+                <a:latin typeface="DejaVu Sans Mono"/>
+              </a:defRPr>
+            </a:pPr>
             <a:r>
               <a:t>nano ~/ros2_curri/my_agv_ws/src/agv_gazebo/launch/gazebo.launch.py</a:t>
             </a:r>
@@ -41503,7 +43022,7 @@
           </a:fontRef>
         </p:style>
         <p:txBody>
-          <a:bodyPr rtlCol="0" anchor="ctr" wrap="square" lIns="164592" rIns="164592" tIns="109728" bIns="36576"/>
+          <a:bodyPr rtlCol="0" anchor="ctr" wrap="square" lIns="164592" rIns="164592" tIns="109728" bIns="73152"/>
           <a:lstStyle/>
           <a:p>
             <a:pPr algn="l">
@@ -41520,44 +43039,176 @@
             <a:r>
               <a:t>import os</a:t>
             </a:r>
-            <a:br/>
+          </a:p>
+          <a:p>
+            <a:pPr algn="l">
+              <a:spcAft>
+                <a:spcPts val="0"/>
+              </a:spcAft>
+              <a:defRPr sz="1400" b="0">
+                <a:solidFill>
+                  <a:srgbClr val="FFFFFF"/>
+                </a:solidFill>
+                <a:latin typeface="DejaVu Sans Mono"/>
+              </a:defRPr>
+            </a:pPr>
             <a:r>
               <a:t>from ament_index_python.packages import get_package_share_directory</a:t>
             </a:r>
-            <a:br/>
+          </a:p>
+          <a:p>
+            <a:pPr algn="l">
+              <a:spcAft>
+                <a:spcPts val="0"/>
+              </a:spcAft>
+              <a:defRPr sz="1400" b="0">
+                <a:solidFill>
+                  <a:srgbClr val="FFFFFF"/>
+                </a:solidFill>
+                <a:latin typeface="DejaVu Sans Mono"/>
+              </a:defRPr>
+            </a:pPr>
             <a:r>
               <a:t>from launch import LaunchDescription</a:t>
             </a:r>
-            <a:br/>
+          </a:p>
+          <a:p>
+            <a:pPr algn="l">
+              <a:spcAft>
+                <a:spcPts val="0"/>
+              </a:spcAft>
+              <a:defRPr sz="1400" b="0">
+                <a:solidFill>
+                  <a:srgbClr val="FFFFFF"/>
+                </a:solidFill>
+                <a:latin typeface="DejaVu Sans Mono"/>
+              </a:defRPr>
+            </a:pPr>
             <a:r>
               <a:t>from launch.actions import IncludeLaunchDescription, SetEnvironmentVariable</a:t>
             </a:r>
-            <a:br/>
+          </a:p>
+          <a:p>
+            <a:pPr algn="l">
+              <a:spcAft>
+                <a:spcPts val="0"/>
+              </a:spcAft>
+              <a:defRPr sz="1400" b="0">
+                <a:solidFill>
+                  <a:srgbClr val="FFFFFF"/>
+                </a:solidFill>
+                <a:latin typeface="DejaVu Sans Mono"/>
+              </a:defRPr>
+            </a:pPr>
             <a:r>
               <a:t>from launch.launch_description_sources import PythonLaunchDescriptionSource</a:t>
             </a:r>
-            <a:br/>
+          </a:p>
+          <a:p>
+            <a:pPr algn="l">
+              <a:spcAft>
+                <a:spcPts val="0"/>
+              </a:spcAft>
+              <a:defRPr sz="1400" b="0">
+                <a:solidFill>
+                  <a:srgbClr val="FFFFFF"/>
+                </a:solidFill>
+                <a:latin typeface="DejaVu Sans Mono"/>
+              </a:defRPr>
+            </a:pPr>
             <a:r>
               <a:t>from launch_ros.actions import Node</a:t>
             </a:r>
-            <a:br/>
-            <a:br/>
+          </a:p>
+          <a:p>
+            <a:pPr algn="l">
+              <a:spcAft>
+                <a:spcPts val="0"/>
+              </a:spcAft>
+              <a:defRPr sz="1400" b="0">
+                <a:solidFill>
+                  <a:srgbClr val="FFFFFF"/>
+                </a:solidFill>
+                <a:latin typeface="DejaVu Sans Mono"/>
+              </a:defRPr>
+            </a:pPr>
+          </a:p>
+          <a:p>
+            <a:pPr algn="l">
+              <a:spcAft>
+                <a:spcPts val="0"/>
+              </a:spcAft>
+              <a:defRPr sz="1400" b="0">
+                <a:solidFill>
+                  <a:srgbClr val="FFFFFF"/>
+                </a:solidFill>
+                <a:latin typeface="DejaVu Sans Mono"/>
+              </a:defRPr>
+            </a:pPr>
             <a:r>
               <a:t>def generate_launch_description():</a:t>
             </a:r>
-            <a:br/>
+          </a:p>
+          <a:p>
+            <a:pPr algn="l">
+              <a:spcAft>
+                <a:spcPts val="0"/>
+              </a:spcAft>
+              <a:defRPr sz="1400" b="0">
+                <a:solidFill>
+                  <a:srgbClr val="FFFFFF"/>
+                </a:solidFill>
+                <a:latin typeface="DejaVu Sans Mono"/>
+              </a:defRPr>
+            </a:pPr>
             <a:r>
               <a:t>    share = get_package_share_directory('agv_gazebo')</a:t>
             </a:r>
-            <a:br/>
+          </a:p>
+          <a:p>
+            <a:pPr algn="l">
+              <a:spcAft>
+                <a:spcPts val="0"/>
+              </a:spcAft>
+              <a:defRPr sz="1400" b="0">
+                <a:solidFill>
+                  <a:srgbClr val="FFFFFF"/>
+                </a:solidFill>
+                <a:latin typeface="DejaVu Sans Mono"/>
+              </a:defRPr>
+            </a:pPr>
             <a:r>
               <a:t>    world = os.path.join(share, 'worlds', 'warehouse.sdf')</a:t>
             </a:r>
-            <a:br/>
+          </a:p>
+          <a:p>
+            <a:pPr algn="l">
+              <a:spcAft>
+                <a:spcPts val="0"/>
+              </a:spcAft>
+              <a:defRPr sz="1400" b="0">
+                <a:solidFill>
+                  <a:srgbClr val="FFFFFF"/>
+                </a:solidFill>
+                <a:latin typeface="DejaVu Sans Mono"/>
+              </a:defRPr>
+            </a:pPr>
             <a:r>
               <a:t>    models = os.path.join(share, 'models')</a:t>
             </a:r>
-            <a:br/>
+          </a:p>
+          <a:p>
+            <a:pPr algn="l">
+              <a:spcAft>
+                <a:spcPts val="0"/>
+              </a:spcAft>
+              <a:defRPr sz="1400" b="0">
+                <a:solidFill>
+                  <a:srgbClr val="FFFFFF"/>
+                </a:solidFill>
+                <a:latin typeface="DejaVu Sans Mono"/>
+              </a:defRPr>
+            </a:pPr>
             <a:r>
               <a:t>    previous = os.environ.get('GZ_SIM_RESOURCE_PATH', '')</a:t>
             </a:r>
@@ -41974,7 +43625,7 @@
           </a:fontRef>
         </p:style>
         <p:txBody>
-          <a:bodyPr rtlCol="0" anchor="ctr" wrap="square" lIns="164592" rIns="164592" tIns="109728" bIns="36576"/>
+          <a:bodyPr rtlCol="0" anchor="ctr" wrap="square" lIns="164592" rIns="164592" tIns="109728" bIns="73152"/>
           <a:lstStyle/>
           <a:p>
             <a:pPr algn="l">
@@ -41991,27 +43642,99 @@
             <a:r>
               <a:t>    gz_launch = os.path.join(get_package_share_directory('ros_gz_sim'), 'launch', 'gz_sim.launch.py')</a:t>
             </a:r>
-            <a:br/>
+          </a:p>
+          <a:p>
+            <a:pPr algn="l">
+              <a:spcAft>
+                <a:spcPts val="0"/>
+              </a:spcAft>
+              <a:defRPr sz="1400" b="0">
+                <a:solidFill>
+                  <a:srgbClr val="FFFFFF"/>
+                </a:solidFill>
+                <a:latin typeface="DejaVu Sans Mono"/>
+              </a:defRPr>
+            </a:pPr>
             <a:r>
               <a:t>    return LaunchDescription([SetEnvironmentVariable('GZ_SIM_RESOURCE_PATH',</a:t>
             </a:r>
-            <a:br/>
+          </a:p>
+          <a:p>
+            <a:pPr algn="l">
+              <a:spcAft>
+                <a:spcPts val="0"/>
+              </a:spcAft>
+              <a:defRPr sz="1400" b="0">
+                <a:solidFill>
+                  <a:srgbClr val="FFFFFF"/>
+                </a:solidFill>
+                <a:latin typeface="DejaVu Sans Mono"/>
+              </a:defRPr>
+            </a:pPr>
             <a:r>
               <a:t>        models + (':' + previous if previous else '')),</a:t>
             </a:r>
-            <a:br/>
+          </a:p>
+          <a:p>
+            <a:pPr algn="l">
+              <a:spcAft>
+                <a:spcPts val="0"/>
+              </a:spcAft>
+              <a:defRPr sz="1400" b="0">
+                <a:solidFill>
+                  <a:srgbClr val="FFFFFF"/>
+                </a:solidFill>
+                <a:latin typeface="DejaVu Sans Mono"/>
+              </a:defRPr>
+            </a:pPr>
             <a:r>
               <a:t>        IncludeLaunchDescription(PythonLaunchDescriptionSource(gz_launch),</a:t>
             </a:r>
-            <a:br/>
+          </a:p>
+          <a:p>
+            <a:pPr algn="l">
+              <a:spcAft>
+                <a:spcPts val="0"/>
+              </a:spcAft>
+              <a:defRPr sz="1400" b="0">
+                <a:solidFill>
+                  <a:srgbClr val="FFFFFF"/>
+                </a:solidFill>
+                <a:latin typeface="DejaVu Sans Mono"/>
+              </a:defRPr>
+            </a:pPr>
             <a:r>
               <a:t>        launch_arguments={'gz_args': '-r ' + world}.items()), Node(package='ros_gz_bridge',</a:t>
             </a:r>
-            <a:br/>
+          </a:p>
+          <a:p>
+            <a:pPr algn="l">
+              <a:spcAft>
+                <a:spcPts val="0"/>
+              </a:spcAft>
+              <a:defRPr sz="1400" b="0">
+                <a:solidFill>
+                  <a:srgbClr val="FFFFFF"/>
+                </a:solidFill>
+                <a:latin typeface="DejaVu Sans Mono"/>
+              </a:defRPr>
+            </a:pPr>
             <a:r>
               <a:t>         executable='parameter_bridge', parameters=[{'config_file': os.path.join(share,</a:t>
             </a:r>
-            <a:br/>
+          </a:p>
+          <a:p>
+            <a:pPr algn="l">
+              <a:spcAft>
+                <a:spcPts val="0"/>
+              </a:spcAft>
+              <a:defRPr sz="1400" b="0">
+                <a:solidFill>
+                  <a:srgbClr val="FFFFFF"/>
+                </a:solidFill>
+                <a:latin typeface="DejaVu Sans Mono"/>
+              </a:defRPr>
+            </a:pPr>
             <a:r>
               <a:t>        'config', 'bridge.yaml')}], output='screen')])</a:t>
             </a:r>
@@ -42521,7 +44244,7 @@
               </a:defRPr>
             </a:pPr>
             <a:r>
-              <a:t>현재 단계 실행 1/3    |    현재 폴더 ~/ros2_curri/my_agv_ws    |    현재 터미널</a:t>
+              <a:t>현재 단계 실행 1/3    |    현재 폴더 ~/ros2_curri/my_agv_ws    |    터미널 1</a:t>
             </a:r>
           </a:p>
         </p:txBody>
@@ -42534,25 +44257,25 @@
         </p:nvSpPr>
         <p:spPr>
           <a:xfrm>
-            <a:off x="676656" y="1764792"/>
-            <a:ext cx="1828800" cy="347472"/>
-          </a:xfrm>
-          <a:prstGeom prst="rect">
-            <a:avLst/>
-          </a:prstGeom>
-          <a:noFill/>
-        </p:spPr>
-        <p:txBody>
-          <a:bodyPr wrap="square" lIns="73152" rIns="73152" tIns="36576" bIns="36576">
-            <a:spAutoFit/>
-          </a:bodyPr>
-          <a:lstStyle/>
-          <a:p>
-            <a:pPr algn="l">
-              <a:spcAft>
-                <a:spcPts val="0"/>
-              </a:spcAft>
-              <a:defRPr sz="1800" b="1">
+            <a:off x="676656" y="1719072"/>
+            <a:ext cx="1691640" cy="274320"/>
+          </a:xfrm>
+          <a:prstGeom prst="rect">
+            <a:avLst/>
+          </a:prstGeom>
+          <a:noFill/>
+        </p:spPr>
+        <p:txBody>
+          <a:bodyPr wrap="square" lIns="73152" rIns="73152" tIns="36576" bIns="36576">
+            <a:spAutoFit/>
+          </a:bodyPr>
+          <a:lstStyle/>
+          <a:p>
+            <a:pPr algn="l">
+              <a:spcAft>
+                <a:spcPts val="0"/>
+              </a:spcAft>
+              <a:defRPr sz="1700" b="1">
                 <a:solidFill>
                   <a:srgbClr val="225B9B"/>
                 </a:solidFill>
@@ -42560,7 +44283,7 @@
               </a:defRPr>
             </a:pPr>
             <a:r>
-              <a:t>왜 하는가</a:t>
+              <a:t>명령의 목적</a:t>
             </a:r>
           </a:p>
         </p:txBody>
@@ -42573,7 +44296,7 @@
         </p:nvSpPr>
         <p:spPr>
           <a:xfrm>
-            <a:off x="676656" y="2103120"/>
+            <a:off x="676656" y="2002536"/>
             <a:ext cx="10789920" cy="512064"/>
           </a:xfrm>
           <a:prstGeom prst="rect">
@@ -42591,7 +44314,7 @@
               <a:spcAft>
                 <a:spcPts val="0"/>
               </a:spcAft>
-              <a:defRPr sz="2000" b="0">
+              <a:defRPr sz="1800" b="0">
                 <a:solidFill>
                   <a:srgbClr val="122C4E"/>
                 </a:solidFill>
@@ -42606,14 +44329,53 @@
       </p:sp>
       <p:sp>
         <p:nvSpPr>
-          <p:cNvPr id="9" name="Rounded Rectangle 8"/>
+          <p:cNvPr id="9" name="TextBox 8"/>
+          <p:cNvSpPr txBox="1"/>
+          <p:nvPr/>
+        </p:nvSpPr>
+        <p:spPr>
+          <a:xfrm>
+            <a:off x="676656" y="2816352"/>
+            <a:ext cx="10835640" cy="256032"/>
+          </a:xfrm>
+          <a:prstGeom prst="rect">
+            <a:avLst/>
+          </a:prstGeom>
+          <a:noFill/>
+        </p:spPr>
+        <p:txBody>
+          <a:bodyPr wrap="square" lIns="73152" rIns="73152" tIns="36576" bIns="36576">
+            <a:spAutoFit/>
+          </a:bodyPr>
+          <a:lstStyle/>
+          <a:p>
+            <a:pPr algn="ctr">
+              <a:spcAft>
+                <a:spcPts val="0"/>
+              </a:spcAft>
+              <a:defRPr sz="1600" b="1">
+                <a:solidFill>
+                  <a:srgbClr val="225B9B"/>
+                </a:solidFill>
+                <a:latin typeface="Noto Sans CJK KR"/>
+              </a:defRPr>
+            </a:pPr>
+            <a:r>
+              <a:t>터미널 1 — 아래 검은 블록은 명령만 복사합니다.</a:t>
+            </a:r>
+          </a:p>
+        </p:txBody>
+      </p:sp>
+      <p:sp>
+        <p:nvSpPr>
+          <p:cNvPr id="10" name="Rounded Rectangle 9"/>
           <p:cNvSpPr/>
           <p:nvPr/>
         </p:nvSpPr>
         <p:spPr>
           <a:xfrm>
-            <a:off x="676656" y="2871216"/>
-            <a:ext cx="10835640" cy="2331720"/>
+            <a:off x="676656" y="3154680"/>
+            <a:ext cx="10835640" cy="1938528"/>
           </a:xfrm>
           <a:prstGeom prst="roundRect">
             <a:avLst/>
@@ -42642,7 +44404,7 @@
           </a:fontRef>
         </p:style>
         <p:txBody>
-          <a:bodyPr rtlCol="0" anchor="ctr" wrap="square" lIns="73152" rIns="73152" tIns="36576" bIns="36576"/>
+          <a:bodyPr rtlCol="0" anchor="ctr" wrap="square" lIns="109728" rIns="109728" tIns="73152" bIns="73152"/>
           <a:lstStyle/>
           <a:p>
             <a:pPr algn="l">
@@ -42659,7 +44421,19 @@
             <a:r>
               <a:t>find ~/ros2_curri/my_agv_ws/src -path '*/config/*.yaml' -type f | sort</a:t>
             </a:r>
-            <a:br/>
+          </a:p>
+          <a:p>
+            <a:pPr algn="l">
+              <a:spcAft>
+                <a:spcPts val="0"/>
+              </a:spcAft>
+              <a:defRPr sz="1600" b="0">
+                <a:solidFill>
+                  <a:srgbClr val="FFFFFF"/>
+                </a:solidFill>
+                <a:latin typeface="DejaVu Sans Mono"/>
+              </a:defRPr>
+            </a:pPr>
             <a:r>
               <a:t>ros2 param get /mission_manager stop_distance</a:t>
             </a:r>
@@ -42668,31 +44442,31 @@
       </p:sp>
       <p:sp>
         <p:nvSpPr>
-          <p:cNvPr id="10" name="TextBox 9"/>
-          <p:cNvSpPr txBox="1"/>
-          <p:nvPr/>
-        </p:nvSpPr>
-        <p:spPr>
-          <a:xfrm>
-            <a:off x="768096" y="5468112"/>
-            <a:ext cx="1143000" cy="256032"/>
-          </a:xfrm>
-          <a:prstGeom prst="rect">
-            <a:avLst/>
-          </a:prstGeom>
-          <a:noFill/>
-        </p:spPr>
-        <p:txBody>
-          <a:bodyPr wrap="square" lIns="73152" rIns="73152" tIns="36576" bIns="36576">
-            <a:spAutoFit/>
-          </a:bodyPr>
-          <a:lstStyle/>
-          <a:p>
-            <a:pPr algn="l">
-              <a:spcAft>
-                <a:spcPts val="0"/>
-              </a:spcAft>
-              <a:defRPr sz="1800" b="1">
+          <p:cNvPr id="11" name="TextBox 10"/>
+          <p:cNvSpPr txBox="1"/>
+          <p:nvPr/>
+        </p:nvSpPr>
+        <p:spPr>
+          <a:xfrm>
+            <a:off x="768096" y="5276088"/>
+            <a:ext cx="10561320" cy="384048"/>
+          </a:xfrm>
+          <a:prstGeom prst="rect">
+            <a:avLst/>
+          </a:prstGeom>
+          <a:noFill/>
+        </p:spPr>
+        <p:txBody>
+          <a:bodyPr wrap="square" lIns="73152" rIns="73152" tIns="36576" bIns="36576">
+            <a:spAutoFit/>
+          </a:bodyPr>
+          <a:lstStyle/>
+          <a:p>
+            <a:pPr algn="ctr">
+              <a:spcAft>
+                <a:spcPts val="0"/>
+              </a:spcAft>
+              <a:defRPr sz="1500" b="1">
                 <a:solidFill>
                   <a:srgbClr val="2A8B5A"/>
                 </a:solidFill>
@@ -42700,38 +44474,38 @@
               </a:defRPr>
             </a:pPr>
             <a:r>
-              <a:t>확인</a:t>
-            </a:r>
-          </a:p>
-        </p:txBody>
-      </p:sp>
-      <p:sp>
-        <p:nvSpPr>
-          <p:cNvPr id="11" name="TextBox 10"/>
-          <p:cNvSpPr txBox="1"/>
-          <p:nvPr/>
-        </p:nvSpPr>
-        <p:spPr>
-          <a:xfrm>
-            <a:off x="768096" y="5742432"/>
-            <a:ext cx="10561320" cy="347472"/>
-          </a:xfrm>
-          <a:prstGeom prst="rect">
-            <a:avLst/>
-          </a:prstGeom>
-          <a:noFill/>
-        </p:spPr>
-        <p:txBody>
-          <a:bodyPr wrap="square" lIns="73152" rIns="73152" tIns="36576" bIns="36576">
-            <a:spAutoFit/>
-          </a:bodyPr>
-          <a:lstStyle/>
-          <a:p>
-            <a:pPr algn="l">
-              <a:spcAft>
-                <a:spcPts val="0"/>
-              </a:spcAft>
-              <a:defRPr sz="1800" b="0">
+              <a:t>터미널 1 역할: 터미널 1에서 이 명령만 그대로 복사해 실행합니다.</a:t>
+            </a:r>
+          </a:p>
+        </p:txBody>
+      </p:sp>
+      <p:sp>
+        <p:nvSpPr>
+          <p:cNvPr id="12" name="TextBox 11"/>
+          <p:cNvSpPr txBox="1"/>
+          <p:nvPr/>
+        </p:nvSpPr>
+        <p:spPr>
+          <a:xfrm>
+            <a:off x="768096" y="5916168"/>
+            <a:ext cx="10561320" cy="292608"/>
+          </a:xfrm>
+          <a:prstGeom prst="rect">
+            <a:avLst/>
+          </a:prstGeom>
+          <a:noFill/>
+        </p:spPr>
+        <p:txBody>
+          <a:bodyPr wrap="square" lIns="73152" rIns="73152" tIns="36576" bIns="36576">
+            <a:spAutoFit/>
+          </a:bodyPr>
+          <a:lstStyle/>
+          <a:p>
+            <a:pPr algn="ctr">
+              <a:spcAft>
+                <a:spcPts val="0"/>
+              </a:spcAft>
+              <a:defRPr sz="1500" b="1">
                 <a:solidFill>
                   <a:srgbClr val="122C4E"/>
                 </a:solidFill>
@@ -42739,7 +44513,7 @@
               </a:defRPr>
             </a:pPr>
             <a:r>
-              <a:t>출력에서 topic·frame·파일 이름 또는 성공 메시지를 찾고, 맞지 않으면 다음 파일로 가지 않습니다.</a:t>
+              <a:t>확인: 출력에서 topic·frame·파일 이름 또는 성공 메시지를 찾고, 맞지 않으면 다음 파일로 가지 않습니다.</a:t>
             </a:r>
           </a:p>
         </p:txBody>
@@ -42971,7 +44745,7 @@
               </a:defRPr>
             </a:pPr>
             <a:r>
-              <a:t>현재 단계 실행 2/3    |    현재 폴더 ~/ros2_curri/my_agv_ws    |    현재 터미널</a:t>
+              <a:t>현재 단계 실행 2/3    |    현재 폴더 ~/ros2_curri/my_agv_ws    |    터미널 1</a:t>
             </a:r>
           </a:p>
         </p:txBody>
@@ -42984,25 +44758,25 @@
         </p:nvSpPr>
         <p:spPr>
           <a:xfrm>
-            <a:off x="676656" y="1764792"/>
-            <a:ext cx="1828800" cy="347472"/>
-          </a:xfrm>
-          <a:prstGeom prst="rect">
-            <a:avLst/>
-          </a:prstGeom>
-          <a:noFill/>
-        </p:spPr>
-        <p:txBody>
-          <a:bodyPr wrap="square" lIns="73152" rIns="73152" tIns="36576" bIns="36576">
-            <a:spAutoFit/>
-          </a:bodyPr>
-          <a:lstStyle/>
-          <a:p>
-            <a:pPr algn="l">
-              <a:spcAft>
-                <a:spcPts val="0"/>
-              </a:spcAft>
-              <a:defRPr sz="1800" b="1">
+            <a:off x="676656" y="1719072"/>
+            <a:ext cx="1691640" cy="274320"/>
+          </a:xfrm>
+          <a:prstGeom prst="rect">
+            <a:avLst/>
+          </a:prstGeom>
+          <a:noFill/>
+        </p:spPr>
+        <p:txBody>
+          <a:bodyPr wrap="square" lIns="73152" rIns="73152" tIns="36576" bIns="36576">
+            <a:spAutoFit/>
+          </a:bodyPr>
+          <a:lstStyle/>
+          <a:p>
+            <a:pPr algn="l">
+              <a:spcAft>
+                <a:spcPts val="0"/>
+              </a:spcAft>
+              <a:defRPr sz="1700" b="1">
                 <a:solidFill>
                   <a:srgbClr val="225B9B"/>
                 </a:solidFill>
@@ -43010,7 +44784,7 @@
               </a:defRPr>
             </a:pPr>
             <a:r>
-              <a:t>왜 하는가</a:t>
+              <a:t>명령의 목적</a:t>
             </a:r>
           </a:p>
         </p:txBody>
@@ -43023,7 +44797,7 @@
         </p:nvSpPr>
         <p:spPr>
           <a:xfrm>
-            <a:off x="676656" y="2103120"/>
+            <a:off x="676656" y="2002536"/>
             <a:ext cx="10789920" cy="512064"/>
           </a:xfrm>
           <a:prstGeom prst="rect">
@@ -43041,7 +44815,7 @@
               <a:spcAft>
                 <a:spcPts val="0"/>
               </a:spcAft>
-              <a:defRPr sz="2000" b="0">
+              <a:defRPr sz="1800" b="0">
                 <a:solidFill>
                   <a:srgbClr val="122C4E"/>
                 </a:solidFill>
@@ -43056,14 +44830,53 @@
       </p:sp>
       <p:sp>
         <p:nvSpPr>
-          <p:cNvPr id="9" name="Rounded Rectangle 8"/>
+          <p:cNvPr id="9" name="TextBox 8"/>
+          <p:cNvSpPr txBox="1"/>
+          <p:nvPr/>
+        </p:nvSpPr>
+        <p:spPr>
+          <a:xfrm>
+            <a:off x="676656" y="2816352"/>
+            <a:ext cx="10835640" cy="256032"/>
+          </a:xfrm>
+          <a:prstGeom prst="rect">
+            <a:avLst/>
+          </a:prstGeom>
+          <a:noFill/>
+        </p:spPr>
+        <p:txBody>
+          <a:bodyPr wrap="square" lIns="73152" rIns="73152" tIns="36576" bIns="36576">
+            <a:spAutoFit/>
+          </a:bodyPr>
+          <a:lstStyle/>
+          <a:p>
+            <a:pPr algn="ctr">
+              <a:spcAft>
+                <a:spcPts val="0"/>
+              </a:spcAft>
+              <a:defRPr sz="1600" b="1">
+                <a:solidFill>
+                  <a:srgbClr val="225B9B"/>
+                </a:solidFill>
+                <a:latin typeface="Noto Sans CJK KR"/>
+              </a:defRPr>
+            </a:pPr>
+            <a:r>
+              <a:t>터미널 1 — 아래 검은 블록은 명령만 복사합니다.</a:t>
+            </a:r>
+          </a:p>
+        </p:txBody>
+      </p:sp>
+      <p:sp>
+        <p:nvSpPr>
+          <p:cNvPr id="10" name="Rounded Rectangle 9"/>
           <p:cNvSpPr/>
           <p:nvPr/>
         </p:nvSpPr>
         <p:spPr>
           <a:xfrm>
-            <a:off x="676656" y="2871216"/>
-            <a:ext cx="10835640" cy="2331720"/>
+            <a:off x="676656" y="3154680"/>
+            <a:ext cx="10835640" cy="1938528"/>
           </a:xfrm>
           <a:prstGeom prst="roundRect">
             <a:avLst/>
@@ -43092,7 +44905,7 @@
           </a:fontRef>
         </p:style>
         <p:txBody>
-          <a:bodyPr rtlCol="0" anchor="ctr" wrap="square" lIns="73152" rIns="73152" tIns="36576" bIns="36576"/>
+          <a:bodyPr rtlCol="0" anchor="ctr" wrap="square" lIns="109728" rIns="109728" tIns="73152" bIns="73152"/>
           <a:lstStyle/>
           <a:p>
             <a:pPr algn="l">
@@ -43109,7 +44922,19 @@
             <a:r>
               <a:t>source ~/ros2_curri/my_agv_ws/install/setup.bash</a:t>
             </a:r>
-            <a:br/>
+          </a:p>
+          <a:p>
+            <a:pPr algn="l">
+              <a:spcAft>
+                <a:spcPts val="0"/>
+              </a:spcAft>
+              <a:defRPr sz="1600" b="0">
+                <a:solidFill>
+                  <a:srgbClr val="FFFFFF"/>
+                </a:solidFill>
+                <a:latin typeface="DejaVu Sans Mono"/>
+              </a:defRPr>
+            </a:pPr>
             <a:r>
               <a:t>ros2 launch agv_bringup agv_sim.launch.py</a:t>
             </a:r>
@@ -43118,31 +44943,31 @@
       </p:sp>
       <p:sp>
         <p:nvSpPr>
-          <p:cNvPr id="10" name="TextBox 9"/>
-          <p:cNvSpPr txBox="1"/>
-          <p:nvPr/>
-        </p:nvSpPr>
-        <p:spPr>
-          <a:xfrm>
-            <a:off x="768096" y="5468112"/>
-            <a:ext cx="1143000" cy="256032"/>
-          </a:xfrm>
-          <a:prstGeom prst="rect">
-            <a:avLst/>
-          </a:prstGeom>
-          <a:noFill/>
-        </p:spPr>
-        <p:txBody>
-          <a:bodyPr wrap="square" lIns="73152" rIns="73152" tIns="36576" bIns="36576">
-            <a:spAutoFit/>
-          </a:bodyPr>
-          <a:lstStyle/>
-          <a:p>
-            <a:pPr algn="l">
-              <a:spcAft>
-                <a:spcPts val="0"/>
-              </a:spcAft>
-              <a:defRPr sz="1800" b="1">
+          <p:cNvPr id="11" name="TextBox 10"/>
+          <p:cNvSpPr txBox="1"/>
+          <p:nvPr/>
+        </p:nvSpPr>
+        <p:spPr>
+          <a:xfrm>
+            <a:off x="768096" y="5276088"/>
+            <a:ext cx="10561320" cy="384048"/>
+          </a:xfrm>
+          <a:prstGeom prst="rect">
+            <a:avLst/>
+          </a:prstGeom>
+          <a:noFill/>
+        </p:spPr>
+        <p:txBody>
+          <a:bodyPr wrap="square" lIns="73152" rIns="73152" tIns="36576" bIns="36576">
+            <a:spAutoFit/>
+          </a:bodyPr>
+          <a:lstStyle/>
+          <a:p>
+            <a:pPr algn="ctr">
+              <a:spcAft>
+                <a:spcPts val="0"/>
+              </a:spcAft>
+              <a:defRPr sz="1500" b="1">
                 <a:solidFill>
                   <a:srgbClr val="2A8B5A"/>
                 </a:solidFill>
@@ -43150,38 +44975,38 @@
               </a:defRPr>
             </a:pPr>
             <a:r>
-              <a:t>확인</a:t>
-            </a:r>
-          </a:p>
-        </p:txBody>
-      </p:sp>
-      <p:sp>
-        <p:nvSpPr>
-          <p:cNvPr id="11" name="TextBox 10"/>
-          <p:cNvSpPr txBox="1"/>
-          <p:nvPr/>
-        </p:nvSpPr>
-        <p:spPr>
-          <a:xfrm>
-            <a:off x="768096" y="5742432"/>
-            <a:ext cx="10561320" cy="347472"/>
-          </a:xfrm>
-          <a:prstGeom prst="rect">
-            <a:avLst/>
-          </a:prstGeom>
-          <a:noFill/>
-        </p:spPr>
-        <p:txBody>
-          <a:bodyPr wrap="square" lIns="73152" rIns="73152" tIns="36576" bIns="36576">
-            <a:spAutoFit/>
-          </a:bodyPr>
-          <a:lstStyle/>
-          <a:p>
-            <a:pPr algn="l">
-              <a:spcAft>
-                <a:spcPts val="0"/>
-              </a:spcAft>
-              <a:defRPr sz="1800" b="0">
+              <a:t>터미널 1 역할: 시뮬레이터·bridge·node를 먼저 시작한 뒤 이 창은 종료하지 않고 둡니다.</a:t>
+            </a:r>
+          </a:p>
+        </p:txBody>
+      </p:sp>
+      <p:sp>
+        <p:nvSpPr>
+          <p:cNvPr id="12" name="TextBox 11"/>
+          <p:cNvSpPr txBox="1"/>
+          <p:nvPr/>
+        </p:nvSpPr>
+        <p:spPr>
+          <a:xfrm>
+            <a:off x="768096" y="5916168"/>
+            <a:ext cx="10561320" cy="292608"/>
+          </a:xfrm>
+          <a:prstGeom prst="rect">
+            <a:avLst/>
+          </a:prstGeom>
+          <a:noFill/>
+        </p:spPr>
+        <p:txBody>
+          <a:bodyPr wrap="square" lIns="73152" rIns="73152" tIns="36576" bIns="36576">
+            <a:spAutoFit/>
+          </a:bodyPr>
+          <a:lstStyle/>
+          <a:p>
+            <a:pPr algn="ctr">
+              <a:spcAft>
+                <a:spcPts val="0"/>
+              </a:spcAft>
+              <a:defRPr sz="1500" b="1">
                 <a:solidFill>
                   <a:srgbClr val="122C4E"/>
                 </a:solidFill>
@@ -43189,7 +45014,7 @@
               </a:defRPr>
             </a:pPr>
             <a:r>
-              <a:t>출력에서 topic·frame·파일 이름 또는 성공 메시지를 찾고, 맞지 않으면 다음 파일로 가지 않습니다.</a:t>
+              <a:t>확인: 출력에서 topic·frame·파일 이름 또는 성공 메시지를 찾고, 맞지 않으면 다음 파일로 가지 않습니다.</a:t>
             </a:r>
           </a:p>
         </p:txBody>
@@ -43421,7 +45246,7 @@
               </a:defRPr>
             </a:pPr>
             <a:r>
-              <a:t>현재 단계 실행 3/3    |    현재 폴더 ~/ros2_curri/my_agv_ws    |    현재 터미널</a:t>
+              <a:t>현재 단계 실행 3/3    |    현재 폴더 ~/ros2_curri/my_agv_ws    |    터미널 1</a:t>
             </a:r>
           </a:p>
         </p:txBody>
@@ -43434,25 +45259,25 @@
         </p:nvSpPr>
         <p:spPr>
           <a:xfrm>
-            <a:off x="676656" y="1764792"/>
-            <a:ext cx="1828800" cy="347472"/>
-          </a:xfrm>
-          <a:prstGeom prst="rect">
-            <a:avLst/>
-          </a:prstGeom>
-          <a:noFill/>
-        </p:spPr>
-        <p:txBody>
-          <a:bodyPr wrap="square" lIns="73152" rIns="73152" tIns="36576" bIns="36576">
-            <a:spAutoFit/>
-          </a:bodyPr>
-          <a:lstStyle/>
-          <a:p>
-            <a:pPr algn="l">
-              <a:spcAft>
-                <a:spcPts val="0"/>
-              </a:spcAft>
-              <a:defRPr sz="1800" b="1">
+            <a:off x="676656" y="1719072"/>
+            <a:ext cx="1691640" cy="274320"/>
+          </a:xfrm>
+          <a:prstGeom prst="rect">
+            <a:avLst/>
+          </a:prstGeom>
+          <a:noFill/>
+        </p:spPr>
+        <p:txBody>
+          <a:bodyPr wrap="square" lIns="73152" rIns="73152" tIns="36576" bIns="36576">
+            <a:spAutoFit/>
+          </a:bodyPr>
+          <a:lstStyle/>
+          <a:p>
+            <a:pPr algn="l">
+              <a:spcAft>
+                <a:spcPts val="0"/>
+              </a:spcAft>
+              <a:defRPr sz="1700" b="1">
                 <a:solidFill>
                   <a:srgbClr val="225B9B"/>
                 </a:solidFill>
@@ -43460,7 +45285,7 @@
               </a:defRPr>
             </a:pPr>
             <a:r>
-              <a:t>왜 하는가</a:t>
+              <a:t>명령의 목적</a:t>
             </a:r>
           </a:p>
         </p:txBody>
@@ -43473,7 +45298,7 @@
         </p:nvSpPr>
         <p:spPr>
           <a:xfrm>
-            <a:off x="676656" y="2103120"/>
+            <a:off x="676656" y="2002536"/>
             <a:ext cx="10789920" cy="512064"/>
           </a:xfrm>
           <a:prstGeom prst="rect">
@@ -43491,7 +45316,7 @@
               <a:spcAft>
                 <a:spcPts val="0"/>
               </a:spcAft>
-              <a:defRPr sz="2000" b="0">
+              <a:defRPr sz="1800" b="0">
                 <a:solidFill>
                   <a:srgbClr val="122C4E"/>
                 </a:solidFill>
@@ -43506,14 +45331,53 @@
       </p:sp>
       <p:sp>
         <p:nvSpPr>
-          <p:cNvPr id="9" name="Rounded Rectangle 8"/>
+          <p:cNvPr id="9" name="TextBox 8"/>
+          <p:cNvSpPr txBox="1"/>
+          <p:nvPr/>
+        </p:nvSpPr>
+        <p:spPr>
+          <a:xfrm>
+            <a:off x="676656" y="2816352"/>
+            <a:ext cx="10835640" cy="256032"/>
+          </a:xfrm>
+          <a:prstGeom prst="rect">
+            <a:avLst/>
+          </a:prstGeom>
+          <a:noFill/>
+        </p:spPr>
+        <p:txBody>
+          <a:bodyPr wrap="square" lIns="73152" rIns="73152" tIns="36576" bIns="36576">
+            <a:spAutoFit/>
+          </a:bodyPr>
+          <a:lstStyle/>
+          <a:p>
+            <a:pPr algn="ctr">
+              <a:spcAft>
+                <a:spcPts val="0"/>
+              </a:spcAft>
+              <a:defRPr sz="1600" b="1">
+                <a:solidFill>
+                  <a:srgbClr val="225B9B"/>
+                </a:solidFill>
+                <a:latin typeface="Noto Sans CJK KR"/>
+              </a:defRPr>
+            </a:pPr>
+            <a:r>
+              <a:t>터미널 1 — 아래 검은 블록은 명령만 복사합니다.</a:t>
+            </a:r>
+          </a:p>
+        </p:txBody>
+      </p:sp>
+      <p:sp>
+        <p:nvSpPr>
+          <p:cNvPr id="10" name="Rounded Rectangle 9"/>
           <p:cNvSpPr/>
           <p:nvPr/>
         </p:nvSpPr>
         <p:spPr>
           <a:xfrm>
-            <a:off x="676656" y="2871216"/>
-            <a:ext cx="10835640" cy="2331720"/>
+            <a:off x="676656" y="3154680"/>
+            <a:ext cx="10835640" cy="1938528"/>
           </a:xfrm>
           <a:prstGeom prst="roundRect">
             <a:avLst/>
@@ -43542,7 +45406,7 @@
           </a:fontRef>
         </p:style>
         <p:txBody>
-          <a:bodyPr rtlCol="0" anchor="ctr" wrap="square" lIns="73152" rIns="73152" tIns="36576" bIns="36576"/>
+          <a:bodyPr rtlCol="0" anchor="ctr" wrap="square" lIns="109728" rIns="109728" tIns="73152" bIns="73152"/>
           <a:lstStyle/>
           <a:p>
             <a:pPr algn="l">
@@ -43559,44 +45423,52 @@
             <a:r>
               <a:t>ros2 bag record -o ~/agv_bag_01 \</a:t>
             </a:r>
-            <a:br/>
+          </a:p>
+          <a:p>
+            <a:pPr algn="l">
+              <a:spcAft>
+                <a:spcPts val="0"/>
+              </a:spcAft>
+              <a:defRPr sz="1600" b="0">
+                <a:solidFill>
+                  <a:srgbClr val="FFFFFF"/>
+                </a:solidFill>
+                <a:latin typeface="DejaVu Sans Mono"/>
+              </a:defRPr>
+            </a:pPr>
             <a:r>
               <a:t>  /scan /imu/data /odom /camera/image_raw</a:t>
             </a:r>
-            <a:br/>
-            <a:r>
-              <a:t># Ctrl-C 뒤: ros2 bag info ~/agv_bag_01</a:t>
-            </a:r>
-          </a:p>
-        </p:txBody>
-      </p:sp>
-      <p:sp>
-        <p:nvSpPr>
-          <p:cNvPr id="10" name="TextBox 9"/>
-          <p:cNvSpPr txBox="1"/>
-          <p:nvPr/>
-        </p:nvSpPr>
-        <p:spPr>
-          <a:xfrm>
-            <a:off x="768096" y="5468112"/>
-            <a:ext cx="1143000" cy="256032"/>
-          </a:xfrm>
-          <a:prstGeom prst="rect">
-            <a:avLst/>
-          </a:prstGeom>
-          <a:noFill/>
-        </p:spPr>
-        <p:txBody>
-          <a:bodyPr wrap="square" lIns="73152" rIns="73152" tIns="36576" bIns="36576">
-            <a:spAutoFit/>
-          </a:bodyPr>
-          <a:lstStyle/>
-          <a:p>
-            <a:pPr algn="l">
-              <a:spcAft>
-                <a:spcPts val="0"/>
-              </a:spcAft>
-              <a:defRPr sz="1800" b="1">
+          </a:p>
+        </p:txBody>
+      </p:sp>
+      <p:sp>
+        <p:nvSpPr>
+          <p:cNvPr id="11" name="TextBox 10"/>
+          <p:cNvSpPr txBox="1"/>
+          <p:nvPr/>
+        </p:nvSpPr>
+        <p:spPr>
+          <a:xfrm>
+            <a:off x="768096" y="5276088"/>
+            <a:ext cx="10561320" cy="384048"/>
+          </a:xfrm>
+          <a:prstGeom prst="rect">
+            <a:avLst/>
+          </a:prstGeom>
+          <a:noFill/>
+        </p:spPr>
+        <p:txBody>
+          <a:bodyPr wrap="square" lIns="73152" rIns="73152" tIns="36576" bIns="36576">
+            <a:spAutoFit/>
+          </a:bodyPr>
+          <a:lstStyle/>
+          <a:p>
+            <a:pPr algn="ctr">
+              <a:spcAft>
+                <a:spcPts val="0"/>
+              </a:spcAft>
+              <a:defRPr sz="1500" b="1">
                 <a:solidFill>
                   <a:srgbClr val="2A8B5A"/>
                 </a:solidFill>
@@ -43604,38 +45476,38 @@
               </a:defRPr>
             </a:pPr>
             <a:r>
-              <a:t>확인</a:t>
-            </a:r>
-          </a:p>
-        </p:txBody>
-      </p:sp>
-      <p:sp>
-        <p:nvSpPr>
-          <p:cNvPr id="11" name="TextBox 10"/>
-          <p:cNvSpPr txBox="1"/>
-          <p:nvPr/>
-        </p:nvSpPr>
-        <p:spPr>
-          <a:xfrm>
-            <a:off x="768096" y="5742432"/>
-            <a:ext cx="10561320" cy="347472"/>
-          </a:xfrm>
-          <a:prstGeom prst="rect">
-            <a:avLst/>
-          </a:prstGeom>
-          <a:noFill/>
-        </p:spPr>
-        <p:txBody>
-          <a:bodyPr wrap="square" lIns="73152" rIns="73152" tIns="36576" bIns="36576">
-            <a:spAutoFit/>
-          </a:bodyPr>
-          <a:lstStyle/>
-          <a:p>
-            <a:pPr algn="l">
-              <a:spcAft>
-                <a:spcPts val="0"/>
-              </a:spcAft>
-              <a:defRPr sz="1800" b="0">
+              <a:t>터미널 1 역할: 터미널 1에서 이 명령만 그대로 복사해 실행합니다.</a:t>
+            </a:r>
+          </a:p>
+        </p:txBody>
+      </p:sp>
+      <p:sp>
+        <p:nvSpPr>
+          <p:cNvPr id="12" name="TextBox 11"/>
+          <p:cNvSpPr txBox="1"/>
+          <p:nvPr/>
+        </p:nvSpPr>
+        <p:spPr>
+          <a:xfrm>
+            <a:off x="768096" y="5916168"/>
+            <a:ext cx="10561320" cy="292608"/>
+          </a:xfrm>
+          <a:prstGeom prst="rect">
+            <a:avLst/>
+          </a:prstGeom>
+          <a:noFill/>
+        </p:spPr>
+        <p:txBody>
+          <a:bodyPr wrap="square" lIns="73152" rIns="73152" tIns="36576" bIns="36576">
+            <a:spAutoFit/>
+          </a:bodyPr>
+          <a:lstStyle/>
+          <a:p>
+            <a:pPr algn="ctr">
+              <a:spcAft>
+                <a:spcPts val="0"/>
+              </a:spcAft>
+              <a:defRPr sz="1500" b="1">
                 <a:solidFill>
                   <a:srgbClr val="122C4E"/>
                 </a:solidFill>
@@ -43643,7 +45515,7 @@
               </a:defRPr>
             </a:pPr>
             <a:r>
-              <a:t>출력에서 topic·frame·파일 이름 또는 성공 메시지를 찾고, 맞지 않으면 다음 파일로 가지 않습니다.</a:t>
+              <a:t>확인: 출력에서 topic·frame·파일 이름 또는 성공 메시지를 찾고, 맞지 않으면 다음 파일로 가지 않습니다.</a:t>
             </a:r>
           </a:p>
         </p:txBody>
@@ -43875,21 +45747,138 @@
               </a:defRPr>
             </a:pPr>
             <a:r>
-              <a:t>현재 단계 실행    |    현재 폴더 ~/ros2_curri/my_agv_ws    |    현재 터미널</a:t>
-            </a:r>
-          </a:p>
-        </p:txBody>
-      </p:sp>
-      <p:sp>
-        <p:nvSpPr>
-          <p:cNvPr id="7" name="Rounded Rectangle 6"/>
+              <a:t>현재 단계 실행    |    현재 폴더 ~/ros2_curri/my_agv_ws    |    터미널 1</a:t>
+            </a:r>
+          </a:p>
+        </p:txBody>
+      </p:sp>
+      <p:sp>
+        <p:nvSpPr>
+          <p:cNvPr id="7" name="TextBox 6"/>
+          <p:cNvSpPr txBox="1"/>
+          <p:nvPr/>
+        </p:nvSpPr>
+        <p:spPr>
+          <a:xfrm>
+            <a:off x="676656" y="1719072"/>
+            <a:ext cx="1691640" cy="274320"/>
+          </a:xfrm>
+          <a:prstGeom prst="rect">
+            <a:avLst/>
+          </a:prstGeom>
+          <a:noFill/>
+        </p:spPr>
+        <p:txBody>
+          <a:bodyPr wrap="square" lIns="73152" rIns="73152" tIns="36576" bIns="36576">
+            <a:spAutoFit/>
+          </a:bodyPr>
+          <a:lstStyle/>
+          <a:p>
+            <a:pPr algn="l">
+              <a:spcAft>
+                <a:spcPts val="0"/>
+              </a:spcAft>
+              <a:defRPr sz="1700" b="1">
+                <a:solidFill>
+                  <a:srgbClr val="225B9B"/>
+                </a:solidFill>
+                <a:latin typeface="Noto Sans CJK KR"/>
+              </a:defRPr>
+            </a:pPr>
+            <a:r>
+              <a:t>명령의 목적</a:t>
+            </a:r>
+          </a:p>
+        </p:txBody>
+      </p:sp>
+      <p:sp>
+        <p:nvSpPr>
+          <p:cNvPr id="8" name="TextBox 7"/>
+          <p:cNvSpPr txBox="1"/>
+          <p:nvPr/>
+        </p:nvSpPr>
+        <p:spPr>
+          <a:xfrm>
+            <a:off x="676656" y="2002536"/>
+            <a:ext cx="10789920" cy="512064"/>
+          </a:xfrm>
+          <a:prstGeom prst="rect">
+            <a:avLst/>
+          </a:prstGeom>
+          <a:noFill/>
+        </p:spPr>
+        <p:txBody>
+          <a:bodyPr wrap="square" lIns="73152" rIns="73152" tIns="36576" bIns="36576">
+            <a:spAutoFit/>
+          </a:bodyPr>
+          <a:lstStyle/>
+          <a:p>
+            <a:pPr algn="l">
+              <a:spcAft>
+                <a:spcPts val="0"/>
+              </a:spcAft>
+              <a:defRPr sz="1800" b="0">
+                <a:solidFill>
+                  <a:srgbClr val="122C4E"/>
+                </a:solidFill>
+                <a:latin typeface="Noto Sans CJK KR"/>
+              </a:defRPr>
+            </a:pPr>
+            <a:r>
+              <a:t>명령 순서를 바꾸지 않습니다. build가 끝난 뒤 source하고, 마지막 명령으로 node·Gazebo·RViz를 실행합니다.</a:t>
+            </a:r>
+          </a:p>
+        </p:txBody>
+      </p:sp>
+      <p:sp>
+        <p:nvSpPr>
+          <p:cNvPr id="9" name="TextBox 8"/>
+          <p:cNvSpPr txBox="1"/>
+          <p:nvPr/>
+        </p:nvSpPr>
+        <p:spPr>
+          <a:xfrm>
+            <a:off x="676656" y="2816352"/>
+            <a:ext cx="10835640" cy="256032"/>
+          </a:xfrm>
+          <a:prstGeom prst="rect">
+            <a:avLst/>
+          </a:prstGeom>
+          <a:noFill/>
+        </p:spPr>
+        <p:txBody>
+          <a:bodyPr wrap="square" lIns="73152" rIns="73152" tIns="36576" bIns="36576">
+            <a:spAutoFit/>
+          </a:bodyPr>
+          <a:lstStyle/>
+          <a:p>
+            <a:pPr algn="ctr">
+              <a:spcAft>
+                <a:spcPts val="0"/>
+              </a:spcAft>
+              <a:defRPr sz="1600" b="1">
+                <a:solidFill>
+                  <a:srgbClr val="225B9B"/>
+                </a:solidFill>
+                <a:latin typeface="Noto Sans CJK KR"/>
+              </a:defRPr>
+            </a:pPr>
+            <a:r>
+              <a:t>터미널 1 — 아래 검은 블록은 명령만 복사합니다.</a:t>
+            </a:r>
+          </a:p>
+        </p:txBody>
+      </p:sp>
+      <p:sp>
+        <p:nvSpPr>
+          <p:cNvPr id="10" name="Rounded Rectangle 9"/>
           <p:cNvSpPr/>
           <p:nvPr/>
         </p:nvSpPr>
         <p:spPr>
           <a:xfrm>
-            <a:off x="658368" y="1700784"/>
-            <a:ext cx="10972800" cy="3182112"/>
+            <a:off x="676656" y="3154680"/>
+            <a:ext cx="10835640" cy="1938528"/>
           </a:xfrm>
           <a:prstGeom prst="roundRect">
             <a:avLst/>
@@ -43918,7 +45907,7 @@
           </a:fontRef>
         </p:style>
         <p:txBody>
-          <a:bodyPr rtlCol="0" anchor="ctr" wrap="square" lIns="73152" rIns="73152" tIns="36576" bIns="36576"/>
+          <a:bodyPr rtlCol="0" anchor="ctr" wrap="square" lIns="109728" rIns="109728" tIns="73152" bIns="73152"/>
           <a:lstStyle/>
           <a:p>
             <a:pPr algn="l">
@@ -43935,44 +45924,52 @@
             <a:r>
               <a:t>cd ~/ros2_curri/my_agv_ws &amp;&amp; source install/setup.bash</a:t>
             </a:r>
-            <a:br/>
+          </a:p>
+          <a:p>
+            <a:pPr algn="l">
+              <a:spcAft>
+                <a:spcPts val="0"/>
+              </a:spcAft>
+              <a:defRPr sz="1600" b="0">
+                <a:solidFill>
+                  <a:srgbClr val="FFFFFF"/>
+                </a:solidFill>
+                <a:latin typeface="DejaVu Sans Mono"/>
+              </a:defRPr>
+            </a:pPr>
             <a:r>
               <a:t>ros2 launch agv_bringup agv_sim.launch.py</a:t>
             </a:r>
-            <a:br/>
-            <a:r>
-              <a:t># 별도 터미널: ros2 bag record -o ~/agv_bag_01 /scan /imu/data /odom /camera/image_raw</a:t>
-            </a:r>
-          </a:p>
-        </p:txBody>
-      </p:sp>
-      <p:sp>
-        <p:nvSpPr>
-          <p:cNvPr id="8" name="TextBox 7"/>
-          <p:cNvSpPr txBox="1"/>
-          <p:nvPr/>
-        </p:nvSpPr>
-        <p:spPr>
-          <a:xfrm>
-            <a:off x="786384" y="5239512"/>
-            <a:ext cx="1261872" cy="237744"/>
-          </a:xfrm>
-          <a:prstGeom prst="rect">
-            <a:avLst/>
-          </a:prstGeom>
-          <a:noFill/>
-        </p:spPr>
-        <p:txBody>
-          <a:bodyPr wrap="square" lIns="73152" rIns="73152" tIns="36576" bIns="36576">
-            <a:spAutoFit/>
-          </a:bodyPr>
-          <a:lstStyle/>
-          <a:p>
-            <a:pPr algn="l">
-              <a:spcAft>
-                <a:spcPts val="0"/>
-              </a:spcAft>
-              <a:defRPr sz="1800" b="1">
+          </a:p>
+        </p:txBody>
+      </p:sp>
+      <p:sp>
+        <p:nvSpPr>
+          <p:cNvPr id="11" name="TextBox 10"/>
+          <p:cNvSpPr txBox="1"/>
+          <p:nvPr/>
+        </p:nvSpPr>
+        <p:spPr>
+          <a:xfrm>
+            <a:off x="768096" y="5276088"/>
+            <a:ext cx="10561320" cy="384048"/>
+          </a:xfrm>
+          <a:prstGeom prst="rect">
+            <a:avLst/>
+          </a:prstGeom>
+          <a:noFill/>
+        </p:spPr>
+        <p:txBody>
+          <a:bodyPr wrap="square" lIns="73152" rIns="73152" tIns="36576" bIns="36576">
+            <a:spAutoFit/>
+          </a:bodyPr>
+          <a:lstStyle/>
+          <a:p>
+            <a:pPr algn="ctr">
+              <a:spcAft>
+                <a:spcPts val="0"/>
+              </a:spcAft>
+              <a:defRPr sz="1500" b="1">
                 <a:solidFill>
                   <a:srgbClr val="2A8B5A"/>
                 </a:solidFill>
@@ -43980,38 +45977,38 @@
               </a:defRPr>
             </a:pPr>
             <a:r>
-              <a:t>확인 기준</a:t>
-            </a:r>
-          </a:p>
-        </p:txBody>
-      </p:sp>
-      <p:sp>
-        <p:nvSpPr>
-          <p:cNvPr id="9" name="TextBox 8"/>
-          <p:cNvSpPr txBox="1"/>
-          <p:nvPr/>
-        </p:nvSpPr>
-        <p:spPr>
-          <a:xfrm>
-            <a:off x="786384" y="5532120"/>
-            <a:ext cx="10469880" cy="420624"/>
-          </a:xfrm>
-          <a:prstGeom prst="rect">
-            <a:avLst/>
-          </a:prstGeom>
-          <a:noFill/>
-        </p:spPr>
-        <p:txBody>
-          <a:bodyPr wrap="square" lIns="73152" rIns="73152" tIns="36576" bIns="36576">
-            <a:spAutoFit/>
-          </a:bodyPr>
-          <a:lstStyle/>
-          <a:p>
-            <a:pPr algn="l">
-              <a:spcAft>
-                <a:spcPts val="0"/>
-              </a:spcAft>
-              <a:defRPr sz="1800" b="0">
+              <a:t>터미널 1 역할: 시뮬레이터·bridge·node를 먼저 시작한 뒤 이 창은 종료하지 않고 둡니다.</a:t>
+            </a:r>
+          </a:p>
+        </p:txBody>
+      </p:sp>
+      <p:sp>
+        <p:nvSpPr>
+          <p:cNvPr id="12" name="TextBox 11"/>
+          <p:cNvSpPr txBox="1"/>
+          <p:nvPr/>
+        </p:nvSpPr>
+        <p:spPr>
+          <a:xfrm>
+            <a:off x="768096" y="5916168"/>
+            <a:ext cx="10561320" cy="292608"/>
+          </a:xfrm>
+          <a:prstGeom prst="rect">
+            <a:avLst/>
+          </a:prstGeom>
+          <a:noFill/>
+        </p:spPr>
+        <p:txBody>
+          <a:bodyPr wrap="square" lIns="73152" rIns="73152" tIns="36576" bIns="36576">
+            <a:spAutoFit/>
+          </a:bodyPr>
+          <a:lstStyle/>
+          <a:p>
+            <a:pPr algn="ctr">
+              <a:spcAft>
+                <a:spcPts val="0"/>
+              </a:spcAft>
+              <a:defRPr sz="1500" b="1">
                 <a:solidFill>
                   <a:srgbClr val="122C4E"/>
                 </a:solidFill>
@@ -44019,7 +46016,7 @@
               </a:defRPr>
             </a:pPr>
             <a:r>
-              <a:t>한 launch 명령·YAML parameter·rosbag record/replay 명령을 설명하고 확인한다.</a:t>
+              <a:t>확인: 한 launch 명령·YAML parameter·rosbag record/replay 명령을 설명하고 확인한다.</a:t>
             </a:r>
           </a:p>
         </p:txBody>
@@ -44115,7 +46112,7 @@
               </a:defRPr>
             </a:pPr>
             <a:r>
-              <a:t>실제 ROS 2 환경의 파일·패키지·구성 검증 로그</a:t>
+              <a:t>실제 Gazebo Sim: launch로 World와 AGV를 함께 실행한 화면</a:t>
             </a:r>
           </a:p>
         </p:txBody>
@@ -44200,7 +46197,7 @@
       </p:sp>
       <p:pic>
         <p:nvPicPr>
-          <p:cNvPr id="6" name="Picture 5" descr="validation_terminal.png"/>
+          <p:cNvPr id="6" name="Picture 5" descr="01_gazebo_final_actual.png"/>
           <p:cNvPicPr>
             <a:picLocks noChangeAspect="1"/>
           </p:cNvPicPr>
@@ -44214,8 +46211,8 @@
         </p:blipFill>
         <p:spPr>
           <a:xfrm>
-            <a:off x="2855133" y="1353312"/>
-            <a:ext cx="6478685" cy="4800600"/>
+            <a:off x="3253884" y="1353312"/>
+            <a:ext cx="5681183" cy="4800600"/>
           </a:xfrm>
           <a:prstGeom prst="rect">
             <a:avLst/>
@@ -44256,7 +46253,7 @@
               </a:defRPr>
             </a:pPr>
             <a:r>
-              <a:t>화면에서 확인: ① 명령/설정  ② 정상 출력 또는 화면  ③ 다음 검증 명령으로 재확인</a:t>
+              <a:t>화면에서 확인: 명령·설정과 화면의 topic·frame·결과 이름을 대조합니다.</a:t>
             </a:r>
           </a:p>
         </p:txBody>
@@ -44313,7 +46310,7 @@
               </a:defRPr>
             </a:pPr>
             <a:r>
-              <a:t>객관적 검증 명령으로 완료를 확인한다</a:t>
+              <a:t>정상 결과: 실제 환경에서 확인한 출력</a:t>
             </a:r>
           </a:p>
         </p:txBody>
@@ -44352,7 +46349,7 @@
               </a:defRPr>
             </a:pPr>
             <a:r>
-              <a:t>화면만 보지 말고 topic·frame·파일·parameter를 다시 확인합니다.</a:t>
+              <a:t>실제 ROS 2 환경의 파일·패키지·구성 검증 로그</a:t>
             </a:r>
           </a:p>
         </p:txBody>
@@ -44435,176 +46432,57 @@
           </a:p>
         </p:txBody>
       </p:sp>
-      <p:sp>
-        <p:nvSpPr>
-          <p:cNvPr id="6" name="Rectangle 5"/>
-          <p:cNvSpPr/>
-          <p:nvPr/>
-        </p:nvSpPr>
-        <p:spPr>
-          <a:xfrm>
-            <a:off x="566928" y="1188720"/>
-            <a:ext cx="11064240" cy="347472"/>
-          </a:xfrm>
-          <a:prstGeom prst="rect">
-            <a:avLst/>
-          </a:prstGeom>
-          <a:solidFill>
-            <a:srgbClr val="F4F7FB"/>
-          </a:solidFill>
-          <a:ln>
-            <a:solidFill>
-              <a:srgbClr val="F4F7FB"/>
-            </a:solidFill>
-          </a:ln>
-        </p:spPr>
-        <p:style>
-          <a:lnRef idx="1">
-            <a:schemeClr val="accent1"/>
-          </a:lnRef>
-          <a:fillRef idx="3">
-            <a:schemeClr val="accent1"/>
-          </a:fillRef>
-          <a:effectRef idx="2">
-            <a:schemeClr val="accent1"/>
-          </a:effectRef>
-          <a:fontRef idx="minor">
-            <a:schemeClr val="lt1"/>
-          </a:fontRef>
-        </p:style>
-        <p:txBody>
-          <a:bodyPr rtlCol="0" anchor="ctr" wrap="square" lIns="73152" rIns="73152" tIns="36576" bIns="36576"/>
-          <a:lstStyle/>
-          <a:p>
-            <a:pPr algn="l">
-              <a:spcAft>
-                <a:spcPts val="0"/>
-              </a:spcAft>
-              <a:defRPr sz="1300" b="1">
-                <a:solidFill>
-                  <a:srgbClr val="122C4E"/>
-                </a:solidFill>
-                <a:latin typeface="Noto Sans CJK KR"/>
-              </a:defRPr>
-            </a:pPr>
-            <a:r>
-              <a:t>현재 단계 검증    |    현재 폴더 ~/ros2_curri/my_agv_ws    |    현재 터미널</a:t>
-            </a:r>
-          </a:p>
-        </p:txBody>
-      </p:sp>
-      <p:sp>
-        <p:nvSpPr>
-          <p:cNvPr id="7" name="Rounded Rectangle 6"/>
-          <p:cNvSpPr/>
-          <p:nvPr/>
-        </p:nvSpPr>
-        <p:spPr>
-          <a:xfrm>
-            <a:off x="658368" y="1755648"/>
-            <a:ext cx="10972800" cy="2148840"/>
-          </a:xfrm>
-          <a:prstGeom prst="roundRect">
-            <a:avLst/>
-          </a:prstGeom>
-          <a:solidFill>
-            <a:srgbClr val="1D232D"/>
-          </a:solidFill>
-          <a:ln>
-            <a:solidFill>
-              <a:srgbClr val="1D232D"/>
-            </a:solidFill>
-          </a:ln>
-        </p:spPr>
-        <p:style>
-          <a:lnRef idx="1">
-            <a:schemeClr val="accent1"/>
-          </a:lnRef>
-          <a:fillRef idx="3">
-            <a:schemeClr val="accent1"/>
-          </a:fillRef>
-          <a:effectRef idx="2">
-            <a:schemeClr val="accent1"/>
-          </a:effectRef>
-          <a:fontRef idx="minor">
-            <a:schemeClr val="lt1"/>
-          </a:fontRef>
-        </p:style>
-        <p:txBody>
-          <a:bodyPr rtlCol="0" anchor="ctr" wrap="square" lIns="73152" rIns="73152" tIns="36576" bIns="36576"/>
-          <a:lstStyle/>
-          <a:p>
-            <a:pPr algn="l">
-              <a:spcAft>
-                <a:spcPts val="0"/>
-              </a:spcAft>
-              <a:defRPr sz="1600" b="0">
-                <a:solidFill>
-                  <a:srgbClr val="FFFFFF"/>
-                </a:solidFill>
-                <a:latin typeface="DejaVu Sans Mono"/>
-              </a:defRPr>
-            </a:pPr>
-            <a:r>
-              <a:t>ros2 launch agv_bringup agv_sim.launch.py --show-args</a:t>
-            </a:r>
-            <a:br/>
-            <a:r>
-              <a:t>ros2 node list</a:t>
-            </a:r>
-            <a:br/>
-            <a:r>
-              <a:t>ros2 param get /mission_manager stop_distance</a:t>
-            </a:r>
-          </a:p>
-        </p:txBody>
-      </p:sp>
-      <p:sp>
-        <p:nvSpPr>
-          <p:cNvPr id="8" name="Rounded Rectangle 7"/>
-          <p:cNvSpPr/>
-          <p:nvPr/>
-        </p:nvSpPr>
-        <p:spPr>
-          <a:xfrm>
-            <a:off x="658368" y="4206240"/>
-            <a:ext cx="10972800" cy="1554480"/>
-          </a:xfrm>
-          <a:prstGeom prst="roundRect">
-            <a:avLst/>
-          </a:prstGeom>
-          <a:solidFill>
-            <a:srgbClr val="F4F7FB"/>
-          </a:solidFill>
-          <a:ln>
-            <a:solidFill>
-              <a:srgbClr val="D1DFD5"/>
-            </a:solidFill>
-          </a:ln>
-        </p:spPr>
-        <p:style>
-          <a:lnRef idx="1">
-            <a:schemeClr val="accent1"/>
-          </a:lnRef>
-          <a:fillRef idx="3">
-            <a:schemeClr val="accent1"/>
-          </a:fillRef>
-          <a:effectRef idx="2">
-            <a:schemeClr val="accent1"/>
-          </a:effectRef>
-          <a:fontRef idx="minor">
-            <a:schemeClr val="lt1"/>
-          </a:fontRef>
-        </p:style>
-        <p:txBody>
-          <a:bodyPr rtlCol="0" anchor="ctr" wrap="square" lIns="73152" rIns="73152" tIns="36576" bIns="36576"/>
-          <a:lstStyle/>
-          <a:p>
-            <a:pPr algn="l">
-              <a:spcAft>
-                <a:spcPts val="0"/>
-              </a:spcAft>
-              <a:defRPr sz="1800" b="1">
+      <p:pic>
+        <p:nvPicPr>
+          <p:cNvPr id="6" name="Picture 5" descr="validation_terminal.png"/>
+          <p:cNvPicPr>
+            <a:picLocks noChangeAspect="1"/>
+          </p:cNvPicPr>
+          <p:nvPr/>
+        </p:nvPicPr>
+        <p:blipFill>
+          <a:blip r:embed="rId2"/>
+          <a:stretch>
+            <a:fillRect/>
+          </a:stretch>
+        </p:blipFill>
+        <p:spPr>
+          <a:xfrm>
+            <a:off x="2855133" y="1353312"/>
+            <a:ext cx="6478685" cy="4800600"/>
+          </a:xfrm>
+          <a:prstGeom prst="rect">
+            <a:avLst/>
+          </a:prstGeom>
+        </p:spPr>
+      </p:pic>
+      <p:sp>
+        <p:nvSpPr>
+          <p:cNvPr id="7" name="TextBox 6"/>
+          <p:cNvSpPr txBox="1"/>
+          <p:nvPr/>
+        </p:nvSpPr>
+        <p:spPr>
+          <a:xfrm>
+            <a:off x="777240" y="6144768"/>
+            <a:ext cx="10607040" cy="310896"/>
+          </a:xfrm>
+          <a:prstGeom prst="rect">
+            <a:avLst/>
+          </a:prstGeom>
+          <a:noFill/>
+        </p:spPr>
+        <p:txBody>
+          <a:bodyPr wrap="square" lIns="73152" rIns="73152" tIns="36576" bIns="36576">
+            <a:spAutoFit/>
+          </a:bodyPr>
+          <a:lstStyle/>
+          <a:p>
+            <a:pPr algn="ctr">
+              <a:spcAft>
+                <a:spcPts val="0"/>
+              </a:spcAft>
+              <a:defRPr sz="1100" b="1">
                 <a:solidFill>
                   <a:srgbClr val="2A8B5A"/>
                 </a:solidFill>
@@ -44612,58 +46490,7 @@
               </a:defRPr>
             </a:pPr>
             <a:r>
-              <a:t>완료 체크</a:t>
-            </a:r>
-            <a:br/>
-            <a:r>
-              <a:t>□ 명령이 오류 없이 실행된다.</a:t>
-            </a:r>
-            <a:br/>
-            <a:r>
-              <a:t>□ 기대한 파일·topic·frame·parameter 이름이 보인다.</a:t>
-            </a:r>
-            <a:br/>
-            <a:r>
-              <a:t>□ 값의 단위와 방향을 한 문장으로 설명할 수 있다.</a:t>
-            </a:r>
-          </a:p>
-        </p:txBody>
-      </p:sp>
-      <p:sp>
-        <p:nvSpPr>
-          <p:cNvPr id="9" name="TextBox 8"/>
-          <p:cNvSpPr txBox="1"/>
-          <p:nvPr/>
-        </p:nvSpPr>
-        <p:spPr>
-          <a:xfrm>
-            <a:off x="731520" y="5989320"/>
-            <a:ext cx="10789920" cy="237744"/>
-          </a:xfrm>
-          <a:prstGeom prst="rect">
-            <a:avLst/>
-          </a:prstGeom>
-          <a:noFill/>
-        </p:spPr>
-        <p:txBody>
-          <a:bodyPr wrap="square" lIns="73152" rIns="73152" tIns="36576" bIns="36576">
-            <a:spAutoFit/>
-          </a:bodyPr>
-          <a:lstStyle/>
-          <a:p>
-            <a:pPr algn="l">
-              <a:spcAft>
-                <a:spcPts val="0"/>
-              </a:spcAft>
-              <a:defRPr sz="1500" b="1">
-                <a:solidFill>
-                  <a:srgbClr val="122C4E"/>
-                </a:solidFill>
-                <a:latin typeface="Noto Sans CJK KR"/>
-              </a:defRPr>
-            </a:pPr>
-            <a:r>
-              <a:t>완료 조건: 한 launch 명령·YAML parameter·rosbag record/replay 명령을 설명하고 확인한다.</a:t>
+              <a:t>화면에서 확인: ① 명령/설정  ② 정상 출력 또는 화면  ③ 다음 검증 명령으로 재확인</a:t>
             </a:r>
           </a:p>
         </p:txBody>
@@ -44720,7 +46547,7 @@
               </a:defRPr>
             </a:pPr>
             <a:r>
-              <a:t>막히면: 증상 → 우선 확인 → 재검증</a:t>
+              <a:t>객관적 검증 명령으로 완료를 확인한다</a:t>
             </a:r>
           </a:p>
         </p:txBody>
@@ -44759,7 +46586,7 @@
               </a:defRPr>
             </a:pPr>
             <a:r>
-              <a:t>오류 메시지를 숨기지 않고 같은 순서로 점검합니다.</a:t>
+              <a:t>화면만 보지 말고 topic·frame·파일·parameter를 다시 확인합니다.</a:t>
             </a:r>
           </a:p>
         </p:txBody>
@@ -44895,7 +46722,7 @@
               </a:defRPr>
             </a:pPr>
             <a:r>
-              <a:t>현재 단계 오류 대응    |    현재 폴더 ~/ros2_curri/my_agv_ws    |    현재 터미널</a:t>
+              <a:t>현재 단계 검증    |    현재 폴더 ~/ros2_curri/my_agv_ws    |    현재 터미널</a:t>
             </a:r>
           </a:p>
         </p:txBody>
@@ -44908,18 +46735,18 @@
         </p:nvSpPr>
         <p:spPr>
           <a:xfrm>
-            <a:off x="694944" y="1755648"/>
-            <a:ext cx="10972800" cy="1115568"/>
+            <a:off x="658368" y="1755648"/>
+            <a:ext cx="10972800" cy="2148840"/>
           </a:xfrm>
           <a:prstGeom prst="roundRect">
             <a:avLst/>
           </a:prstGeom>
           <a:solidFill>
-            <a:srgbClr val="FFF7F4"/>
+            <a:srgbClr val="1D232D"/>
           </a:solidFill>
           <a:ln>
             <a:solidFill>
-              <a:srgbClr val="EDBEB4"/>
+              <a:srgbClr val="1D232D"/>
             </a:solidFill>
           </a:ln>
         </p:spPr>
@@ -44938,72 +46765,7 @@
           </a:fontRef>
         </p:style>
         <p:txBody>
-          <a:bodyPr rtlCol="0" anchor="ctr"/>
-          <a:lstStyle/>
-          <a:p>
-            <a:pPr algn="ctr"/>
-          </a:p>
-        </p:txBody>
-      </p:sp>
-      <p:sp>
-        <p:nvSpPr>
-          <p:cNvPr id="8" name="TextBox 7"/>
-          <p:cNvSpPr txBox="1"/>
-          <p:nvPr/>
-        </p:nvSpPr>
-        <p:spPr>
-          <a:xfrm>
-            <a:off x="896112" y="1901952"/>
-            <a:ext cx="2926080" cy="274320"/>
-          </a:xfrm>
-          <a:prstGeom prst="rect">
-            <a:avLst/>
-          </a:prstGeom>
-          <a:noFill/>
-        </p:spPr>
-        <p:txBody>
-          <a:bodyPr wrap="square" lIns="73152" rIns="73152" tIns="36576" bIns="36576">
-            <a:spAutoFit/>
-          </a:bodyPr>
-          <a:lstStyle/>
-          <a:p>
-            <a:pPr algn="l">
-              <a:spcAft>
-                <a:spcPts val="0"/>
-              </a:spcAft>
-              <a:defRPr sz="1800" b="1">
-                <a:solidFill>
-                  <a:srgbClr val="BE3B3B"/>
-                </a:solidFill>
-                <a:latin typeface="Noto Sans CJK KR"/>
-              </a:defRPr>
-            </a:pPr>
-            <a:r>
-              <a:t>증상 1: 일부 노드 시작 실패</a:t>
-            </a:r>
-          </a:p>
-        </p:txBody>
-      </p:sp>
-      <p:sp>
-        <p:nvSpPr>
-          <p:cNvPr id="9" name="TextBox 8"/>
-          <p:cNvSpPr txBox="1"/>
-          <p:nvPr/>
-        </p:nvSpPr>
-        <p:spPr>
-          <a:xfrm>
-            <a:off x="3794760" y="1883664"/>
-            <a:ext cx="7543800" cy="621792"/>
-          </a:xfrm>
-          <a:prstGeom prst="rect">
-            <a:avLst/>
-          </a:prstGeom>
-          <a:noFill/>
-        </p:spPr>
-        <p:txBody>
-          <a:bodyPr wrap="square" lIns="73152" rIns="73152" tIns="36576" bIns="36576">
-            <a:spAutoFit/>
-          </a:bodyPr>
+          <a:bodyPr rtlCol="0" anchor="ctr" wrap="square" lIns="109728" rIns="109728" tIns="73152" bIns="73152"/>
           <a:lstStyle/>
           <a:p>
             <a:pPr algn="l">
@@ -45012,41 +46774,69 @@
               </a:spcAft>
               <a:defRPr sz="1600" b="0">
                 <a:solidFill>
-                  <a:srgbClr val="122C4E"/>
-                </a:solidFill>
-                <a:latin typeface="Noto Sans CJK KR"/>
-              </a:defRPr>
-            </a:pPr>
-            <a:r>
-              <a:t>우선 확인: launch 순서·spawn 준비·package path를 확인한다.</a:t>
-            </a:r>
-            <a:br/>
-            <a:r>
-              <a:t>수정 후: ros2 launch agv_bringup agv_sim.launch.py --show-args</a:t>
-            </a:r>
-          </a:p>
-        </p:txBody>
-      </p:sp>
-      <p:sp>
-        <p:nvSpPr>
-          <p:cNvPr id="10" name="Rounded Rectangle 9"/>
+                  <a:srgbClr val="FFFFFF"/>
+                </a:solidFill>
+                <a:latin typeface="DejaVu Sans Mono"/>
+              </a:defRPr>
+            </a:pPr>
+            <a:r>
+              <a:t>ros2 launch agv_bringup agv_sim.launch.py --show-args</a:t>
+            </a:r>
+          </a:p>
+          <a:p>
+            <a:pPr algn="l">
+              <a:spcAft>
+                <a:spcPts val="0"/>
+              </a:spcAft>
+              <a:defRPr sz="1600" b="0">
+                <a:solidFill>
+                  <a:srgbClr val="FFFFFF"/>
+                </a:solidFill>
+                <a:latin typeface="DejaVu Sans Mono"/>
+              </a:defRPr>
+            </a:pPr>
+            <a:r>
+              <a:t>ros2 node list</a:t>
+            </a:r>
+          </a:p>
+          <a:p>
+            <a:pPr algn="l">
+              <a:spcAft>
+                <a:spcPts val="0"/>
+              </a:spcAft>
+              <a:defRPr sz="1600" b="0">
+                <a:solidFill>
+                  <a:srgbClr val="FFFFFF"/>
+                </a:solidFill>
+                <a:latin typeface="DejaVu Sans Mono"/>
+              </a:defRPr>
+            </a:pPr>
+            <a:r>
+              <a:t>ros2 param get /mission_manager stop_distance</a:t>
+            </a:r>
+          </a:p>
+        </p:txBody>
+      </p:sp>
+      <p:sp>
+        <p:nvSpPr>
+          <p:cNvPr id="8" name="Rounded Rectangle 7"/>
           <p:cNvSpPr/>
           <p:nvPr/>
         </p:nvSpPr>
         <p:spPr>
           <a:xfrm>
-            <a:off x="694944" y="3172968"/>
-            <a:ext cx="10972800" cy="1115568"/>
+            <a:off x="658368" y="4206240"/>
+            <a:ext cx="10972800" cy="1554480"/>
           </a:xfrm>
           <a:prstGeom prst="roundRect">
             <a:avLst/>
           </a:prstGeom>
           <a:solidFill>
-            <a:srgbClr val="FFF7F4"/>
+            <a:srgbClr val="F4F7FB"/>
           </a:solidFill>
           <a:ln>
             <a:solidFill>
-              <a:srgbClr val="EDBEB4"/>
+              <a:srgbClr val="D1DFD5"/>
             </a:solidFill>
           </a:ln>
         </p:spPr>
@@ -45065,33 +46855,7 @@
           </a:fontRef>
         </p:style>
         <p:txBody>
-          <a:bodyPr rtlCol="0" anchor="ctr"/>
-          <a:lstStyle/>
-          <a:p>
-            <a:pPr algn="ctr"/>
-          </a:p>
-        </p:txBody>
-      </p:sp>
-      <p:sp>
-        <p:nvSpPr>
-          <p:cNvPr id="11" name="TextBox 10"/>
-          <p:cNvSpPr txBox="1"/>
-          <p:nvPr/>
-        </p:nvSpPr>
-        <p:spPr>
-          <a:xfrm>
-            <a:off x="896112" y="3319272"/>
-            <a:ext cx="2926080" cy="274320"/>
-          </a:xfrm>
-          <a:prstGeom prst="rect">
-            <a:avLst/>
-          </a:prstGeom>
-          <a:noFill/>
-        </p:spPr>
-        <p:txBody>
-          <a:bodyPr wrap="square" lIns="73152" rIns="73152" tIns="36576" bIns="36576">
-            <a:spAutoFit/>
-          </a:bodyPr>
+          <a:bodyPr rtlCol="0" anchor="ctr" wrap="square" lIns="73152" rIns="73152" tIns="36576" bIns="36576"/>
           <a:lstStyle/>
           <a:p>
             <a:pPr algn="l">
@@ -45100,44 +46864,56 @@
               </a:spcAft>
               <a:defRPr sz="1800" b="1">
                 <a:solidFill>
-                  <a:srgbClr val="BE3B3B"/>
-                </a:solidFill>
-                <a:latin typeface="Noto Sans CJK KR"/>
-              </a:defRPr>
-            </a:pPr>
-            <a:r>
-              <a:t>증상 2: YAML 값이 적용 안 됨</a:t>
-            </a:r>
-          </a:p>
-        </p:txBody>
-      </p:sp>
-      <p:sp>
-        <p:nvSpPr>
-          <p:cNvPr id="12" name="TextBox 11"/>
-          <p:cNvSpPr txBox="1"/>
-          <p:nvPr/>
-        </p:nvSpPr>
-        <p:spPr>
-          <a:xfrm>
-            <a:off x="3794760" y="3300984"/>
-            <a:ext cx="7543800" cy="621792"/>
-          </a:xfrm>
-          <a:prstGeom prst="rect">
-            <a:avLst/>
-          </a:prstGeom>
-          <a:noFill/>
-        </p:spPr>
-        <p:txBody>
-          <a:bodyPr wrap="square" lIns="73152" rIns="73152" tIns="36576" bIns="36576">
-            <a:spAutoFit/>
-          </a:bodyPr>
-          <a:lstStyle/>
-          <a:p>
-            <a:pPr algn="l">
-              <a:spcAft>
-                <a:spcPts val="0"/>
-              </a:spcAft>
-              <a:defRPr sz="1600" b="0">
+                  <a:srgbClr val="2A8B5A"/>
+                </a:solidFill>
+                <a:latin typeface="Noto Sans CJK KR"/>
+              </a:defRPr>
+            </a:pPr>
+            <a:r>
+              <a:t>완료 체크</a:t>
+            </a:r>
+            <a:br/>
+            <a:r>
+              <a:t>□ 명령이 오류 없이 실행된다.</a:t>
+            </a:r>
+            <a:br/>
+            <a:r>
+              <a:t>□ 기대한 파일·topic·frame·parameter 이름이 보인다.</a:t>
+            </a:r>
+            <a:br/>
+            <a:r>
+              <a:t>□ 값의 단위와 방향을 한 문장으로 설명할 수 있다.</a:t>
+            </a:r>
+          </a:p>
+        </p:txBody>
+      </p:sp>
+      <p:sp>
+        <p:nvSpPr>
+          <p:cNvPr id="9" name="TextBox 8"/>
+          <p:cNvSpPr txBox="1"/>
+          <p:nvPr/>
+        </p:nvSpPr>
+        <p:spPr>
+          <a:xfrm>
+            <a:off x="731520" y="5989320"/>
+            <a:ext cx="10789920" cy="237744"/>
+          </a:xfrm>
+          <a:prstGeom prst="rect">
+            <a:avLst/>
+          </a:prstGeom>
+          <a:noFill/>
+        </p:spPr>
+        <p:txBody>
+          <a:bodyPr wrap="square" lIns="73152" rIns="73152" tIns="36576" bIns="36576">
+            <a:spAutoFit/>
+          </a:bodyPr>
+          <a:lstStyle/>
+          <a:p>
+            <a:pPr algn="l">
+              <a:spcAft>
+                <a:spcPts val="0"/>
+              </a:spcAft>
+              <a:defRPr sz="1500" b="1">
                 <a:solidFill>
                   <a:srgbClr val="122C4E"/>
                 </a:solidFill>
@@ -45145,50 +46921,7 @@
               </a:defRPr>
             </a:pPr>
             <a:r>
-              <a:t>우선 확인: node name/namespace와 parameter key를 확인한다.</a:t>
-            </a:r>
-            <a:br/>
-            <a:r>
-              <a:t>수정 후: ros2 launch agv_bringup agv_sim.launch.py --show-args</a:t>
-            </a:r>
-          </a:p>
-        </p:txBody>
-      </p:sp>
-      <p:sp>
-        <p:nvSpPr>
-          <p:cNvPr id="13" name="TextBox 12"/>
-          <p:cNvSpPr txBox="1"/>
-          <p:nvPr/>
-        </p:nvSpPr>
-        <p:spPr>
-          <a:xfrm>
-            <a:off x="822960" y="5102352"/>
-            <a:ext cx="10607040" cy="402336"/>
-          </a:xfrm>
-          <a:prstGeom prst="rect">
-            <a:avLst/>
-          </a:prstGeom>
-          <a:noFill/>
-        </p:spPr>
-        <p:txBody>
-          <a:bodyPr wrap="square" lIns="73152" rIns="73152" tIns="36576" bIns="36576">
-            <a:spAutoFit/>
-          </a:bodyPr>
-          <a:lstStyle/>
-          <a:p>
-            <a:pPr algn="ctr">
-              <a:spcAft>
-                <a:spcPts val="0"/>
-              </a:spcAft>
-              <a:defRPr sz="1800" b="1">
-                <a:solidFill>
-                  <a:srgbClr val="DB7E22"/>
-                </a:solidFill>
-                <a:latin typeface="Noto Sans CJK KR"/>
-              </a:defRPr>
-            </a:pPr>
-            <a:r>
-              <a:t>공통 순서: ① 현재 폴더 ② source ③ 파일 경로 ④ 이름/타입/단위 ⑤ build·source 후 재실행</a:t>
+              <a:t>완료 조건: 한 launch 명령·YAML parameter·rosbag record/replay 명령을 설명하고 확인한다.</a:t>
             </a:r>
           </a:p>
         </p:txBody>
@@ -45245,7 +46978,7 @@
               </a:defRPr>
             </a:pPr>
             <a:r>
-              <a:t>막혔을 때만: Complete를 복구용으로 사용한다</a:t>
+              <a:t>막히면: 증상 → 우선 확인 → 재검증</a:t>
             </a:r>
           </a:p>
         </p:txBody>
@@ -45284,7 +47017,7 @@
               </a:defRPr>
             </a:pPr>
             <a:r>
-              <a:t>이 슬라이드가 먼저가 아닙니다. 직접 입력·실행을 시도한 뒤에만 내 파일과 Complete를 비교합니다.</a:t>
+              <a:t>오류 메시지를 숨기지 않고 같은 순서로 점검합니다.</a:t>
             </a:r>
           </a:p>
         </p:txBody>
@@ -45420,70 +47153,31 @@
               </a:defRPr>
             </a:pPr>
             <a:r>
-              <a:t>현재 단계 복구용 Complete    |    현재 폴더 ~/ros2_curri    |    현재 터미널</a:t>
-            </a:r>
-          </a:p>
-        </p:txBody>
-      </p:sp>
-      <p:sp>
-        <p:nvSpPr>
-          <p:cNvPr id="7" name="TextBox 6"/>
-          <p:cNvSpPr txBox="1"/>
-          <p:nvPr/>
-        </p:nvSpPr>
-        <p:spPr>
-          <a:xfrm>
-            <a:off x="713232" y="1664208"/>
-            <a:ext cx="10698480" cy="402336"/>
-          </a:xfrm>
-          <a:prstGeom prst="rect">
-            <a:avLst/>
-          </a:prstGeom>
-          <a:noFill/>
-        </p:spPr>
-        <p:txBody>
-          <a:bodyPr wrap="square" lIns="73152" rIns="73152" tIns="36576" bIns="36576">
-            <a:spAutoFit/>
-          </a:bodyPr>
-          <a:lstStyle/>
-          <a:p>
-            <a:pPr algn="ctr">
-              <a:spcAft>
-                <a:spcPts val="0"/>
-              </a:spcAft>
-              <a:defRPr sz="1800" b="1">
-                <a:solidFill>
-                  <a:srgbClr val="DB7E22"/>
-                </a:solidFill>
-                <a:latin typeface="Noto Sans CJK KR"/>
-              </a:defRPr>
-            </a:pPr>
-            <a:r>
-              <a:t>권장 순서: ① 내 오류를 확인  ② Complete와 diff  ③ 꼭 필요할 때만 backup 후 복사</a:t>
-            </a:r>
-          </a:p>
-        </p:txBody>
-      </p:sp>
-      <p:sp>
-        <p:nvSpPr>
-          <p:cNvPr id="8" name="Rounded Rectangle 7"/>
+              <a:t>현재 단계 오류 대응    |    현재 폴더 ~/ros2_curri/my_agv_ws    |    현재 터미널</a:t>
+            </a:r>
+          </a:p>
+        </p:txBody>
+      </p:sp>
+      <p:sp>
+        <p:nvSpPr>
+          <p:cNvPr id="7" name="Rounded Rectangle 6"/>
           <p:cNvSpPr/>
           <p:nvPr/>
         </p:nvSpPr>
         <p:spPr>
           <a:xfrm>
-            <a:off x="676656" y="2423160"/>
-            <a:ext cx="10881360" cy="2606040"/>
+            <a:off x="694944" y="1755648"/>
+            <a:ext cx="10972800" cy="1115568"/>
           </a:xfrm>
           <a:prstGeom prst="roundRect">
             <a:avLst/>
           </a:prstGeom>
           <a:solidFill>
-            <a:srgbClr val="1D232D"/>
+            <a:srgbClr val="FFF7F4"/>
           </a:solidFill>
           <a:ln>
             <a:solidFill>
-              <a:srgbClr val="1D232D"/>
+              <a:srgbClr val="EDBEB4"/>
             </a:solidFill>
           </a:ln>
         </p:spPr>
@@ -45502,52 +47196,232 @@
           </a:fontRef>
         </p:style>
         <p:txBody>
-          <a:bodyPr rtlCol="0" anchor="ctr" wrap="square" lIns="73152" rIns="73152" tIns="36576" bIns="36576"/>
-          <a:lstStyle/>
-          <a:p>
-            <a:pPr algn="l">
-              <a:spcAft>
-                <a:spcPts val="0"/>
-              </a:spcAft>
-              <a:defRPr sz="1400" b="0">
-                <a:solidFill>
-                  <a:srgbClr val="FFFFFF"/>
-                </a:solidFill>
-                <a:latin typeface="DejaVu Sans Mono"/>
-              </a:defRPr>
-            </a:pPr>
-            <a:r>
-              <a:t>cd ~/ros2_curri</a:t>
+          <a:bodyPr rtlCol="0" anchor="ctr"/>
+          <a:lstStyle/>
+          <a:p>
+            <a:pPr algn="ctr"/>
+          </a:p>
+        </p:txBody>
+      </p:sp>
+      <p:sp>
+        <p:nvSpPr>
+          <p:cNvPr id="8" name="TextBox 7"/>
+          <p:cNvSpPr txBox="1"/>
+          <p:nvPr/>
+        </p:nvSpPr>
+        <p:spPr>
+          <a:xfrm>
+            <a:off x="896112" y="1901952"/>
+            <a:ext cx="2926080" cy="274320"/>
+          </a:xfrm>
+          <a:prstGeom prst="rect">
+            <a:avLst/>
+          </a:prstGeom>
+          <a:noFill/>
+        </p:spPr>
+        <p:txBody>
+          <a:bodyPr wrap="square" lIns="73152" rIns="73152" tIns="36576" bIns="36576">
+            <a:spAutoFit/>
+          </a:bodyPr>
+          <a:lstStyle/>
+          <a:p>
+            <a:pPr algn="l">
+              <a:spcAft>
+                <a:spcPts val="0"/>
+              </a:spcAft>
+              <a:defRPr sz="1800" b="1">
+                <a:solidFill>
+                  <a:srgbClr val="BE3B3B"/>
+                </a:solidFill>
+                <a:latin typeface="Noto Sans CJK KR"/>
+              </a:defRPr>
+            </a:pPr>
+            <a:r>
+              <a:t>증상 1: 일부 노드 시작 실패</a:t>
+            </a:r>
+          </a:p>
+        </p:txBody>
+      </p:sp>
+      <p:sp>
+        <p:nvSpPr>
+          <p:cNvPr id="9" name="TextBox 8"/>
+          <p:cNvSpPr txBox="1"/>
+          <p:nvPr/>
+        </p:nvSpPr>
+        <p:spPr>
+          <a:xfrm>
+            <a:off x="3794760" y="1883664"/>
+            <a:ext cx="7543800" cy="621792"/>
+          </a:xfrm>
+          <a:prstGeom prst="rect">
+            <a:avLst/>
+          </a:prstGeom>
+          <a:noFill/>
+        </p:spPr>
+        <p:txBody>
+          <a:bodyPr wrap="square" lIns="73152" rIns="73152" tIns="36576" bIns="36576">
+            <a:spAutoFit/>
+          </a:bodyPr>
+          <a:lstStyle/>
+          <a:p>
+            <a:pPr algn="l">
+              <a:spcAft>
+                <a:spcPts val="0"/>
+              </a:spcAft>
+              <a:defRPr sz="1600" b="0">
+                <a:solidFill>
+                  <a:srgbClr val="122C4E"/>
+                </a:solidFill>
+                <a:latin typeface="Noto Sans CJK KR"/>
+              </a:defRPr>
+            </a:pPr>
+            <a:r>
+              <a:t>우선 확인: launch 순서·spawn 준비·package path를 확인한다.</a:t>
             </a:r>
             <a:br/>
             <a:r>
-              <a:t>diff -ru my_agv_ws/src blocks/F_integration/M21_launch_yaml_rosbag/complete/agv_ws/src || true</a:t>
+              <a:t>수정 후: ros2 launch agv_bringup agv_sim.launch.py --show-args</a:t>
+            </a:r>
+          </a:p>
+        </p:txBody>
+      </p:sp>
+      <p:sp>
+        <p:nvSpPr>
+          <p:cNvPr id="10" name="Rounded Rectangle 9"/>
+          <p:cNvSpPr/>
+          <p:nvPr/>
+        </p:nvSpPr>
+        <p:spPr>
+          <a:xfrm>
+            <a:off x="694944" y="3172968"/>
+            <a:ext cx="10972800" cy="1115568"/>
+          </a:xfrm>
+          <a:prstGeom prst="roundRect">
+            <a:avLst/>
+          </a:prstGeom>
+          <a:solidFill>
+            <a:srgbClr val="FFF7F4"/>
+          </a:solidFill>
+          <a:ln>
+            <a:solidFill>
+              <a:srgbClr val="EDBEB4"/>
+            </a:solidFill>
+          </a:ln>
+        </p:spPr>
+        <p:style>
+          <a:lnRef idx="1">
+            <a:schemeClr val="accent1"/>
+          </a:lnRef>
+          <a:fillRef idx="3">
+            <a:schemeClr val="accent1"/>
+          </a:fillRef>
+          <a:effectRef idx="2">
+            <a:schemeClr val="accent1"/>
+          </a:effectRef>
+          <a:fontRef idx="minor">
+            <a:schemeClr val="lt1"/>
+          </a:fontRef>
+        </p:style>
+        <p:txBody>
+          <a:bodyPr rtlCol="0" anchor="ctr"/>
+          <a:lstStyle/>
+          <a:p>
+            <a:pPr algn="ctr"/>
+          </a:p>
+        </p:txBody>
+      </p:sp>
+      <p:sp>
+        <p:nvSpPr>
+          <p:cNvPr id="11" name="TextBox 10"/>
+          <p:cNvSpPr txBox="1"/>
+          <p:nvPr/>
+        </p:nvSpPr>
+        <p:spPr>
+          <a:xfrm>
+            <a:off x="896112" y="3319272"/>
+            <a:ext cx="2926080" cy="274320"/>
+          </a:xfrm>
+          <a:prstGeom prst="rect">
+            <a:avLst/>
+          </a:prstGeom>
+          <a:noFill/>
+        </p:spPr>
+        <p:txBody>
+          <a:bodyPr wrap="square" lIns="73152" rIns="73152" tIns="36576" bIns="36576">
+            <a:spAutoFit/>
+          </a:bodyPr>
+          <a:lstStyle/>
+          <a:p>
+            <a:pPr algn="l">
+              <a:spcAft>
+                <a:spcPts val="0"/>
+              </a:spcAft>
+              <a:defRPr sz="1800" b="1">
+                <a:solidFill>
+                  <a:srgbClr val="BE3B3B"/>
+                </a:solidFill>
+                <a:latin typeface="Noto Sans CJK KR"/>
+              </a:defRPr>
+            </a:pPr>
+            <a:r>
+              <a:t>증상 2: YAML 값이 적용 안 됨</a:t>
+            </a:r>
+          </a:p>
+        </p:txBody>
+      </p:sp>
+      <p:sp>
+        <p:nvSpPr>
+          <p:cNvPr id="12" name="TextBox 11"/>
+          <p:cNvSpPr txBox="1"/>
+          <p:nvPr/>
+        </p:nvSpPr>
+        <p:spPr>
+          <a:xfrm>
+            <a:off x="3794760" y="3300984"/>
+            <a:ext cx="7543800" cy="621792"/>
+          </a:xfrm>
+          <a:prstGeom prst="rect">
+            <a:avLst/>
+          </a:prstGeom>
+          <a:noFill/>
+        </p:spPr>
+        <p:txBody>
+          <a:bodyPr wrap="square" lIns="73152" rIns="73152" tIns="36576" bIns="36576">
+            <a:spAutoFit/>
+          </a:bodyPr>
+          <a:lstStyle/>
+          <a:p>
+            <a:pPr algn="l">
+              <a:spcAft>
+                <a:spcPts val="0"/>
+              </a:spcAft>
+              <a:defRPr sz="1600" b="0">
+                <a:solidFill>
+                  <a:srgbClr val="122C4E"/>
+                </a:solidFill>
+                <a:latin typeface="Noto Sans CJK KR"/>
+              </a:defRPr>
+            </a:pPr>
+            <a:r>
+              <a:t>우선 확인: node name/namespace와 parameter key를 확인한다.</a:t>
             </a:r>
             <a:br/>
             <a:r>
-              <a:t>cp -a my_agv_ws/src my_agv_ws/src_before_M21</a:t>
-            </a:r>
-            <a:br/>
-            <a:r>
-              <a:t>cp -a blocks/F_integration/M21_launch_yaml_rosbag/complete/agv_ws/src/. my_agv_ws/src/</a:t>
-            </a:r>
-            <a:br/>
-            <a:r>
-              <a:t>cd my_agv_ws &amp;&amp; colcon build --symlink-install &amp;&amp; source install/setup.bash</a:t>
-            </a:r>
-          </a:p>
-        </p:txBody>
-      </p:sp>
-      <p:sp>
-        <p:nvSpPr>
-          <p:cNvPr id="9" name="TextBox 8"/>
-          <p:cNvSpPr txBox="1"/>
-          <p:nvPr/>
-        </p:nvSpPr>
-        <p:spPr>
-          <a:xfrm>
-            <a:off x="786384" y="5413248"/>
-            <a:ext cx="10424160" cy="429768"/>
+              <a:t>수정 후: ros2 launch agv_bringup agv_sim.launch.py --show-args</a:t>
+            </a:r>
+          </a:p>
+        </p:txBody>
+      </p:sp>
+      <p:sp>
+        <p:nvSpPr>
+          <p:cNvPr id="13" name="TextBox 12"/>
+          <p:cNvSpPr txBox="1"/>
+          <p:nvPr/>
+        </p:nvSpPr>
+        <p:spPr>
+          <a:xfrm>
+            <a:off x="822960" y="5102352"/>
+            <a:ext cx="10607040" cy="402336"/>
           </a:xfrm>
           <a:prstGeom prst="rect">
             <a:avLst/>
@@ -45564,15 +47438,15 @@
               <a:spcAft>
                 <a:spcPts val="0"/>
               </a:spcAft>
-              <a:defRPr sz="1700" b="1">
-                <a:solidFill>
-                  <a:srgbClr val="2A8B5A"/>
-                </a:solidFill>
-                <a:latin typeface="Noto Sans CJK KR"/>
-              </a:defRPr>
-            </a:pPr>
-            <a:r>
-              <a:t>복구 뒤에는 끝내지 말고, 내 파일과 Complete의 차이를 한 줄씩 설명한 뒤 다시 직접 입력해 봅니다.</a:t>
+              <a:defRPr sz="1800" b="1">
+                <a:solidFill>
+                  <a:srgbClr val="DB7E22"/>
+                </a:solidFill>
+                <a:latin typeface="Noto Sans CJK KR"/>
+              </a:defRPr>
+            </a:pPr>
+            <a:r>
+              <a:t>공통 순서: ① 현재 폴더 ② source ③ 파일 경로 ④ 이름/타입/단위 ⑤ build·source 후 재실행</a:t>
             </a:r>
           </a:p>
         </p:txBody>
@@ -45629,7 +47503,7 @@
               </a:defRPr>
             </a:pPr>
             <a:r>
-              <a:t>미니 실습: 값 하나를 바꾸고 결과를 비교한다</a:t>
+              <a:t>막혔을 때만: Complete를 복구용으로 사용한다</a:t>
             </a:r>
           </a:p>
         </p:txBody>
@@ -45668,7 +47542,7 @@
               </a:defRPr>
             </a:pPr>
             <a:r>
-              <a:t>정상 결과를 만든 뒤에는 한 번에 하나의 값만 바꿉니다.</a:t>
+              <a:t>이 슬라이드가 먼저가 아닙니다. 직접 입력·실행을 시도한 뒤에만 내 파일과 Complete를 비교합니다.</a:t>
             </a:r>
           </a:p>
         </p:txBody>
@@ -45804,31 +47678,70 @@
               </a:defRPr>
             </a:pPr>
             <a:r>
-              <a:t>현재 단계 미니 실습    |    현재 폴더 ~/ros2_curri/my_agv_ws    |    현재 터미널</a:t>
-            </a:r>
-          </a:p>
-        </p:txBody>
-      </p:sp>
-      <p:sp>
-        <p:nvSpPr>
-          <p:cNvPr id="7" name="Rounded Rectangle 6"/>
+              <a:t>현재 단계 복구용 Complete    |    현재 폴더 ~/ros2_curri    |    현재 터미널</a:t>
+            </a:r>
+          </a:p>
+        </p:txBody>
+      </p:sp>
+      <p:sp>
+        <p:nvSpPr>
+          <p:cNvPr id="7" name="TextBox 6"/>
+          <p:cNvSpPr txBox="1"/>
+          <p:nvPr/>
+        </p:nvSpPr>
+        <p:spPr>
+          <a:xfrm>
+            <a:off x="713232" y="1664208"/>
+            <a:ext cx="10698480" cy="402336"/>
+          </a:xfrm>
+          <a:prstGeom prst="rect">
+            <a:avLst/>
+          </a:prstGeom>
+          <a:noFill/>
+        </p:spPr>
+        <p:txBody>
+          <a:bodyPr wrap="square" lIns="73152" rIns="73152" tIns="36576" bIns="36576">
+            <a:spAutoFit/>
+          </a:bodyPr>
+          <a:lstStyle/>
+          <a:p>
+            <a:pPr algn="ctr">
+              <a:spcAft>
+                <a:spcPts val="0"/>
+              </a:spcAft>
+              <a:defRPr sz="1800" b="1">
+                <a:solidFill>
+                  <a:srgbClr val="DB7E22"/>
+                </a:solidFill>
+                <a:latin typeface="Noto Sans CJK KR"/>
+              </a:defRPr>
+            </a:pPr>
+            <a:r>
+              <a:t>권장 순서: ① 내 오류를 확인  ② Complete와 diff  ③ 꼭 필요할 때만 backup 후 복사</a:t>
+            </a:r>
+          </a:p>
+        </p:txBody>
+      </p:sp>
+      <p:sp>
+        <p:nvSpPr>
+          <p:cNvPr id="8" name="Rounded Rectangle 7"/>
           <p:cNvSpPr/>
           <p:nvPr/>
         </p:nvSpPr>
         <p:spPr>
           <a:xfrm>
-            <a:off x="749808" y="1874519"/>
-            <a:ext cx="10652760" cy="1993392"/>
+            <a:off x="676656" y="2423160"/>
+            <a:ext cx="10881360" cy="2606040"/>
           </a:xfrm>
           <a:prstGeom prst="roundRect">
             <a:avLst/>
           </a:prstGeom>
           <a:solidFill>
-            <a:srgbClr val="FFF8EB"/>
+            <a:srgbClr val="1D232D"/>
           </a:solidFill>
           <a:ln>
             <a:solidFill>
-              <a:srgbClr val="ECC680"/>
+              <a:srgbClr val="1D232D"/>
             </a:solidFill>
           </a:ln>
         </p:spPr>
@@ -45847,61 +47760,125 @@
           </a:fontRef>
         </p:style>
         <p:txBody>
-          <a:bodyPr rtlCol="0" anchor="ctr" wrap="square" lIns="73152" rIns="73152" tIns="36576" bIns="36576"/>
+          <a:bodyPr rtlCol="0" anchor="ctr" wrap="square" lIns="109728" rIns="109728" tIns="73152" bIns="73152"/>
+          <a:lstStyle/>
+          <a:p>
+            <a:pPr algn="l">
+              <a:spcAft>
+                <a:spcPts val="0"/>
+              </a:spcAft>
+              <a:defRPr sz="1400" b="0">
+                <a:solidFill>
+                  <a:srgbClr val="FFFFFF"/>
+                </a:solidFill>
+                <a:latin typeface="DejaVu Sans Mono"/>
+              </a:defRPr>
+            </a:pPr>
+            <a:r>
+              <a:t>cd ~/ros2_curri</a:t>
+            </a:r>
+          </a:p>
+          <a:p>
+            <a:pPr algn="l">
+              <a:spcAft>
+                <a:spcPts val="0"/>
+              </a:spcAft>
+              <a:defRPr sz="1400" b="0">
+                <a:solidFill>
+                  <a:srgbClr val="FFFFFF"/>
+                </a:solidFill>
+                <a:latin typeface="DejaVu Sans Mono"/>
+              </a:defRPr>
+            </a:pPr>
+            <a:r>
+              <a:t>diff -ru my_agv_ws/src blocks/F_integration/M21_launch_yaml_rosbag/complete/agv_ws/src || true</a:t>
+            </a:r>
+          </a:p>
+          <a:p>
+            <a:pPr algn="l">
+              <a:spcAft>
+                <a:spcPts val="0"/>
+              </a:spcAft>
+              <a:defRPr sz="1400" b="0">
+                <a:solidFill>
+                  <a:srgbClr val="FFFFFF"/>
+                </a:solidFill>
+                <a:latin typeface="DejaVu Sans Mono"/>
+              </a:defRPr>
+            </a:pPr>
+            <a:r>
+              <a:t>cp -a my_agv_ws/src my_agv_ws/src_before_M21</a:t>
+            </a:r>
+          </a:p>
+          <a:p>
+            <a:pPr algn="l">
+              <a:spcAft>
+                <a:spcPts val="0"/>
+              </a:spcAft>
+              <a:defRPr sz="1400" b="0">
+                <a:solidFill>
+                  <a:srgbClr val="FFFFFF"/>
+                </a:solidFill>
+                <a:latin typeface="DejaVu Sans Mono"/>
+              </a:defRPr>
+            </a:pPr>
+            <a:r>
+              <a:t>cp -a blocks/F_integration/M21_launch_yaml_rosbag/complete/agv_ws/src/. my_agv_ws/src/</a:t>
+            </a:r>
+          </a:p>
+          <a:p>
+            <a:pPr algn="l">
+              <a:spcAft>
+                <a:spcPts val="0"/>
+              </a:spcAft>
+              <a:defRPr sz="1400" b="0">
+                <a:solidFill>
+                  <a:srgbClr val="FFFFFF"/>
+                </a:solidFill>
+                <a:latin typeface="DejaVu Sans Mono"/>
+              </a:defRPr>
+            </a:pPr>
+            <a:r>
+              <a:t>cd my_agv_ws &amp;&amp; colcon build --symlink-install &amp;&amp; source install/setup.bash</a:t>
+            </a:r>
+          </a:p>
+        </p:txBody>
+      </p:sp>
+      <p:sp>
+        <p:nvSpPr>
+          <p:cNvPr id="9" name="TextBox 8"/>
+          <p:cNvSpPr txBox="1"/>
+          <p:nvPr/>
+        </p:nvSpPr>
+        <p:spPr>
+          <a:xfrm>
+            <a:off x="786384" y="5413248"/>
+            <a:ext cx="10424160" cy="429768"/>
+          </a:xfrm>
+          <a:prstGeom prst="rect">
+            <a:avLst/>
+          </a:prstGeom>
+          <a:noFill/>
+        </p:spPr>
+        <p:txBody>
+          <a:bodyPr wrap="square" lIns="73152" rIns="73152" tIns="36576" bIns="36576">
+            <a:spAutoFit/>
+          </a:bodyPr>
           <a:lstStyle/>
           <a:p>
             <a:pPr algn="ctr">
               <a:spcAft>
                 <a:spcPts val="0"/>
               </a:spcAft>
-              <a:defRPr sz="2300" b="1">
-                <a:solidFill>
-                  <a:srgbClr val="122C4E"/>
-                </a:solidFill>
-                <a:latin typeface="Noto Sans CJK KR"/>
-              </a:defRPr>
-            </a:pPr>
-            <a:r>
-              <a:t>mission.yaml stop_distance를 0.50→0.70으로 바꾼 뒤 재실행하고 ros2 param get으로 적용값을 확인한다.</a:t>
-            </a:r>
-          </a:p>
-        </p:txBody>
-      </p:sp>
-      <p:sp>
-        <p:nvSpPr>
-          <p:cNvPr id="8" name="TextBox 7"/>
-          <p:cNvSpPr txBox="1"/>
-          <p:nvPr/>
-        </p:nvSpPr>
-        <p:spPr>
-          <a:xfrm>
-            <a:off x="877824" y="4590288"/>
-            <a:ext cx="10241280" cy="594360"/>
-          </a:xfrm>
-          <a:prstGeom prst="rect">
-            <a:avLst/>
-          </a:prstGeom>
-          <a:noFill/>
-        </p:spPr>
-        <p:txBody>
-          <a:bodyPr wrap="square" lIns="73152" rIns="73152" tIns="36576" bIns="36576">
-            <a:spAutoFit/>
-          </a:bodyPr>
-          <a:lstStyle/>
-          <a:p>
-            <a:pPr algn="ctr">
-              <a:spcAft>
-                <a:spcPts val="0"/>
-              </a:spcAft>
-              <a:defRPr sz="1900" b="1">
-                <a:solidFill>
-                  <a:srgbClr val="DB7E22"/>
-                </a:solidFill>
-                <a:latin typeface="Noto Sans CJK KR"/>
-              </a:defRPr>
-            </a:pPr>
-            <a:r>
-              <a:t>기록할 것: 바꾼 값(단위) · 기대한 변화 · 실제 출력/화면 · 원래 값으로 되돌린 결과</a:t>
+              <a:defRPr sz="1700" b="1">
+                <a:solidFill>
+                  <a:srgbClr val="2A8B5A"/>
+                </a:solidFill>
+                <a:latin typeface="Noto Sans CJK KR"/>
+              </a:defRPr>
+            </a:pPr>
+            <a:r>
+              <a:t>복구 뒤에는 끝내지 말고, 내 파일과 Complete의 차이를 한 줄씩 설명한 뒤 다시 직접 입력해 봅니다.</a:t>
             </a:r>
           </a:p>
         </p:txBody>
@@ -45958,7 +47935,7 @@
               </a:defRPr>
             </a:pPr>
             <a:r>
-              <a:t>rosbag2 재생 절차</a:t>
+              <a:t>미니 실습: 값 하나를 바꾸고 결과를 비교한다</a:t>
             </a:r>
           </a:p>
         </p:txBody>
@@ -45997,7 +47974,7 @@
               </a:defRPr>
             </a:pPr>
             <a:r>
-              <a:t>통합 단계에서 놓치기 쉬운 실행·운영 조건을 정리합니다.</a:t>
+              <a:t>정상 결과를 만든 뒤에는 한 번에 하나의 값만 바꿉니다.</a:t>
             </a:r>
           </a:p>
         </p:txBody>
@@ -46133,7 +48110,7 @@
               </a:defRPr>
             </a:pPr>
             <a:r>
-              <a:t>현재 단계 통합 보강    |    현재 폴더 ~/ros2_curri/my_agv_ws    |    현재 터미널</a:t>
+              <a:t>현재 단계 미니 실습    |    현재 폴더 ~/ros2_curri/my_agv_ws    |    현재 터미널</a:t>
             </a:r>
           </a:p>
         </p:txBody>
@@ -46146,18 +48123,18 @@
         </p:nvSpPr>
         <p:spPr>
           <a:xfrm>
-            <a:off x="676656" y="1691640"/>
-            <a:ext cx="10972800" cy="4434840"/>
+            <a:off x="749808" y="1874519"/>
+            <a:ext cx="10652760" cy="1993392"/>
           </a:xfrm>
           <a:prstGeom prst="roundRect">
             <a:avLst/>
           </a:prstGeom>
           <a:solidFill>
-            <a:srgbClr val="F4F7FB"/>
+            <a:srgbClr val="FFF8EB"/>
           </a:solidFill>
           <a:ln>
             <a:solidFill>
-              <a:srgbClr val="D2DEEC"/>
+              <a:srgbClr val="ECC680"/>
             </a:solidFill>
           </a:ln>
         </p:spPr>
@@ -46176,10 +48153,23 @@
           </a:fontRef>
         </p:style>
         <p:txBody>
-          <a:bodyPr rtlCol="0" anchor="ctr"/>
-          <a:lstStyle/>
-          <a:p>
-            <a:pPr algn="ctr"/>
+          <a:bodyPr rtlCol="0" anchor="ctr" wrap="square" lIns="73152" rIns="73152" tIns="36576" bIns="36576"/>
+          <a:lstStyle/>
+          <a:p>
+            <a:pPr algn="ctr">
+              <a:spcAft>
+                <a:spcPts val="0"/>
+              </a:spcAft>
+              <a:defRPr sz="2300" b="1">
+                <a:solidFill>
+                  <a:srgbClr val="122C4E"/>
+                </a:solidFill>
+                <a:latin typeface="Noto Sans CJK KR"/>
+              </a:defRPr>
+            </a:pPr>
+            <a:r>
+              <a:t>mission.yaml stop_distance를 0.50→0.70으로 바꾼 뒤 재실행하고 ros2 param get으로 적용값을 확인한다.</a:t>
+            </a:r>
           </a:p>
         </p:txBody>
       </p:sp>
@@ -46191,81 +48181,33 @@
         </p:nvSpPr>
         <p:spPr>
           <a:xfrm>
-            <a:off x="914400" y="1993392"/>
-            <a:ext cx="10332720" cy="3749039"/>
-          </a:xfrm>
-          <a:prstGeom prst="rect">
-            <a:avLst/>
-          </a:prstGeom>
-          <a:noFill/>
-        </p:spPr>
-        <p:txBody>
-          <a:bodyPr wrap="square" lIns="109728" rIns="109728">
-            <a:spAutoFit/>
-          </a:bodyPr>
-          <a:lstStyle/>
-          <a:p>
-            <a:pPr>
-              <a:spcAft>
-                <a:spcPts val="800"/>
-              </a:spcAft>
-              <a:defRPr sz="1900">
-                <a:solidFill>
-                  <a:srgbClr val="122C4E"/>
-                </a:solidFill>
-                <a:latin typeface="Noto Sans CJK KR"/>
-              </a:defRPr>
-            </a:pPr>
-            <a:r>
-              <a:t>• 기록 종료 뒤 `ros2 bag info ~/agv_bag_01`로 topic과 duration을 먼저 확인한다.</a:t>
-            </a:r>
-          </a:p>
-          <a:p>
-            <a:pPr>
-              <a:spcAft>
-                <a:spcPts val="800"/>
-              </a:spcAft>
-              <a:defRPr sz="1900">
-                <a:solidFill>
-                  <a:srgbClr val="122C4E"/>
-                </a:solidFill>
-                <a:latin typeface="Noto Sans CJK KR"/>
-              </a:defRPr>
-            </a:pPr>
-            <a:r>
-              <a:t>• Gazebo가 없는 terminal에서 processing node를 source·실행한다.</a:t>
-            </a:r>
-          </a:p>
-          <a:p>
-            <a:pPr>
-              <a:spcAft>
-                <a:spcPts val="800"/>
-              </a:spcAft>
-              <a:defRPr sz="1900">
-                <a:solidFill>
-                  <a:srgbClr val="122C4E"/>
-                </a:solidFill>
-                <a:latin typeface="Noto Sans CJK KR"/>
-              </a:defRPr>
-            </a:pPr>
-            <a:r>
-              <a:t>• `ros2 bag play ~/agv_bag_01 --clock`으로 sensor 입력을 다시 공급한다.</a:t>
-            </a:r>
-          </a:p>
-          <a:p>
-            <a:pPr>
-              <a:spcAft>
-                <a:spcPts val="800"/>
-              </a:spcAft>
-              <a:defRPr sz="1900">
-                <a:solidFill>
-                  <a:srgbClr val="122C4E"/>
-                </a:solidFill>
-                <a:latin typeface="Noto Sans CJK KR"/>
-              </a:defRPr>
-            </a:pPr>
-            <a:r>
-              <a:t>• use_sim_time=true 노드는 /clock을 받아 같은 시간축을 사용한다.</a:t>
+            <a:off x="877824" y="4590288"/>
+            <a:ext cx="10241280" cy="594360"/>
+          </a:xfrm>
+          <a:prstGeom prst="rect">
+            <a:avLst/>
+          </a:prstGeom>
+          <a:noFill/>
+        </p:spPr>
+        <p:txBody>
+          <a:bodyPr wrap="square" lIns="73152" rIns="73152" tIns="36576" bIns="36576">
+            <a:spAutoFit/>
+          </a:bodyPr>
+          <a:lstStyle/>
+          <a:p>
+            <a:pPr algn="ctr">
+              <a:spcAft>
+                <a:spcPts val="0"/>
+              </a:spcAft>
+              <a:defRPr sz="1900" b="1">
+                <a:solidFill>
+                  <a:srgbClr val="DB7E22"/>
+                </a:solidFill>
+                <a:latin typeface="Noto Sans CJK KR"/>
+              </a:defRPr>
+            </a:pPr>
+            <a:r>
+              <a:t>기록할 것: 바꾼 값(단위) · 기대한 변화 · 실제 출력/화면 · 원래 값으로 되돌린 결과</a:t>
             </a:r>
           </a:p>
         </p:txBody>
@@ -46872,7 +48814,7 @@
               </a:defRPr>
             </a:pPr>
             <a:r>
-              <a:t>증상별 디버깅 도구</a:t>
+              <a:t>rosbag2 재생 절차</a:t>
             </a:r>
           </a:p>
         </p:txBody>
@@ -47131,7 +49073,7 @@
               </a:defRPr>
             </a:pPr>
             <a:r>
-              <a:t>• node 미실행: ros2 node list</a:t>
+              <a:t>• 기록 종료 뒤 `ros2 bag info ~/agv_bag_01`로 topic과 duration을 먼저 확인한다.</a:t>
             </a:r>
           </a:p>
           <a:p>
@@ -47147,7 +49089,7 @@
               </a:defRPr>
             </a:pPr>
             <a:r>
-              <a:t>• topic/타입/QoS: ros2 topic info --verbose</a:t>
+              <a:t>• Gazebo가 없는 terminal에서 processing node를 source·실행한다.</a:t>
             </a:r>
           </a:p>
           <a:p>
@@ -47163,7 +49105,7 @@
               </a:defRPr>
             </a:pPr>
             <a:r>
-              <a:t>• parameter: ros2 param get/list</a:t>
+              <a:t>• `ros2 bag play ~/agv_bag_01 --clock`으로 sensor 입력을 다시 공급한다.</a:t>
             </a:r>
           </a:p>
           <a:p>
@@ -47179,23 +49121,7 @@
               </a:defRPr>
             </a:pPr>
             <a:r>
-              <a:t>• frame: tf2_tools view_frames와 RViz2</a:t>
-            </a:r>
-          </a:p>
-          <a:p>
-            <a:pPr>
-              <a:spcAft>
-                <a:spcPts val="800"/>
-              </a:spcAft>
-              <a:defRPr sz="1900">
-                <a:solidFill>
-                  <a:srgbClr val="122C4E"/>
-                </a:solidFill>
-                <a:latin typeface="Noto Sans CJK KR"/>
-              </a:defRPr>
-            </a:pPr>
-            <a:r>
-              <a:t>• 시뮬레이터: Gazebo GUI와 bridge log</a:t>
+              <a:t>• use_sim_time=true 노드는 /clock을 받아 같은 시간축을 사용한다.</a:t>
             </a:r>
           </a:p>
         </p:txBody>
@@ -47252,7 +49178,7 @@
               </a:defRPr>
             </a:pPr>
             <a:r>
-              <a:t>내 프로젝트 체크포인트를 저장하고 다음 모듈로 넘긴다</a:t>
+              <a:t>증상별 디버깅 도구</a:t>
             </a:r>
           </a:p>
         </p:txBody>
@@ -47291,7 +49217,7 @@
               </a:defRPr>
             </a:pPr>
             <a:r>
-              <a:t>Complete는 복구용 비교 기준이고, 다음 단계는 내가 직접 만든 workspace에서 계속합니다.</a:t>
+              <a:t>통합 단계에서 놓치기 쉬운 실행·운영 조건을 정리합니다.</a:t>
             </a:r>
           </a:p>
         </p:txBody>
@@ -47427,7 +49353,7 @@
               </a:defRPr>
             </a:pPr>
             <a:r>
-              <a:t>현재 단계 체크포인트    |    현재 폴더 ~/ros2_curri/my_agv_ws    |    현재 터미널</a:t>
+              <a:t>현재 단계 통합 보강    |    현재 폴더 ~/ros2_curri/my_agv_ws    |    현재 터미널</a:t>
             </a:r>
           </a:p>
         </p:txBody>
@@ -47440,8 +49366,8 @@
         </p:nvSpPr>
         <p:spPr>
           <a:xfrm>
-            <a:off x="685800" y="1737360"/>
-            <a:ext cx="10972800" cy="3611880"/>
+            <a:off x="676656" y="1691640"/>
+            <a:ext cx="10972800" cy="4434840"/>
           </a:xfrm>
           <a:prstGeom prst="roundRect">
             <a:avLst/>
@@ -47451,7 +49377,7 @@
           </a:solidFill>
           <a:ln>
             <a:solidFill>
-              <a:srgbClr val="D2DCE8"/>
+              <a:srgbClr val="D2DEEC"/>
             </a:solidFill>
           </a:ln>
         </p:spPr>
@@ -47485,8 +49411,8 @@
         </p:nvSpPr>
         <p:spPr>
           <a:xfrm>
-            <a:off x="896112" y="1993392"/>
-            <a:ext cx="10332720" cy="2971800"/>
+            <a:off x="914400" y="1993392"/>
+            <a:ext cx="10332720" cy="3749039"/>
           </a:xfrm>
           <a:prstGeom prst="rect">
             <a:avLst/>
@@ -47503,7 +49429,7 @@
               <a:spcAft>
                 <a:spcPts val="800"/>
               </a:spcAft>
-              <a:defRPr sz="1800">
+              <a:defRPr sz="1900">
                 <a:solidFill>
                   <a:srgbClr val="122C4E"/>
                 </a:solidFill>
@@ -47511,7 +49437,7 @@
               </a:defRPr>
             </a:pPr>
             <a:r>
-              <a:t>• □ 완료 화면: 한 launch 명령·YAML parameter·rosbag record/replay 명령을 설명하고 확인한다.</a:t>
+              <a:t>• node 미실행: ros2 node list</a:t>
             </a:r>
           </a:p>
           <a:p>
@@ -47519,7 +49445,7 @@
               <a:spcAft>
                 <a:spcPts val="800"/>
               </a:spcAft>
-              <a:defRPr sz="1800">
+              <a:defRPr sz="1900">
                 <a:solidFill>
                   <a:srgbClr val="122C4E"/>
                 </a:solidFill>
@@ -47527,7 +49453,7 @@
               </a:defRPr>
             </a:pPr>
             <a:r>
-              <a:t>• □ 막혔을 때 비교할 Complete: blocks/F_integration/M21_launch_yaml_rosbag/complete/</a:t>
+              <a:t>• topic/타입/QoS: ros2 topic info --verbose</a:t>
             </a:r>
           </a:p>
           <a:p>
@@ -47535,7 +49461,7 @@
               <a:spcAft>
                 <a:spcPts val="800"/>
               </a:spcAft>
-              <a:defRPr sz="1800">
+              <a:defRPr sz="1900">
                 <a:solidFill>
                   <a:srgbClr val="122C4E"/>
                 </a:solidFill>
@@ -47543,7 +49469,7 @@
               </a:defRPr>
             </a:pPr>
             <a:r>
-              <a:t>• □ 정상 로그·캡처: logs/validation.log, screenshots/validation_terminal.png</a:t>
+              <a:t>• parameter: ros2 param get/list</a:t>
             </a:r>
           </a:p>
           <a:p>
@@ -47551,7 +49477,7 @@
               <a:spcAft>
                 <a:spcPts val="800"/>
               </a:spcAft>
-              <a:defRPr sz="1800">
+              <a:defRPr sz="1900">
                 <a:solidFill>
                   <a:srgbClr val="122C4E"/>
                 </a:solidFill>
@@ -47559,7 +49485,7 @@
               </a:defRPr>
             </a:pPr>
             <a:r>
-              <a:t>• □ 버전 식별: CHECKSUM_or_TAG.txt의 SHA-256 manifest</a:t>
+              <a:t>• frame: tf2_tools view_frames와 RViz2</a:t>
             </a:r>
           </a:p>
           <a:p>
@@ -47567,7 +49493,7 @@
               <a:spcAft>
                 <a:spcPts val="800"/>
               </a:spcAft>
-              <a:defRPr sz="1800">
+              <a:defRPr sz="1900">
                 <a:solidFill>
                   <a:srgbClr val="122C4E"/>
                 </a:solidFill>
@@ -47575,46 +49501,7 @@
               </a:defRPr>
             </a:pPr>
             <a:r>
-              <a:t>• □ 다음 시작 조건: M22 final mission</a:t>
-            </a:r>
-          </a:p>
-        </p:txBody>
-      </p:sp>
-      <p:sp>
-        <p:nvSpPr>
-          <p:cNvPr id="9" name="TextBox 8"/>
-          <p:cNvSpPr txBox="1"/>
-          <p:nvPr/>
-        </p:nvSpPr>
-        <p:spPr>
-          <a:xfrm>
-            <a:off x="868680" y="5596128"/>
-            <a:ext cx="10515600" cy="338328"/>
-          </a:xfrm>
-          <a:prstGeom prst="rect">
-            <a:avLst/>
-          </a:prstGeom>
-          <a:noFill/>
-        </p:spPr>
-        <p:txBody>
-          <a:bodyPr wrap="square" lIns="73152" rIns="73152" tIns="36576" bIns="36576">
-            <a:spAutoFit/>
-          </a:bodyPr>
-          <a:lstStyle/>
-          <a:p>
-            <a:pPr algn="ctr">
-              <a:spcAft>
-                <a:spcPts val="0"/>
-              </a:spcAft>
-              <a:defRPr sz="1700" b="1">
-                <a:solidFill>
-                  <a:srgbClr val="2A8B5A"/>
-                </a:solidFill>
-                <a:latin typeface="Noto Sans CJK KR"/>
-              </a:defRPr>
-            </a:pPr>
-            <a:r>
-              <a:t>다음 모듈을 시작하기 전, 내 src의 변경사항을 저장하고 현재 완료 조건을 다시 확인합니다.</a:t>
+              <a:t>• 시뮬레이터: Gazebo GUI와 bridge log</a:t>
             </a:r>
           </a:p>
         </p:txBody>
@@ -47628,6 +49515,425 @@
 </file>
 
 <file path=ppt/slides/slide72.xml><?xml version="1.0" encoding="utf-8"?>
+<p:sld xmlns:a="http://schemas.openxmlformats.org/drawingml/2006/main" xmlns:p="http://schemas.openxmlformats.org/presentationml/2006/main" xmlns:r="http://schemas.openxmlformats.org/officeDocument/2006/relationships">
+  <p:cSld>
+    <p:spTree>
+      <p:nvGrpSpPr>
+        <p:cNvPr id="1" name=""/>
+        <p:cNvGrpSpPr/>
+        <p:nvPr/>
+      </p:nvGrpSpPr>
+      <p:grpSpPr/>
+      <p:sp>
+        <p:nvSpPr>
+          <p:cNvPr id="2" name="TextBox 1"/>
+          <p:cNvSpPr txBox="1"/>
+          <p:nvPr/>
+        </p:nvSpPr>
+        <p:spPr>
+          <a:xfrm>
+            <a:off x="566928" y="347472"/>
+            <a:ext cx="10881360" cy="438912"/>
+          </a:xfrm>
+          <a:prstGeom prst="rect">
+            <a:avLst/>
+          </a:prstGeom>
+          <a:noFill/>
+        </p:spPr>
+        <p:txBody>
+          <a:bodyPr wrap="square" lIns="73152" rIns="73152" tIns="36576" bIns="36576">
+            <a:spAutoFit/>
+          </a:bodyPr>
+          <a:lstStyle/>
+          <a:p>
+            <a:pPr algn="l">
+              <a:spcAft>
+                <a:spcPts val="0"/>
+              </a:spcAft>
+              <a:defRPr sz="3200" b="1">
+                <a:solidFill>
+                  <a:srgbClr val="122C4E"/>
+                </a:solidFill>
+                <a:latin typeface="Noto Sans CJK KR"/>
+              </a:defRPr>
+            </a:pPr>
+            <a:r>
+              <a:t>내 프로젝트 체크포인트를 저장하고 다음 모듈로 넘긴다</a:t>
+            </a:r>
+          </a:p>
+        </p:txBody>
+      </p:sp>
+      <p:sp>
+        <p:nvSpPr>
+          <p:cNvPr id="3" name="TextBox 2"/>
+          <p:cNvSpPr txBox="1"/>
+          <p:nvPr/>
+        </p:nvSpPr>
+        <p:spPr>
+          <a:xfrm>
+            <a:off x="603504" y="859536"/>
+            <a:ext cx="10698480" cy="292608"/>
+          </a:xfrm>
+          <a:prstGeom prst="rect">
+            <a:avLst/>
+          </a:prstGeom>
+          <a:noFill/>
+        </p:spPr>
+        <p:txBody>
+          <a:bodyPr wrap="square" lIns="73152" rIns="73152" tIns="36576" bIns="36576">
+            <a:spAutoFit/>
+          </a:bodyPr>
+          <a:lstStyle/>
+          <a:p>
+            <a:pPr algn="l">
+              <a:spcAft>
+                <a:spcPts val="0"/>
+              </a:spcAft>
+              <a:defRPr sz="1700" b="0">
+                <a:solidFill>
+                  <a:srgbClr val="5C6672"/>
+                </a:solidFill>
+                <a:latin typeface="Noto Sans CJK KR"/>
+              </a:defRPr>
+            </a:pPr>
+            <a:r>
+              <a:t>Complete는 복구용 비교 기준이고, 다음 단계는 내가 직접 만든 workspace에서 계속합니다.</a:t>
+            </a:r>
+          </a:p>
+        </p:txBody>
+      </p:sp>
+      <p:sp>
+        <p:nvSpPr>
+          <p:cNvPr id="4" name="TextBox 3"/>
+          <p:cNvSpPr txBox="1"/>
+          <p:nvPr/>
+        </p:nvSpPr>
+        <p:spPr>
+          <a:xfrm>
+            <a:off x="530352" y="6510528"/>
+            <a:ext cx="7772400" cy="201168"/>
+          </a:xfrm>
+          <a:prstGeom prst="rect">
+            <a:avLst/>
+          </a:prstGeom>
+          <a:noFill/>
+        </p:spPr>
+        <p:txBody>
+          <a:bodyPr wrap="square" lIns="73152" rIns="73152" tIns="36576" bIns="36576">
+            <a:spAutoFit/>
+          </a:bodyPr>
+          <a:lstStyle/>
+          <a:p>
+            <a:pPr algn="l">
+              <a:spcAft>
+                <a:spcPts val="0"/>
+              </a:spcAft>
+              <a:defRPr sz="900" b="0">
+                <a:solidFill>
+                  <a:srgbClr val="5C6672"/>
+                </a:solidFill>
+                <a:latin typeface="Noto Sans CJK KR"/>
+              </a:defRPr>
+            </a:pPr>
+            <a:r>
+              <a:t>ROS 2 기반 AGV End-to-End 개발 커리큘럼 · M21 · Block F</a:t>
+            </a:r>
+          </a:p>
+        </p:txBody>
+      </p:sp>
+      <p:sp>
+        <p:nvSpPr>
+          <p:cNvPr id="5" name="TextBox 4"/>
+          <p:cNvSpPr txBox="1"/>
+          <p:nvPr/>
+        </p:nvSpPr>
+        <p:spPr>
+          <a:xfrm>
+            <a:off x="9144000" y="6510528"/>
+            <a:ext cx="2468880" cy="201168"/>
+          </a:xfrm>
+          <a:prstGeom prst="rect">
+            <a:avLst/>
+          </a:prstGeom>
+          <a:noFill/>
+        </p:spPr>
+        <p:txBody>
+          <a:bodyPr wrap="square" lIns="73152" rIns="73152" tIns="36576" bIns="36576">
+            <a:spAutoFit/>
+          </a:bodyPr>
+          <a:lstStyle/>
+          <a:p>
+            <a:pPr algn="r">
+              <a:spcAft>
+                <a:spcPts val="0"/>
+              </a:spcAft>
+              <a:defRPr sz="1000" b="0">
+                <a:solidFill>
+                  <a:srgbClr val="5C6672"/>
+                </a:solidFill>
+                <a:latin typeface="Noto Sans CJK KR"/>
+              </a:defRPr>
+            </a:pPr>
+            <a:r>
+              <a:t>명령·파일 경로는 슬라이드에서 복사 가능</a:t>
+            </a:r>
+          </a:p>
+        </p:txBody>
+      </p:sp>
+      <p:sp>
+        <p:nvSpPr>
+          <p:cNvPr id="6" name="Rectangle 5"/>
+          <p:cNvSpPr/>
+          <p:nvPr/>
+        </p:nvSpPr>
+        <p:spPr>
+          <a:xfrm>
+            <a:off x="566928" y="1188720"/>
+            <a:ext cx="11064240" cy="347472"/>
+          </a:xfrm>
+          <a:prstGeom prst="rect">
+            <a:avLst/>
+          </a:prstGeom>
+          <a:solidFill>
+            <a:srgbClr val="F4F7FB"/>
+          </a:solidFill>
+          <a:ln>
+            <a:solidFill>
+              <a:srgbClr val="F4F7FB"/>
+            </a:solidFill>
+          </a:ln>
+        </p:spPr>
+        <p:style>
+          <a:lnRef idx="1">
+            <a:schemeClr val="accent1"/>
+          </a:lnRef>
+          <a:fillRef idx="3">
+            <a:schemeClr val="accent1"/>
+          </a:fillRef>
+          <a:effectRef idx="2">
+            <a:schemeClr val="accent1"/>
+          </a:effectRef>
+          <a:fontRef idx="minor">
+            <a:schemeClr val="lt1"/>
+          </a:fontRef>
+        </p:style>
+        <p:txBody>
+          <a:bodyPr rtlCol="0" anchor="ctr" wrap="square" lIns="73152" rIns="73152" tIns="36576" bIns="36576"/>
+          <a:lstStyle/>
+          <a:p>
+            <a:pPr algn="l">
+              <a:spcAft>
+                <a:spcPts val="0"/>
+              </a:spcAft>
+              <a:defRPr sz="1300" b="1">
+                <a:solidFill>
+                  <a:srgbClr val="122C4E"/>
+                </a:solidFill>
+                <a:latin typeface="Noto Sans CJK KR"/>
+              </a:defRPr>
+            </a:pPr>
+            <a:r>
+              <a:t>현재 단계 체크포인트    |    현재 폴더 ~/ros2_curri/my_agv_ws    |    현재 터미널</a:t>
+            </a:r>
+          </a:p>
+        </p:txBody>
+      </p:sp>
+      <p:sp>
+        <p:nvSpPr>
+          <p:cNvPr id="7" name="Rounded Rectangle 6"/>
+          <p:cNvSpPr/>
+          <p:nvPr/>
+        </p:nvSpPr>
+        <p:spPr>
+          <a:xfrm>
+            <a:off x="685800" y="1737360"/>
+            <a:ext cx="10972800" cy="3611880"/>
+          </a:xfrm>
+          <a:prstGeom prst="roundRect">
+            <a:avLst/>
+          </a:prstGeom>
+          <a:solidFill>
+            <a:srgbClr val="F4F7FB"/>
+          </a:solidFill>
+          <a:ln>
+            <a:solidFill>
+              <a:srgbClr val="D2DCE8"/>
+            </a:solidFill>
+          </a:ln>
+        </p:spPr>
+        <p:style>
+          <a:lnRef idx="1">
+            <a:schemeClr val="accent1"/>
+          </a:lnRef>
+          <a:fillRef idx="3">
+            <a:schemeClr val="accent1"/>
+          </a:fillRef>
+          <a:effectRef idx="2">
+            <a:schemeClr val="accent1"/>
+          </a:effectRef>
+          <a:fontRef idx="minor">
+            <a:schemeClr val="lt1"/>
+          </a:fontRef>
+        </p:style>
+        <p:txBody>
+          <a:bodyPr rtlCol="0" anchor="ctr"/>
+          <a:lstStyle/>
+          <a:p>
+            <a:pPr algn="ctr"/>
+          </a:p>
+        </p:txBody>
+      </p:sp>
+      <p:sp>
+        <p:nvSpPr>
+          <p:cNvPr id="8" name="TextBox 7"/>
+          <p:cNvSpPr txBox="1"/>
+          <p:nvPr/>
+        </p:nvSpPr>
+        <p:spPr>
+          <a:xfrm>
+            <a:off x="896112" y="1993392"/>
+            <a:ext cx="10332720" cy="2971800"/>
+          </a:xfrm>
+          <a:prstGeom prst="rect">
+            <a:avLst/>
+          </a:prstGeom>
+          <a:noFill/>
+        </p:spPr>
+        <p:txBody>
+          <a:bodyPr wrap="square" lIns="109728" rIns="109728">
+            <a:spAutoFit/>
+          </a:bodyPr>
+          <a:lstStyle/>
+          <a:p>
+            <a:pPr>
+              <a:spcAft>
+                <a:spcPts val="800"/>
+              </a:spcAft>
+              <a:defRPr sz="1800">
+                <a:solidFill>
+                  <a:srgbClr val="122C4E"/>
+                </a:solidFill>
+                <a:latin typeface="Noto Sans CJK KR"/>
+              </a:defRPr>
+            </a:pPr>
+            <a:r>
+              <a:t>• □ 완료 화면: 한 launch 명령·YAML parameter·rosbag record/replay 명령을 설명하고 확인한다.</a:t>
+            </a:r>
+          </a:p>
+          <a:p>
+            <a:pPr>
+              <a:spcAft>
+                <a:spcPts val="800"/>
+              </a:spcAft>
+              <a:defRPr sz="1800">
+                <a:solidFill>
+                  <a:srgbClr val="122C4E"/>
+                </a:solidFill>
+                <a:latin typeface="Noto Sans CJK KR"/>
+              </a:defRPr>
+            </a:pPr>
+            <a:r>
+              <a:t>• □ 막혔을 때 비교할 Complete: blocks/F_integration/M21_launch_yaml_rosbag/complete/</a:t>
+            </a:r>
+          </a:p>
+          <a:p>
+            <a:pPr>
+              <a:spcAft>
+                <a:spcPts val="800"/>
+              </a:spcAft>
+              <a:defRPr sz="1800">
+                <a:solidFill>
+                  <a:srgbClr val="122C4E"/>
+                </a:solidFill>
+                <a:latin typeface="Noto Sans CJK KR"/>
+              </a:defRPr>
+            </a:pPr>
+            <a:r>
+              <a:t>• □ 정상 로그·캡처: logs/validation.log, screenshots/validation_terminal.png</a:t>
+            </a:r>
+          </a:p>
+          <a:p>
+            <a:pPr>
+              <a:spcAft>
+                <a:spcPts val="800"/>
+              </a:spcAft>
+              <a:defRPr sz="1800">
+                <a:solidFill>
+                  <a:srgbClr val="122C4E"/>
+                </a:solidFill>
+                <a:latin typeface="Noto Sans CJK KR"/>
+              </a:defRPr>
+            </a:pPr>
+            <a:r>
+              <a:t>• □ 버전 식별: CHECKSUM_or_TAG.txt의 SHA-256 manifest</a:t>
+            </a:r>
+          </a:p>
+          <a:p>
+            <a:pPr>
+              <a:spcAft>
+                <a:spcPts val="800"/>
+              </a:spcAft>
+              <a:defRPr sz="1800">
+                <a:solidFill>
+                  <a:srgbClr val="122C4E"/>
+                </a:solidFill>
+                <a:latin typeface="Noto Sans CJK KR"/>
+              </a:defRPr>
+            </a:pPr>
+            <a:r>
+              <a:t>• □ 다음 시작 조건: M22 final mission</a:t>
+            </a:r>
+          </a:p>
+        </p:txBody>
+      </p:sp>
+      <p:sp>
+        <p:nvSpPr>
+          <p:cNvPr id="9" name="TextBox 8"/>
+          <p:cNvSpPr txBox="1"/>
+          <p:nvPr/>
+        </p:nvSpPr>
+        <p:spPr>
+          <a:xfrm>
+            <a:off x="868680" y="5596128"/>
+            <a:ext cx="10515600" cy="338328"/>
+          </a:xfrm>
+          <a:prstGeom prst="rect">
+            <a:avLst/>
+          </a:prstGeom>
+          <a:noFill/>
+        </p:spPr>
+        <p:txBody>
+          <a:bodyPr wrap="square" lIns="73152" rIns="73152" tIns="36576" bIns="36576">
+            <a:spAutoFit/>
+          </a:bodyPr>
+          <a:lstStyle/>
+          <a:p>
+            <a:pPr algn="ctr">
+              <a:spcAft>
+                <a:spcPts val="0"/>
+              </a:spcAft>
+              <a:defRPr sz="1700" b="1">
+                <a:solidFill>
+                  <a:srgbClr val="2A8B5A"/>
+                </a:solidFill>
+                <a:latin typeface="Noto Sans CJK KR"/>
+              </a:defRPr>
+            </a:pPr>
+            <a:r>
+              <a:t>다음 모듈을 시작하기 전, 내 src의 변경사항을 저장하고 현재 완료 조건을 다시 확인합니다.</a:t>
+            </a:r>
+          </a:p>
+        </p:txBody>
+      </p:sp>
+    </p:spTree>
+  </p:cSld>
+  <p:clrMapOvr>
+    <a:masterClrMapping/>
+  </p:clrMapOvr>
+</p:sld>
+</file>
+
+<file path=ppt/slides/slide73.xml><?xml version="1.0" encoding="utf-8"?>
 <p:sld xmlns:a="http://schemas.openxmlformats.org/drawingml/2006/main" xmlns:p="http://schemas.openxmlformats.org/presentationml/2006/main" xmlns:r="http://schemas.openxmlformats.org/officeDocument/2006/relationships">
   <p:cSld>
     <p:spTree>
